--- a/pptx_old/SLMamba.pptx
+++ b/pptx_old/SLMamba.pptx
@@ -1,16 +1,16 @@
 
 <file path=ppt/presentation.xml><?xml version="1.0" encoding="utf-8"?>
-<p:presentation xmlns:a="http://schemas.openxmlformats.org/drawingml/2006/main" xmlns:r="http://schemas.openxmlformats.org/officeDocument/2006/relationships" xmlns:p="http://schemas.openxmlformats.org/presentationml/2006/main" saveSubsetFonts="1">
+<p:presentation xmlns:a="http://schemas.openxmlformats.org/drawingml/2006/main" xmlns:r="http://schemas.openxmlformats.org/officeDocument/2006/relationships" xmlns:p="http://schemas.openxmlformats.org/presentationml/2006/main">
   <p:sldMasterIdLst>
-    <p:sldMasterId id="2147483792" r:id="rId1"/>
+    <p:sldMasterId id="2147483648" r:id="rId1"/>
   </p:sldMasterIdLst>
   <p:notesMasterIdLst>
-    <p:notesMasterId r:id="rId3"/>
+    <p:notesMasterId r:id="rId4"/>
   </p:notesMasterIdLst>
   <p:sldIdLst>
-    <p:sldId id="267" r:id="rId2"/>
+    <p:sldId id="267" r:id="rId3"/>
   </p:sldIdLst>
-  <p:sldSz cx="19199225" cy="8999538"/>
+  <p:sldSz cx="19199225" cy="8999220"/>
   <p:notesSz cx="6858000" cy="9144000"/>
   <p:defaultTextStyle>
     <a:defPPr>
@@ -107,23 +107,12 @@
       </a:defRPr>
     </a:lvl9pPr>
   </p:defaultTextStyle>
-  <p:extLst>
-    <p:ext uri="{EFAFB233-063F-42B5-8137-9DF3F51BA10A}">
-      <p15:sldGuideLst xmlns:p15="http://schemas.microsoft.com/office/powerpoint/2012/main"/>
-    </p:ext>
-  </p:extLst>
 </p:presentation>
 </file>
 
 <file path=ppt/commentAuthors.xml><?xml version="1.0" encoding="utf-8"?>
 <p:cmAuthorLst xmlns:a="http://schemas.openxmlformats.org/drawingml/2006/main" xmlns:r="http://schemas.openxmlformats.org/officeDocument/2006/relationships" xmlns:p="http://schemas.openxmlformats.org/presentationml/2006/main">
-  <p:cmAuthor id="1" name="王 纯" initials="王" lastIdx="1" clrIdx="0">
-    <p:extLst>
-      <p:ext uri="{19B8F6BF-5375-455C-9EA6-DF929625EA0E}">
-        <p15:presenceInfo xmlns:p15="http://schemas.microsoft.com/office/powerpoint/2012/main" userId="7e7fc5f9d8cde568" providerId="Windows Live"/>
-      </p:ext>
-    </p:extLst>
-  </p:cmAuthor>
+  <p:cmAuthor id="1" name="王 纯" initials="王" lastIdx="1" clrIdx="0"/>
 </p:cmAuthorLst>
 </file>
 
@@ -209,7 +198,6 @@
           <a:p>
             <a:fld id="{CA430BDA-A533-4A3C-B8FC-8C24D08F8B22}" type="datetimeFigureOut">
               <a:rPr lang="zh-CN" altLang="en-US" smtClean="0"/>
-              <a:t>2026/3/12</a:t>
             </a:fld>
             <a:endParaRPr lang="zh-CN" altLang="en-US"/>
           </a:p>
@@ -276,6 +264,7 @@
               <a:rPr lang="zh-CN" altLang="en-US"/>
               <a:t>单击此处编辑母版文本样式</a:t>
             </a:r>
+            <a:endParaRPr lang="zh-CN" altLang="en-US"/>
           </a:p>
           <a:p>
             <a:pPr lvl="1"/>
@@ -283,6 +272,7 @@
               <a:rPr lang="zh-CN" altLang="en-US"/>
               <a:t>二级</a:t>
             </a:r>
+            <a:endParaRPr lang="zh-CN" altLang="en-US"/>
           </a:p>
           <a:p>
             <a:pPr lvl="2"/>
@@ -290,6 +280,7 @@
               <a:rPr lang="zh-CN" altLang="en-US"/>
               <a:t>三级</a:t>
             </a:r>
+            <a:endParaRPr lang="zh-CN" altLang="en-US"/>
           </a:p>
           <a:p>
             <a:pPr lvl="3"/>
@@ -297,6 +288,7 @@
               <a:rPr lang="zh-CN" altLang="en-US"/>
               <a:t>四级</a:t>
             </a:r>
+            <a:endParaRPr lang="zh-CN" altLang="en-US"/>
           </a:p>
           <a:p>
             <a:pPr lvl="4"/>
@@ -304,6 +296,7 @@
               <a:rPr lang="zh-CN" altLang="en-US"/>
               <a:t>五级</a:t>
             </a:r>
+            <a:endParaRPr lang="zh-CN" altLang="en-US"/>
           </a:p>
         </p:txBody>
       </p:sp>
@@ -367,23 +360,17 @@
           <a:p>
             <a:fld id="{2076D52C-0437-4C77-A47E-41F2C938B078}" type="slidenum">
               <a:rPr lang="zh-CN" altLang="en-US" smtClean="0"/>
-              <a:t>‹#›</a:t>
             </a:fld>
             <a:endParaRPr lang="zh-CN" altLang="en-US"/>
           </a:p>
         </p:txBody>
       </p:sp>
     </p:spTree>
-    <p:extLst>
-      <p:ext uri="{BB962C8B-B14F-4D97-AF65-F5344CB8AC3E}">
-        <p14:creationId xmlns:p14="http://schemas.microsoft.com/office/powerpoint/2010/main" val="1680516483"/>
-      </p:ext>
-    </p:extLst>
   </p:cSld>
   <p:clrMap bg1="lt1" tx1="dk1" bg2="lt2" tx2="dk2" accent1="accent1" accent2="accent2" accent3="accent3" accent4="accent4" accent5="accent5" accent6="accent6" hlink="hlink" folHlink="folHlink"/>
   <p:notesStyle>
-    <a:lvl1pPr marL="0" algn="l" defTabSz="1827802" rtl="0" eaLnBrk="1" latinLnBrk="0" hangingPunct="1">
-      <a:defRPr sz="2399" kern="1200">
+    <a:lvl1pPr marL="0" algn="l" defTabSz="1827530" rtl="0" eaLnBrk="1" latinLnBrk="0" hangingPunct="1">
+      <a:defRPr sz="2400" kern="1200">
         <a:solidFill>
           <a:schemeClr val="tx1"/>
         </a:solidFill>
@@ -392,8 +379,8 @@
         <a:cs typeface="+mn-cs"/>
       </a:defRPr>
     </a:lvl1pPr>
-    <a:lvl2pPr marL="913902" algn="l" defTabSz="1827802" rtl="0" eaLnBrk="1" latinLnBrk="0" hangingPunct="1">
-      <a:defRPr sz="2399" kern="1200">
+    <a:lvl2pPr marL="913765" algn="l" defTabSz="1827530" rtl="0" eaLnBrk="1" latinLnBrk="0" hangingPunct="1">
+      <a:defRPr sz="2400" kern="1200">
         <a:solidFill>
           <a:schemeClr val="tx1"/>
         </a:solidFill>
@@ -402,8 +389,8 @@
         <a:cs typeface="+mn-cs"/>
       </a:defRPr>
     </a:lvl2pPr>
-    <a:lvl3pPr marL="1827802" algn="l" defTabSz="1827802" rtl="0" eaLnBrk="1" latinLnBrk="0" hangingPunct="1">
-      <a:defRPr sz="2399" kern="1200">
+    <a:lvl3pPr marL="1827530" algn="l" defTabSz="1827530" rtl="0" eaLnBrk="1" latinLnBrk="0" hangingPunct="1">
+      <a:defRPr sz="2400" kern="1200">
         <a:solidFill>
           <a:schemeClr val="tx1"/>
         </a:solidFill>
@@ -412,8 +399,8 @@
         <a:cs typeface="+mn-cs"/>
       </a:defRPr>
     </a:lvl3pPr>
-    <a:lvl4pPr marL="2741703" algn="l" defTabSz="1827802" rtl="0" eaLnBrk="1" latinLnBrk="0" hangingPunct="1">
-      <a:defRPr sz="2399" kern="1200">
+    <a:lvl4pPr marL="2741930" algn="l" defTabSz="1827530" rtl="0" eaLnBrk="1" latinLnBrk="0" hangingPunct="1">
+      <a:defRPr sz="2400" kern="1200">
         <a:solidFill>
           <a:schemeClr val="tx1"/>
         </a:solidFill>
@@ -422,8 +409,8 @@
         <a:cs typeface="+mn-cs"/>
       </a:defRPr>
     </a:lvl4pPr>
-    <a:lvl5pPr marL="3655604" algn="l" defTabSz="1827802" rtl="0" eaLnBrk="1" latinLnBrk="0" hangingPunct="1">
-      <a:defRPr sz="2399" kern="1200">
+    <a:lvl5pPr marL="3655695" algn="l" defTabSz="1827530" rtl="0" eaLnBrk="1" latinLnBrk="0" hangingPunct="1">
+      <a:defRPr sz="2400" kern="1200">
         <a:solidFill>
           <a:schemeClr val="tx1"/>
         </a:solidFill>
@@ -432,8 +419,8 @@
         <a:cs typeface="+mn-cs"/>
       </a:defRPr>
     </a:lvl5pPr>
-    <a:lvl6pPr marL="4569505" algn="l" defTabSz="1827802" rtl="0" eaLnBrk="1" latinLnBrk="0" hangingPunct="1">
-      <a:defRPr sz="2399" kern="1200">
+    <a:lvl6pPr marL="4569460" algn="l" defTabSz="1827530" rtl="0" eaLnBrk="1" latinLnBrk="0" hangingPunct="1">
+      <a:defRPr sz="2400" kern="1200">
         <a:solidFill>
           <a:schemeClr val="tx1"/>
         </a:solidFill>
@@ -442,8 +429,8 @@
         <a:cs typeface="+mn-cs"/>
       </a:defRPr>
     </a:lvl6pPr>
-    <a:lvl7pPr marL="5483406" algn="l" defTabSz="1827802" rtl="0" eaLnBrk="1" latinLnBrk="0" hangingPunct="1">
-      <a:defRPr sz="2399" kern="1200">
+    <a:lvl7pPr marL="5483225" algn="l" defTabSz="1827530" rtl="0" eaLnBrk="1" latinLnBrk="0" hangingPunct="1">
+      <a:defRPr sz="2400" kern="1200">
         <a:solidFill>
           <a:schemeClr val="tx1"/>
         </a:solidFill>
@@ -452,8 +439,8 @@
         <a:cs typeface="+mn-cs"/>
       </a:defRPr>
     </a:lvl7pPr>
-    <a:lvl8pPr marL="6397307" algn="l" defTabSz="1827802" rtl="0" eaLnBrk="1" latinLnBrk="0" hangingPunct="1">
-      <a:defRPr sz="2399" kern="1200">
+    <a:lvl8pPr marL="6396990" algn="l" defTabSz="1827530" rtl="0" eaLnBrk="1" latinLnBrk="0" hangingPunct="1">
+      <a:defRPr sz="2400" kern="1200">
         <a:solidFill>
           <a:schemeClr val="tx1"/>
         </a:solidFill>
@@ -462,8 +449,8 @@
         <a:cs typeface="+mn-cs"/>
       </a:defRPr>
     </a:lvl8pPr>
-    <a:lvl9pPr marL="7311208" algn="l" defTabSz="1827802" rtl="0" eaLnBrk="1" latinLnBrk="0" hangingPunct="1">
-      <a:defRPr sz="2399" kern="1200">
+    <a:lvl9pPr marL="7311390" algn="l" defTabSz="1827530" rtl="0" eaLnBrk="1" latinLnBrk="0" hangingPunct="1">
+      <a:defRPr sz="2400" kern="1200">
         <a:solidFill>
           <a:schemeClr val="tx1"/>
         </a:solidFill>
@@ -553,18 +540,12 @@
           <a:p>
             <a:fld id="{2076D52C-0437-4C77-A47E-41F2C938B078}" type="slidenum">
               <a:rPr lang="zh-CN" altLang="en-US" smtClean="0"/>
-              <a:t>1</a:t>
             </a:fld>
             <a:endParaRPr lang="zh-CN" altLang="en-US"/>
           </a:p>
         </p:txBody>
       </p:sp>
     </p:spTree>
-    <p:extLst>
-      <p:ext uri="{BB962C8B-B14F-4D97-AF65-F5344CB8AC3E}">
-        <p14:creationId xmlns:p14="http://schemas.microsoft.com/office/powerpoint/2010/main" val="2514873192"/>
-      </p:ext>
-    </p:extLst>
   </p:cSld>
   <p:clrMapOvr>
     <a:masterClrMapping/>
@@ -609,7 +590,7 @@
           <a:bodyPr anchor="b"/>
           <a:lstStyle>
             <a:lvl1pPr algn="ctr">
-              <a:defRPr sz="7874"/>
+              <a:defRPr sz="7875"/>
             </a:lvl1pPr>
           </a:lstStyle>
           <a:p>
@@ -644,35 +625,35 @@
               <a:buNone/>
               <a:defRPr sz="3150"/>
             </a:lvl1pPr>
-            <a:lvl2pPr marL="599984" indent="0" algn="ctr">
+            <a:lvl2pPr marL="600075" indent="0" algn="ctr">
               <a:buNone/>
               <a:defRPr sz="2625"/>
             </a:lvl2pPr>
-            <a:lvl3pPr marL="1199967" indent="0" algn="ctr">
+            <a:lvl3pPr marL="1200150" indent="0" algn="ctr">
               <a:buNone/>
-              <a:defRPr sz="2362"/>
+              <a:defRPr sz="2360"/>
             </a:lvl3pPr>
-            <a:lvl4pPr marL="1799951" indent="0" algn="ctr">
+            <a:lvl4pPr marL="1800225" indent="0" algn="ctr">
               <a:buNone/>
               <a:defRPr sz="2100"/>
             </a:lvl4pPr>
-            <a:lvl5pPr marL="2399934" indent="0" algn="ctr">
+            <a:lvl5pPr marL="2399665" indent="0" algn="ctr">
               <a:buNone/>
               <a:defRPr sz="2100"/>
             </a:lvl5pPr>
-            <a:lvl6pPr marL="2999918" indent="0" algn="ctr">
+            <a:lvl6pPr marL="2999740" indent="0" algn="ctr">
               <a:buNone/>
               <a:defRPr sz="2100"/>
             </a:lvl6pPr>
-            <a:lvl7pPr marL="3599901" indent="0" algn="ctr">
+            <a:lvl7pPr marL="3599815" indent="0" algn="ctr">
               <a:buNone/>
               <a:defRPr sz="2100"/>
             </a:lvl7pPr>
-            <a:lvl8pPr marL="4199885" indent="0" algn="ctr">
+            <a:lvl8pPr marL="4199890" indent="0" algn="ctr">
               <a:buNone/>
               <a:defRPr sz="2100"/>
             </a:lvl8pPr>
-            <a:lvl9pPr marL="4799868" indent="0" algn="ctr">
+            <a:lvl9pPr marL="4799965" indent="0" algn="ctr">
               <a:buNone/>
               <a:defRPr sz="2100"/>
             </a:lvl9pPr>
@@ -703,7 +684,6 @@
           <a:p>
             <a:fld id="{A4CA9E0F-CAF8-49C6-93F3-C610F83BCB2B}" type="datetimeFigureOut">
               <a:rPr lang="zh-CN" altLang="en-US" smtClean="0"/>
-              <a:t>2026/3/12</a:t>
             </a:fld>
             <a:endParaRPr lang="zh-CN" altLang="en-US"/>
           </a:p>
@@ -745,18 +725,12 @@
           <a:p>
             <a:fld id="{9E5E7579-7958-4A17-BB40-18AB140F3378}" type="slidenum">
               <a:rPr lang="zh-CN" altLang="en-US" smtClean="0"/>
-              <a:t>‹#›</a:t>
             </a:fld>
             <a:endParaRPr lang="zh-CN" altLang="en-US"/>
           </a:p>
         </p:txBody>
       </p:sp>
     </p:spTree>
-    <p:extLst>
-      <p:ext uri="{BB962C8B-B14F-4D97-AF65-F5344CB8AC3E}">
-        <p14:creationId xmlns:p14="http://schemas.microsoft.com/office/powerpoint/2010/main" val="1496675970"/>
-      </p:ext>
-    </p:extLst>
   </p:cSld>
   <p:clrMapOvr>
     <a:masterClrMapping/>
@@ -824,6 +798,7 @@
               <a:rPr lang="zh-CN" altLang="en-US"/>
               <a:t>单击此处编辑母版文本样式</a:t>
             </a:r>
+            <a:endParaRPr lang="zh-CN" altLang="en-US"/>
           </a:p>
           <a:p>
             <a:pPr lvl="1"/>
@@ -831,6 +806,7 @@
               <a:rPr lang="zh-CN" altLang="en-US"/>
               <a:t>二级</a:t>
             </a:r>
+            <a:endParaRPr lang="zh-CN" altLang="en-US"/>
           </a:p>
           <a:p>
             <a:pPr lvl="2"/>
@@ -838,6 +814,7 @@
               <a:rPr lang="zh-CN" altLang="en-US"/>
               <a:t>三级</a:t>
             </a:r>
+            <a:endParaRPr lang="zh-CN" altLang="en-US"/>
           </a:p>
           <a:p>
             <a:pPr lvl="3"/>
@@ -845,6 +822,7 @@
               <a:rPr lang="zh-CN" altLang="en-US"/>
               <a:t>四级</a:t>
             </a:r>
+            <a:endParaRPr lang="zh-CN" altLang="en-US"/>
           </a:p>
           <a:p>
             <a:pPr lvl="4"/>
@@ -873,7 +851,6 @@
           <a:p>
             <a:fld id="{A4CA9E0F-CAF8-49C6-93F3-C610F83BCB2B}" type="datetimeFigureOut">
               <a:rPr lang="zh-CN" altLang="en-US" smtClean="0"/>
-              <a:t>2026/3/12</a:t>
             </a:fld>
             <a:endParaRPr lang="zh-CN" altLang="en-US"/>
           </a:p>
@@ -915,18 +892,12 @@
           <a:p>
             <a:fld id="{9E5E7579-7958-4A17-BB40-18AB140F3378}" type="slidenum">
               <a:rPr lang="zh-CN" altLang="en-US" smtClean="0"/>
-              <a:t>‹#›</a:t>
             </a:fld>
             <a:endParaRPr lang="zh-CN" altLang="en-US"/>
           </a:p>
         </p:txBody>
       </p:sp>
     </p:spTree>
-    <p:extLst>
-      <p:ext uri="{BB962C8B-B14F-4D97-AF65-F5344CB8AC3E}">
-        <p14:creationId xmlns:p14="http://schemas.microsoft.com/office/powerpoint/2010/main" val="1555890060"/>
-      </p:ext>
-    </p:extLst>
   </p:cSld>
   <p:clrMapOvr>
     <a:masterClrMapping/>
@@ -1004,6 +975,7 @@
               <a:rPr lang="zh-CN" altLang="en-US"/>
               <a:t>单击此处编辑母版文本样式</a:t>
             </a:r>
+            <a:endParaRPr lang="zh-CN" altLang="en-US"/>
           </a:p>
           <a:p>
             <a:pPr lvl="1"/>
@@ -1011,6 +983,7 @@
               <a:rPr lang="zh-CN" altLang="en-US"/>
               <a:t>二级</a:t>
             </a:r>
+            <a:endParaRPr lang="zh-CN" altLang="en-US"/>
           </a:p>
           <a:p>
             <a:pPr lvl="2"/>
@@ -1018,6 +991,7 @@
               <a:rPr lang="zh-CN" altLang="en-US"/>
               <a:t>三级</a:t>
             </a:r>
+            <a:endParaRPr lang="zh-CN" altLang="en-US"/>
           </a:p>
           <a:p>
             <a:pPr lvl="3"/>
@@ -1025,6 +999,7 @@
               <a:rPr lang="zh-CN" altLang="en-US"/>
               <a:t>四级</a:t>
             </a:r>
+            <a:endParaRPr lang="zh-CN" altLang="en-US"/>
           </a:p>
           <a:p>
             <a:pPr lvl="4"/>
@@ -1053,7 +1028,6 @@
           <a:p>
             <a:fld id="{A4CA9E0F-CAF8-49C6-93F3-C610F83BCB2B}" type="datetimeFigureOut">
               <a:rPr lang="zh-CN" altLang="en-US" smtClean="0"/>
-              <a:t>2026/3/12</a:t>
             </a:fld>
             <a:endParaRPr lang="zh-CN" altLang="en-US"/>
           </a:p>
@@ -1095,18 +1069,12 @@
           <a:p>
             <a:fld id="{9E5E7579-7958-4A17-BB40-18AB140F3378}" type="slidenum">
               <a:rPr lang="zh-CN" altLang="en-US" smtClean="0"/>
-              <a:t>‹#›</a:t>
             </a:fld>
             <a:endParaRPr lang="zh-CN" altLang="en-US"/>
           </a:p>
         </p:txBody>
       </p:sp>
     </p:spTree>
-    <p:extLst>
-      <p:ext uri="{BB962C8B-B14F-4D97-AF65-F5344CB8AC3E}">
-        <p14:creationId xmlns:p14="http://schemas.microsoft.com/office/powerpoint/2010/main" val="4177495405"/>
-      </p:ext>
-    </p:extLst>
   </p:cSld>
   <p:clrMapOvr>
     <a:masterClrMapping/>
@@ -1174,6 +1142,7 @@
               <a:rPr lang="zh-CN" altLang="en-US"/>
               <a:t>单击此处编辑母版文本样式</a:t>
             </a:r>
+            <a:endParaRPr lang="zh-CN" altLang="en-US"/>
           </a:p>
           <a:p>
             <a:pPr lvl="1"/>
@@ -1181,6 +1150,7 @@
               <a:rPr lang="zh-CN" altLang="en-US"/>
               <a:t>二级</a:t>
             </a:r>
+            <a:endParaRPr lang="zh-CN" altLang="en-US"/>
           </a:p>
           <a:p>
             <a:pPr lvl="2"/>
@@ -1188,6 +1158,7 @@
               <a:rPr lang="zh-CN" altLang="en-US"/>
               <a:t>三级</a:t>
             </a:r>
+            <a:endParaRPr lang="zh-CN" altLang="en-US"/>
           </a:p>
           <a:p>
             <a:pPr lvl="3"/>
@@ -1195,6 +1166,7 @@
               <a:rPr lang="zh-CN" altLang="en-US"/>
               <a:t>四级</a:t>
             </a:r>
+            <a:endParaRPr lang="zh-CN" altLang="en-US"/>
           </a:p>
           <a:p>
             <a:pPr lvl="4"/>
@@ -1223,7 +1195,6 @@
           <a:p>
             <a:fld id="{A4CA9E0F-CAF8-49C6-93F3-C610F83BCB2B}" type="datetimeFigureOut">
               <a:rPr lang="zh-CN" altLang="en-US" smtClean="0"/>
-              <a:t>2026/3/12</a:t>
             </a:fld>
             <a:endParaRPr lang="zh-CN" altLang="en-US"/>
           </a:p>
@@ -1265,18 +1236,12 @@
           <a:p>
             <a:fld id="{9E5E7579-7958-4A17-BB40-18AB140F3378}" type="slidenum">
               <a:rPr lang="zh-CN" altLang="en-US" smtClean="0"/>
-              <a:t>‹#›</a:t>
             </a:fld>
             <a:endParaRPr lang="zh-CN" altLang="en-US"/>
           </a:p>
         </p:txBody>
       </p:sp>
     </p:spTree>
-    <p:extLst>
-      <p:ext uri="{BB962C8B-B14F-4D97-AF65-F5344CB8AC3E}">
-        <p14:creationId xmlns:p14="http://schemas.microsoft.com/office/powerpoint/2010/main" val="811168073"/>
-      </p:ext>
-    </p:extLst>
   </p:cSld>
   <p:clrMapOvr>
     <a:masterClrMapping/>
@@ -1321,7 +1286,7 @@
           <a:bodyPr anchor="b"/>
           <a:lstStyle>
             <a:lvl1pPr>
-              <a:defRPr sz="7874"/>
+              <a:defRPr sz="7875"/>
             </a:lvl1pPr>
           </a:lstStyle>
           <a:p>
@@ -1362,7 +1327,7 @@
                 </a:solidFill>
               </a:defRPr>
             </a:lvl1pPr>
-            <a:lvl2pPr marL="599984" indent="0">
+            <a:lvl2pPr marL="600075" indent="0">
               <a:buNone/>
               <a:defRPr sz="2625">
                 <a:solidFill>
@@ -1372,9 +1337,9 @@
                 </a:solidFill>
               </a:defRPr>
             </a:lvl2pPr>
-            <a:lvl3pPr marL="1199967" indent="0">
+            <a:lvl3pPr marL="1200150" indent="0">
               <a:buNone/>
-              <a:defRPr sz="2362">
+              <a:defRPr sz="2360">
                 <a:solidFill>
                   <a:schemeClr val="tx1">
                     <a:tint val="75000"/>
@@ -1382,7 +1347,7 @@
                 </a:solidFill>
               </a:defRPr>
             </a:lvl3pPr>
-            <a:lvl4pPr marL="1799951" indent="0">
+            <a:lvl4pPr marL="1800225" indent="0">
               <a:buNone/>
               <a:defRPr sz="2100">
                 <a:solidFill>
@@ -1392,7 +1357,7 @@
                 </a:solidFill>
               </a:defRPr>
             </a:lvl4pPr>
-            <a:lvl5pPr marL="2399934" indent="0">
+            <a:lvl5pPr marL="2399665" indent="0">
               <a:buNone/>
               <a:defRPr sz="2100">
                 <a:solidFill>
@@ -1402,7 +1367,7 @@
                 </a:solidFill>
               </a:defRPr>
             </a:lvl5pPr>
-            <a:lvl6pPr marL="2999918" indent="0">
+            <a:lvl6pPr marL="2999740" indent="0">
               <a:buNone/>
               <a:defRPr sz="2100">
                 <a:solidFill>
@@ -1412,7 +1377,7 @@
                 </a:solidFill>
               </a:defRPr>
             </a:lvl6pPr>
-            <a:lvl7pPr marL="3599901" indent="0">
+            <a:lvl7pPr marL="3599815" indent="0">
               <a:buNone/>
               <a:defRPr sz="2100">
                 <a:solidFill>
@@ -1422,7 +1387,7 @@
                 </a:solidFill>
               </a:defRPr>
             </a:lvl7pPr>
-            <a:lvl8pPr marL="4199885" indent="0">
+            <a:lvl8pPr marL="4199890" indent="0">
               <a:buNone/>
               <a:defRPr sz="2100">
                 <a:solidFill>
@@ -1432,7 +1397,7 @@
                 </a:solidFill>
               </a:defRPr>
             </a:lvl8pPr>
-            <a:lvl9pPr marL="4799868" indent="0">
+            <a:lvl9pPr marL="4799965" indent="0">
               <a:buNone/>
               <a:defRPr sz="2100">
                 <a:solidFill>
@@ -1449,6 +1414,7 @@
               <a:rPr lang="zh-CN" altLang="en-US"/>
               <a:t>单击此处编辑母版文本样式</a:t>
             </a:r>
+            <a:endParaRPr lang="zh-CN" altLang="en-US"/>
           </a:p>
         </p:txBody>
       </p:sp>
@@ -1469,7 +1435,6 @@
           <a:p>
             <a:fld id="{A4CA9E0F-CAF8-49C6-93F3-C610F83BCB2B}" type="datetimeFigureOut">
               <a:rPr lang="zh-CN" altLang="en-US" smtClean="0"/>
-              <a:t>2026/3/12</a:t>
             </a:fld>
             <a:endParaRPr lang="zh-CN" altLang="en-US"/>
           </a:p>
@@ -1511,18 +1476,12 @@
           <a:p>
             <a:fld id="{9E5E7579-7958-4A17-BB40-18AB140F3378}" type="slidenum">
               <a:rPr lang="zh-CN" altLang="en-US" smtClean="0"/>
-              <a:t>‹#›</a:t>
             </a:fld>
             <a:endParaRPr lang="zh-CN" altLang="en-US"/>
           </a:p>
         </p:txBody>
       </p:sp>
     </p:spTree>
-    <p:extLst>
-      <p:ext uri="{BB962C8B-B14F-4D97-AF65-F5344CB8AC3E}">
-        <p14:creationId xmlns:p14="http://schemas.microsoft.com/office/powerpoint/2010/main" val="3119824718"/>
-      </p:ext>
-    </p:extLst>
   </p:cSld>
   <p:clrMapOvr>
     <a:masterClrMapping/>
@@ -1595,6 +1554,7 @@
               <a:rPr lang="zh-CN" altLang="en-US"/>
               <a:t>单击此处编辑母版文本样式</a:t>
             </a:r>
+            <a:endParaRPr lang="zh-CN" altLang="en-US"/>
           </a:p>
           <a:p>
             <a:pPr lvl="1"/>
@@ -1602,6 +1562,7 @@
               <a:rPr lang="zh-CN" altLang="en-US"/>
               <a:t>二级</a:t>
             </a:r>
+            <a:endParaRPr lang="zh-CN" altLang="en-US"/>
           </a:p>
           <a:p>
             <a:pPr lvl="2"/>
@@ -1609,6 +1570,7 @@
               <a:rPr lang="zh-CN" altLang="en-US"/>
               <a:t>三级</a:t>
             </a:r>
+            <a:endParaRPr lang="zh-CN" altLang="en-US"/>
           </a:p>
           <a:p>
             <a:pPr lvl="3"/>
@@ -1616,6 +1578,7 @@
               <a:rPr lang="zh-CN" altLang="en-US"/>
               <a:t>四级</a:t>
             </a:r>
+            <a:endParaRPr lang="zh-CN" altLang="en-US"/>
           </a:p>
           <a:p>
             <a:pPr lvl="4"/>
@@ -1652,6 +1615,7 @@
               <a:rPr lang="zh-CN" altLang="en-US"/>
               <a:t>单击此处编辑母版文本样式</a:t>
             </a:r>
+            <a:endParaRPr lang="zh-CN" altLang="en-US"/>
           </a:p>
           <a:p>
             <a:pPr lvl="1"/>
@@ -1659,6 +1623,7 @@
               <a:rPr lang="zh-CN" altLang="en-US"/>
               <a:t>二级</a:t>
             </a:r>
+            <a:endParaRPr lang="zh-CN" altLang="en-US"/>
           </a:p>
           <a:p>
             <a:pPr lvl="2"/>
@@ -1666,6 +1631,7 @@
               <a:rPr lang="zh-CN" altLang="en-US"/>
               <a:t>三级</a:t>
             </a:r>
+            <a:endParaRPr lang="zh-CN" altLang="en-US"/>
           </a:p>
           <a:p>
             <a:pPr lvl="3"/>
@@ -1673,6 +1639,7 @@
               <a:rPr lang="zh-CN" altLang="en-US"/>
               <a:t>四级</a:t>
             </a:r>
+            <a:endParaRPr lang="zh-CN" altLang="en-US"/>
           </a:p>
           <a:p>
             <a:pPr lvl="4"/>
@@ -1701,7 +1668,6 @@
           <a:p>
             <a:fld id="{A4CA9E0F-CAF8-49C6-93F3-C610F83BCB2B}" type="datetimeFigureOut">
               <a:rPr lang="zh-CN" altLang="en-US" smtClean="0"/>
-              <a:t>2026/3/12</a:t>
             </a:fld>
             <a:endParaRPr lang="zh-CN" altLang="en-US"/>
           </a:p>
@@ -1743,18 +1709,12 @@
           <a:p>
             <a:fld id="{9E5E7579-7958-4A17-BB40-18AB140F3378}" type="slidenum">
               <a:rPr lang="zh-CN" altLang="en-US" smtClean="0"/>
-              <a:t>‹#›</a:t>
             </a:fld>
             <a:endParaRPr lang="zh-CN" altLang="en-US"/>
           </a:p>
         </p:txBody>
       </p:sp>
     </p:spTree>
-    <p:extLst>
-      <p:ext uri="{BB962C8B-B14F-4D97-AF65-F5344CB8AC3E}">
-        <p14:creationId xmlns:p14="http://schemas.microsoft.com/office/powerpoint/2010/main" val="3962673403"/>
-      </p:ext>
-    </p:extLst>
   </p:cSld>
   <p:clrMapOvr>
     <a:masterClrMapping/>
@@ -1830,35 +1790,35 @@
               <a:buNone/>
               <a:defRPr sz="3150" b="1"/>
             </a:lvl1pPr>
-            <a:lvl2pPr marL="599984" indent="0">
+            <a:lvl2pPr marL="600075" indent="0">
               <a:buNone/>
               <a:defRPr sz="2625" b="1"/>
             </a:lvl2pPr>
-            <a:lvl3pPr marL="1199967" indent="0">
+            <a:lvl3pPr marL="1200150" indent="0">
               <a:buNone/>
-              <a:defRPr sz="2362" b="1"/>
+              <a:defRPr sz="2360" b="1"/>
             </a:lvl3pPr>
-            <a:lvl4pPr marL="1799951" indent="0">
+            <a:lvl4pPr marL="1800225" indent="0">
               <a:buNone/>
               <a:defRPr sz="2100" b="1"/>
             </a:lvl4pPr>
-            <a:lvl5pPr marL="2399934" indent="0">
+            <a:lvl5pPr marL="2399665" indent="0">
               <a:buNone/>
               <a:defRPr sz="2100" b="1"/>
             </a:lvl5pPr>
-            <a:lvl6pPr marL="2999918" indent="0">
+            <a:lvl6pPr marL="2999740" indent="0">
               <a:buNone/>
               <a:defRPr sz="2100" b="1"/>
             </a:lvl6pPr>
-            <a:lvl7pPr marL="3599901" indent="0">
+            <a:lvl7pPr marL="3599815" indent="0">
               <a:buNone/>
               <a:defRPr sz="2100" b="1"/>
             </a:lvl7pPr>
-            <a:lvl8pPr marL="4199885" indent="0">
+            <a:lvl8pPr marL="4199890" indent="0">
               <a:buNone/>
               <a:defRPr sz="2100" b="1"/>
             </a:lvl8pPr>
-            <a:lvl9pPr marL="4799868" indent="0">
+            <a:lvl9pPr marL="4799965" indent="0">
               <a:buNone/>
               <a:defRPr sz="2100" b="1"/>
             </a:lvl9pPr>
@@ -1869,6 +1829,7 @@
               <a:rPr lang="zh-CN" altLang="en-US"/>
               <a:t>单击此处编辑母版文本样式</a:t>
             </a:r>
+            <a:endParaRPr lang="zh-CN" altLang="en-US"/>
           </a:p>
         </p:txBody>
       </p:sp>
@@ -1897,6 +1858,7 @@
               <a:rPr lang="zh-CN" altLang="en-US"/>
               <a:t>单击此处编辑母版文本样式</a:t>
             </a:r>
+            <a:endParaRPr lang="zh-CN" altLang="en-US"/>
           </a:p>
           <a:p>
             <a:pPr lvl="1"/>
@@ -1904,6 +1866,7 @@
               <a:rPr lang="zh-CN" altLang="en-US"/>
               <a:t>二级</a:t>
             </a:r>
+            <a:endParaRPr lang="zh-CN" altLang="en-US"/>
           </a:p>
           <a:p>
             <a:pPr lvl="2"/>
@@ -1911,6 +1874,7 @@
               <a:rPr lang="zh-CN" altLang="en-US"/>
               <a:t>三级</a:t>
             </a:r>
+            <a:endParaRPr lang="zh-CN" altLang="en-US"/>
           </a:p>
           <a:p>
             <a:pPr lvl="3"/>
@@ -1918,6 +1882,7 @@
               <a:rPr lang="zh-CN" altLang="en-US"/>
               <a:t>四级</a:t>
             </a:r>
+            <a:endParaRPr lang="zh-CN" altLang="en-US"/>
           </a:p>
           <a:p>
             <a:pPr lvl="4"/>
@@ -1952,35 +1917,35 @@
               <a:buNone/>
               <a:defRPr sz="3150" b="1"/>
             </a:lvl1pPr>
-            <a:lvl2pPr marL="599984" indent="0">
+            <a:lvl2pPr marL="600075" indent="0">
               <a:buNone/>
               <a:defRPr sz="2625" b="1"/>
             </a:lvl2pPr>
-            <a:lvl3pPr marL="1199967" indent="0">
+            <a:lvl3pPr marL="1200150" indent="0">
               <a:buNone/>
-              <a:defRPr sz="2362" b="1"/>
+              <a:defRPr sz="2360" b="1"/>
             </a:lvl3pPr>
-            <a:lvl4pPr marL="1799951" indent="0">
+            <a:lvl4pPr marL="1800225" indent="0">
               <a:buNone/>
               <a:defRPr sz="2100" b="1"/>
             </a:lvl4pPr>
-            <a:lvl5pPr marL="2399934" indent="0">
+            <a:lvl5pPr marL="2399665" indent="0">
               <a:buNone/>
               <a:defRPr sz="2100" b="1"/>
             </a:lvl5pPr>
-            <a:lvl6pPr marL="2999918" indent="0">
+            <a:lvl6pPr marL="2999740" indent="0">
               <a:buNone/>
               <a:defRPr sz="2100" b="1"/>
             </a:lvl6pPr>
-            <a:lvl7pPr marL="3599901" indent="0">
+            <a:lvl7pPr marL="3599815" indent="0">
               <a:buNone/>
               <a:defRPr sz="2100" b="1"/>
             </a:lvl7pPr>
-            <a:lvl8pPr marL="4199885" indent="0">
+            <a:lvl8pPr marL="4199890" indent="0">
               <a:buNone/>
               <a:defRPr sz="2100" b="1"/>
             </a:lvl8pPr>
-            <a:lvl9pPr marL="4799868" indent="0">
+            <a:lvl9pPr marL="4799965" indent="0">
               <a:buNone/>
               <a:defRPr sz="2100" b="1"/>
             </a:lvl9pPr>
@@ -1991,6 +1956,7 @@
               <a:rPr lang="zh-CN" altLang="en-US"/>
               <a:t>单击此处编辑母版文本样式</a:t>
             </a:r>
+            <a:endParaRPr lang="zh-CN" altLang="en-US"/>
           </a:p>
         </p:txBody>
       </p:sp>
@@ -2019,6 +1985,7 @@
               <a:rPr lang="zh-CN" altLang="en-US"/>
               <a:t>单击此处编辑母版文本样式</a:t>
             </a:r>
+            <a:endParaRPr lang="zh-CN" altLang="en-US"/>
           </a:p>
           <a:p>
             <a:pPr lvl="1"/>
@@ -2026,6 +1993,7 @@
               <a:rPr lang="zh-CN" altLang="en-US"/>
               <a:t>二级</a:t>
             </a:r>
+            <a:endParaRPr lang="zh-CN" altLang="en-US"/>
           </a:p>
           <a:p>
             <a:pPr lvl="2"/>
@@ -2033,6 +2001,7 @@
               <a:rPr lang="zh-CN" altLang="en-US"/>
               <a:t>三级</a:t>
             </a:r>
+            <a:endParaRPr lang="zh-CN" altLang="en-US"/>
           </a:p>
           <a:p>
             <a:pPr lvl="3"/>
@@ -2040,6 +2009,7 @@
               <a:rPr lang="zh-CN" altLang="en-US"/>
               <a:t>四级</a:t>
             </a:r>
+            <a:endParaRPr lang="zh-CN" altLang="en-US"/>
           </a:p>
           <a:p>
             <a:pPr lvl="4"/>
@@ -2068,7 +2038,6 @@
           <a:p>
             <a:fld id="{A4CA9E0F-CAF8-49C6-93F3-C610F83BCB2B}" type="datetimeFigureOut">
               <a:rPr lang="zh-CN" altLang="en-US" smtClean="0"/>
-              <a:t>2026/3/12</a:t>
             </a:fld>
             <a:endParaRPr lang="zh-CN" altLang="en-US"/>
           </a:p>
@@ -2110,18 +2079,12 @@
           <a:p>
             <a:fld id="{9E5E7579-7958-4A17-BB40-18AB140F3378}" type="slidenum">
               <a:rPr lang="zh-CN" altLang="en-US" smtClean="0"/>
-              <a:t>‹#›</a:t>
             </a:fld>
             <a:endParaRPr lang="zh-CN" altLang="en-US"/>
           </a:p>
         </p:txBody>
       </p:sp>
     </p:spTree>
-    <p:extLst>
-      <p:ext uri="{BB962C8B-B14F-4D97-AF65-F5344CB8AC3E}">
-        <p14:creationId xmlns:p14="http://schemas.microsoft.com/office/powerpoint/2010/main" val="1202189587"/>
-      </p:ext>
-    </p:extLst>
   </p:cSld>
   <p:clrMapOvr>
     <a:masterClrMapping/>
@@ -2186,7 +2149,6 @@
           <a:p>
             <a:fld id="{A4CA9E0F-CAF8-49C6-93F3-C610F83BCB2B}" type="datetimeFigureOut">
               <a:rPr lang="zh-CN" altLang="en-US" smtClean="0"/>
-              <a:t>2026/3/12</a:t>
             </a:fld>
             <a:endParaRPr lang="zh-CN" altLang="en-US"/>
           </a:p>
@@ -2228,18 +2190,12 @@
           <a:p>
             <a:fld id="{9E5E7579-7958-4A17-BB40-18AB140F3378}" type="slidenum">
               <a:rPr lang="zh-CN" altLang="en-US" smtClean="0"/>
-              <a:t>‹#›</a:t>
             </a:fld>
             <a:endParaRPr lang="zh-CN" altLang="en-US"/>
           </a:p>
         </p:txBody>
       </p:sp>
     </p:spTree>
-    <p:extLst>
-      <p:ext uri="{BB962C8B-B14F-4D97-AF65-F5344CB8AC3E}">
-        <p14:creationId xmlns:p14="http://schemas.microsoft.com/office/powerpoint/2010/main" val="2968379230"/>
-      </p:ext>
-    </p:extLst>
   </p:cSld>
   <p:clrMapOvr>
     <a:masterClrMapping/>
@@ -2281,7 +2237,6 @@
           <a:p>
             <a:fld id="{A4CA9E0F-CAF8-49C6-93F3-C610F83BCB2B}" type="datetimeFigureOut">
               <a:rPr lang="zh-CN" altLang="en-US" smtClean="0"/>
-              <a:t>2026/3/12</a:t>
             </a:fld>
             <a:endParaRPr lang="zh-CN" altLang="en-US"/>
           </a:p>
@@ -2323,18 +2278,12 @@
           <a:p>
             <a:fld id="{9E5E7579-7958-4A17-BB40-18AB140F3378}" type="slidenum">
               <a:rPr lang="zh-CN" altLang="en-US" smtClean="0"/>
-              <a:t>‹#›</a:t>
             </a:fld>
             <a:endParaRPr lang="zh-CN" altLang="en-US"/>
           </a:p>
         </p:txBody>
       </p:sp>
     </p:spTree>
-    <p:extLst>
-      <p:ext uri="{BB962C8B-B14F-4D97-AF65-F5344CB8AC3E}">
-        <p14:creationId xmlns:p14="http://schemas.microsoft.com/office/powerpoint/2010/main" val="987328508"/>
-      </p:ext>
-    </p:extLst>
   </p:cSld>
   <p:clrMapOvr>
     <a:masterClrMapping/>
@@ -2379,7 +2328,7 @@
           <a:bodyPr anchor="b"/>
           <a:lstStyle>
             <a:lvl1pPr>
-              <a:defRPr sz="4199"/>
+              <a:defRPr sz="4200"/>
             </a:lvl1pPr>
           </a:lstStyle>
           <a:p>
@@ -2411,10 +2360,10 @@
           <a:bodyPr/>
           <a:lstStyle>
             <a:lvl1pPr>
-              <a:defRPr sz="4199"/>
+              <a:defRPr sz="4200"/>
             </a:lvl1pPr>
             <a:lvl2pPr>
-              <a:defRPr sz="3674"/>
+              <a:defRPr sz="3675"/>
             </a:lvl2pPr>
             <a:lvl3pPr>
               <a:defRPr sz="3150"/>
@@ -2444,6 +2393,7 @@
               <a:rPr lang="zh-CN" altLang="en-US"/>
               <a:t>单击此处编辑母版文本样式</a:t>
             </a:r>
+            <a:endParaRPr lang="zh-CN" altLang="en-US"/>
           </a:p>
           <a:p>
             <a:pPr lvl="1"/>
@@ -2451,6 +2401,7 @@
               <a:rPr lang="zh-CN" altLang="en-US"/>
               <a:t>二级</a:t>
             </a:r>
+            <a:endParaRPr lang="zh-CN" altLang="en-US"/>
           </a:p>
           <a:p>
             <a:pPr lvl="2"/>
@@ -2458,6 +2409,7 @@
               <a:rPr lang="zh-CN" altLang="en-US"/>
               <a:t>三级</a:t>
             </a:r>
+            <a:endParaRPr lang="zh-CN" altLang="en-US"/>
           </a:p>
           <a:p>
             <a:pPr lvl="3"/>
@@ -2465,6 +2417,7 @@
               <a:rPr lang="zh-CN" altLang="en-US"/>
               <a:t>四级</a:t>
             </a:r>
+            <a:endParaRPr lang="zh-CN" altLang="en-US"/>
           </a:p>
           <a:p>
             <a:pPr lvl="4"/>
@@ -2499,37 +2452,37 @@
               <a:buNone/>
               <a:defRPr sz="2100"/>
             </a:lvl1pPr>
-            <a:lvl2pPr marL="599984" indent="0">
+            <a:lvl2pPr marL="600075" indent="0">
               <a:buNone/>
-              <a:defRPr sz="1837"/>
+              <a:defRPr sz="1835"/>
             </a:lvl2pPr>
-            <a:lvl3pPr marL="1199967" indent="0">
+            <a:lvl3pPr marL="1200150" indent="0">
               <a:buNone/>
               <a:defRPr sz="1575"/>
             </a:lvl3pPr>
-            <a:lvl4pPr marL="1799951" indent="0">
+            <a:lvl4pPr marL="1800225" indent="0">
               <a:buNone/>
-              <a:defRPr sz="1312"/>
+              <a:defRPr sz="1310"/>
             </a:lvl4pPr>
-            <a:lvl5pPr marL="2399934" indent="0">
+            <a:lvl5pPr marL="2399665" indent="0">
               <a:buNone/>
-              <a:defRPr sz="1312"/>
+              <a:defRPr sz="1310"/>
             </a:lvl5pPr>
-            <a:lvl6pPr marL="2999918" indent="0">
+            <a:lvl6pPr marL="2999740" indent="0">
               <a:buNone/>
-              <a:defRPr sz="1312"/>
+              <a:defRPr sz="1310"/>
             </a:lvl6pPr>
-            <a:lvl7pPr marL="3599901" indent="0">
+            <a:lvl7pPr marL="3599815" indent="0">
               <a:buNone/>
-              <a:defRPr sz="1312"/>
+              <a:defRPr sz="1310"/>
             </a:lvl7pPr>
-            <a:lvl8pPr marL="4199885" indent="0">
+            <a:lvl8pPr marL="4199890" indent="0">
               <a:buNone/>
-              <a:defRPr sz="1312"/>
+              <a:defRPr sz="1310"/>
             </a:lvl8pPr>
-            <a:lvl9pPr marL="4799868" indent="0">
+            <a:lvl9pPr marL="4799965" indent="0">
               <a:buNone/>
-              <a:defRPr sz="1312"/>
+              <a:defRPr sz="1310"/>
             </a:lvl9pPr>
           </a:lstStyle>
           <a:p>
@@ -2538,6 +2491,7 @@
               <a:rPr lang="zh-CN" altLang="en-US"/>
               <a:t>单击此处编辑母版文本样式</a:t>
             </a:r>
+            <a:endParaRPr lang="zh-CN" altLang="en-US"/>
           </a:p>
         </p:txBody>
       </p:sp>
@@ -2558,7 +2512,6 @@
           <a:p>
             <a:fld id="{A4CA9E0F-CAF8-49C6-93F3-C610F83BCB2B}" type="datetimeFigureOut">
               <a:rPr lang="zh-CN" altLang="en-US" smtClean="0"/>
-              <a:t>2026/3/12</a:t>
             </a:fld>
             <a:endParaRPr lang="zh-CN" altLang="en-US"/>
           </a:p>
@@ -2600,18 +2553,12 @@
           <a:p>
             <a:fld id="{9E5E7579-7958-4A17-BB40-18AB140F3378}" type="slidenum">
               <a:rPr lang="zh-CN" altLang="en-US" smtClean="0"/>
-              <a:t>‹#›</a:t>
             </a:fld>
             <a:endParaRPr lang="zh-CN" altLang="en-US"/>
           </a:p>
         </p:txBody>
       </p:sp>
     </p:spTree>
-    <p:extLst>
-      <p:ext uri="{BB962C8B-B14F-4D97-AF65-F5344CB8AC3E}">
-        <p14:creationId xmlns:p14="http://schemas.microsoft.com/office/powerpoint/2010/main" val="1155137658"/>
-      </p:ext>
-    </p:extLst>
   </p:cSld>
   <p:clrMapOvr>
     <a:masterClrMapping/>
@@ -2656,7 +2603,7 @@
           <a:bodyPr anchor="b"/>
           <a:lstStyle>
             <a:lvl1pPr>
-              <a:defRPr sz="4199"/>
+              <a:defRPr sz="4200"/>
             </a:lvl1pPr>
           </a:lstStyle>
           <a:p>
@@ -2689,37 +2636,37 @@
           <a:lstStyle>
             <a:lvl1pPr marL="0" indent="0">
               <a:buNone/>
-              <a:defRPr sz="4199"/>
+              <a:defRPr sz="4200"/>
             </a:lvl1pPr>
-            <a:lvl2pPr marL="599984" indent="0">
+            <a:lvl2pPr marL="600075" indent="0">
               <a:buNone/>
-              <a:defRPr sz="3674"/>
+              <a:defRPr sz="3675"/>
             </a:lvl2pPr>
-            <a:lvl3pPr marL="1199967" indent="0">
+            <a:lvl3pPr marL="1200150" indent="0">
               <a:buNone/>
               <a:defRPr sz="3150"/>
             </a:lvl3pPr>
-            <a:lvl4pPr marL="1799951" indent="0">
+            <a:lvl4pPr marL="1800225" indent="0">
               <a:buNone/>
               <a:defRPr sz="2625"/>
             </a:lvl4pPr>
-            <a:lvl5pPr marL="2399934" indent="0">
+            <a:lvl5pPr marL="2399665" indent="0">
               <a:buNone/>
               <a:defRPr sz="2625"/>
             </a:lvl5pPr>
-            <a:lvl6pPr marL="2999918" indent="0">
+            <a:lvl6pPr marL="2999740" indent="0">
               <a:buNone/>
               <a:defRPr sz="2625"/>
             </a:lvl6pPr>
-            <a:lvl7pPr marL="3599901" indent="0">
+            <a:lvl7pPr marL="3599815" indent="0">
               <a:buNone/>
               <a:defRPr sz="2625"/>
             </a:lvl7pPr>
-            <a:lvl8pPr marL="4199885" indent="0">
+            <a:lvl8pPr marL="4199890" indent="0">
               <a:buNone/>
               <a:defRPr sz="2625"/>
             </a:lvl8pPr>
-            <a:lvl9pPr marL="4799868" indent="0">
+            <a:lvl9pPr marL="4799965" indent="0">
               <a:buNone/>
               <a:defRPr sz="2625"/>
             </a:lvl9pPr>
@@ -2756,37 +2703,37 @@
               <a:buNone/>
               <a:defRPr sz="2100"/>
             </a:lvl1pPr>
-            <a:lvl2pPr marL="599984" indent="0">
+            <a:lvl2pPr marL="600075" indent="0">
               <a:buNone/>
-              <a:defRPr sz="1837"/>
+              <a:defRPr sz="1835"/>
             </a:lvl2pPr>
-            <a:lvl3pPr marL="1199967" indent="0">
+            <a:lvl3pPr marL="1200150" indent="0">
               <a:buNone/>
               <a:defRPr sz="1575"/>
             </a:lvl3pPr>
-            <a:lvl4pPr marL="1799951" indent="0">
+            <a:lvl4pPr marL="1800225" indent="0">
               <a:buNone/>
-              <a:defRPr sz="1312"/>
+              <a:defRPr sz="1310"/>
             </a:lvl4pPr>
-            <a:lvl5pPr marL="2399934" indent="0">
+            <a:lvl5pPr marL="2399665" indent="0">
               <a:buNone/>
-              <a:defRPr sz="1312"/>
+              <a:defRPr sz="1310"/>
             </a:lvl5pPr>
-            <a:lvl6pPr marL="2999918" indent="0">
+            <a:lvl6pPr marL="2999740" indent="0">
               <a:buNone/>
-              <a:defRPr sz="1312"/>
+              <a:defRPr sz="1310"/>
             </a:lvl6pPr>
-            <a:lvl7pPr marL="3599901" indent="0">
+            <a:lvl7pPr marL="3599815" indent="0">
               <a:buNone/>
-              <a:defRPr sz="1312"/>
+              <a:defRPr sz="1310"/>
             </a:lvl7pPr>
-            <a:lvl8pPr marL="4199885" indent="0">
+            <a:lvl8pPr marL="4199890" indent="0">
               <a:buNone/>
-              <a:defRPr sz="1312"/>
+              <a:defRPr sz="1310"/>
             </a:lvl8pPr>
-            <a:lvl9pPr marL="4799868" indent="0">
+            <a:lvl9pPr marL="4799965" indent="0">
               <a:buNone/>
-              <a:defRPr sz="1312"/>
+              <a:defRPr sz="1310"/>
             </a:lvl9pPr>
           </a:lstStyle>
           <a:p>
@@ -2795,6 +2742,7 @@
               <a:rPr lang="zh-CN" altLang="en-US"/>
               <a:t>单击此处编辑母版文本样式</a:t>
             </a:r>
+            <a:endParaRPr lang="zh-CN" altLang="en-US"/>
           </a:p>
         </p:txBody>
       </p:sp>
@@ -2815,7 +2763,6 @@
           <a:p>
             <a:fld id="{A4CA9E0F-CAF8-49C6-93F3-C610F83BCB2B}" type="datetimeFigureOut">
               <a:rPr lang="zh-CN" altLang="en-US" smtClean="0"/>
-              <a:t>2026/3/12</a:t>
             </a:fld>
             <a:endParaRPr lang="zh-CN" altLang="en-US"/>
           </a:p>
@@ -2857,18 +2804,12 @@
           <a:p>
             <a:fld id="{9E5E7579-7958-4A17-BB40-18AB140F3378}" type="slidenum">
               <a:rPr lang="zh-CN" altLang="en-US" smtClean="0"/>
-              <a:t>‹#›</a:t>
             </a:fld>
             <a:endParaRPr lang="zh-CN" altLang="en-US"/>
           </a:p>
         </p:txBody>
       </p:sp>
     </p:spTree>
-    <p:extLst>
-      <p:ext uri="{BB962C8B-B14F-4D97-AF65-F5344CB8AC3E}">
-        <p14:creationId xmlns:p14="http://schemas.microsoft.com/office/powerpoint/2010/main" val="1280596380"/>
-      </p:ext>
-    </p:extLst>
   </p:cSld>
   <p:clrMapOvr>
     <a:masterClrMapping/>
@@ -2961,6 +2902,7 @@
               <a:rPr lang="zh-CN" altLang="en-US"/>
               <a:t>单击此处编辑母版文本样式</a:t>
             </a:r>
+            <a:endParaRPr lang="zh-CN" altLang="en-US"/>
           </a:p>
           <a:p>
             <a:pPr lvl="1"/>
@@ -2968,6 +2910,7 @@
               <a:rPr lang="zh-CN" altLang="en-US"/>
               <a:t>二级</a:t>
             </a:r>
+            <a:endParaRPr lang="zh-CN" altLang="en-US"/>
           </a:p>
           <a:p>
             <a:pPr lvl="2"/>
@@ -2975,6 +2918,7 @@
               <a:rPr lang="zh-CN" altLang="en-US"/>
               <a:t>三级</a:t>
             </a:r>
+            <a:endParaRPr lang="zh-CN" altLang="en-US"/>
           </a:p>
           <a:p>
             <a:pPr lvl="3"/>
@@ -2982,6 +2926,7 @@
               <a:rPr lang="zh-CN" altLang="en-US"/>
               <a:t>四级</a:t>
             </a:r>
+            <a:endParaRPr lang="zh-CN" altLang="en-US"/>
           </a:p>
           <a:p>
             <a:pPr lvl="4"/>
@@ -3028,7 +2973,6 @@
           <a:p>
             <a:fld id="{A4CA9E0F-CAF8-49C6-93F3-C610F83BCB2B}" type="datetimeFigureOut">
               <a:rPr lang="zh-CN" altLang="en-US" smtClean="0"/>
-              <a:t>2026/3/12</a:t>
             </a:fld>
             <a:endParaRPr lang="zh-CN" altLang="en-US"/>
           </a:p>
@@ -3106,36 +3050,30 @@
           <a:p>
             <a:fld id="{9E5E7579-7958-4A17-BB40-18AB140F3378}" type="slidenum">
               <a:rPr lang="zh-CN" altLang="en-US" smtClean="0"/>
-              <a:t>‹#›</a:t>
             </a:fld>
             <a:endParaRPr lang="zh-CN" altLang="en-US"/>
           </a:p>
         </p:txBody>
       </p:sp>
     </p:spTree>
-    <p:extLst>
-      <p:ext uri="{BB962C8B-B14F-4D97-AF65-F5344CB8AC3E}">
-        <p14:creationId xmlns:p14="http://schemas.microsoft.com/office/powerpoint/2010/main" val="2388384555"/>
-      </p:ext>
-    </p:extLst>
   </p:cSld>
   <p:clrMap bg1="lt1" tx1="dk1" bg2="lt2" tx2="dk2" accent1="accent1" accent2="accent2" accent3="accent3" accent4="accent4" accent5="accent5" accent6="accent6" hlink="hlink" folHlink="folHlink"/>
   <p:sldLayoutIdLst>
-    <p:sldLayoutId id="2147483793" r:id="rId1"/>
-    <p:sldLayoutId id="2147483794" r:id="rId2"/>
-    <p:sldLayoutId id="2147483795" r:id="rId3"/>
-    <p:sldLayoutId id="2147483796" r:id="rId4"/>
-    <p:sldLayoutId id="2147483797" r:id="rId5"/>
-    <p:sldLayoutId id="2147483798" r:id="rId6"/>
-    <p:sldLayoutId id="2147483799" r:id="rId7"/>
-    <p:sldLayoutId id="2147483800" r:id="rId8"/>
-    <p:sldLayoutId id="2147483801" r:id="rId9"/>
-    <p:sldLayoutId id="2147483802" r:id="rId10"/>
-    <p:sldLayoutId id="2147483803" r:id="rId11"/>
+    <p:sldLayoutId id="2147483649" r:id="rId1"/>
+    <p:sldLayoutId id="2147483650" r:id="rId2"/>
+    <p:sldLayoutId id="2147483651" r:id="rId3"/>
+    <p:sldLayoutId id="2147483652" r:id="rId4"/>
+    <p:sldLayoutId id="2147483653" r:id="rId5"/>
+    <p:sldLayoutId id="2147483654" r:id="rId6"/>
+    <p:sldLayoutId id="2147483655" r:id="rId7"/>
+    <p:sldLayoutId id="2147483656" r:id="rId8"/>
+    <p:sldLayoutId id="2147483657" r:id="rId9"/>
+    <p:sldLayoutId id="2147483658" r:id="rId10"/>
+    <p:sldLayoutId id="2147483659" r:id="rId11"/>
   </p:sldLayoutIdLst>
   <p:txStyles>
     <p:titleStyle>
-      <a:lvl1pPr algn="l" defTabSz="1199967" rtl="0" eaLnBrk="1" latinLnBrk="0" hangingPunct="1">
+      <a:lvl1pPr algn="l" defTabSz="1200150" rtl="0" eaLnBrk="1" latinLnBrk="0" hangingPunct="1">
         <a:lnSpc>
           <a:spcPct val="90000"/>
         </a:lnSpc>
@@ -3143,7 +3081,7 @@
           <a:spcPct val="0"/>
         </a:spcBef>
         <a:buNone/>
-        <a:defRPr sz="5774" kern="1200">
+        <a:defRPr sz="5775" kern="1200">
           <a:solidFill>
             <a:schemeClr val="tx1"/>
           </a:solidFill>
@@ -3154,16 +3092,16 @@
       </a:lvl1pPr>
     </p:titleStyle>
     <p:bodyStyle>
-      <a:lvl1pPr marL="299992" indent="-299992" algn="l" defTabSz="1199967" rtl="0" eaLnBrk="1" latinLnBrk="0" hangingPunct="1">
+      <a:lvl1pPr marL="299720" indent="-299720" algn="l" defTabSz="1200150" rtl="0" eaLnBrk="1" latinLnBrk="0" hangingPunct="1">
         <a:lnSpc>
           <a:spcPct val="90000"/>
         </a:lnSpc>
         <a:spcBef>
-          <a:spcPts val="1312"/>
+          <a:spcPts val="1310"/>
         </a:spcBef>
-        <a:buFont typeface="Arial" panose="020B0604020202020204" pitchFamily="34" charset="0"/>
+        <a:buFont typeface="Arial" panose="020B0604020202090204" pitchFamily="34" charset="0"/>
         <a:buChar char="•"/>
-        <a:defRPr sz="3674" kern="1200">
+        <a:defRPr sz="3675" kern="1200">
           <a:solidFill>
             <a:schemeClr val="tx1"/>
           </a:solidFill>
@@ -3172,14 +3110,14 @@
           <a:cs typeface="+mn-cs"/>
         </a:defRPr>
       </a:lvl1pPr>
-      <a:lvl2pPr marL="899975" indent="-299992" algn="l" defTabSz="1199967" rtl="0" eaLnBrk="1" latinLnBrk="0" hangingPunct="1">
+      <a:lvl2pPr marL="899795" indent="-299720" algn="l" defTabSz="1200150" rtl="0" eaLnBrk="1" latinLnBrk="0" hangingPunct="1">
         <a:lnSpc>
           <a:spcPct val="90000"/>
         </a:lnSpc>
         <a:spcBef>
-          <a:spcPts val="656"/>
+          <a:spcPts val="655"/>
         </a:spcBef>
-        <a:buFont typeface="Arial" panose="020B0604020202020204" pitchFamily="34" charset="0"/>
+        <a:buFont typeface="Arial" panose="020B0604020202090204" pitchFamily="34" charset="0"/>
         <a:buChar char="•"/>
         <a:defRPr sz="3150" kern="1200">
           <a:solidFill>
@@ -3190,14 +3128,14 @@
           <a:cs typeface="+mn-cs"/>
         </a:defRPr>
       </a:lvl2pPr>
-      <a:lvl3pPr marL="1499959" indent="-299992" algn="l" defTabSz="1199967" rtl="0" eaLnBrk="1" latinLnBrk="0" hangingPunct="1">
+      <a:lvl3pPr marL="1499870" indent="-299720" algn="l" defTabSz="1200150" rtl="0" eaLnBrk="1" latinLnBrk="0" hangingPunct="1">
         <a:lnSpc>
           <a:spcPct val="90000"/>
         </a:lnSpc>
         <a:spcBef>
-          <a:spcPts val="656"/>
+          <a:spcPts val="655"/>
         </a:spcBef>
-        <a:buFont typeface="Arial" panose="020B0604020202020204" pitchFamily="34" charset="0"/>
+        <a:buFont typeface="Arial" panose="020B0604020202090204" pitchFamily="34" charset="0"/>
         <a:buChar char="•"/>
         <a:defRPr sz="2625" kern="1200">
           <a:solidFill>
@@ -3208,16 +3146,16 @@
           <a:cs typeface="+mn-cs"/>
         </a:defRPr>
       </a:lvl3pPr>
-      <a:lvl4pPr marL="2099942" indent="-299992" algn="l" defTabSz="1199967" rtl="0" eaLnBrk="1" latinLnBrk="0" hangingPunct="1">
+      <a:lvl4pPr marL="2099945" indent="-299720" algn="l" defTabSz="1200150" rtl="0" eaLnBrk="1" latinLnBrk="0" hangingPunct="1">
         <a:lnSpc>
           <a:spcPct val="90000"/>
         </a:lnSpc>
         <a:spcBef>
-          <a:spcPts val="656"/>
+          <a:spcPts val="655"/>
         </a:spcBef>
-        <a:buFont typeface="Arial" panose="020B0604020202020204" pitchFamily="34" charset="0"/>
+        <a:buFont typeface="Arial" panose="020B0604020202090204" pitchFamily="34" charset="0"/>
         <a:buChar char="•"/>
-        <a:defRPr sz="2362" kern="1200">
+        <a:defRPr sz="2360" kern="1200">
           <a:solidFill>
             <a:schemeClr val="tx1"/>
           </a:solidFill>
@@ -3226,16 +3164,16 @@
           <a:cs typeface="+mn-cs"/>
         </a:defRPr>
       </a:lvl4pPr>
-      <a:lvl5pPr marL="2699926" indent="-299992" algn="l" defTabSz="1199967" rtl="0" eaLnBrk="1" latinLnBrk="0" hangingPunct="1">
+      <a:lvl5pPr marL="2700020" indent="-299720" algn="l" defTabSz="1200150" rtl="0" eaLnBrk="1" latinLnBrk="0" hangingPunct="1">
         <a:lnSpc>
           <a:spcPct val="90000"/>
         </a:lnSpc>
         <a:spcBef>
-          <a:spcPts val="656"/>
+          <a:spcPts val="655"/>
         </a:spcBef>
-        <a:buFont typeface="Arial" panose="020B0604020202020204" pitchFamily="34" charset="0"/>
+        <a:buFont typeface="Arial" panose="020B0604020202090204" pitchFamily="34" charset="0"/>
         <a:buChar char="•"/>
-        <a:defRPr sz="2362" kern="1200">
+        <a:defRPr sz="2360" kern="1200">
           <a:solidFill>
             <a:schemeClr val="tx1"/>
           </a:solidFill>
@@ -3244,16 +3182,16 @@
           <a:cs typeface="+mn-cs"/>
         </a:defRPr>
       </a:lvl5pPr>
-      <a:lvl6pPr marL="3299910" indent="-299992" algn="l" defTabSz="1199967" rtl="0" eaLnBrk="1" latinLnBrk="0" hangingPunct="1">
+      <a:lvl6pPr marL="3300095" indent="-299720" algn="l" defTabSz="1200150" rtl="0" eaLnBrk="1" latinLnBrk="0" hangingPunct="1">
         <a:lnSpc>
           <a:spcPct val="90000"/>
         </a:lnSpc>
         <a:spcBef>
-          <a:spcPts val="656"/>
+          <a:spcPts val="655"/>
         </a:spcBef>
-        <a:buFont typeface="Arial" panose="020B0604020202020204" pitchFamily="34" charset="0"/>
+        <a:buFont typeface="Arial" panose="020B0604020202090204" pitchFamily="34" charset="0"/>
         <a:buChar char="•"/>
-        <a:defRPr sz="2362" kern="1200">
+        <a:defRPr sz="2360" kern="1200">
           <a:solidFill>
             <a:schemeClr val="tx1"/>
           </a:solidFill>
@@ -3262,16 +3200,16 @@
           <a:cs typeface="+mn-cs"/>
         </a:defRPr>
       </a:lvl6pPr>
-      <a:lvl7pPr marL="3899893" indent="-299992" algn="l" defTabSz="1199967" rtl="0" eaLnBrk="1" latinLnBrk="0" hangingPunct="1">
+      <a:lvl7pPr marL="3900170" indent="-299720" algn="l" defTabSz="1200150" rtl="0" eaLnBrk="1" latinLnBrk="0" hangingPunct="1">
         <a:lnSpc>
           <a:spcPct val="90000"/>
         </a:lnSpc>
         <a:spcBef>
-          <a:spcPts val="656"/>
+          <a:spcPts val="655"/>
         </a:spcBef>
-        <a:buFont typeface="Arial" panose="020B0604020202020204" pitchFamily="34" charset="0"/>
+        <a:buFont typeface="Arial" panose="020B0604020202090204" pitchFamily="34" charset="0"/>
         <a:buChar char="•"/>
-        <a:defRPr sz="2362" kern="1200">
+        <a:defRPr sz="2360" kern="1200">
           <a:solidFill>
             <a:schemeClr val="tx1"/>
           </a:solidFill>
@@ -3280,16 +3218,16 @@
           <a:cs typeface="+mn-cs"/>
         </a:defRPr>
       </a:lvl7pPr>
-      <a:lvl8pPr marL="4499877" indent="-299992" algn="l" defTabSz="1199967" rtl="0" eaLnBrk="1" latinLnBrk="0" hangingPunct="1">
+      <a:lvl8pPr marL="4499610" indent="-299720" algn="l" defTabSz="1200150" rtl="0" eaLnBrk="1" latinLnBrk="0" hangingPunct="1">
         <a:lnSpc>
           <a:spcPct val="90000"/>
         </a:lnSpc>
         <a:spcBef>
-          <a:spcPts val="656"/>
+          <a:spcPts val="655"/>
         </a:spcBef>
-        <a:buFont typeface="Arial" panose="020B0604020202020204" pitchFamily="34" charset="0"/>
+        <a:buFont typeface="Arial" panose="020B0604020202090204" pitchFamily="34" charset="0"/>
         <a:buChar char="•"/>
-        <a:defRPr sz="2362" kern="1200">
+        <a:defRPr sz="2360" kern="1200">
           <a:solidFill>
             <a:schemeClr val="tx1"/>
           </a:solidFill>
@@ -3298,16 +3236,16 @@
           <a:cs typeface="+mn-cs"/>
         </a:defRPr>
       </a:lvl8pPr>
-      <a:lvl9pPr marL="5099860" indent="-299992" algn="l" defTabSz="1199967" rtl="0" eaLnBrk="1" latinLnBrk="0" hangingPunct="1">
+      <a:lvl9pPr marL="5099685" indent="-299720" algn="l" defTabSz="1200150" rtl="0" eaLnBrk="1" latinLnBrk="0" hangingPunct="1">
         <a:lnSpc>
           <a:spcPct val="90000"/>
         </a:lnSpc>
         <a:spcBef>
-          <a:spcPts val="656"/>
+          <a:spcPts val="655"/>
         </a:spcBef>
-        <a:buFont typeface="Arial" panose="020B0604020202020204" pitchFamily="34" charset="0"/>
+        <a:buFont typeface="Arial" panose="020B0604020202090204" pitchFamily="34" charset="0"/>
         <a:buChar char="•"/>
-        <a:defRPr sz="2362" kern="1200">
+        <a:defRPr sz="2360" kern="1200">
           <a:solidFill>
             <a:schemeClr val="tx1"/>
           </a:solidFill>
@@ -3321,8 +3259,8 @@
       <a:defPPr>
         <a:defRPr lang="en-US"/>
       </a:defPPr>
-      <a:lvl1pPr marL="0" algn="l" defTabSz="1199967" rtl="0" eaLnBrk="1" latinLnBrk="0" hangingPunct="1">
-        <a:defRPr sz="2362" kern="1200">
+      <a:lvl1pPr marL="0" algn="l" defTabSz="1200150" rtl="0" eaLnBrk="1" latinLnBrk="0" hangingPunct="1">
+        <a:defRPr sz="2360" kern="1200">
           <a:solidFill>
             <a:schemeClr val="tx1"/>
           </a:solidFill>
@@ -3331,8 +3269,8 @@
           <a:cs typeface="+mn-cs"/>
         </a:defRPr>
       </a:lvl1pPr>
-      <a:lvl2pPr marL="599984" algn="l" defTabSz="1199967" rtl="0" eaLnBrk="1" latinLnBrk="0" hangingPunct="1">
-        <a:defRPr sz="2362" kern="1200">
+      <a:lvl2pPr marL="600075" algn="l" defTabSz="1200150" rtl="0" eaLnBrk="1" latinLnBrk="0" hangingPunct="1">
+        <a:defRPr sz="2360" kern="1200">
           <a:solidFill>
             <a:schemeClr val="tx1"/>
           </a:solidFill>
@@ -3341,8 +3279,8 @@
           <a:cs typeface="+mn-cs"/>
         </a:defRPr>
       </a:lvl2pPr>
-      <a:lvl3pPr marL="1199967" algn="l" defTabSz="1199967" rtl="0" eaLnBrk="1" latinLnBrk="0" hangingPunct="1">
-        <a:defRPr sz="2362" kern="1200">
+      <a:lvl3pPr marL="1200150" algn="l" defTabSz="1200150" rtl="0" eaLnBrk="1" latinLnBrk="0" hangingPunct="1">
+        <a:defRPr sz="2360" kern="1200">
           <a:solidFill>
             <a:schemeClr val="tx1"/>
           </a:solidFill>
@@ -3351,8 +3289,8 @@
           <a:cs typeface="+mn-cs"/>
         </a:defRPr>
       </a:lvl3pPr>
-      <a:lvl4pPr marL="1799951" algn="l" defTabSz="1199967" rtl="0" eaLnBrk="1" latinLnBrk="0" hangingPunct="1">
-        <a:defRPr sz="2362" kern="1200">
+      <a:lvl4pPr marL="1800225" algn="l" defTabSz="1200150" rtl="0" eaLnBrk="1" latinLnBrk="0" hangingPunct="1">
+        <a:defRPr sz="2360" kern="1200">
           <a:solidFill>
             <a:schemeClr val="tx1"/>
           </a:solidFill>
@@ -3361,8 +3299,8 @@
           <a:cs typeface="+mn-cs"/>
         </a:defRPr>
       </a:lvl4pPr>
-      <a:lvl5pPr marL="2399934" algn="l" defTabSz="1199967" rtl="0" eaLnBrk="1" latinLnBrk="0" hangingPunct="1">
-        <a:defRPr sz="2362" kern="1200">
+      <a:lvl5pPr marL="2399665" algn="l" defTabSz="1200150" rtl="0" eaLnBrk="1" latinLnBrk="0" hangingPunct="1">
+        <a:defRPr sz="2360" kern="1200">
           <a:solidFill>
             <a:schemeClr val="tx1"/>
           </a:solidFill>
@@ -3371,8 +3309,8 @@
           <a:cs typeface="+mn-cs"/>
         </a:defRPr>
       </a:lvl5pPr>
-      <a:lvl6pPr marL="2999918" algn="l" defTabSz="1199967" rtl="0" eaLnBrk="1" latinLnBrk="0" hangingPunct="1">
-        <a:defRPr sz="2362" kern="1200">
+      <a:lvl6pPr marL="2999740" algn="l" defTabSz="1200150" rtl="0" eaLnBrk="1" latinLnBrk="0" hangingPunct="1">
+        <a:defRPr sz="2360" kern="1200">
           <a:solidFill>
             <a:schemeClr val="tx1"/>
           </a:solidFill>
@@ -3381,8 +3319,8 @@
           <a:cs typeface="+mn-cs"/>
         </a:defRPr>
       </a:lvl6pPr>
-      <a:lvl7pPr marL="3599901" algn="l" defTabSz="1199967" rtl="0" eaLnBrk="1" latinLnBrk="0" hangingPunct="1">
-        <a:defRPr sz="2362" kern="1200">
+      <a:lvl7pPr marL="3599815" algn="l" defTabSz="1200150" rtl="0" eaLnBrk="1" latinLnBrk="0" hangingPunct="1">
+        <a:defRPr sz="2360" kern="1200">
           <a:solidFill>
             <a:schemeClr val="tx1"/>
           </a:solidFill>
@@ -3391,8 +3329,8 @@
           <a:cs typeface="+mn-cs"/>
         </a:defRPr>
       </a:lvl7pPr>
-      <a:lvl8pPr marL="4199885" algn="l" defTabSz="1199967" rtl="0" eaLnBrk="1" latinLnBrk="0" hangingPunct="1">
-        <a:defRPr sz="2362" kern="1200">
+      <a:lvl8pPr marL="4199890" algn="l" defTabSz="1200150" rtl="0" eaLnBrk="1" latinLnBrk="0" hangingPunct="1">
+        <a:defRPr sz="2360" kern="1200">
           <a:solidFill>
             <a:schemeClr val="tx1"/>
           </a:solidFill>
@@ -3401,8 +3339,8 @@
           <a:cs typeface="+mn-cs"/>
         </a:defRPr>
       </a:lvl8pPr>
-      <a:lvl9pPr marL="4799868" algn="l" defTabSz="1199967" rtl="0" eaLnBrk="1" latinLnBrk="0" hangingPunct="1">
-        <a:defRPr sz="2362" kern="1200">
+      <a:lvl9pPr marL="4799965" algn="l" defTabSz="1200150" rtl="0" eaLnBrk="1" latinLnBrk="0" hangingPunct="1">
+        <a:defRPr sz="2360" kern="1200">
           <a:solidFill>
             <a:schemeClr val="tx1"/>
           </a:solidFill>
@@ -3435,13 +3373,7 @@
       </p:grpSpPr>
       <p:sp>
         <p:nvSpPr>
-          <p:cNvPr id="156" name="矩形 155">
-            <a:extLst>
-              <a:ext uri="{FF2B5EF4-FFF2-40B4-BE49-F238E27FC236}">
-                <a16:creationId xmlns:a16="http://schemas.microsoft.com/office/drawing/2014/main" id="{69E64DD0-1E71-906D-CE02-99BCE9D7D4C5}"/>
-              </a:ext>
-            </a:extLst>
-          </p:cNvPr>
+          <p:cNvPr id="156" name="矩形 155"/>
           <p:cNvSpPr/>
           <p:nvPr/>
         </p:nvSpPr>
@@ -3490,19 +3422,13 @@
           <a:lstStyle/>
           <a:p>
             <a:pPr algn="ctr"/>
-            <a:endParaRPr lang="zh-CN" altLang="en-US" sz="1861" dirty="0"/>
-          </a:p>
-        </p:txBody>
-      </p:sp>
-      <p:sp>
-        <p:nvSpPr>
-          <p:cNvPr id="167" name="矩形 166">
-            <a:extLst>
-              <a:ext uri="{FF2B5EF4-FFF2-40B4-BE49-F238E27FC236}">
-                <a16:creationId xmlns:a16="http://schemas.microsoft.com/office/drawing/2014/main" id="{CCB15A51-B379-0467-CA99-DBBBE0CB7B5F}"/>
-              </a:ext>
-            </a:extLst>
-          </p:cNvPr>
+            <a:endParaRPr lang="zh-CN" altLang="en-US" sz="1860" dirty="0"/>
+          </a:p>
+        </p:txBody>
+      </p:sp>
+      <p:sp>
+        <p:nvSpPr>
+          <p:cNvPr id="167" name="矩形 166"/>
           <p:cNvSpPr/>
           <p:nvPr/>
         </p:nvSpPr>
@@ -3551,19 +3477,13 @@
           <a:lstStyle/>
           <a:p>
             <a:pPr algn="ctr"/>
-            <a:endParaRPr lang="zh-CN" altLang="en-US" sz="1861" dirty="0"/>
-          </a:p>
-        </p:txBody>
-      </p:sp>
-      <p:sp>
-        <p:nvSpPr>
-          <p:cNvPr id="178" name="矩形 177">
-            <a:extLst>
-              <a:ext uri="{FF2B5EF4-FFF2-40B4-BE49-F238E27FC236}">
-                <a16:creationId xmlns:a16="http://schemas.microsoft.com/office/drawing/2014/main" id="{54E72F33-708B-C0D7-6D85-176439F4B68B}"/>
-              </a:ext>
-            </a:extLst>
-          </p:cNvPr>
+            <a:endParaRPr lang="zh-CN" altLang="en-US" sz="1860" dirty="0"/>
+          </a:p>
+        </p:txBody>
+      </p:sp>
+      <p:sp>
+        <p:nvSpPr>
+          <p:cNvPr id="178" name="矩形 177"/>
           <p:cNvSpPr/>
           <p:nvPr/>
         </p:nvSpPr>
@@ -3612,19 +3532,13 @@
           <a:lstStyle/>
           <a:p>
             <a:pPr algn="ctr"/>
-            <a:endParaRPr lang="zh-CN" altLang="en-US" sz="1861" dirty="0"/>
-          </a:p>
-        </p:txBody>
-      </p:sp>
-      <p:sp>
-        <p:nvSpPr>
-          <p:cNvPr id="159" name="矩形 158">
-            <a:extLst>
-              <a:ext uri="{FF2B5EF4-FFF2-40B4-BE49-F238E27FC236}">
-                <a16:creationId xmlns:a16="http://schemas.microsoft.com/office/drawing/2014/main" id="{EDC48906-30A5-87F0-D07F-C76E1A85CBEB}"/>
-              </a:ext>
-            </a:extLst>
-          </p:cNvPr>
+            <a:endParaRPr lang="zh-CN" altLang="en-US" sz="1860" dirty="0"/>
+          </a:p>
+        </p:txBody>
+      </p:sp>
+      <p:sp>
+        <p:nvSpPr>
+          <p:cNvPr id="159" name="矩形 158"/>
           <p:cNvSpPr/>
           <p:nvPr/>
         </p:nvSpPr>
@@ -3673,19 +3587,13 @@
           <a:lstStyle/>
           <a:p>
             <a:pPr algn="ctr"/>
-            <a:endParaRPr lang="zh-CN" altLang="en-US" sz="1861" dirty="0"/>
-          </a:p>
-        </p:txBody>
-      </p:sp>
-      <p:sp>
-        <p:nvSpPr>
-          <p:cNvPr id="160" name="矩形 159">
-            <a:extLst>
-              <a:ext uri="{FF2B5EF4-FFF2-40B4-BE49-F238E27FC236}">
-                <a16:creationId xmlns:a16="http://schemas.microsoft.com/office/drawing/2014/main" id="{37A22490-C4AE-AE22-609F-458C73FC9790}"/>
-              </a:ext>
-            </a:extLst>
-          </p:cNvPr>
+            <a:endParaRPr lang="zh-CN" altLang="en-US" sz="1860" dirty="0"/>
+          </a:p>
+        </p:txBody>
+      </p:sp>
+      <p:sp>
+        <p:nvSpPr>
+          <p:cNvPr id="160" name="矩形 159"/>
           <p:cNvSpPr/>
           <p:nvPr/>
         </p:nvSpPr>
@@ -3734,19 +3642,13 @@
           <a:lstStyle/>
           <a:p>
             <a:pPr algn="ctr"/>
-            <a:endParaRPr lang="zh-CN" altLang="en-US" sz="1861" dirty="0"/>
-          </a:p>
-        </p:txBody>
-      </p:sp>
-      <p:sp>
-        <p:nvSpPr>
-          <p:cNvPr id="166" name="矩形 165">
-            <a:extLst>
-              <a:ext uri="{FF2B5EF4-FFF2-40B4-BE49-F238E27FC236}">
-                <a16:creationId xmlns:a16="http://schemas.microsoft.com/office/drawing/2014/main" id="{810635D4-A692-3C1C-D4C7-88F27B973979}"/>
-              </a:ext>
-            </a:extLst>
-          </p:cNvPr>
+            <a:endParaRPr lang="zh-CN" altLang="en-US" sz="1860" dirty="0"/>
+          </a:p>
+        </p:txBody>
+      </p:sp>
+      <p:sp>
+        <p:nvSpPr>
+          <p:cNvPr id="166" name="矩形 165"/>
           <p:cNvSpPr/>
           <p:nvPr/>
         </p:nvSpPr>
@@ -3795,19 +3697,13 @@
           <a:lstStyle/>
           <a:p>
             <a:pPr algn="ctr"/>
-            <a:endParaRPr lang="zh-CN" altLang="en-US" sz="1861" dirty="0"/>
-          </a:p>
-        </p:txBody>
-      </p:sp>
-      <p:sp>
-        <p:nvSpPr>
-          <p:cNvPr id="168" name="矩形 167">
-            <a:extLst>
-              <a:ext uri="{FF2B5EF4-FFF2-40B4-BE49-F238E27FC236}">
-                <a16:creationId xmlns:a16="http://schemas.microsoft.com/office/drawing/2014/main" id="{20191776-BF94-204F-BCF6-666E6BC0471B}"/>
-              </a:ext>
-            </a:extLst>
-          </p:cNvPr>
+            <a:endParaRPr lang="zh-CN" altLang="en-US" sz="1860" dirty="0"/>
+          </a:p>
+        </p:txBody>
+      </p:sp>
+      <p:sp>
+        <p:nvSpPr>
+          <p:cNvPr id="168" name="矩形 167"/>
           <p:cNvSpPr/>
           <p:nvPr/>
         </p:nvSpPr>
@@ -3856,19 +3752,13 @@
           <a:lstStyle/>
           <a:p>
             <a:pPr algn="ctr"/>
-            <a:endParaRPr lang="zh-CN" altLang="en-US" sz="1861" dirty="0"/>
-          </a:p>
-        </p:txBody>
-      </p:sp>
-      <p:sp>
-        <p:nvSpPr>
-          <p:cNvPr id="169" name="矩形 168">
-            <a:extLst>
-              <a:ext uri="{FF2B5EF4-FFF2-40B4-BE49-F238E27FC236}">
-                <a16:creationId xmlns:a16="http://schemas.microsoft.com/office/drawing/2014/main" id="{1E6AB58A-D452-56B7-13C0-2C6142198529}"/>
-              </a:ext>
-            </a:extLst>
-          </p:cNvPr>
+            <a:endParaRPr lang="zh-CN" altLang="en-US" sz="1860" dirty="0"/>
+          </a:p>
+        </p:txBody>
+      </p:sp>
+      <p:sp>
+        <p:nvSpPr>
+          <p:cNvPr id="169" name="矩形 168"/>
           <p:cNvSpPr/>
           <p:nvPr/>
         </p:nvSpPr>
@@ -3917,19 +3807,13 @@
           <a:lstStyle/>
           <a:p>
             <a:pPr algn="ctr"/>
-            <a:endParaRPr lang="zh-CN" altLang="en-US" sz="1861" dirty="0"/>
-          </a:p>
-        </p:txBody>
-      </p:sp>
-      <p:sp>
-        <p:nvSpPr>
-          <p:cNvPr id="170" name="矩形 169">
-            <a:extLst>
-              <a:ext uri="{FF2B5EF4-FFF2-40B4-BE49-F238E27FC236}">
-                <a16:creationId xmlns:a16="http://schemas.microsoft.com/office/drawing/2014/main" id="{99E37BBD-2193-A693-2D8D-9E67259DCE7D}"/>
-              </a:ext>
-            </a:extLst>
-          </p:cNvPr>
+            <a:endParaRPr lang="zh-CN" altLang="en-US" sz="1860" dirty="0"/>
+          </a:p>
+        </p:txBody>
+      </p:sp>
+      <p:sp>
+        <p:nvSpPr>
+          <p:cNvPr id="170" name="矩形 169"/>
           <p:cNvSpPr/>
           <p:nvPr/>
         </p:nvSpPr>
@@ -3978,19 +3862,13 @@
           <a:lstStyle/>
           <a:p>
             <a:pPr algn="ctr"/>
-            <a:endParaRPr lang="zh-CN" altLang="en-US" sz="1861" dirty="0"/>
-          </a:p>
-        </p:txBody>
-      </p:sp>
-      <p:sp>
-        <p:nvSpPr>
-          <p:cNvPr id="157" name="矩形 156">
-            <a:extLst>
-              <a:ext uri="{FF2B5EF4-FFF2-40B4-BE49-F238E27FC236}">
-                <a16:creationId xmlns:a16="http://schemas.microsoft.com/office/drawing/2014/main" id="{349F370D-304C-AA23-D6CA-3A0824E7CFA2}"/>
-              </a:ext>
-            </a:extLst>
-          </p:cNvPr>
+            <a:endParaRPr lang="zh-CN" altLang="en-US" sz="1860" dirty="0"/>
+          </a:p>
+        </p:txBody>
+      </p:sp>
+      <p:sp>
+        <p:nvSpPr>
+          <p:cNvPr id="157" name="矩形 156"/>
           <p:cNvSpPr/>
           <p:nvPr/>
         </p:nvSpPr>
@@ -4039,19 +3917,13 @@
           <a:lstStyle/>
           <a:p>
             <a:pPr algn="ctr"/>
-            <a:endParaRPr lang="zh-CN" altLang="en-US" sz="1861" dirty="0"/>
-          </a:p>
-        </p:txBody>
-      </p:sp>
-      <p:sp>
-        <p:nvSpPr>
-          <p:cNvPr id="158" name="矩形 157">
-            <a:extLst>
-              <a:ext uri="{FF2B5EF4-FFF2-40B4-BE49-F238E27FC236}">
-                <a16:creationId xmlns:a16="http://schemas.microsoft.com/office/drawing/2014/main" id="{1C6ABBE1-E6B4-FF66-B555-B615D0967B3C}"/>
-              </a:ext>
-            </a:extLst>
-          </p:cNvPr>
+            <a:endParaRPr lang="zh-CN" altLang="en-US" sz="1860" dirty="0"/>
+          </a:p>
+        </p:txBody>
+      </p:sp>
+      <p:sp>
+        <p:nvSpPr>
+          <p:cNvPr id="158" name="矩形 157"/>
           <p:cNvSpPr/>
           <p:nvPr/>
         </p:nvSpPr>
@@ -4100,19 +3972,13 @@
           <a:lstStyle/>
           <a:p>
             <a:pPr algn="ctr"/>
-            <a:endParaRPr lang="zh-CN" altLang="en-US" sz="1861" dirty="0"/>
-          </a:p>
-        </p:txBody>
-      </p:sp>
-      <p:sp>
-        <p:nvSpPr>
-          <p:cNvPr id="417" name="矩形 416">
-            <a:extLst>
-              <a:ext uri="{FF2B5EF4-FFF2-40B4-BE49-F238E27FC236}">
-                <a16:creationId xmlns:a16="http://schemas.microsoft.com/office/drawing/2014/main" id="{3AB97414-2AF7-4578-926A-4BCAB9E2916C}"/>
-              </a:ext>
-            </a:extLst>
-          </p:cNvPr>
+            <a:endParaRPr lang="zh-CN" altLang="en-US" sz="1860" dirty="0"/>
+          </a:p>
+        </p:txBody>
+      </p:sp>
+      <p:sp>
+        <p:nvSpPr>
+          <p:cNvPr id="417" name="矩形 416"/>
           <p:cNvSpPr/>
           <p:nvPr/>
         </p:nvSpPr>
@@ -4161,19 +4027,13 @@
           <a:lstStyle/>
           <a:p>
             <a:pPr algn="ctr"/>
-            <a:endParaRPr lang="zh-CN" altLang="en-US" sz="1861"/>
-          </a:p>
-        </p:txBody>
-      </p:sp>
-      <p:sp>
-        <p:nvSpPr>
-          <p:cNvPr id="56" name="矩形: 圆角 55">
-            <a:extLst>
-              <a:ext uri="{FF2B5EF4-FFF2-40B4-BE49-F238E27FC236}">
-                <a16:creationId xmlns:a16="http://schemas.microsoft.com/office/drawing/2014/main" id="{96480694-A299-41A8-A9EE-003545ADAC2A}"/>
-              </a:ext>
-            </a:extLst>
-          </p:cNvPr>
+            <a:endParaRPr lang="zh-CN" altLang="en-US" sz="1860"/>
+          </a:p>
+        </p:txBody>
+      </p:sp>
+      <p:sp>
+        <p:nvSpPr>
+          <p:cNvPr id="56" name="矩形: 圆角 55"/>
           <p:cNvSpPr/>
           <p:nvPr/>
         </p:nvSpPr>
@@ -4219,34 +4079,28 @@
           <a:p>
             <a:pPr algn="ctr"/>
             <a:r>
-              <a:rPr lang="en-US" altLang="zh-CN" sz="1241" dirty="0">
+              <a:rPr lang="en-US" altLang="zh-CN" sz="1240" dirty="0">
                 <a:solidFill>
                   <a:schemeClr val="tx1"/>
                 </a:solidFill>
-                <a:latin typeface="Times New Roman" panose="02020603050405020304" pitchFamily="18" charset="0"/>
-                <a:cs typeface="Times New Roman" panose="02020603050405020304" pitchFamily="18" charset="0"/>
+                <a:latin typeface="Times New Roman" panose="02020503050405090304" pitchFamily="18" charset="0"/>
+                <a:cs typeface="Times New Roman" panose="02020503050405090304" pitchFamily="18" charset="0"/>
               </a:rPr>
               <a:t>SC</a:t>
             </a:r>
-            <a:endParaRPr lang="zh-CN" altLang="en-US" sz="1241" dirty="0">
+            <a:endParaRPr lang="zh-CN" altLang="en-US" sz="1240" dirty="0">
               <a:solidFill>
                 <a:schemeClr val="tx1"/>
               </a:solidFill>
-              <a:latin typeface="Times New Roman" panose="02020603050405020304" pitchFamily="18" charset="0"/>
-              <a:cs typeface="Times New Roman" panose="02020603050405020304" pitchFamily="18" charset="0"/>
+              <a:latin typeface="Times New Roman" panose="02020503050405090304" pitchFamily="18" charset="0"/>
+              <a:cs typeface="Times New Roman" panose="02020503050405090304" pitchFamily="18" charset="0"/>
             </a:endParaRPr>
           </a:p>
         </p:txBody>
       </p:sp>
       <p:sp>
         <p:nvSpPr>
-          <p:cNvPr id="57" name="矩形: 圆角 56">
-            <a:extLst>
-              <a:ext uri="{FF2B5EF4-FFF2-40B4-BE49-F238E27FC236}">
-                <a16:creationId xmlns:a16="http://schemas.microsoft.com/office/drawing/2014/main" id="{09532AD9-D75D-4F1A-B853-57BEB8A00753}"/>
-              </a:ext>
-            </a:extLst>
-          </p:cNvPr>
+          <p:cNvPr id="57" name="矩形: 圆角 56"/>
           <p:cNvSpPr/>
           <p:nvPr/>
         </p:nvSpPr>
@@ -4296,8 +4150,8 @@
                 <a:solidFill>
                   <a:schemeClr val="tx1"/>
                 </a:solidFill>
-                <a:latin typeface="Times New Roman" panose="02020603050405020304" pitchFamily="18" charset="0"/>
-                <a:cs typeface="Times New Roman" panose="02020603050405020304" pitchFamily="18" charset="0"/>
+                <a:latin typeface="Times New Roman" panose="02020503050405090304" pitchFamily="18" charset="0"/>
+                <a:cs typeface="Times New Roman" panose="02020503050405090304" pitchFamily="18" charset="0"/>
               </a:rPr>
               <a:t>Conv 3x3 </a:t>
             </a:r>
@@ -4305,21 +4159,15 @@
               <a:solidFill>
                 <a:schemeClr val="tx1"/>
               </a:solidFill>
-              <a:latin typeface="Times New Roman" panose="02020603050405020304" pitchFamily="18" charset="0"/>
-              <a:cs typeface="Times New Roman" panose="02020603050405020304" pitchFamily="18" charset="0"/>
+              <a:latin typeface="Times New Roman" panose="02020503050405090304" pitchFamily="18" charset="0"/>
+              <a:cs typeface="Times New Roman" panose="02020503050405090304" pitchFamily="18" charset="0"/>
             </a:endParaRPr>
           </a:p>
         </p:txBody>
       </p:sp>
       <p:sp>
         <p:nvSpPr>
-          <p:cNvPr id="58" name="矩形: 圆角 57">
-            <a:extLst>
-              <a:ext uri="{FF2B5EF4-FFF2-40B4-BE49-F238E27FC236}">
-                <a16:creationId xmlns:a16="http://schemas.microsoft.com/office/drawing/2014/main" id="{E32AA318-AAE6-4F91-A76C-1EF43F6C9EAB}"/>
-              </a:ext>
-            </a:extLst>
-          </p:cNvPr>
+          <p:cNvPr id="58" name="矩形: 圆角 57"/>
           <p:cNvSpPr/>
           <p:nvPr/>
         </p:nvSpPr>
@@ -4365,34 +4213,28 @@
           <a:p>
             <a:pPr algn="ctr"/>
             <a:r>
-              <a:rPr lang="en-US" altLang="zh-CN" sz="1241" dirty="0">
+              <a:rPr lang="en-US" altLang="zh-CN" sz="1240" dirty="0">
                 <a:solidFill>
                   <a:schemeClr val="tx1"/>
                 </a:solidFill>
-                <a:latin typeface="Times New Roman" panose="02020603050405020304" pitchFamily="18" charset="0"/>
-                <a:cs typeface="Times New Roman" panose="02020603050405020304" pitchFamily="18" charset="0"/>
+                <a:latin typeface="Times New Roman" panose="02020503050405090304" pitchFamily="18" charset="0"/>
+                <a:cs typeface="Times New Roman" panose="02020503050405090304" pitchFamily="18" charset="0"/>
               </a:rPr>
               <a:t>SC</a:t>
             </a:r>
-            <a:endParaRPr lang="zh-CN" altLang="en-US" sz="1241" dirty="0">
+            <a:endParaRPr lang="zh-CN" altLang="en-US" sz="1240" dirty="0">
               <a:solidFill>
                 <a:schemeClr val="tx1"/>
               </a:solidFill>
-              <a:latin typeface="Times New Roman" panose="02020603050405020304" pitchFamily="18" charset="0"/>
-              <a:cs typeface="Times New Roman" panose="02020603050405020304" pitchFamily="18" charset="0"/>
+              <a:latin typeface="Times New Roman" panose="02020503050405090304" pitchFamily="18" charset="0"/>
+              <a:cs typeface="Times New Roman" panose="02020503050405090304" pitchFamily="18" charset="0"/>
             </a:endParaRPr>
           </a:p>
         </p:txBody>
       </p:sp>
       <p:sp>
         <p:nvSpPr>
-          <p:cNvPr id="59" name="流程图: 或者 58">
-            <a:extLst>
-              <a:ext uri="{FF2B5EF4-FFF2-40B4-BE49-F238E27FC236}">
-                <a16:creationId xmlns:a16="http://schemas.microsoft.com/office/drawing/2014/main" id="{5151FC85-7F11-419D-8FCB-E753FCEC220E}"/>
-              </a:ext>
-            </a:extLst>
-          </p:cNvPr>
+          <p:cNvPr id="59" name="流程图: 或者 58"/>
           <p:cNvSpPr/>
           <p:nvPr/>
         </p:nvSpPr>
@@ -4434,19 +4276,13 @@
           <a:lstStyle/>
           <a:p>
             <a:pPr algn="ctr"/>
-            <a:endParaRPr lang="zh-CN" altLang="en-US" sz="1861"/>
-          </a:p>
-        </p:txBody>
-      </p:sp>
-      <p:sp>
-        <p:nvSpPr>
-          <p:cNvPr id="60" name="矩形: 圆角 59">
-            <a:extLst>
-              <a:ext uri="{FF2B5EF4-FFF2-40B4-BE49-F238E27FC236}">
-                <a16:creationId xmlns:a16="http://schemas.microsoft.com/office/drawing/2014/main" id="{6FD624E5-8761-4331-ACBF-15C916ADF494}"/>
-              </a:ext>
-            </a:extLst>
-          </p:cNvPr>
+            <a:endParaRPr lang="zh-CN" altLang="en-US" sz="1860"/>
+          </a:p>
+        </p:txBody>
+      </p:sp>
+      <p:sp>
+        <p:nvSpPr>
+          <p:cNvPr id="60" name="矩形: 圆角 59"/>
           <p:cNvSpPr/>
           <p:nvPr/>
         </p:nvSpPr>
@@ -4492,34 +4328,28 @@
           <a:p>
             <a:pPr algn="ctr"/>
             <a:r>
-              <a:rPr lang="en-US" altLang="zh-CN" sz="1241" dirty="0">
+              <a:rPr lang="en-US" altLang="zh-CN" sz="1240" dirty="0">
                 <a:solidFill>
                   <a:schemeClr val="tx1"/>
                 </a:solidFill>
-                <a:latin typeface="Times New Roman" panose="02020603050405020304" pitchFamily="18" charset="0"/>
-                <a:cs typeface="Times New Roman" panose="02020603050405020304" pitchFamily="18" charset="0"/>
+                <a:latin typeface="Times New Roman" panose="02020503050405090304" pitchFamily="18" charset="0"/>
+                <a:cs typeface="Times New Roman" panose="02020503050405090304" pitchFamily="18" charset="0"/>
               </a:rPr>
               <a:t>BN</a:t>
             </a:r>
-            <a:endParaRPr lang="zh-CN" altLang="en-US" sz="1241" dirty="0">
+            <a:endParaRPr lang="zh-CN" altLang="en-US" sz="1240" dirty="0">
               <a:solidFill>
                 <a:schemeClr val="tx1"/>
               </a:solidFill>
-              <a:latin typeface="Times New Roman" panose="02020603050405020304" pitchFamily="18" charset="0"/>
-              <a:cs typeface="Times New Roman" panose="02020603050405020304" pitchFamily="18" charset="0"/>
+              <a:latin typeface="Times New Roman" panose="02020503050405090304" pitchFamily="18" charset="0"/>
+              <a:cs typeface="Times New Roman" panose="02020503050405090304" pitchFamily="18" charset="0"/>
             </a:endParaRPr>
           </a:p>
         </p:txBody>
       </p:sp>
       <p:sp>
         <p:nvSpPr>
-          <p:cNvPr id="61" name="矩形: 圆角 60">
-            <a:extLst>
-              <a:ext uri="{FF2B5EF4-FFF2-40B4-BE49-F238E27FC236}">
-                <a16:creationId xmlns:a16="http://schemas.microsoft.com/office/drawing/2014/main" id="{7BF0C043-A945-40B5-9846-A2C13E96FC91}"/>
-              </a:ext>
-            </a:extLst>
-          </p:cNvPr>
+          <p:cNvPr id="61" name="矩形: 圆角 60"/>
           <p:cNvSpPr/>
           <p:nvPr/>
         </p:nvSpPr>
@@ -4565,34 +4395,28 @@
           <a:p>
             <a:pPr algn="ctr"/>
             <a:r>
-              <a:rPr lang="en-US" altLang="zh-CN" sz="1241" dirty="0">
+              <a:rPr lang="en-US" altLang="zh-CN" sz="1240" dirty="0">
                 <a:solidFill>
                   <a:schemeClr val="tx1"/>
                 </a:solidFill>
-                <a:latin typeface="Times New Roman" panose="02020603050405020304" pitchFamily="18" charset="0"/>
-                <a:cs typeface="Times New Roman" panose="02020603050405020304" pitchFamily="18" charset="0"/>
+                <a:latin typeface="Times New Roman" panose="02020503050405090304" pitchFamily="18" charset="0"/>
+                <a:cs typeface="Times New Roman" panose="02020503050405090304" pitchFamily="18" charset="0"/>
               </a:rPr>
               <a:t>BN</a:t>
             </a:r>
-            <a:endParaRPr lang="zh-CN" altLang="en-US" sz="1241" dirty="0">
+            <a:endParaRPr lang="zh-CN" altLang="en-US" sz="1240" dirty="0">
               <a:solidFill>
                 <a:schemeClr val="tx1"/>
               </a:solidFill>
-              <a:latin typeface="Times New Roman" panose="02020603050405020304" pitchFamily="18" charset="0"/>
-              <a:cs typeface="Times New Roman" panose="02020603050405020304" pitchFamily="18" charset="0"/>
+              <a:latin typeface="Times New Roman" panose="02020503050405090304" pitchFamily="18" charset="0"/>
+              <a:cs typeface="Times New Roman" panose="02020503050405090304" pitchFamily="18" charset="0"/>
             </a:endParaRPr>
           </a:p>
         </p:txBody>
       </p:sp>
       <p:sp>
         <p:nvSpPr>
-          <p:cNvPr id="62" name="矩形: 圆角 61">
-            <a:extLst>
-              <a:ext uri="{FF2B5EF4-FFF2-40B4-BE49-F238E27FC236}">
-                <a16:creationId xmlns:a16="http://schemas.microsoft.com/office/drawing/2014/main" id="{CBCE3E53-8080-4585-A0C8-E1D97FFED4E8}"/>
-              </a:ext>
-            </a:extLst>
-          </p:cNvPr>
+          <p:cNvPr id="62" name="矩形: 圆角 61"/>
           <p:cNvSpPr/>
           <p:nvPr/>
         </p:nvSpPr>
@@ -4638,36 +4462,29 @@
           <a:p>
             <a:pPr algn="ctr"/>
             <a:r>
-              <a:rPr lang="en-US" altLang="zh-CN" sz="1241" dirty="0">
+              <a:rPr lang="en-US" altLang="zh-CN" sz="1240" dirty="0">
                 <a:solidFill>
                   <a:schemeClr val="tx1"/>
                 </a:solidFill>
-                <a:latin typeface="Times New Roman" panose="02020603050405020304" pitchFamily="18" charset="0"/>
-                <a:cs typeface="Times New Roman" panose="02020603050405020304" pitchFamily="18" charset="0"/>
+                <a:latin typeface="Times New Roman" panose="02020503050405090304" pitchFamily="18" charset="0"/>
+                <a:cs typeface="Times New Roman" panose="02020503050405090304" pitchFamily="18" charset="0"/>
               </a:rPr>
               <a:t>Sigmoid </a:t>
             </a:r>
-            <a:endParaRPr lang="zh-CN" altLang="en-US" sz="1241" dirty="0">
+            <a:endParaRPr lang="zh-CN" altLang="en-US" sz="1240" dirty="0">
               <a:solidFill>
                 <a:schemeClr val="tx1"/>
               </a:solidFill>
-              <a:latin typeface="Times New Roman" panose="02020603050405020304" pitchFamily="18" charset="0"/>
-              <a:cs typeface="Times New Roman" panose="02020603050405020304" pitchFamily="18" charset="0"/>
+              <a:latin typeface="Times New Roman" panose="02020503050405090304" pitchFamily="18" charset="0"/>
+              <a:cs typeface="Times New Roman" panose="02020503050405090304" pitchFamily="18" charset="0"/>
             </a:endParaRPr>
           </a:p>
         </p:txBody>
       </p:sp>
       <p:cxnSp>
         <p:nvCxnSpPr>
-          <p:cNvPr id="63" name="直接箭头连接符 62">
-            <a:extLst>
-              <a:ext uri="{FF2B5EF4-FFF2-40B4-BE49-F238E27FC236}">
-                <a16:creationId xmlns:a16="http://schemas.microsoft.com/office/drawing/2014/main" id="{8BE9B0C9-6E1C-4C1C-8589-A8AD0A528367}"/>
-              </a:ext>
-            </a:extLst>
-          </p:cNvPr>
+          <p:cNvPr id="63" name="直接箭头连接符 62"/>
           <p:cNvCxnSpPr>
-            <a:cxnSpLocks/>
             <a:stCxn id="58" idx="2"/>
             <a:endCxn id="59" idx="7"/>
           </p:cNvCxnSpPr>
@@ -4705,15 +4522,8 @@
       </p:cxnSp>
       <p:cxnSp>
         <p:nvCxnSpPr>
-          <p:cNvPr id="64" name="直接箭头连接符 63">
-            <a:extLst>
-              <a:ext uri="{FF2B5EF4-FFF2-40B4-BE49-F238E27FC236}">
-                <a16:creationId xmlns:a16="http://schemas.microsoft.com/office/drawing/2014/main" id="{19901410-D220-40F9-AA88-62A5C2B7897A}"/>
-              </a:ext>
-            </a:extLst>
-          </p:cNvPr>
+          <p:cNvPr id="64" name="直接箭头连接符 63"/>
           <p:cNvCxnSpPr>
-            <a:cxnSpLocks/>
             <a:stCxn id="56" idx="2"/>
             <a:endCxn id="59" idx="1"/>
           </p:cNvCxnSpPr>
@@ -4751,15 +4561,8 @@
       </p:cxnSp>
       <p:cxnSp>
         <p:nvCxnSpPr>
-          <p:cNvPr id="65" name="直接箭头连接符 64">
-            <a:extLst>
-              <a:ext uri="{FF2B5EF4-FFF2-40B4-BE49-F238E27FC236}">
-                <a16:creationId xmlns:a16="http://schemas.microsoft.com/office/drawing/2014/main" id="{C751EB9C-26E4-454E-BCEB-3592E8FAFEFE}"/>
-              </a:ext>
-            </a:extLst>
-          </p:cNvPr>
+          <p:cNvPr id="65" name="直接箭头连接符 64"/>
           <p:cNvCxnSpPr>
-            <a:cxnSpLocks/>
             <a:stCxn id="60" idx="3"/>
             <a:endCxn id="59" idx="2"/>
           </p:cNvCxnSpPr>
@@ -4797,15 +4600,8 @@
       </p:cxnSp>
       <p:cxnSp>
         <p:nvCxnSpPr>
-          <p:cNvPr id="66" name="直接箭头连接符 65">
-            <a:extLst>
-              <a:ext uri="{FF2B5EF4-FFF2-40B4-BE49-F238E27FC236}">
-                <a16:creationId xmlns:a16="http://schemas.microsoft.com/office/drawing/2014/main" id="{08E86AFF-AD45-4733-AECC-5987A0BC8749}"/>
-              </a:ext>
-            </a:extLst>
-          </p:cNvPr>
+          <p:cNvPr id="66" name="直接箭头连接符 65"/>
           <p:cNvCxnSpPr>
-            <a:cxnSpLocks/>
             <a:stCxn id="61" idx="1"/>
             <a:endCxn id="59" idx="6"/>
           </p:cNvCxnSpPr>
@@ -4843,15 +4639,8 @@
       </p:cxnSp>
       <p:cxnSp>
         <p:nvCxnSpPr>
-          <p:cNvPr id="70" name="直接箭头连接符 69">
-            <a:extLst>
-              <a:ext uri="{FF2B5EF4-FFF2-40B4-BE49-F238E27FC236}">
-                <a16:creationId xmlns:a16="http://schemas.microsoft.com/office/drawing/2014/main" id="{86C4987F-1E53-444F-BD62-7C5E19258747}"/>
-              </a:ext>
-            </a:extLst>
-          </p:cNvPr>
+          <p:cNvPr id="70" name="直接箭头连接符 69"/>
           <p:cNvCxnSpPr>
-            <a:cxnSpLocks/>
             <a:endCxn id="57" idx="0"/>
           </p:cNvCxnSpPr>
           <p:nvPr/>
@@ -4888,15 +4677,8 @@
       </p:cxnSp>
       <p:cxnSp>
         <p:nvCxnSpPr>
-          <p:cNvPr id="72" name="连接符: 肘形 71">
-            <a:extLst>
-              <a:ext uri="{FF2B5EF4-FFF2-40B4-BE49-F238E27FC236}">
-                <a16:creationId xmlns:a16="http://schemas.microsoft.com/office/drawing/2014/main" id="{796BDA84-F388-4350-B48D-CB62DC511F9D}"/>
-              </a:ext>
-            </a:extLst>
-          </p:cNvPr>
+          <p:cNvPr id="72" name="连接符: 肘形 71"/>
           <p:cNvCxnSpPr>
-            <a:cxnSpLocks/>
             <a:stCxn id="57" idx="0"/>
             <a:endCxn id="58" idx="0"/>
           </p:cNvCxnSpPr>
@@ -4937,13 +4719,7 @@
       </p:cxnSp>
       <p:sp>
         <p:nvSpPr>
-          <p:cNvPr id="74" name="矩形: 圆角 73">
-            <a:extLst>
-              <a:ext uri="{FF2B5EF4-FFF2-40B4-BE49-F238E27FC236}">
-                <a16:creationId xmlns:a16="http://schemas.microsoft.com/office/drawing/2014/main" id="{3AEF2644-E4BA-4236-9889-DBC25EAB61F7}"/>
-              </a:ext>
-            </a:extLst>
-          </p:cNvPr>
+          <p:cNvPr id="74" name="矩形: 圆角 73"/>
           <p:cNvSpPr/>
           <p:nvPr/>
         </p:nvSpPr>
@@ -4993,8 +4769,8 @@
                 <a:solidFill>
                   <a:schemeClr val="tx1"/>
                 </a:solidFill>
-                <a:latin typeface="Times New Roman" panose="02020603050405020304" pitchFamily="18" charset="0"/>
-                <a:cs typeface="Times New Roman" panose="02020603050405020304" pitchFamily="18" charset="0"/>
+                <a:latin typeface="Times New Roman" panose="02020503050405090304" pitchFamily="18" charset="0"/>
+                <a:cs typeface="Times New Roman" panose="02020503050405090304" pitchFamily="18" charset="0"/>
               </a:rPr>
               <a:t>Conv 3x3 </a:t>
             </a:r>
@@ -5002,21 +4778,15 @@
               <a:solidFill>
                 <a:schemeClr val="tx1"/>
               </a:solidFill>
-              <a:latin typeface="Times New Roman" panose="02020603050405020304" pitchFamily="18" charset="0"/>
-              <a:cs typeface="Times New Roman" panose="02020603050405020304" pitchFamily="18" charset="0"/>
+              <a:latin typeface="Times New Roman" panose="02020503050405090304" pitchFamily="18" charset="0"/>
+              <a:cs typeface="Times New Roman" panose="02020503050405090304" pitchFamily="18" charset="0"/>
             </a:endParaRPr>
           </a:p>
         </p:txBody>
       </p:sp>
       <p:sp>
         <p:nvSpPr>
-          <p:cNvPr id="76" name="文本框 75">
-            <a:extLst>
-              <a:ext uri="{FF2B5EF4-FFF2-40B4-BE49-F238E27FC236}">
-                <a16:creationId xmlns:a16="http://schemas.microsoft.com/office/drawing/2014/main" id="{3D92093C-F49B-4463-9CC4-239C58220043}"/>
-              </a:ext>
-            </a:extLst>
-          </p:cNvPr>
+          <p:cNvPr id="76" name="文本框 75"/>
           <p:cNvSpPr txBox="1"/>
           <p:nvPr/>
         </p:nvSpPr>
@@ -5038,35 +4808,29 @@
           <a:p>
             <a:pPr algn="ctr"/>
             <a:r>
-              <a:rPr lang="en-US" altLang="zh-CN" sz="2067" dirty="0">
-                <a:latin typeface="Times New Roman" panose="02020603050405020304" pitchFamily="18" charset="0"/>
-                <a:cs typeface="Times New Roman" panose="02020603050405020304" pitchFamily="18" charset="0"/>
+              <a:rPr lang="en-US" altLang="zh-CN" sz="2065" dirty="0">
+                <a:latin typeface="Times New Roman" panose="02020503050405090304" pitchFamily="18" charset="0"/>
+                <a:cs typeface="Times New Roman" panose="02020503050405090304" pitchFamily="18" charset="0"/>
               </a:rPr>
               <a:t>(c) </a:t>
             </a:r>
             <a:r>
-              <a:rPr lang="en-US" altLang="zh-CN" sz="2067" b="1" dirty="0">
-                <a:latin typeface="Times New Roman" panose="02020603050405020304" pitchFamily="18" charset="0"/>
-                <a:cs typeface="Times New Roman" panose="02020603050405020304" pitchFamily="18" charset="0"/>
+              <a:rPr lang="en-US" altLang="zh-CN" sz="2065" b="1" dirty="0">
+                <a:latin typeface="Times New Roman" panose="02020503050405090304" pitchFamily="18" charset="0"/>
+                <a:cs typeface="Times New Roman" panose="02020503050405090304" pitchFamily="18" charset="0"/>
               </a:rPr>
               <a:t>SLGAG</a:t>
             </a:r>
-            <a:endParaRPr lang="zh-CN" altLang="en-US" sz="2067" b="1" dirty="0">
-              <a:latin typeface="Times New Roman" panose="02020603050405020304" pitchFamily="18" charset="0"/>
-              <a:cs typeface="Times New Roman" panose="02020603050405020304" pitchFamily="18" charset="0"/>
+            <a:endParaRPr lang="zh-CN" altLang="en-US" sz="2065" b="1" dirty="0">
+              <a:latin typeface="Times New Roman" panose="02020503050405090304" pitchFamily="18" charset="0"/>
+              <a:cs typeface="Times New Roman" panose="02020503050405090304" pitchFamily="18" charset="0"/>
             </a:endParaRPr>
           </a:p>
         </p:txBody>
       </p:sp>
       <p:sp>
         <p:nvSpPr>
-          <p:cNvPr id="77" name="流程图: 汇总连接 76">
-            <a:extLst>
-              <a:ext uri="{FF2B5EF4-FFF2-40B4-BE49-F238E27FC236}">
-                <a16:creationId xmlns:a16="http://schemas.microsoft.com/office/drawing/2014/main" id="{51026CC8-972C-4182-9BC3-890284510261}"/>
-              </a:ext>
-            </a:extLst>
-          </p:cNvPr>
+          <p:cNvPr id="77" name="流程图: 汇总连接 76"/>
           <p:cNvSpPr/>
           <p:nvPr/>
         </p:nvSpPr>
@@ -5108,19 +4872,13 @@
           <a:lstStyle/>
           <a:p>
             <a:pPr algn="ctr"/>
-            <a:endParaRPr lang="zh-CN" altLang="en-US" sz="1861"/>
-          </a:p>
-        </p:txBody>
-      </p:sp>
-      <p:sp>
-        <p:nvSpPr>
-          <p:cNvPr id="82" name="矩形: 圆角 81">
-            <a:extLst>
-              <a:ext uri="{FF2B5EF4-FFF2-40B4-BE49-F238E27FC236}">
-                <a16:creationId xmlns:a16="http://schemas.microsoft.com/office/drawing/2014/main" id="{A6B4BE96-578D-47CB-B3CB-AF73C46672EF}"/>
-              </a:ext>
-            </a:extLst>
-          </p:cNvPr>
+            <a:endParaRPr lang="zh-CN" altLang="en-US" sz="1860"/>
+          </a:p>
+        </p:txBody>
+      </p:sp>
+      <p:sp>
+        <p:nvSpPr>
+          <p:cNvPr id="82" name="矩形: 圆角 81"/>
           <p:cNvSpPr/>
           <p:nvPr/>
         </p:nvSpPr>
@@ -5166,34 +4924,28 @@
           <a:p>
             <a:pPr algn="ctr"/>
             <a:r>
-              <a:rPr lang="en-US" altLang="zh-CN" sz="1241" dirty="0">
+              <a:rPr lang="en-US" altLang="zh-CN" sz="1240" dirty="0">
                 <a:solidFill>
                   <a:schemeClr val="tx1"/>
                 </a:solidFill>
-                <a:latin typeface="Times New Roman" panose="02020603050405020304" pitchFamily="18" charset="0"/>
-                <a:cs typeface="Times New Roman" panose="02020603050405020304" pitchFamily="18" charset="0"/>
+                <a:latin typeface="Times New Roman" panose="02020503050405090304" pitchFamily="18" charset="0"/>
+                <a:cs typeface="Times New Roman" panose="02020503050405090304" pitchFamily="18" charset="0"/>
               </a:rPr>
               <a:t>AMP </a:t>
             </a:r>
-            <a:endParaRPr lang="zh-CN" altLang="en-US" sz="1241" dirty="0">
+            <a:endParaRPr lang="zh-CN" altLang="en-US" sz="1240" dirty="0">
               <a:solidFill>
                 <a:schemeClr val="tx1"/>
               </a:solidFill>
-              <a:latin typeface="Times New Roman" panose="02020603050405020304" pitchFamily="18" charset="0"/>
-              <a:cs typeface="Times New Roman" panose="02020603050405020304" pitchFamily="18" charset="0"/>
+              <a:latin typeface="Times New Roman" panose="02020503050405090304" pitchFamily="18" charset="0"/>
+              <a:cs typeface="Times New Roman" panose="02020503050405090304" pitchFamily="18" charset="0"/>
             </a:endParaRPr>
           </a:p>
         </p:txBody>
       </p:sp>
       <p:sp>
         <p:nvSpPr>
-          <p:cNvPr id="83" name="矩形: 圆角 82">
-            <a:extLst>
-              <a:ext uri="{FF2B5EF4-FFF2-40B4-BE49-F238E27FC236}">
-                <a16:creationId xmlns:a16="http://schemas.microsoft.com/office/drawing/2014/main" id="{9779DFF5-3AFB-46A5-97E4-2A986F98FA52}"/>
-              </a:ext>
-            </a:extLst>
-          </p:cNvPr>
+          <p:cNvPr id="83" name="矩形: 圆角 82"/>
           <p:cNvSpPr/>
           <p:nvPr/>
         </p:nvSpPr>
@@ -5239,34 +4991,28 @@
           <a:p>
             <a:pPr algn="ctr"/>
             <a:r>
-              <a:rPr lang="en-US" altLang="zh-CN" sz="1137" dirty="0">
+              <a:rPr lang="en-US" altLang="zh-CN" sz="1135" dirty="0">
                 <a:solidFill>
                   <a:schemeClr val="tx1"/>
                 </a:solidFill>
-                <a:latin typeface="Times New Roman" panose="02020603050405020304" pitchFamily="18" charset="0"/>
-                <a:cs typeface="Times New Roman" panose="02020603050405020304" pitchFamily="18" charset="0"/>
+                <a:latin typeface="Times New Roman" panose="02020503050405090304" pitchFamily="18" charset="0"/>
+                <a:cs typeface="Times New Roman" panose="02020503050405090304" pitchFamily="18" charset="0"/>
               </a:rPr>
               <a:t>PWC C/r </a:t>
             </a:r>
-            <a:endParaRPr lang="zh-CN" altLang="en-US" sz="1137" dirty="0">
+            <a:endParaRPr lang="zh-CN" altLang="en-US" sz="1135" dirty="0">
               <a:solidFill>
                 <a:schemeClr val="tx1"/>
               </a:solidFill>
-              <a:latin typeface="Times New Roman" panose="02020603050405020304" pitchFamily="18" charset="0"/>
-              <a:cs typeface="Times New Roman" panose="02020603050405020304" pitchFamily="18" charset="0"/>
+              <a:latin typeface="Times New Roman" panose="02020503050405090304" pitchFamily="18" charset="0"/>
+              <a:cs typeface="Times New Roman" panose="02020503050405090304" pitchFamily="18" charset="0"/>
             </a:endParaRPr>
           </a:p>
         </p:txBody>
       </p:sp>
       <p:sp>
         <p:nvSpPr>
-          <p:cNvPr id="84" name="矩形: 圆角 83">
-            <a:extLst>
-              <a:ext uri="{FF2B5EF4-FFF2-40B4-BE49-F238E27FC236}">
-                <a16:creationId xmlns:a16="http://schemas.microsoft.com/office/drawing/2014/main" id="{FCD97BB5-8BF1-4320-B7A5-583EAB1AAFCE}"/>
-              </a:ext>
-            </a:extLst>
-          </p:cNvPr>
+          <p:cNvPr id="84" name="矩形: 圆角 83"/>
           <p:cNvSpPr/>
           <p:nvPr/>
         </p:nvSpPr>
@@ -5312,34 +5058,28 @@
           <a:p>
             <a:pPr algn="ctr"/>
             <a:r>
-              <a:rPr lang="en-US" altLang="zh-CN" sz="1241" dirty="0">
+              <a:rPr lang="en-US" altLang="zh-CN" sz="1240" dirty="0">
                 <a:solidFill>
                   <a:schemeClr val="tx1"/>
                 </a:solidFill>
-                <a:latin typeface="Times New Roman" panose="02020603050405020304" pitchFamily="18" charset="0"/>
-                <a:cs typeface="Times New Roman" panose="02020603050405020304" pitchFamily="18" charset="0"/>
+                <a:latin typeface="Times New Roman" panose="02020503050405090304" pitchFamily="18" charset="0"/>
+                <a:cs typeface="Times New Roman" panose="02020503050405090304" pitchFamily="18" charset="0"/>
               </a:rPr>
               <a:t>ReLU </a:t>
             </a:r>
-            <a:endParaRPr lang="zh-CN" altLang="en-US" sz="1241" dirty="0">
+            <a:endParaRPr lang="zh-CN" altLang="en-US" sz="1240" dirty="0">
               <a:solidFill>
                 <a:schemeClr val="tx1"/>
               </a:solidFill>
-              <a:latin typeface="Times New Roman" panose="02020603050405020304" pitchFamily="18" charset="0"/>
-              <a:cs typeface="Times New Roman" panose="02020603050405020304" pitchFamily="18" charset="0"/>
+              <a:latin typeface="Times New Roman" panose="02020503050405090304" pitchFamily="18" charset="0"/>
+              <a:cs typeface="Times New Roman" panose="02020503050405090304" pitchFamily="18" charset="0"/>
             </a:endParaRPr>
           </a:p>
         </p:txBody>
       </p:sp>
       <p:sp>
         <p:nvSpPr>
-          <p:cNvPr id="85" name="矩形: 圆角 84">
-            <a:extLst>
-              <a:ext uri="{FF2B5EF4-FFF2-40B4-BE49-F238E27FC236}">
-                <a16:creationId xmlns:a16="http://schemas.microsoft.com/office/drawing/2014/main" id="{D953F5D9-22DF-4AF6-99D0-26F78520D852}"/>
-              </a:ext>
-            </a:extLst>
-          </p:cNvPr>
+          <p:cNvPr id="85" name="矩形: 圆角 84"/>
           <p:cNvSpPr/>
           <p:nvPr/>
         </p:nvSpPr>
@@ -5385,34 +5125,28 @@
           <a:p>
             <a:pPr algn="ctr"/>
             <a:r>
-              <a:rPr lang="en-US" altLang="zh-CN" sz="1241" dirty="0">
+              <a:rPr lang="en-US" altLang="zh-CN" sz="1240" dirty="0">
                 <a:solidFill>
                   <a:schemeClr val="tx1"/>
                 </a:solidFill>
-                <a:latin typeface="Times New Roman" panose="02020603050405020304" pitchFamily="18" charset="0"/>
-                <a:cs typeface="Times New Roman" panose="02020603050405020304" pitchFamily="18" charset="0"/>
+                <a:latin typeface="Times New Roman" panose="02020503050405090304" pitchFamily="18" charset="0"/>
+                <a:cs typeface="Times New Roman" panose="02020503050405090304" pitchFamily="18" charset="0"/>
               </a:rPr>
               <a:t>PWC C </a:t>
             </a:r>
-            <a:endParaRPr lang="zh-CN" altLang="en-US" sz="1241" dirty="0">
+            <a:endParaRPr lang="zh-CN" altLang="en-US" sz="1240" dirty="0">
               <a:solidFill>
                 <a:schemeClr val="tx1"/>
               </a:solidFill>
-              <a:latin typeface="Times New Roman" panose="02020603050405020304" pitchFamily="18" charset="0"/>
-              <a:cs typeface="Times New Roman" panose="02020603050405020304" pitchFamily="18" charset="0"/>
+              <a:latin typeface="Times New Roman" panose="02020503050405090304" pitchFamily="18" charset="0"/>
+              <a:cs typeface="Times New Roman" panose="02020503050405090304" pitchFamily="18" charset="0"/>
             </a:endParaRPr>
           </a:p>
         </p:txBody>
       </p:sp>
       <p:sp>
         <p:nvSpPr>
-          <p:cNvPr id="86" name="矩形: 圆角 85">
-            <a:extLst>
-              <a:ext uri="{FF2B5EF4-FFF2-40B4-BE49-F238E27FC236}">
-                <a16:creationId xmlns:a16="http://schemas.microsoft.com/office/drawing/2014/main" id="{8F04BBDA-9071-408D-A804-271F75D9D8FD}"/>
-              </a:ext>
-            </a:extLst>
-          </p:cNvPr>
+          <p:cNvPr id="86" name="矩形: 圆角 85"/>
           <p:cNvSpPr/>
           <p:nvPr/>
         </p:nvSpPr>
@@ -5458,34 +5192,28 @@
           <a:p>
             <a:pPr algn="ctr"/>
             <a:r>
-              <a:rPr lang="en-US" altLang="zh-CN" sz="1241" dirty="0">
+              <a:rPr lang="en-US" altLang="zh-CN" sz="1240" dirty="0">
                 <a:solidFill>
                   <a:schemeClr val="tx1"/>
                 </a:solidFill>
-                <a:latin typeface="Times New Roman" panose="02020603050405020304" pitchFamily="18" charset="0"/>
-                <a:cs typeface="Times New Roman" panose="02020603050405020304" pitchFamily="18" charset="0"/>
+                <a:latin typeface="Times New Roman" panose="02020503050405090304" pitchFamily="18" charset="0"/>
+                <a:cs typeface="Times New Roman" panose="02020503050405090304" pitchFamily="18" charset="0"/>
               </a:rPr>
               <a:t>AAP </a:t>
             </a:r>
-            <a:endParaRPr lang="zh-CN" altLang="en-US" sz="1241" dirty="0">
+            <a:endParaRPr lang="zh-CN" altLang="en-US" sz="1240" dirty="0">
               <a:solidFill>
                 <a:schemeClr val="tx1"/>
               </a:solidFill>
-              <a:latin typeface="Times New Roman" panose="02020603050405020304" pitchFamily="18" charset="0"/>
-              <a:cs typeface="Times New Roman" panose="02020603050405020304" pitchFamily="18" charset="0"/>
+              <a:latin typeface="Times New Roman" panose="02020503050405090304" pitchFamily="18" charset="0"/>
+              <a:cs typeface="Times New Roman" panose="02020503050405090304" pitchFamily="18" charset="0"/>
             </a:endParaRPr>
           </a:p>
         </p:txBody>
       </p:sp>
       <p:sp>
         <p:nvSpPr>
-          <p:cNvPr id="87" name="矩形: 圆角 86">
-            <a:extLst>
-              <a:ext uri="{FF2B5EF4-FFF2-40B4-BE49-F238E27FC236}">
-                <a16:creationId xmlns:a16="http://schemas.microsoft.com/office/drawing/2014/main" id="{66DD2F48-ABB8-44B6-8023-E74AED1F5419}"/>
-              </a:ext>
-            </a:extLst>
-          </p:cNvPr>
+          <p:cNvPr id="87" name="矩形: 圆角 86"/>
           <p:cNvSpPr/>
           <p:nvPr/>
         </p:nvSpPr>
@@ -5531,34 +5259,28 @@
           <a:p>
             <a:pPr algn="ctr"/>
             <a:r>
-              <a:rPr lang="en-US" altLang="zh-CN" sz="1137" dirty="0">
+              <a:rPr lang="en-US" altLang="zh-CN" sz="1135" dirty="0">
                 <a:solidFill>
                   <a:schemeClr val="tx1"/>
                 </a:solidFill>
-                <a:latin typeface="Times New Roman" panose="02020603050405020304" pitchFamily="18" charset="0"/>
-                <a:cs typeface="Times New Roman" panose="02020603050405020304" pitchFamily="18" charset="0"/>
+                <a:latin typeface="Times New Roman" panose="02020503050405090304" pitchFamily="18" charset="0"/>
+                <a:cs typeface="Times New Roman" panose="02020503050405090304" pitchFamily="18" charset="0"/>
               </a:rPr>
               <a:t>PWC C/r </a:t>
             </a:r>
-            <a:endParaRPr lang="zh-CN" altLang="en-US" sz="1137" dirty="0">
+            <a:endParaRPr lang="zh-CN" altLang="en-US" sz="1135" dirty="0">
               <a:solidFill>
                 <a:schemeClr val="tx1"/>
               </a:solidFill>
-              <a:latin typeface="Times New Roman" panose="02020603050405020304" pitchFamily="18" charset="0"/>
-              <a:cs typeface="Times New Roman" panose="02020603050405020304" pitchFamily="18" charset="0"/>
+              <a:latin typeface="Times New Roman" panose="02020503050405090304" pitchFamily="18" charset="0"/>
+              <a:cs typeface="Times New Roman" panose="02020503050405090304" pitchFamily="18" charset="0"/>
             </a:endParaRPr>
           </a:p>
         </p:txBody>
       </p:sp>
       <p:sp>
         <p:nvSpPr>
-          <p:cNvPr id="88" name="矩形: 圆角 87">
-            <a:extLst>
-              <a:ext uri="{FF2B5EF4-FFF2-40B4-BE49-F238E27FC236}">
-                <a16:creationId xmlns:a16="http://schemas.microsoft.com/office/drawing/2014/main" id="{34D96305-1CA2-4D0F-A858-C15DD775F87F}"/>
-              </a:ext>
-            </a:extLst>
-          </p:cNvPr>
+          <p:cNvPr id="88" name="矩形: 圆角 87"/>
           <p:cNvSpPr/>
           <p:nvPr/>
         </p:nvSpPr>
@@ -5604,34 +5326,28 @@
           <a:p>
             <a:pPr algn="ctr"/>
             <a:r>
-              <a:rPr lang="en-US" altLang="zh-CN" sz="1241" dirty="0">
+              <a:rPr lang="en-US" altLang="zh-CN" sz="1240" dirty="0">
                 <a:solidFill>
                   <a:schemeClr val="tx1"/>
                 </a:solidFill>
-                <a:latin typeface="Times New Roman" panose="02020603050405020304" pitchFamily="18" charset="0"/>
-                <a:cs typeface="Times New Roman" panose="02020603050405020304" pitchFamily="18" charset="0"/>
+                <a:latin typeface="Times New Roman" panose="02020503050405090304" pitchFamily="18" charset="0"/>
+                <a:cs typeface="Times New Roman" panose="02020503050405090304" pitchFamily="18" charset="0"/>
               </a:rPr>
               <a:t>ReLU </a:t>
             </a:r>
-            <a:endParaRPr lang="zh-CN" altLang="en-US" sz="1241" dirty="0">
+            <a:endParaRPr lang="zh-CN" altLang="en-US" sz="1240" dirty="0">
               <a:solidFill>
                 <a:schemeClr val="tx1"/>
               </a:solidFill>
-              <a:latin typeface="Times New Roman" panose="02020603050405020304" pitchFamily="18" charset="0"/>
-              <a:cs typeface="Times New Roman" panose="02020603050405020304" pitchFamily="18" charset="0"/>
+              <a:latin typeface="Times New Roman" panose="02020503050405090304" pitchFamily="18" charset="0"/>
+              <a:cs typeface="Times New Roman" panose="02020503050405090304" pitchFamily="18" charset="0"/>
             </a:endParaRPr>
           </a:p>
         </p:txBody>
       </p:sp>
       <p:sp>
         <p:nvSpPr>
-          <p:cNvPr id="89" name="矩形: 圆角 88">
-            <a:extLst>
-              <a:ext uri="{FF2B5EF4-FFF2-40B4-BE49-F238E27FC236}">
-                <a16:creationId xmlns:a16="http://schemas.microsoft.com/office/drawing/2014/main" id="{3B1967F4-6974-4A53-B960-1F7F46EC01F3}"/>
-              </a:ext>
-            </a:extLst>
-          </p:cNvPr>
+          <p:cNvPr id="89" name="矩形: 圆角 88"/>
           <p:cNvSpPr/>
           <p:nvPr/>
         </p:nvSpPr>
@@ -5677,34 +5393,28 @@
           <a:p>
             <a:pPr algn="ctr"/>
             <a:r>
-              <a:rPr lang="en-US" altLang="zh-CN" sz="1241" dirty="0">
+              <a:rPr lang="en-US" altLang="zh-CN" sz="1240" dirty="0">
                 <a:solidFill>
                   <a:schemeClr val="tx1"/>
                 </a:solidFill>
-                <a:latin typeface="Times New Roman" panose="02020603050405020304" pitchFamily="18" charset="0"/>
-                <a:cs typeface="Times New Roman" panose="02020603050405020304" pitchFamily="18" charset="0"/>
+                <a:latin typeface="Times New Roman" panose="02020503050405090304" pitchFamily="18" charset="0"/>
+                <a:cs typeface="Times New Roman" panose="02020503050405090304" pitchFamily="18" charset="0"/>
               </a:rPr>
               <a:t>PWC C </a:t>
             </a:r>
-            <a:endParaRPr lang="zh-CN" altLang="en-US" sz="1241" dirty="0">
+            <a:endParaRPr lang="zh-CN" altLang="en-US" sz="1240" dirty="0">
               <a:solidFill>
                 <a:schemeClr val="tx1"/>
               </a:solidFill>
-              <a:latin typeface="Times New Roman" panose="02020603050405020304" pitchFamily="18" charset="0"/>
-              <a:cs typeface="Times New Roman" panose="02020603050405020304" pitchFamily="18" charset="0"/>
+              <a:latin typeface="Times New Roman" panose="02020503050405090304" pitchFamily="18" charset="0"/>
+              <a:cs typeface="Times New Roman" panose="02020503050405090304" pitchFamily="18" charset="0"/>
             </a:endParaRPr>
           </a:p>
         </p:txBody>
       </p:sp>
       <p:sp>
         <p:nvSpPr>
-          <p:cNvPr id="90" name="矩形: 圆角 89">
-            <a:extLst>
-              <a:ext uri="{FF2B5EF4-FFF2-40B4-BE49-F238E27FC236}">
-                <a16:creationId xmlns:a16="http://schemas.microsoft.com/office/drawing/2014/main" id="{0DC468E2-A36B-4D6D-A98A-D2123E2339E0}"/>
-              </a:ext>
-            </a:extLst>
-          </p:cNvPr>
+          <p:cNvPr id="90" name="矩形: 圆角 89"/>
           <p:cNvSpPr/>
           <p:nvPr/>
         </p:nvSpPr>
@@ -5750,34 +5460,28 @@
           <a:p>
             <a:pPr algn="ctr"/>
             <a:r>
-              <a:rPr lang="en-US" altLang="zh-CN" sz="1241" dirty="0">
+              <a:rPr lang="en-US" altLang="zh-CN" sz="1240" dirty="0">
                 <a:solidFill>
                   <a:schemeClr val="tx1"/>
                 </a:solidFill>
-                <a:latin typeface="Times New Roman" panose="02020603050405020304" pitchFamily="18" charset="0"/>
-                <a:cs typeface="Times New Roman" panose="02020603050405020304" pitchFamily="18" charset="0"/>
+                <a:latin typeface="Times New Roman" panose="02020503050405090304" pitchFamily="18" charset="0"/>
+                <a:cs typeface="Times New Roman" panose="02020503050405090304" pitchFamily="18" charset="0"/>
               </a:rPr>
               <a:t>Sigmoid </a:t>
             </a:r>
-            <a:endParaRPr lang="zh-CN" altLang="en-US" sz="1241" dirty="0">
+            <a:endParaRPr lang="zh-CN" altLang="en-US" sz="1240" dirty="0">
               <a:solidFill>
                 <a:schemeClr val="tx1"/>
               </a:solidFill>
-              <a:latin typeface="Times New Roman" panose="02020603050405020304" pitchFamily="18" charset="0"/>
-              <a:cs typeface="Times New Roman" panose="02020603050405020304" pitchFamily="18" charset="0"/>
+              <a:latin typeface="Times New Roman" panose="02020503050405090304" pitchFamily="18" charset="0"/>
+              <a:cs typeface="Times New Roman" panose="02020503050405090304" pitchFamily="18" charset="0"/>
             </a:endParaRPr>
           </a:p>
         </p:txBody>
       </p:sp>
       <p:sp>
         <p:nvSpPr>
-          <p:cNvPr id="91" name="流程图: 汇总连接 90">
-            <a:extLst>
-              <a:ext uri="{FF2B5EF4-FFF2-40B4-BE49-F238E27FC236}">
-                <a16:creationId xmlns:a16="http://schemas.microsoft.com/office/drawing/2014/main" id="{2DA0488C-0145-4845-9374-B0714A08AE53}"/>
-              </a:ext>
-            </a:extLst>
-          </p:cNvPr>
+          <p:cNvPr id="91" name="流程图: 汇总连接 90"/>
           <p:cNvSpPr/>
           <p:nvPr/>
         </p:nvSpPr>
@@ -5819,19 +5523,13 @@
           <a:lstStyle/>
           <a:p>
             <a:pPr algn="ctr"/>
-            <a:endParaRPr lang="zh-CN" altLang="en-US" sz="1861" dirty="0"/>
-          </a:p>
-        </p:txBody>
-      </p:sp>
-      <p:sp>
-        <p:nvSpPr>
-          <p:cNvPr id="92" name="流程图: 或者 91">
-            <a:extLst>
-              <a:ext uri="{FF2B5EF4-FFF2-40B4-BE49-F238E27FC236}">
-                <a16:creationId xmlns:a16="http://schemas.microsoft.com/office/drawing/2014/main" id="{8162FA3C-CFE5-43D0-9ED0-FB3302F59990}"/>
-              </a:ext>
-            </a:extLst>
-          </p:cNvPr>
+            <a:endParaRPr lang="zh-CN" altLang="en-US" sz="1860" dirty="0"/>
+          </a:p>
+        </p:txBody>
+      </p:sp>
+      <p:sp>
+        <p:nvSpPr>
+          <p:cNvPr id="92" name="流程图: 或者 91"/>
           <p:cNvSpPr/>
           <p:nvPr/>
         </p:nvSpPr>
@@ -5873,19 +5571,13 @@
           <a:lstStyle/>
           <a:p>
             <a:pPr algn="ctr"/>
-            <a:endParaRPr lang="zh-CN" altLang="en-US" sz="1861"/>
-          </a:p>
-        </p:txBody>
-      </p:sp>
-      <p:sp>
-        <p:nvSpPr>
-          <p:cNvPr id="100" name="矩形: 圆角 99">
-            <a:extLst>
-              <a:ext uri="{FF2B5EF4-FFF2-40B4-BE49-F238E27FC236}">
-                <a16:creationId xmlns:a16="http://schemas.microsoft.com/office/drawing/2014/main" id="{8BE7BF95-CB19-4518-8837-A98A058DCA7C}"/>
-              </a:ext>
-            </a:extLst>
-          </p:cNvPr>
+            <a:endParaRPr lang="zh-CN" altLang="en-US" sz="1860"/>
+          </a:p>
+        </p:txBody>
+      </p:sp>
+      <p:sp>
+        <p:nvSpPr>
+          <p:cNvPr id="100" name="矩形: 圆角 99"/>
           <p:cNvSpPr/>
           <p:nvPr/>
         </p:nvSpPr>
@@ -5931,34 +5623,28 @@
           <a:p>
             <a:pPr algn="ctr"/>
             <a:r>
-              <a:rPr lang="en-US" altLang="zh-CN" sz="1241" dirty="0">
+              <a:rPr lang="en-US" altLang="zh-CN" sz="1240" dirty="0">
                 <a:solidFill>
                   <a:schemeClr val="tx1"/>
                 </a:solidFill>
-                <a:latin typeface="Times New Roman" panose="02020603050405020304" pitchFamily="18" charset="0"/>
-                <a:cs typeface="Times New Roman" panose="02020603050405020304" pitchFamily="18" charset="0"/>
+                <a:latin typeface="Times New Roman" panose="02020503050405090304" pitchFamily="18" charset="0"/>
+                <a:cs typeface="Times New Roman" panose="02020503050405090304" pitchFamily="18" charset="0"/>
               </a:rPr>
               <a:t>BN </a:t>
             </a:r>
-            <a:endParaRPr lang="zh-CN" altLang="en-US" sz="1241" dirty="0">
+            <a:endParaRPr lang="zh-CN" altLang="en-US" sz="1240" dirty="0">
               <a:solidFill>
                 <a:schemeClr val="tx1"/>
               </a:solidFill>
-              <a:latin typeface="Times New Roman" panose="02020603050405020304" pitchFamily="18" charset="0"/>
-              <a:cs typeface="Times New Roman" panose="02020603050405020304" pitchFamily="18" charset="0"/>
+              <a:latin typeface="Times New Roman" panose="02020503050405090304" pitchFamily="18" charset="0"/>
+              <a:cs typeface="Times New Roman" panose="02020503050405090304" pitchFamily="18" charset="0"/>
             </a:endParaRPr>
           </a:p>
         </p:txBody>
       </p:sp>
       <p:sp>
         <p:nvSpPr>
-          <p:cNvPr id="101" name="矩形: 圆角 100">
-            <a:extLst>
-              <a:ext uri="{FF2B5EF4-FFF2-40B4-BE49-F238E27FC236}">
-                <a16:creationId xmlns:a16="http://schemas.microsoft.com/office/drawing/2014/main" id="{9A187EBC-AD49-4669-B79E-101EE4C496C4}"/>
-              </a:ext>
-            </a:extLst>
-          </p:cNvPr>
+          <p:cNvPr id="101" name="矩形: 圆角 100"/>
           <p:cNvSpPr/>
           <p:nvPr/>
         </p:nvSpPr>
@@ -6004,34 +5690,28 @@
           <a:p>
             <a:pPr algn="ctr"/>
             <a:r>
-              <a:rPr lang="en-US" altLang="zh-CN" sz="1241" dirty="0">
+              <a:rPr lang="en-US" altLang="zh-CN" sz="1240" dirty="0">
                 <a:solidFill>
                   <a:schemeClr val="tx1"/>
                 </a:solidFill>
-                <a:latin typeface="Times New Roman" panose="02020603050405020304" pitchFamily="18" charset="0"/>
-                <a:cs typeface="Times New Roman" panose="02020603050405020304" pitchFamily="18" charset="0"/>
+                <a:latin typeface="Times New Roman" panose="02020503050405090304" pitchFamily="18" charset="0"/>
+                <a:cs typeface="Times New Roman" panose="02020503050405090304" pitchFamily="18" charset="0"/>
               </a:rPr>
               <a:t>Conv 1x1 </a:t>
             </a:r>
-            <a:endParaRPr lang="zh-CN" altLang="en-US" sz="1241" dirty="0">
+            <a:endParaRPr lang="zh-CN" altLang="en-US" sz="1240" dirty="0">
               <a:solidFill>
                 <a:schemeClr val="tx1"/>
               </a:solidFill>
-              <a:latin typeface="Times New Roman" panose="02020603050405020304" pitchFamily="18" charset="0"/>
-              <a:cs typeface="Times New Roman" panose="02020603050405020304" pitchFamily="18" charset="0"/>
+              <a:latin typeface="Times New Roman" panose="02020503050405090304" pitchFamily="18" charset="0"/>
+              <a:cs typeface="Times New Roman" panose="02020503050405090304" pitchFamily="18" charset="0"/>
             </a:endParaRPr>
           </a:p>
         </p:txBody>
       </p:sp>
       <p:sp>
         <p:nvSpPr>
-          <p:cNvPr id="102" name="矩形: 圆角 101">
-            <a:extLst>
-              <a:ext uri="{FF2B5EF4-FFF2-40B4-BE49-F238E27FC236}">
-                <a16:creationId xmlns:a16="http://schemas.microsoft.com/office/drawing/2014/main" id="{6E998983-872C-4398-916D-7FFD391CF58E}"/>
-              </a:ext>
-            </a:extLst>
-          </p:cNvPr>
+          <p:cNvPr id="102" name="矩形: 圆角 101"/>
           <p:cNvSpPr/>
           <p:nvPr/>
         </p:nvSpPr>
@@ -6077,37 +5757,29 @@
           <a:p>
             <a:pPr algn="ctr"/>
             <a:r>
-              <a:rPr lang="en-US" altLang="zh-CN" sz="1241" dirty="0">
+              <a:rPr lang="en-US" altLang="zh-CN" sz="1240" dirty="0">
                 <a:solidFill>
                   <a:schemeClr val="tx1"/>
                 </a:solidFill>
-                <a:latin typeface="Times New Roman" panose="02020603050405020304" pitchFamily="18" charset="0"/>
-                <a:cs typeface="Times New Roman" panose="02020603050405020304" pitchFamily="18" charset="0"/>
+                <a:latin typeface="Times New Roman" panose="02020503050405090304" pitchFamily="18" charset="0"/>
+                <a:cs typeface="Times New Roman" panose="02020503050405090304" pitchFamily="18" charset="0"/>
               </a:rPr>
               <a:t>ReLU </a:t>
             </a:r>
-            <a:endParaRPr lang="zh-CN" altLang="en-US" sz="1241" dirty="0">
+            <a:endParaRPr lang="zh-CN" altLang="en-US" sz="1240" dirty="0">
               <a:solidFill>
                 <a:schemeClr val="tx1"/>
               </a:solidFill>
-              <a:latin typeface="Times New Roman" panose="02020603050405020304" pitchFamily="18" charset="0"/>
-              <a:cs typeface="Times New Roman" panose="02020603050405020304" pitchFamily="18" charset="0"/>
+              <a:latin typeface="Times New Roman" panose="02020503050405090304" pitchFamily="18" charset="0"/>
+              <a:cs typeface="Times New Roman" panose="02020503050405090304" pitchFamily="18" charset="0"/>
             </a:endParaRPr>
           </a:p>
         </p:txBody>
       </p:sp>
       <p:cxnSp>
         <p:nvCxnSpPr>
-          <p:cNvPr id="103" name="直接连接符 102">
-            <a:extLst>
-              <a:ext uri="{FF2B5EF4-FFF2-40B4-BE49-F238E27FC236}">
-                <a16:creationId xmlns:a16="http://schemas.microsoft.com/office/drawing/2014/main" id="{F877E0B2-8BEF-4C32-AA5F-586DB0C9C3B0}"/>
-              </a:ext>
-            </a:extLst>
-          </p:cNvPr>
-          <p:cNvCxnSpPr>
-            <a:cxnSpLocks/>
-          </p:cNvCxnSpPr>
+          <p:cNvPr id="103" name="直接连接符 102"/>
+          <p:cNvCxnSpPr/>
           <p:nvPr/>
         </p:nvCxnSpPr>
         <p:spPr>
@@ -6141,13 +5813,7 @@
       </p:cxnSp>
       <p:sp>
         <p:nvSpPr>
-          <p:cNvPr id="104" name="文本框 103">
-            <a:extLst>
-              <a:ext uri="{FF2B5EF4-FFF2-40B4-BE49-F238E27FC236}">
-                <a16:creationId xmlns:a16="http://schemas.microsoft.com/office/drawing/2014/main" id="{418CF1EC-4A8B-4EC9-8BD6-375C77C4ACC7}"/>
-              </a:ext>
-            </a:extLst>
-          </p:cNvPr>
+          <p:cNvPr id="104" name="文本框 103"/>
           <p:cNvSpPr txBox="1"/>
           <p:nvPr/>
         </p:nvSpPr>
@@ -6169,35 +5835,29 @@
           <a:p>
             <a:pPr algn="ctr"/>
             <a:r>
-              <a:rPr lang="en-US" altLang="zh-CN" sz="1654" dirty="0">
-                <a:latin typeface="Times New Roman" panose="02020603050405020304" pitchFamily="18" charset="0"/>
-                <a:cs typeface="Times New Roman" panose="02020603050405020304" pitchFamily="18" charset="0"/>
+              <a:rPr lang="en-US" altLang="zh-CN" sz="1655" dirty="0">
+                <a:latin typeface="Times New Roman" panose="02020503050405090304" pitchFamily="18" charset="0"/>
+                <a:cs typeface="Times New Roman" panose="02020503050405090304" pitchFamily="18" charset="0"/>
               </a:rPr>
               <a:t>(f) </a:t>
             </a:r>
             <a:r>
-              <a:rPr lang="en-US" altLang="zh-CN" sz="1654" b="1" dirty="0">
-                <a:latin typeface="Times New Roman" panose="02020603050405020304" pitchFamily="18" charset="0"/>
-                <a:cs typeface="Times New Roman" panose="02020603050405020304" pitchFamily="18" charset="0"/>
+              <a:rPr lang="en-US" altLang="zh-CN" sz="1655" b="1" dirty="0">
+                <a:latin typeface="Times New Roman" panose="02020503050405090304" pitchFamily="18" charset="0"/>
+                <a:cs typeface="Times New Roman" panose="02020503050405090304" pitchFamily="18" charset="0"/>
               </a:rPr>
               <a:t>CA</a:t>
             </a:r>
-            <a:endParaRPr lang="zh-CN" altLang="en-US" sz="1654" b="1" dirty="0">
-              <a:latin typeface="Times New Roman" panose="02020603050405020304" pitchFamily="18" charset="0"/>
-              <a:cs typeface="Times New Roman" panose="02020603050405020304" pitchFamily="18" charset="0"/>
+            <a:endParaRPr lang="zh-CN" altLang="en-US" sz="1655" b="1" dirty="0">
+              <a:latin typeface="Times New Roman" panose="02020503050405090304" pitchFamily="18" charset="0"/>
+              <a:cs typeface="Times New Roman" panose="02020503050405090304" pitchFamily="18" charset="0"/>
             </a:endParaRPr>
           </a:p>
         </p:txBody>
       </p:sp>
       <p:sp>
         <p:nvSpPr>
-          <p:cNvPr id="105" name="矩形: 圆角 104">
-            <a:extLst>
-              <a:ext uri="{FF2B5EF4-FFF2-40B4-BE49-F238E27FC236}">
-                <a16:creationId xmlns:a16="http://schemas.microsoft.com/office/drawing/2014/main" id="{18F23A9C-08E9-42B0-A76E-2100FC0E8A0E}"/>
-              </a:ext>
-            </a:extLst>
-          </p:cNvPr>
+          <p:cNvPr id="105" name="矩形: 圆角 104"/>
           <p:cNvSpPr/>
           <p:nvPr/>
         </p:nvSpPr>
@@ -6247,8 +5907,8 @@
                 <a:solidFill>
                   <a:schemeClr val="tx1"/>
                 </a:solidFill>
-                <a:latin typeface="Times New Roman" panose="02020603050405020304" pitchFamily="18" charset="0"/>
-                <a:cs typeface="Times New Roman" panose="02020603050405020304" pitchFamily="18" charset="0"/>
+                <a:latin typeface="Times New Roman" panose="02020503050405090304" pitchFamily="18" charset="0"/>
+                <a:cs typeface="Times New Roman" panose="02020503050405090304" pitchFamily="18" charset="0"/>
               </a:rPr>
               <a:t>Channel Max</a:t>
             </a:r>
@@ -6256,21 +5916,15 @@
               <a:solidFill>
                 <a:schemeClr val="tx1"/>
               </a:solidFill>
-              <a:latin typeface="Times New Roman" panose="02020603050405020304" pitchFamily="18" charset="0"/>
-              <a:cs typeface="Times New Roman" panose="02020603050405020304" pitchFamily="18" charset="0"/>
+              <a:latin typeface="Times New Roman" panose="02020503050405090304" pitchFamily="18" charset="0"/>
+              <a:cs typeface="Times New Roman" panose="02020503050405090304" pitchFamily="18" charset="0"/>
             </a:endParaRPr>
           </a:p>
         </p:txBody>
       </p:sp>
       <p:sp>
         <p:nvSpPr>
-          <p:cNvPr id="106" name="矩形: 圆角 105">
-            <a:extLst>
-              <a:ext uri="{FF2B5EF4-FFF2-40B4-BE49-F238E27FC236}">
-                <a16:creationId xmlns:a16="http://schemas.microsoft.com/office/drawing/2014/main" id="{0BB043A0-5084-4C6C-998A-5087013CFCCB}"/>
-              </a:ext>
-            </a:extLst>
-          </p:cNvPr>
+          <p:cNvPr id="106" name="矩形: 圆角 105"/>
           <p:cNvSpPr/>
           <p:nvPr/>
         </p:nvSpPr>
@@ -6320,8 +5974,8 @@
                 <a:solidFill>
                   <a:schemeClr val="tx1"/>
                 </a:solidFill>
-                <a:latin typeface="Times New Roman" panose="02020603050405020304" pitchFamily="18" charset="0"/>
-                <a:cs typeface="Times New Roman" panose="02020603050405020304" pitchFamily="18" charset="0"/>
+                <a:latin typeface="Times New Roman" panose="02020503050405090304" pitchFamily="18" charset="0"/>
+                <a:cs typeface="Times New Roman" panose="02020503050405090304" pitchFamily="18" charset="0"/>
               </a:rPr>
               <a:t>Channel Average</a:t>
             </a:r>
@@ -6329,21 +5983,15 @@
               <a:solidFill>
                 <a:schemeClr val="tx1"/>
               </a:solidFill>
-              <a:latin typeface="Times New Roman" panose="02020603050405020304" pitchFamily="18" charset="0"/>
-              <a:cs typeface="Times New Roman" panose="02020603050405020304" pitchFamily="18" charset="0"/>
+              <a:latin typeface="Times New Roman" panose="02020503050405090304" pitchFamily="18" charset="0"/>
+              <a:cs typeface="Times New Roman" panose="02020503050405090304" pitchFamily="18" charset="0"/>
             </a:endParaRPr>
           </a:p>
         </p:txBody>
       </p:sp>
       <p:sp>
         <p:nvSpPr>
-          <p:cNvPr id="107" name="矩形: 圆角 106">
-            <a:extLst>
-              <a:ext uri="{FF2B5EF4-FFF2-40B4-BE49-F238E27FC236}">
-                <a16:creationId xmlns:a16="http://schemas.microsoft.com/office/drawing/2014/main" id="{62C11612-3DFC-4841-A767-3A678A46F191}"/>
-              </a:ext>
-            </a:extLst>
-          </p:cNvPr>
+          <p:cNvPr id="107" name="矩形: 圆角 106"/>
           <p:cNvSpPr/>
           <p:nvPr/>
         </p:nvSpPr>
@@ -6389,34 +6037,28 @@
           <a:p>
             <a:pPr algn="ctr"/>
             <a:r>
-              <a:rPr lang="en-US" altLang="zh-CN" sz="1036" dirty="0">
+              <a:rPr lang="en-US" altLang="zh-CN" sz="1035" dirty="0">
                 <a:solidFill>
                   <a:schemeClr val="tx1"/>
                 </a:solidFill>
-                <a:latin typeface="Times New Roman" panose="02020603050405020304" pitchFamily="18" charset="0"/>
-                <a:cs typeface="Times New Roman" panose="02020603050405020304" pitchFamily="18" charset="0"/>
+                <a:latin typeface="Times New Roman" panose="02020503050405090304" pitchFamily="18" charset="0"/>
+                <a:cs typeface="Times New Roman" panose="02020503050405090304" pitchFamily="18" charset="0"/>
               </a:rPr>
               <a:t>LKC 7x7 Pad:3 </a:t>
             </a:r>
-            <a:endParaRPr lang="zh-CN" altLang="en-US" sz="1036" dirty="0">
+            <a:endParaRPr lang="zh-CN" altLang="en-US" sz="1035" dirty="0">
               <a:solidFill>
                 <a:schemeClr val="tx1"/>
               </a:solidFill>
-              <a:latin typeface="Times New Roman" panose="02020603050405020304" pitchFamily="18" charset="0"/>
-              <a:cs typeface="Times New Roman" panose="02020603050405020304" pitchFamily="18" charset="0"/>
+              <a:latin typeface="Times New Roman" panose="02020503050405090304" pitchFamily="18" charset="0"/>
+              <a:cs typeface="Times New Roman" panose="02020503050405090304" pitchFamily="18" charset="0"/>
             </a:endParaRPr>
           </a:p>
         </p:txBody>
       </p:sp>
       <p:sp>
         <p:nvSpPr>
-          <p:cNvPr id="108" name="椭圆 107">
-            <a:extLst>
-              <a:ext uri="{FF2B5EF4-FFF2-40B4-BE49-F238E27FC236}">
-                <a16:creationId xmlns:a16="http://schemas.microsoft.com/office/drawing/2014/main" id="{CB856D64-B2D6-414A-965E-0BA596AEE047}"/>
-              </a:ext>
-            </a:extLst>
-          </p:cNvPr>
+          <p:cNvPr id="108" name="椭圆 107"/>
           <p:cNvSpPr/>
           <p:nvPr/>
         </p:nvSpPr>
@@ -6459,14 +6101,14 @@
           <a:p>
             <a:pPr algn="ctr"/>
             <a:r>
-              <a:rPr lang="en-US" altLang="zh-CN" sz="1861" dirty="0">
+              <a:rPr lang="en-US" altLang="zh-CN" sz="1860" dirty="0">
                 <a:solidFill>
                   <a:schemeClr val="tx1"/>
                 </a:solidFill>
               </a:rPr>
               <a:t>c</a:t>
             </a:r>
-            <a:endParaRPr lang="zh-CN" altLang="en-US" sz="1861" dirty="0">
+            <a:endParaRPr lang="zh-CN" altLang="en-US" sz="1860" dirty="0">
               <a:solidFill>
                 <a:schemeClr val="tx1"/>
               </a:solidFill>
@@ -6476,13 +6118,7 @@
       </p:sp>
       <p:sp>
         <p:nvSpPr>
-          <p:cNvPr id="109" name="矩形: 圆角 108">
-            <a:extLst>
-              <a:ext uri="{FF2B5EF4-FFF2-40B4-BE49-F238E27FC236}">
-                <a16:creationId xmlns:a16="http://schemas.microsoft.com/office/drawing/2014/main" id="{FFC8AED7-22D5-4BF6-803E-C15EF8CC9717}"/>
-              </a:ext>
-            </a:extLst>
-          </p:cNvPr>
+          <p:cNvPr id="109" name="矩形: 圆角 108"/>
           <p:cNvSpPr/>
           <p:nvPr/>
         </p:nvSpPr>
@@ -6528,36 +6164,29 @@
           <a:p>
             <a:pPr algn="ctr"/>
             <a:r>
-              <a:rPr lang="en-US" altLang="zh-CN" sz="1241" dirty="0">
+              <a:rPr lang="en-US" altLang="zh-CN" sz="1240" dirty="0">
                 <a:solidFill>
                   <a:schemeClr val="tx1"/>
                 </a:solidFill>
-                <a:latin typeface="Times New Roman" panose="02020603050405020304" pitchFamily="18" charset="0"/>
-                <a:cs typeface="Times New Roman" panose="02020603050405020304" pitchFamily="18" charset="0"/>
+                <a:latin typeface="Times New Roman" panose="02020503050405090304" pitchFamily="18" charset="0"/>
+                <a:cs typeface="Times New Roman" panose="02020503050405090304" pitchFamily="18" charset="0"/>
               </a:rPr>
               <a:t>Sigmoid </a:t>
             </a:r>
-            <a:endParaRPr lang="zh-CN" altLang="en-US" sz="1241" dirty="0">
+            <a:endParaRPr lang="zh-CN" altLang="en-US" sz="1240" dirty="0">
               <a:solidFill>
                 <a:schemeClr val="tx1"/>
               </a:solidFill>
-              <a:latin typeface="Times New Roman" panose="02020603050405020304" pitchFamily="18" charset="0"/>
-              <a:cs typeface="Times New Roman" panose="02020603050405020304" pitchFamily="18" charset="0"/>
+              <a:latin typeface="Times New Roman" panose="02020503050405090304" pitchFamily="18" charset="0"/>
+              <a:cs typeface="Times New Roman" panose="02020503050405090304" pitchFamily="18" charset="0"/>
             </a:endParaRPr>
           </a:p>
         </p:txBody>
       </p:sp>
       <p:cxnSp>
         <p:nvCxnSpPr>
-          <p:cNvPr id="112" name="直接箭头连接符 111">
-            <a:extLst>
-              <a:ext uri="{FF2B5EF4-FFF2-40B4-BE49-F238E27FC236}">
-                <a16:creationId xmlns:a16="http://schemas.microsoft.com/office/drawing/2014/main" id="{0B206D8A-AB1E-4A65-BD02-5692E5B55F58}"/>
-              </a:ext>
-            </a:extLst>
-          </p:cNvPr>
+          <p:cNvPr id="112" name="直接箭头连接符 111"/>
           <p:cNvCxnSpPr>
-            <a:cxnSpLocks/>
             <a:stCxn id="108" idx="4"/>
             <a:endCxn id="107" idx="0"/>
           </p:cNvCxnSpPr>
@@ -6595,13 +6224,7 @@
       </p:cxnSp>
       <p:sp>
         <p:nvSpPr>
-          <p:cNvPr id="113" name="流程图: 汇总连接 112">
-            <a:extLst>
-              <a:ext uri="{FF2B5EF4-FFF2-40B4-BE49-F238E27FC236}">
-                <a16:creationId xmlns:a16="http://schemas.microsoft.com/office/drawing/2014/main" id="{76CE0791-F16B-41D2-9388-FA20F17D15F1}"/>
-              </a:ext>
-            </a:extLst>
-          </p:cNvPr>
+          <p:cNvPr id="113" name="流程图: 汇总连接 112"/>
           <p:cNvSpPr/>
           <p:nvPr/>
         </p:nvSpPr>
@@ -6643,21 +6266,14 @@
           <a:lstStyle/>
           <a:p>
             <a:pPr algn="ctr"/>
-            <a:endParaRPr lang="zh-CN" altLang="en-US" sz="1861" dirty="0"/>
+            <a:endParaRPr lang="zh-CN" altLang="en-US" sz="1860" dirty="0"/>
           </a:p>
         </p:txBody>
       </p:sp>
       <p:cxnSp>
         <p:nvCxnSpPr>
-          <p:cNvPr id="114" name="直接箭头连接符 113">
-            <a:extLst>
-              <a:ext uri="{FF2B5EF4-FFF2-40B4-BE49-F238E27FC236}">
-                <a16:creationId xmlns:a16="http://schemas.microsoft.com/office/drawing/2014/main" id="{12E3170E-8380-480B-92EB-24434037AAD0}"/>
-              </a:ext>
-            </a:extLst>
-          </p:cNvPr>
+          <p:cNvPr id="114" name="直接箭头连接符 113"/>
           <p:cNvCxnSpPr>
-            <a:cxnSpLocks/>
             <a:stCxn id="109" idx="2"/>
             <a:endCxn id="113" idx="0"/>
           </p:cNvCxnSpPr>
@@ -6695,15 +6311,8 @@
       </p:cxnSp>
       <p:cxnSp>
         <p:nvCxnSpPr>
-          <p:cNvPr id="117" name="连接符: 肘形 116">
-            <a:extLst>
-              <a:ext uri="{FF2B5EF4-FFF2-40B4-BE49-F238E27FC236}">
-                <a16:creationId xmlns:a16="http://schemas.microsoft.com/office/drawing/2014/main" id="{9E091A76-F6B8-487B-A1F6-EE7C1AE06D55}"/>
-              </a:ext>
-            </a:extLst>
-          </p:cNvPr>
+          <p:cNvPr id="117" name="连接符: 肘形 116"/>
           <p:cNvCxnSpPr>
-            <a:cxnSpLocks/>
             <a:stCxn id="106" idx="0"/>
             <a:endCxn id="113" idx="2"/>
           </p:cNvCxnSpPr>
@@ -6744,13 +6353,7 @@
       </p:cxnSp>
       <p:sp>
         <p:nvSpPr>
-          <p:cNvPr id="118" name="文本框 117">
-            <a:extLst>
-              <a:ext uri="{FF2B5EF4-FFF2-40B4-BE49-F238E27FC236}">
-                <a16:creationId xmlns:a16="http://schemas.microsoft.com/office/drawing/2014/main" id="{51DBBE1D-FC38-448B-B987-8A901C19492A}"/>
-              </a:ext>
-            </a:extLst>
-          </p:cNvPr>
+          <p:cNvPr id="118" name="文本框 117"/>
           <p:cNvSpPr txBox="1"/>
           <p:nvPr/>
         </p:nvSpPr>
@@ -6772,35 +6375,29 @@
           <a:p>
             <a:pPr algn="ctr"/>
             <a:r>
-              <a:rPr lang="en-US" altLang="zh-CN" sz="1654" dirty="0">
-                <a:latin typeface="Times New Roman" panose="02020603050405020304" pitchFamily="18" charset="0"/>
-                <a:cs typeface="Times New Roman" panose="02020603050405020304" pitchFamily="18" charset="0"/>
+              <a:rPr lang="en-US" altLang="zh-CN" sz="1655" dirty="0">
+                <a:latin typeface="Times New Roman" panose="02020503050405090304" pitchFamily="18" charset="0"/>
+                <a:cs typeface="Times New Roman" panose="02020503050405090304" pitchFamily="18" charset="0"/>
               </a:rPr>
               <a:t>(g) </a:t>
             </a:r>
             <a:r>
-              <a:rPr lang="en-US" altLang="zh-CN" sz="1654" b="1" dirty="0">
-                <a:latin typeface="Times New Roman" panose="02020603050405020304" pitchFamily="18" charset="0"/>
-                <a:cs typeface="Times New Roman" panose="02020603050405020304" pitchFamily="18" charset="0"/>
+              <a:rPr lang="en-US" altLang="zh-CN" sz="1655" b="1" dirty="0">
+                <a:latin typeface="Times New Roman" panose="02020503050405090304" pitchFamily="18" charset="0"/>
+                <a:cs typeface="Times New Roman" panose="02020503050405090304" pitchFamily="18" charset="0"/>
               </a:rPr>
               <a:t>SA</a:t>
             </a:r>
-            <a:endParaRPr lang="zh-CN" altLang="en-US" sz="1654" b="1" dirty="0">
-              <a:latin typeface="Times New Roman" panose="02020603050405020304" pitchFamily="18" charset="0"/>
-              <a:cs typeface="Times New Roman" panose="02020603050405020304" pitchFamily="18" charset="0"/>
+            <a:endParaRPr lang="zh-CN" altLang="en-US" sz="1655" b="1" dirty="0">
+              <a:latin typeface="Times New Roman" panose="02020503050405090304" pitchFamily="18" charset="0"/>
+              <a:cs typeface="Times New Roman" panose="02020503050405090304" pitchFamily="18" charset="0"/>
             </a:endParaRPr>
           </a:p>
         </p:txBody>
       </p:sp>
       <p:sp>
         <p:nvSpPr>
-          <p:cNvPr id="119" name="矩形: 圆角 118">
-            <a:extLst>
-              <a:ext uri="{FF2B5EF4-FFF2-40B4-BE49-F238E27FC236}">
-                <a16:creationId xmlns:a16="http://schemas.microsoft.com/office/drawing/2014/main" id="{F79F47FE-9D3F-4BB2-9520-F9C3602A06F5}"/>
-              </a:ext>
-            </a:extLst>
-          </p:cNvPr>
+          <p:cNvPr id="119" name="矩形: 圆角 118"/>
           <p:cNvSpPr/>
           <p:nvPr/>
         </p:nvSpPr>
@@ -6846,34 +6443,28 @@
           <a:p>
             <a:pPr algn="ctr"/>
             <a:r>
-              <a:rPr lang="en-US" altLang="zh-CN" sz="1241" dirty="0">
+              <a:rPr lang="en-US" altLang="zh-CN" sz="1240" dirty="0">
                 <a:solidFill>
                   <a:schemeClr val="tx1"/>
                 </a:solidFill>
-                <a:latin typeface="Times New Roman" panose="02020603050405020304" pitchFamily="18" charset="0"/>
-                <a:cs typeface="Times New Roman" panose="02020603050405020304" pitchFamily="18" charset="0"/>
+                <a:latin typeface="Times New Roman" panose="02020503050405090304" pitchFamily="18" charset="0"/>
+                <a:cs typeface="Times New Roman" panose="02020503050405090304" pitchFamily="18" charset="0"/>
               </a:rPr>
               <a:t>SC</a:t>
             </a:r>
-            <a:endParaRPr lang="zh-CN" altLang="en-US" sz="1241" dirty="0">
+            <a:endParaRPr lang="zh-CN" altLang="en-US" sz="1240" dirty="0">
               <a:solidFill>
                 <a:schemeClr val="tx1"/>
               </a:solidFill>
-              <a:latin typeface="Times New Roman" panose="02020603050405020304" pitchFamily="18" charset="0"/>
-              <a:cs typeface="Times New Roman" panose="02020603050405020304" pitchFamily="18" charset="0"/>
+              <a:latin typeface="Times New Roman" panose="02020503050405090304" pitchFamily="18" charset="0"/>
+              <a:cs typeface="Times New Roman" panose="02020503050405090304" pitchFamily="18" charset="0"/>
             </a:endParaRPr>
           </a:p>
         </p:txBody>
       </p:sp>
       <p:sp>
         <p:nvSpPr>
-          <p:cNvPr id="121" name="矩形: 圆角 120">
-            <a:extLst>
-              <a:ext uri="{FF2B5EF4-FFF2-40B4-BE49-F238E27FC236}">
-                <a16:creationId xmlns:a16="http://schemas.microsoft.com/office/drawing/2014/main" id="{DD972035-3A2B-4D2E-AD1F-CA2B4D8D98B4}"/>
-              </a:ext>
-            </a:extLst>
-          </p:cNvPr>
+          <p:cNvPr id="121" name="矩形: 圆角 120"/>
           <p:cNvSpPr/>
           <p:nvPr/>
         </p:nvSpPr>
@@ -6923,8 +6514,8 @@
                 <a:solidFill>
                   <a:schemeClr val="tx1"/>
                 </a:solidFill>
-                <a:latin typeface="Times New Roman" panose="02020603050405020304" pitchFamily="18" charset="0"/>
-                <a:cs typeface="Times New Roman" panose="02020603050405020304" pitchFamily="18" charset="0"/>
+                <a:latin typeface="Times New Roman" panose="02020503050405090304" pitchFamily="18" charset="0"/>
+                <a:cs typeface="Times New Roman" panose="02020503050405090304" pitchFamily="18" charset="0"/>
               </a:rPr>
               <a:t>BN, ReLU6 </a:t>
             </a:r>
@@ -6932,21 +6523,15 @@
               <a:solidFill>
                 <a:schemeClr val="tx1"/>
               </a:solidFill>
-              <a:latin typeface="Times New Roman" panose="02020603050405020304" pitchFamily="18" charset="0"/>
-              <a:cs typeface="Times New Roman" panose="02020603050405020304" pitchFamily="18" charset="0"/>
+              <a:latin typeface="Times New Roman" panose="02020503050405090304" pitchFamily="18" charset="0"/>
+              <a:cs typeface="Times New Roman" panose="02020503050405090304" pitchFamily="18" charset="0"/>
             </a:endParaRPr>
           </a:p>
         </p:txBody>
       </p:sp>
       <p:sp>
         <p:nvSpPr>
-          <p:cNvPr id="122" name="矩形: 圆角 121">
-            <a:extLst>
-              <a:ext uri="{FF2B5EF4-FFF2-40B4-BE49-F238E27FC236}">
-                <a16:creationId xmlns:a16="http://schemas.microsoft.com/office/drawing/2014/main" id="{E30FC13F-23AF-4CD7-8CF5-FF94D9FE16D5}"/>
-              </a:ext>
-            </a:extLst>
-          </p:cNvPr>
+          <p:cNvPr id="122" name="矩形: 圆角 121"/>
           <p:cNvSpPr/>
           <p:nvPr/>
         </p:nvSpPr>
@@ -6992,34 +6577,28 @@
           <a:p>
             <a:pPr algn="ctr"/>
             <a:r>
-              <a:rPr lang="en-US" altLang="zh-CN" sz="1241" dirty="0">
+              <a:rPr lang="en-US" altLang="zh-CN" sz="1240" dirty="0">
                 <a:solidFill>
                   <a:schemeClr val="tx1"/>
                 </a:solidFill>
-                <a:latin typeface="Times New Roman" panose="02020603050405020304" pitchFamily="18" charset="0"/>
-                <a:cs typeface="Times New Roman" panose="02020603050405020304" pitchFamily="18" charset="0"/>
+                <a:latin typeface="Times New Roman" panose="02020503050405090304" pitchFamily="18" charset="0"/>
+                <a:cs typeface="Times New Roman" panose="02020503050405090304" pitchFamily="18" charset="0"/>
               </a:rPr>
               <a:t>DWC3x3</a:t>
             </a:r>
-            <a:endParaRPr lang="zh-CN" altLang="en-US" sz="1241" dirty="0">
+            <a:endParaRPr lang="zh-CN" altLang="en-US" sz="1240" dirty="0">
               <a:solidFill>
                 <a:schemeClr val="tx1"/>
               </a:solidFill>
-              <a:latin typeface="Times New Roman" panose="02020603050405020304" pitchFamily="18" charset="0"/>
-              <a:cs typeface="Times New Roman" panose="02020603050405020304" pitchFamily="18" charset="0"/>
+              <a:latin typeface="Times New Roman" panose="02020503050405090304" pitchFamily="18" charset="0"/>
+              <a:cs typeface="Times New Roman" panose="02020503050405090304" pitchFamily="18" charset="0"/>
             </a:endParaRPr>
           </a:p>
         </p:txBody>
       </p:sp>
       <p:sp>
         <p:nvSpPr>
-          <p:cNvPr id="124" name="矩形: 圆角 123">
-            <a:extLst>
-              <a:ext uri="{FF2B5EF4-FFF2-40B4-BE49-F238E27FC236}">
-                <a16:creationId xmlns:a16="http://schemas.microsoft.com/office/drawing/2014/main" id="{9A85FAB7-61E8-441B-B6BE-78B5E4488FD6}"/>
-              </a:ext>
-            </a:extLst>
-          </p:cNvPr>
+          <p:cNvPr id="124" name="矩形: 圆角 123"/>
           <p:cNvSpPr/>
           <p:nvPr/>
         </p:nvSpPr>
@@ -7069,8 +6648,8 @@
                 <a:solidFill>
                   <a:schemeClr val="tx1"/>
                 </a:solidFill>
-                <a:latin typeface="Times New Roman" panose="02020603050405020304" pitchFamily="18" charset="0"/>
-                <a:cs typeface="Times New Roman" panose="02020603050405020304" pitchFamily="18" charset="0"/>
+                <a:latin typeface="Times New Roman" panose="02020503050405090304" pitchFamily="18" charset="0"/>
+                <a:cs typeface="Times New Roman" panose="02020503050405090304" pitchFamily="18" charset="0"/>
               </a:rPr>
               <a:t>BN, ReLU6 </a:t>
             </a:r>
@@ -7078,21 +6657,15 @@
               <a:solidFill>
                 <a:schemeClr val="tx1"/>
               </a:solidFill>
-              <a:latin typeface="Times New Roman" panose="02020603050405020304" pitchFamily="18" charset="0"/>
-              <a:cs typeface="Times New Roman" panose="02020603050405020304" pitchFamily="18" charset="0"/>
+              <a:latin typeface="Times New Roman" panose="02020503050405090304" pitchFamily="18" charset="0"/>
+              <a:cs typeface="Times New Roman" panose="02020503050405090304" pitchFamily="18" charset="0"/>
             </a:endParaRPr>
           </a:p>
         </p:txBody>
       </p:sp>
       <p:sp>
         <p:nvSpPr>
-          <p:cNvPr id="125" name="矩形: 圆角 124">
-            <a:extLst>
-              <a:ext uri="{FF2B5EF4-FFF2-40B4-BE49-F238E27FC236}">
-                <a16:creationId xmlns:a16="http://schemas.microsoft.com/office/drawing/2014/main" id="{9B4319B1-175B-4D0F-B118-F734FE274C36}"/>
-              </a:ext>
-            </a:extLst>
-          </p:cNvPr>
+          <p:cNvPr id="125" name="矩形: 圆角 124"/>
           <p:cNvSpPr/>
           <p:nvPr/>
         </p:nvSpPr>
@@ -7138,34 +6711,28 @@
           <a:p>
             <a:pPr algn="ctr"/>
             <a:r>
-              <a:rPr lang="en-US" altLang="zh-CN" sz="1241" dirty="0">
+              <a:rPr lang="en-US" altLang="zh-CN" sz="1240" dirty="0">
                 <a:solidFill>
                   <a:schemeClr val="tx1"/>
                 </a:solidFill>
-                <a:latin typeface="Times New Roman" panose="02020603050405020304" pitchFamily="18" charset="0"/>
-                <a:cs typeface="Times New Roman" panose="02020603050405020304" pitchFamily="18" charset="0"/>
+                <a:latin typeface="Times New Roman" panose="02020503050405090304" pitchFamily="18" charset="0"/>
+                <a:cs typeface="Times New Roman" panose="02020503050405090304" pitchFamily="18" charset="0"/>
               </a:rPr>
               <a:t>DWC5x5 </a:t>
             </a:r>
-            <a:endParaRPr lang="zh-CN" altLang="en-US" sz="1241" dirty="0">
+            <a:endParaRPr lang="zh-CN" altLang="en-US" sz="1240" dirty="0">
               <a:solidFill>
                 <a:schemeClr val="tx1"/>
               </a:solidFill>
-              <a:latin typeface="Times New Roman" panose="02020603050405020304" pitchFamily="18" charset="0"/>
-              <a:cs typeface="Times New Roman" panose="02020603050405020304" pitchFamily="18" charset="0"/>
+              <a:latin typeface="Times New Roman" panose="02020503050405090304" pitchFamily="18" charset="0"/>
+              <a:cs typeface="Times New Roman" panose="02020503050405090304" pitchFamily="18" charset="0"/>
             </a:endParaRPr>
           </a:p>
         </p:txBody>
       </p:sp>
       <p:sp>
         <p:nvSpPr>
-          <p:cNvPr id="128" name="矩形: 圆角 127">
-            <a:extLst>
-              <a:ext uri="{FF2B5EF4-FFF2-40B4-BE49-F238E27FC236}">
-                <a16:creationId xmlns:a16="http://schemas.microsoft.com/office/drawing/2014/main" id="{C9198D63-A175-48D0-A83E-FA42286E9AC3}"/>
-              </a:ext>
-            </a:extLst>
-          </p:cNvPr>
+          <p:cNvPr id="128" name="矩形: 圆角 127"/>
           <p:cNvSpPr/>
           <p:nvPr/>
         </p:nvSpPr>
@@ -7211,36 +6778,29 @@
           <a:p>
             <a:pPr algn="ctr"/>
             <a:r>
-              <a:rPr lang="en-US" altLang="zh-CN" sz="1241" dirty="0">
+              <a:rPr lang="en-US" altLang="zh-CN" sz="1240" dirty="0">
                 <a:solidFill>
                   <a:schemeClr val="tx1"/>
                 </a:solidFill>
-                <a:latin typeface="Times New Roman" panose="02020603050405020304" pitchFamily="18" charset="0"/>
-                <a:cs typeface="Times New Roman" panose="02020603050405020304" pitchFamily="18" charset="0"/>
+                <a:latin typeface="Times New Roman" panose="02020503050405090304" pitchFamily="18" charset="0"/>
+                <a:cs typeface="Times New Roman" panose="02020503050405090304" pitchFamily="18" charset="0"/>
               </a:rPr>
               <a:t>DWC1x1 </a:t>
             </a:r>
-            <a:endParaRPr lang="zh-CN" altLang="en-US" sz="1241" dirty="0">
+            <a:endParaRPr lang="zh-CN" altLang="en-US" sz="1240" dirty="0">
               <a:solidFill>
                 <a:schemeClr val="tx1"/>
               </a:solidFill>
-              <a:latin typeface="Times New Roman" panose="02020603050405020304" pitchFamily="18" charset="0"/>
-              <a:cs typeface="Times New Roman" panose="02020603050405020304" pitchFamily="18" charset="0"/>
+              <a:latin typeface="Times New Roman" panose="02020503050405090304" pitchFamily="18" charset="0"/>
+              <a:cs typeface="Times New Roman" panose="02020503050405090304" pitchFamily="18" charset="0"/>
             </a:endParaRPr>
           </a:p>
         </p:txBody>
       </p:sp>
       <p:cxnSp>
         <p:nvCxnSpPr>
-          <p:cNvPr id="129" name="直接箭头连接符 128">
-            <a:extLst>
-              <a:ext uri="{FF2B5EF4-FFF2-40B4-BE49-F238E27FC236}">
-                <a16:creationId xmlns:a16="http://schemas.microsoft.com/office/drawing/2014/main" id="{B8A755E2-48A3-497E-B1F0-A258A76AD7EA}"/>
-              </a:ext>
-            </a:extLst>
-          </p:cNvPr>
+          <p:cNvPr id="129" name="直接箭头连接符 128"/>
           <p:cNvCxnSpPr>
-            <a:cxnSpLocks/>
             <a:stCxn id="113" idx="4"/>
             <a:endCxn id="119" idx="0"/>
           </p:cNvCxnSpPr>
@@ -7278,13 +6838,7 @@
       </p:cxnSp>
       <p:sp>
         <p:nvSpPr>
-          <p:cNvPr id="131" name="矩形: 圆角 130">
-            <a:extLst>
-              <a:ext uri="{FF2B5EF4-FFF2-40B4-BE49-F238E27FC236}">
-                <a16:creationId xmlns:a16="http://schemas.microsoft.com/office/drawing/2014/main" id="{0EE9CE9C-FBC8-4606-ABBE-4FE7CB6987D2}"/>
-              </a:ext>
-            </a:extLst>
-          </p:cNvPr>
+          <p:cNvPr id="131" name="矩形: 圆角 130"/>
           <p:cNvSpPr/>
           <p:nvPr/>
         </p:nvSpPr>
@@ -7330,34 +6884,28 @@
           <a:p>
             <a:pPr algn="ctr"/>
             <a:r>
-              <a:rPr lang="en-US" altLang="zh-CN" sz="1036" dirty="0">
+              <a:rPr lang="en-US" altLang="zh-CN" sz="1035" dirty="0">
                 <a:solidFill>
                   <a:schemeClr val="tx1"/>
                 </a:solidFill>
-                <a:latin typeface="Times New Roman" panose="02020603050405020304" pitchFamily="18" charset="0"/>
-                <a:cs typeface="Times New Roman" panose="02020603050405020304" pitchFamily="18" charset="0"/>
+                <a:latin typeface="Times New Roman" panose="02020503050405090304" pitchFamily="18" charset="0"/>
+                <a:cs typeface="Times New Roman" panose="02020503050405090304" pitchFamily="18" charset="0"/>
               </a:rPr>
               <a:t>Channel Shuffle </a:t>
             </a:r>
-            <a:endParaRPr lang="zh-CN" altLang="en-US" sz="1036" dirty="0">
+            <a:endParaRPr lang="zh-CN" altLang="en-US" sz="1035" dirty="0">
               <a:solidFill>
                 <a:schemeClr val="tx1"/>
               </a:solidFill>
-              <a:latin typeface="Times New Roman" panose="02020603050405020304" pitchFamily="18" charset="0"/>
-              <a:cs typeface="Times New Roman" panose="02020603050405020304" pitchFamily="18" charset="0"/>
+              <a:latin typeface="Times New Roman" panose="02020503050405090304" pitchFamily="18" charset="0"/>
+              <a:cs typeface="Times New Roman" panose="02020503050405090304" pitchFamily="18" charset="0"/>
             </a:endParaRPr>
           </a:p>
         </p:txBody>
       </p:sp>
       <p:sp>
         <p:nvSpPr>
-          <p:cNvPr id="132" name="流程图: 或者 131">
-            <a:extLst>
-              <a:ext uri="{FF2B5EF4-FFF2-40B4-BE49-F238E27FC236}">
-                <a16:creationId xmlns:a16="http://schemas.microsoft.com/office/drawing/2014/main" id="{F22CC9A6-1762-4D81-9005-47591B7E884C}"/>
-              </a:ext>
-            </a:extLst>
-          </p:cNvPr>
+          <p:cNvPr id="132" name="流程图: 或者 131"/>
           <p:cNvSpPr/>
           <p:nvPr/>
         </p:nvSpPr>
@@ -7399,19 +6947,13 @@
           <a:lstStyle/>
           <a:p>
             <a:pPr algn="ctr"/>
-            <a:endParaRPr lang="zh-CN" altLang="en-US" sz="1861"/>
-          </a:p>
-        </p:txBody>
-      </p:sp>
-      <p:sp>
-        <p:nvSpPr>
-          <p:cNvPr id="140" name="文本框 139">
-            <a:extLst>
-              <a:ext uri="{FF2B5EF4-FFF2-40B4-BE49-F238E27FC236}">
-                <a16:creationId xmlns:a16="http://schemas.microsoft.com/office/drawing/2014/main" id="{F0C697FF-3AF0-4137-B012-501C0D8B2764}"/>
-              </a:ext>
-            </a:extLst>
-          </p:cNvPr>
+            <a:endParaRPr lang="zh-CN" altLang="en-US" sz="1860"/>
+          </a:p>
+        </p:txBody>
+      </p:sp>
+      <p:sp>
+        <p:nvSpPr>
+          <p:cNvPr id="140" name="文本框 139"/>
           <p:cNvSpPr txBox="1"/>
           <p:nvPr/>
         </p:nvSpPr>
@@ -7433,35 +6975,29 @@
           <a:p>
             <a:pPr algn="ctr"/>
             <a:r>
-              <a:rPr lang="en-US" altLang="zh-CN" sz="2067" dirty="0">
-                <a:latin typeface="Times New Roman" panose="02020603050405020304" pitchFamily="18" charset="0"/>
-                <a:cs typeface="Times New Roman" panose="02020603050405020304" pitchFamily="18" charset="0"/>
+              <a:rPr lang="en-US" altLang="zh-CN" sz="2065" dirty="0">
+                <a:latin typeface="Times New Roman" panose="02020503050405090304" pitchFamily="18" charset="0"/>
+                <a:cs typeface="Times New Roman" panose="02020503050405090304" pitchFamily="18" charset="0"/>
               </a:rPr>
               <a:t>(d) </a:t>
             </a:r>
             <a:r>
-              <a:rPr lang="en-US" altLang="zh-CN" sz="2067" b="1" dirty="0">
-                <a:latin typeface="Times New Roman" panose="02020603050405020304" pitchFamily="18" charset="0"/>
-                <a:cs typeface="Times New Roman" panose="02020603050405020304" pitchFamily="18" charset="0"/>
+              <a:rPr lang="en-US" altLang="zh-CN" sz="2065" b="1" dirty="0">
+                <a:latin typeface="Times New Roman" panose="02020503050405090304" pitchFamily="18" charset="0"/>
+                <a:cs typeface="Times New Roman" panose="02020503050405090304" pitchFamily="18" charset="0"/>
               </a:rPr>
               <a:t>SLCB</a:t>
             </a:r>
-            <a:endParaRPr lang="zh-CN" altLang="en-US" sz="2067" b="1" dirty="0">
-              <a:latin typeface="Times New Roman" panose="02020603050405020304" pitchFamily="18" charset="0"/>
-              <a:cs typeface="Times New Roman" panose="02020603050405020304" pitchFamily="18" charset="0"/>
+            <a:endParaRPr lang="zh-CN" altLang="en-US" sz="2065" b="1" dirty="0">
+              <a:latin typeface="Times New Roman" panose="02020503050405090304" pitchFamily="18" charset="0"/>
+              <a:cs typeface="Times New Roman" panose="02020503050405090304" pitchFamily="18" charset="0"/>
             </a:endParaRPr>
           </a:p>
         </p:txBody>
       </p:sp>
       <p:sp>
         <p:nvSpPr>
-          <p:cNvPr id="141" name="文本框 140">
-            <a:extLst>
-              <a:ext uri="{FF2B5EF4-FFF2-40B4-BE49-F238E27FC236}">
-                <a16:creationId xmlns:a16="http://schemas.microsoft.com/office/drawing/2014/main" id="{6E88C940-792C-4BBC-BD14-86BD744FF8E8}"/>
-              </a:ext>
-            </a:extLst>
-          </p:cNvPr>
+          <p:cNvPr id="141" name="文本框 140"/>
           <p:cNvSpPr txBox="1"/>
           <p:nvPr/>
         </p:nvSpPr>
@@ -7483,35 +7019,29 @@
           <a:p>
             <a:pPr algn="ctr"/>
             <a:r>
-              <a:rPr lang="en-US" altLang="zh-CN" sz="1654" dirty="0">
-                <a:latin typeface="Times New Roman" panose="02020603050405020304" pitchFamily="18" charset="0"/>
-                <a:cs typeface="Times New Roman" panose="02020603050405020304" pitchFamily="18" charset="0"/>
+              <a:rPr lang="en-US" altLang="zh-CN" sz="1655" dirty="0">
+                <a:latin typeface="Times New Roman" panose="02020503050405090304" pitchFamily="18" charset="0"/>
+                <a:cs typeface="Times New Roman" panose="02020503050405090304" pitchFamily="18" charset="0"/>
               </a:rPr>
               <a:t>(h) </a:t>
             </a:r>
             <a:r>
-              <a:rPr lang="en-US" altLang="zh-CN" sz="1654" b="1" dirty="0">
-                <a:latin typeface="Times New Roman" panose="02020603050405020304" pitchFamily="18" charset="0"/>
-                <a:cs typeface="Times New Roman" panose="02020603050405020304" pitchFamily="18" charset="0"/>
+              <a:rPr lang="en-US" altLang="zh-CN" sz="1655" b="1" dirty="0">
+                <a:latin typeface="Times New Roman" panose="02020503050405090304" pitchFamily="18" charset="0"/>
+                <a:cs typeface="Times New Roman" panose="02020503050405090304" pitchFamily="18" charset="0"/>
               </a:rPr>
               <a:t>MA</a:t>
             </a:r>
-            <a:endParaRPr lang="zh-CN" altLang="en-US" sz="1654" b="1" dirty="0">
-              <a:latin typeface="Times New Roman" panose="02020603050405020304" pitchFamily="18" charset="0"/>
-              <a:cs typeface="Times New Roman" panose="02020603050405020304" pitchFamily="18" charset="0"/>
+            <a:endParaRPr lang="zh-CN" altLang="en-US" sz="1655" b="1" dirty="0">
+              <a:latin typeface="Times New Roman" panose="02020503050405090304" pitchFamily="18" charset="0"/>
+              <a:cs typeface="Times New Roman" panose="02020503050405090304" pitchFamily="18" charset="0"/>
             </a:endParaRPr>
           </a:p>
         </p:txBody>
       </p:sp>
       <p:sp>
         <p:nvSpPr>
-          <p:cNvPr id="144" name="矩形: 圆角 143">
-            <a:extLst>
-              <a:ext uri="{FF2B5EF4-FFF2-40B4-BE49-F238E27FC236}">
-                <a16:creationId xmlns:a16="http://schemas.microsoft.com/office/drawing/2014/main" id="{DEECECD7-0EA2-4407-83EB-09398263E5A4}"/>
-              </a:ext>
-            </a:extLst>
-          </p:cNvPr>
+          <p:cNvPr id="144" name="矩形: 圆角 143"/>
           <p:cNvSpPr/>
           <p:nvPr/>
         </p:nvSpPr>
@@ -7557,34 +7087,28 @@
           <a:p>
             <a:pPr algn="ctr"/>
             <a:r>
-              <a:rPr lang="en-US" altLang="zh-CN" sz="1241" dirty="0">
+              <a:rPr lang="en-US" altLang="zh-CN" sz="1240" dirty="0">
                 <a:solidFill>
                   <a:schemeClr val="tx1"/>
                 </a:solidFill>
-                <a:latin typeface="Times New Roman" panose="02020603050405020304" pitchFamily="18" charset="0"/>
-                <a:cs typeface="Times New Roman" panose="02020603050405020304" pitchFamily="18" charset="0"/>
+                <a:latin typeface="Times New Roman" panose="02020503050405090304" pitchFamily="18" charset="0"/>
+                <a:cs typeface="Times New Roman" panose="02020503050405090304" pitchFamily="18" charset="0"/>
               </a:rPr>
               <a:t>LN</a:t>
             </a:r>
-            <a:endParaRPr lang="zh-CN" altLang="en-US" sz="1241" dirty="0">
+            <a:endParaRPr lang="zh-CN" altLang="en-US" sz="1240" dirty="0">
               <a:solidFill>
                 <a:schemeClr val="tx1"/>
               </a:solidFill>
-              <a:latin typeface="Times New Roman" panose="02020603050405020304" pitchFamily="18" charset="0"/>
-              <a:cs typeface="Times New Roman" panose="02020603050405020304" pitchFamily="18" charset="0"/>
+              <a:latin typeface="Times New Roman" panose="02020503050405090304" pitchFamily="18" charset="0"/>
+              <a:cs typeface="Times New Roman" panose="02020503050405090304" pitchFamily="18" charset="0"/>
             </a:endParaRPr>
           </a:p>
         </p:txBody>
       </p:sp>
       <p:sp>
         <p:nvSpPr>
-          <p:cNvPr id="145" name="矩形: 圆角 144">
-            <a:extLst>
-              <a:ext uri="{FF2B5EF4-FFF2-40B4-BE49-F238E27FC236}">
-                <a16:creationId xmlns:a16="http://schemas.microsoft.com/office/drawing/2014/main" id="{F829EF0F-1F1D-40DF-9B10-FBBBB96953F2}"/>
-              </a:ext>
-            </a:extLst>
-          </p:cNvPr>
+          <p:cNvPr id="145" name="矩形: 圆角 144"/>
           <p:cNvSpPr/>
           <p:nvPr/>
         </p:nvSpPr>
@@ -7630,34 +7154,28 @@
           <a:p>
             <a:pPr algn="ctr"/>
             <a:r>
-              <a:rPr lang="en-US" altLang="zh-CN" sz="1241" dirty="0">
+              <a:rPr lang="en-US" altLang="zh-CN" sz="1240" dirty="0">
                 <a:solidFill>
                   <a:schemeClr val="tx1"/>
                 </a:solidFill>
-                <a:latin typeface="Times New Roman" panose="02020603050405020304" pitchFamily="18" charset="0"/>
-                <a:cs typeface="Times New Roman" panose="02020603050405020304" pitchFamily="18" charset="0"/>
+                <a:latin typeface="Times New Roman" panose="02020503050405090304" pitchFamily="18" charset="0"/>
+                <a:cs typeface="Times New Roman" panose="02020503050405090304" pitchFamily="18" charset="0"/>
               </a:rPr>
               <a:t>Linear Layer</a:t>
             </a:r>
-            <a:endParaRPr lang="zh-CN" altLang="en-US" sz="1241" dirty="0">
+            <a:endParaRPr lang="zh-CN" altLang="en-US" sz="1240" dirty="0">
               <a:solidFill>
                 <a:schemeClr val="tx1"/>
               </a:solidFill>
-              <a:latin typeface="Times New Roman" panose="02020603050405020304" pitchFamily="18" charset="0"/>
-              <a:cs typeface="Times New Roman" panose="02020603050405020304" pitchFamily="18" charset="0"/>
+              <a:latin typeface="Times New Roman" panose="02020503050405090304" pitchFamily="18" charset="0"/>
+              <a:cs typeface="Times New Roman" panose="02020503050405090304" pitchFamily="18" charset="0"/>
             </a:endParaRPr>
           </a:p>
         </p:txBody>
       </p:sp>
       <p:sp>
         <p:nvSpPr>
-          <p:cNvPr id="146" name="矩形: 圆角 145">
-            <a:extLst>
-              <a:ext uri="{FF2B5EF4-FFF2-40B4-BE49-F238E27FC236}">
-                <a16:creationId xmlns:a16="http://schemas.microsoft.com/office/drawing/2014/main" id="{CD9997E4-E5B1-40AD-8521-6C2E4FE348AD}"/>
-              </a:ext>
-            </a:extLst>
-          </p:cNvPr>
+          <p:cNvPr id="146" name="矩形: 圆角 145"/>
           <p:cNvSpPr/>
           <p:nvPr/>
         </p:nvSpPr>
@@ -7703,34 +7221,28 @@
           <a:p>
             <a:pPr algn="ctr"/>
             <a:r>
-              <a:rPr lang="en-US" altLang="zh-CN" sz="1241" dirty="0">
+              <a:rPr lang="en-US" altLang="zh-CN" sz="1240" dirty="0">
                 <a:solidFill>
                   <a:schemeClr val="tx1"/>
                 </a:solidFill>
-                <a:latin typeface="Times New Roman" panose="02020603050405020304" pitchFamily="18" charset="0"/>
-                <a:cs typeface="Times New Roman" panose="02020603050405020304" pitchFamily="18" charset="0"/>
+                <a:latin typeface="Times New Roman" panose="02020503050405090304" pitchFamily="18" charset="0"/>
+                <a:cs typeface="Times New Roman" panose="02020503050405090304" pitchFamily="18" charset="0"/>
               </a:rPr>
               <a:t>DWC</a:t>
             </a:r>
-            <a:endParaRPr lang="zh-CN" altLang="en-US" sz="1241" dirty="0">
+            <a:endParaRPr lang="zh-CN" altLang="en-US" sz="1240" dirty="0">
               <a:solidFill>
                 <a:schemeClr val="tx1"/>
               </a:solidFill>
-              <a:latin typeface="Times New Roman" panose="02020603050405020304" pitchFamily="18" charset="0"/>
-              <a:cs typeface="Times New Roman" panose="02020603050405020304" pitchFamily="18" charset="0"/>
+              <a:latin typeface="Times New Roman" panose="02020503050405090304" pitchFamily="18" charset="0"/>
+              <a:cs typeface="Times New Roman" panose="02020503050405090304" pitchFamily="18" charset="0"/>
             </a:endParaRPr>
           </a:p>
         </p:txBody>
       </p:sp>
       <p:sp>
         <p:nvSpPr>
-          <p:cNvPr id="147" name="矩形: 圆角 146">
-            <a:extLst>
-              <a:ext uri="{FF2B5EF4-FFF2-40B4-BE49-F238E27FC236}">
-                <a16:creationId xmlns:a16="http://schemas.microsoft.com/office/drawing/2014/main" id="{51CFC538-BF99-4016-A5BB-F665A789FCA2}"/>
-              </a:ext>
-            </a:extLst>
-          </p:cNvPr>
+          <p:cNvPr id="147" name="矩形: 圆角 146"/>
           <p:cNvSpPr/>
           <p:nvPr/>
         </p:nvSpPr>
@@ -7776,34 +7288,28 @@
           <a:p>
             <a:pPr algn="ctr"/>
             <a:r>
-              <a:rPr lang="en-US" altLang="zh-CN" sz="1241" dirty="0">
+              <a:rPr lang="en-US" altLang="zh-CN" sz="1240" dirty="0">
                 <a:solidFill>
                   <a:schemeClr val="tx1"/>
                 </a:solidFill>
-                <a:latin typeface="Times New Roman" panose="02020603050405020304" pitchFamily="18" charset="0"/>
-                <a:cs typeface="Times New Roman" panose="02020603050405020304" pitchFamily="18" charset="0"/>
+                <a:latin typeface="Times New Roman" panose="02020503050405090304" pitchFamily="18" charset="0"/>
+                <a:cs typeface="Times New Roman" panose="02020503050405090304" pitchFamily="18" charset="0"/>
               </a:rPr>
               <a:t>ReLU</a:t>
             </a:r>
-            <a:endParaRPr lang="zh-CN" altLang="en-US" sz="1241" dirty="0">
+            <a:endParaRPr lang="zh-CN" altLang="en-US" sz="1240" dirty="0">
               <a:solidFill>
                 <a:schemeClr val="tx1"/>
               </a:solidFill>
-              <a:latin typeface="Times New Roman" panose="02020603050405020304" pitchFamily="18" charset="0"/>
-              <a:cs typeface="Times New Roman" panose="02020603050405020304" pitchFamily="18" charset="0"/>
+              <a:latin typeface="Times New Roman" panose="02020503050405090304" pitchFamily="18" charset="0"/>
+              <a:cs typeface="Times New Roman" panose="02020503050405090304" pitchFamily="18" charset="0"/>
             </a:endParaRPr>
           </a:p>
         </p:txBody>
       </p:sp>
       <p:sp>
         <p:nvSpPr>
-          <p:cNvPr id="148" name="矩形: 圆角 147">
-            <a:extLst>
-              <a:ext uri="{FF2B5EF4-FFF2-40B4-BE49-F238E27FC236}">
-                <a16:creationId xmlns:a16="http://schemas.microsoft.com/office/drawing/2014/main" id="{A8FE2531-966A-4302-95A4-E53F665F91A2}"/>
-              </a:ext>
-            </a:extLst>
-          </p:cNvPr>
+          <p:cNvPr id="148" name="矩形: 圆角 147"/>
           <p:cNvSpPr/>
           <p:nvPr/>
         </p:nvSpPr>
@@ -7849,27 +7355,28 @@
           <a:p>
             <a:pPr algn="ctr"/>
             <a:r>
-              <a:rPr lang="en-US" altLang="zh-CN" sz="1241" dirty="0">
+              <a:rPr lang="en-US" altLang="zh-CN" sz="1240" dirty="0">
                 <a:solidFill>
                   <a:schemeClr val="tx1"/>
                 </a:solidFill>
-                <a:latin typeface="Times New Roman" panose="02020603050405020304" pitchFamily="18" charset="0"/>
-                <a:cs typeface="Times New Roman" panose="02020603050405020304" pitchFamily="18" charset="0"/>
+                <a:latin typeface="Times New Roman" panose="02020503050405090304" pitchFamily="18" charset="0"/>
+                <a:cs typeface="Times New Roman" panose="02020503050405090304" pitchFamily="18" charset="0"/>
               </a:rPr>
               <a:t>SS2D</a:t>
             </a:r>
-          </a:p>
-        </p:txBody>
-      </p:sp>
-      <p:sp>
-        <p:nvSpPr>
-          <p:cNvPr id="149" name="矩形: 圆角 148">
-            <a:extLst>
-              <a:ext uri="{FF2B5EF4-FFF2-40B4-BE49-F238E27FC236}">
-                <a16:creationId xmlns:a16="http://schemas.microsoft.com/office/drawing/2014/main" id="{7F16CF37-0B52-42BC-8E74-727389640FA8}"/>
-              </a:ext>
-            </a:extLst>
-          </p:cNvPr>
+            <a:endParaRPr lang="en-US" altLang="zh-CN" sz="1240" dirty="0">
+              <a:solidFill>
+                <a:schemeClr val="tx1"/>
+              </a:solidFill>
+              <a:latin typeface="Times New Roman" panose="02020503050405090304" pitchFamily="18" charset="0"/>
+              <a:cs typeface="Times New Roman" panose="02020503050405090304" pitchFamily="18" charset="0"/>
+            </a:endParaRPr>
+          </a:p>
+        </p:txBody>
+      </p:sp>
+      <p:sp>
+        <p:nvSpPr>
+          <p:cNvPr id="149" name="矩形: 圆角 148"/>
           <p:cNvSpPr/>
           <p:nvPr/>
         </p:nvSpPr>
@@ -7915,34 +7422,28 @@
           <a:p>
             <a:pPr algn="ctr"/>
             <a:r>
-              <a:rPr lang="en-US" altLang="zh-CN" sz="1241" dirty="0">
+              <a:rPr lang="en-US" altLang="zh-CN" sz="1240" dirty="0">
                 <a:solidFill>
                   <a:schemeClr val="tx1"/>
                 </a:solidFill>
-                <a:latin typeface="Times New Roman" panose="02020603050405020304" pitchFamily="18" charset="0"/>
-                <a:cs typeface="Times New Roman" panose="02020603050405020304" pitchFamily="18" charset="0"/>
+                <a:latin typeface="Times New Roman" panose="02020503050405090304" pitchFamily="18" charset="0"/>
+                <a:cs typeface="Times New Roman" panose="02020503050405090304" pitchFamily="18" charset="0"/>
               </a:rPr>
               <a:t>LN</a:t>
             </a:r>
-            <a:endParaRPr lang="zh-CN" altLang="en-US" sz="1241" dirty="0">
+            <a:endParaRPr lang="zh-CN" altLang="en-US" sz="1240" dirty="0">
               <a:solidFill>
                 <a:schemeClr val="tx1"/>
               </a:solidFill>
-              <a:latin typeface="Times New Roman" panose="02020603050405020304" pitchFamily="18" charset="0"/>
-              <a:cs typeface="Times New Roman" panose="02020603050405020304" pitchFamily="18" charset="0"/>
+              <a:latin typeface="Times New Roman" panose="02020503050405090304" pitchFamily="18" charset="0"/>
+              <a:cs typeface="Times New Roman" panose="02020503050405090304" pitchFamily="18" charset="0"/>
             </a:endParaRPr>
           </a:p>
         </p:txBody>
       </p:sp>
       <p:sp>
         <p:nvSpPr>
-          <p:cNvPr id="150" name="流程图: 汇总连接 149">
-            <a:extLst>
-              <a:ext uri="{FF2B5EF4-FFF2-40B4-BE49-F238E27FC236}">
-                <a16:creationId xmlns:a16="http://schemas.microsoft.com/office/drawing/2014/main" id="{6197767C-AFFB-45DE-A0CA-22E74587795C}"/>
-              </a:ext>
-            </a:extLst>
-          </p:cNvPr>
+          <p:cNvPr id="150" name="流程图: 汇总连接 149"/>
           <p:cNvSpPr/>
           <p:nvPr/>
         </p:nvSpPr>
@@ -7984,19 +7485,13 @@
           <a:lstStyle/>
           <a:p>
             <a:pPr algn="ctr"/>
-            <a:endParaRPr lang="zh-CN" altLang="en-US" sz="1861" dirty="0"/>
-          </a:p>
-        </p:txBody>
-      </p:sp>
-      <p:sp>
-        <p:nvSpPr>
-          <p:cNvPr id="151" name="矩形: 圆角 150">
-            <a:extLst>
-              <a:ext uri="{FF2B5EF4-FFF2-40B4-BE49-F238E27FC236}">
-                <a16:creationId xmlns:a16="http://schemas.microsoft.com/office/drawing/2014/main" id="{35E73AAA-D56A-4DFF-A9A3-26560A067504}"/>
-              </a:ext>
-            </a:extLst>
-          </p:cNvPr>
+            <a:endParaRPr lang="zh-CN" altLang="en-US" sz="1860" dirty="0"/>
+          </a:p>
+        </p:txBody>
+      </p:sp>
+      <p:sp>
+        <p:nvSpPr>
+          <p:cNvPr id="151" name="矩形: 圆角 150"/>
           <p:cNvSpPr/>
           <p:nvPr/>
         </p:nvSpPr>
@@ -8042,34 +7537,28 @@
           <a:p>
             <a:pPr algn="ctr"/>
             <a:r>
-              <a:rPr lang="en-US" altLang="zh-CN" sz="1241" dirty="0">
+              <a:rPr lang="en-US" altLang="zh-CN" sz="1240" dirty="0">
                 <a:solidFill>
                   <a:schemeClr val="tx1"/>
                 </a:solidFill>
-                <a:latin typeface="Times New Roman" panose="02020603050405020304" pitchFamily="18" charset="0"/>
-                <a:cs typeface="Times New Roman" panose="02020603050405020304" pitchFamily="18" charset="0"/>
+                <a:latin typeface="Times New Roman" panose="02020503050405090304" pitchFamily="18" charset="0"/>
+                <a:cs typeface="Times New Roman" panose="02020503050405090304" pitchFamily="18" charset="0"/>
               </a:rPr>
               <a:t>Linear Layer</a:t>
             </a:r>
-            <a:endParaRPr lang="zh-CN" altLang="en-US" sz="1241" dirty="0">
+            <a:endParaRPr lang="zh-CN" altLang="en-US" sz="1240" dirty="0">
               <a:solidFill>
                 <a:schemeClr val="tx1"/>
               </a:solidFill>
-              <a:latin typeface="Times New Roman" panose="02020603050405020304" pitchFamily="18" charset="0"/>
-              <a:cs typeface="Times New Roman" panose="02020603050405020304" pitchFamily="18" charset="0"/>
+              <a:latin typeface="Times New Roman" panose="02020503050405090304" pitchFamily="18" charset="0"/>
+              <a:cs typeface="Times New Roman" panose="02020503050405090304" pitchFamily="18" charset="0"/>
             </a:endParaRPr>
           </a:p>
         </p:txBody>
       </p:sp>
       <p:sp>
         <p:nvSpPr>
-          <p:cNvPr id="152" name="矩形: 圆角 151">
-            <a:extLst>
-              <a:ext uri="{FF2B5EF4-FFF2-40B4-BE49-F238E27FC236}">
-                <a16:creationId xmlns:a16="http://schemas.microsoft.com/office/drawing/2014/main" id="{BAAB3683-8262-46DB-8552-36909EE0EFCE}"/>
-              </a:ext>
-            </a:extLst>
-          </p:cNvPr>
+          <p:cNvPr id="152" name="矩形: 圆角 151"/>
           <p:cNvSpPr/>
           <p:nvPr/>
         </p:nvSpPr>
@@ -8115,34 +7604,28 @@
           <a:p>
             <a:pPr algn="ctr"/>
             <a:r>
-              <a:rPr lang="en-US" altLang="zh-CN" sz="1241" dirty="0">
+              <a:rPr lang="en-US" altLang="zh-CN" sz="1240" dirty="0">
                 <a:solidFill>
                   <a:schemeClr val="tx1"/>
                 </a:solidFill>
-                <a:latin typeface="Times New Roman" panose="02020603050405020304" pitchFamily="18" charset="0"/>
-                <a:cs typeface="Times New Roman" panose="02020603050405020304" pitchFamily="18" charset="0"/>
+                <a:latin typeface="Times New Roman" panose="02020503050405090304" pitchFamily="18" charset="0"/>
+                <a:cs typeface="Times New Roman" panose="02020503050405090304" pitchFamily="18" charset="0"/>
               </a:rPr>
               <a:t>ReLU</a:t>
             </a:r>
-            <a:endParaRPr lang="zh-CN" altLang="en-US" sz="1241" dirty="0">
+            <a:endParaRPr lang="zh-CN" altLang="en-US" sz="1240" dirty="0">
               <a:solidFill>
                 <a:schemeClr val="tx1"/>
               </a:solidFill>
-              <a:latin typeface="Times New Roman" panose="02020603050405020304" pitchFamily="18" charset="0"/>
-              <a:cs typeface="Times New Roman" panose="02020603050405020304" pitchFamily="18" charset="0"/>
+              <a:latin typeface="Times New Roman" panose="02020503050405090304" pitchFamily="18" charset="0"/>
+              <a:cs typeface="Times New Roman" panose="02020503050405090304" pitchFamily="18" charset="0"/>
             </a:endParaRPr>
           </a:p>
         </p:txBody>
       </p:sp>
       <p:sp>
         <p:nvSpPr>
-          <p:cNvPr id="153" name="矩形: 圆角 152">
-            <a:extLst>
-              <a:ext uri="{FF2B5EF4-FFF2-40B4-BE49-F238E27FC236}">
-                <a16:creationId xmlns:a16="http://schemas.microsoft.com/office/drawing/2014/main" id="{1038A4ED-004B-4396-B93A-B5E625B66F87}"/>
-              </a:ext>
-            </a:extLst>
-          </p:cNvPr>
+          <p:cNvPr id="153" name="矩形: 圆角 152"/>
           <p:cNvSpPr/>
           <p:nvPr/>
         </p:nvSpPr>
@@ -8188,36 +7671,29 @@
           <a:p>
             <a:pPr algn="ctr"/>
             <a:r>
-              <a:rPr lang="en-US" altLang="zh-CN" sz="1241" dirty="0">
+              <a:rPr lang="en-US" altLang="zh-CN" sz="1240" dirty="0">
                 <a:solidFill>
                   <a:schemeClr val="tx1"/>
                 </a:solidFill>
-                <a:latin typeface="Times New Roman" panose="02020603050405020304" pitchFamily="18" charset="0"/>
-                <a:cs typeface="Times New Roman" panose="02020603050405020304" pitchFamily="18" charset="0"/>
+                <a:latin typeface="Times New Roman" panose="02020503050405090304" pitchFamily="18" charset="0"/>
+                <a:cs typeface="Times New Roman" panose="02020503050405090304" pitchFamily="18" charset="0"/>
               </a:rPr>
               <a:t>Linear Layer</a:t>
             </a:r>
-            <a:endParaRPr lang="zh-CN" altLang="en-US" sz="1241" dirty="0">
+            <a:endParaRPr lang="zh-CN" altLang="en-US" sz="1240" dirty="0">
               <a:solidFill>
                 <a:schemeClr val="tx1"/>
               </a:solidFill>
-              <a:latin typeface="Times New Roman" panose="02020603050405020304" pitchFamily="18" charset="0"/>
-              <a:cs typeface="Times New Roman" panose="02020603050405020304" pitchFamily="18" charset="0"/>
+              <a:latin typeface="Times New Roman" panose="02020503050405090304" pitchFamily="18" charset="0"/>
+              <a:cs typeface="Times New Roman" panose="02020503050405090304" pitchFamily="18" charset="0"/>
             </a:endParaRPr>
           </a:p>
         </p:txBody>
       </p:sp>
       <p:cxnSp>
         <p:nvCxnSpPr>
-          <p:cNvPr id="176" name="直接箭头连接符 175">
-            <a:extLst>
-              <a:ext uri="{FF2B5EF4-FFF2-40B4-BE49-F238E27FC236}">
-                <a16:creationId xmlns:a16="http://schemas.microsoft.com/office/drawing/2014/main" id="{2C7E1416-1CF5-4751-AC11-128749F2C55E}"/>
-              </a:ext>
-            </a:extLst>
-          </p:cNvPr>
+          <p:cNvPr id="176" name="直接箭头连接符 175"/>
           <p:cNvCxnSpPr>
-            <a:cxnSpLocks/>
             <a:stCxn id="150" idx="4"/>
             <a:endCxn id="153" idx="0"/>
           </p:cNvCxnSpPr>
@@ -8255,13 +7731,7 @@
       </p:cxnSp>
       <p:sp>
         <p:nvSpPr>
-          <p:cNvPr id="179" name="流程图: 或者 178">
-            <a:extLst>
-              <a:ext uri="{FF2B5EF4-FFF2-40B4-BE49-F238E27FC236}">
-                <a16:creationId xmlns:a16="http://schemas.microsoft.com/office/drawing/2014/main" id="{0686458C-9EA8-49C4-9CD5-4A0862387BE7}"/>
-              </a:ext>
-            </a:extLst>
-          </p:cNvPr>
+          <p:cNvPr id="179" name="流程图: 或者 178"/>
           <p:cNvSpPr/>
           <p:nvPr/>
         </p:nvSpPr>
@@ -8303,21 +7773,14 @@
           <a:lstStyle/>
           <a:p>
             <a:pPr algn="ctr"/>
-            <a:endParaRPr lang="zh-CN" altLang="en-US" sz="1861"/>
+            <a:endParaRPr lang="zh-CN" altLang="en-US" sz="1860"/>
           </a:p>
         </p:txBody>
       </p:sp>
       <p:cxnSp>
         <p:nvCxnSpPr>
-          <p:cNvPr id="180" name="直接箭头连接符 179">
-            <a:extLst>
-              <a:ext uri="{FF2B5EF4-FFF2-40B4-BE49-F238E27FC236}">
-                <a16:creationId xmlns:a16="http://schemas.microsoft.com/office/drawing/2014/main" id="{BB32C3FC-B634-4E2B-B5AB-E454F8D6ACDF}"/>
-              </a:ext>
-            </a:extLst>
-          </p:cNvPr>
+          <p:cNvPr id="180" name="直接箭头连接符 179"/>
           <p:cNvCxnSpPr>
-            <a:cxnSpLocks/>
             <a:stCxn id="153" idx="2"/>
             <a:endCxn id="179" idx="0"/>
           </p:cNvCxnSpPr>
@@ -8355,15 +7818,8 @@
       </p:cxnSp>
       <p:cxnSp>
         <p:nvCxnSpPr>
-          <p:cNvPr id="185" name="直接箭头连接符 184">
-            <a:extLst>
-              <a:ext uri="{FF2B5EF4-FFF2-40B4-BE49-F238E27FC236}">
-                <a16:creationId xmlns:a16="http://schemas.microsoft.com/office/drawing/2014/main" id="{0CBBE6B7-AEE6-492E-B09C-D3B61E3535FB}"/>
-              </a:ext>
-            </a:extLst>
-          </p:cNvPr>
+          <p:cNvPr id="185" name="直接箭头连接符 184"/>
           <p:cNvCxnSpPr>
-            <a:cxnSpLocks/>
             <a:stCxn id="179" idx="4"/>
           </p:cNvCxnSpPr>
           <p:nvPr/>
@@ -8400,13 +7856,7 @@
       </p:cxnSp>
       <p:sp>
         <p:nvSpPr>
-          <p:cNvPr id="200" name="文本框 199">
-            <a:extLst>
-              <a:ext uri="{FF2B5EF4-FFF2-40B4-BE49-F238E27FC236}">
-                <a16:creationId xmlns:a16="http://schemas.microsoft.com/office/drawing/2014/main" id="{5D034174-454A-45A1-B93C-869FFEBC11BB}"/>
-              </a:ext>
-            </a:extLst>
-          </p:cNvPr>
+          <p:cNvPr id="200" name="文本框 199"/>
           <p:cNvSpPr txBox="1"/>
           <p:nvPr/>
         </p:nvSpPr>
@@ -8428,35 +7878,29 @@
           <a:p>
             <a:pPr algn="ctr"/>
             <a:r>
-              <a:rPr lang="en-US" altLang="zh-CN" sz="2067" dirty="0">
-                <a:latin typeface="Times New Roman" panose="02020603050405020304" pitchFamily="18" charset="0"/>
-                <a:cs typeface="Times New Roman" panose="02020603050405020304" pitchFamily="18" charset="0"/>
+              <a:rPr lang="en-US" altLang="zh-CN" sz="2065" dirty="0">
+                <a:latin typeface="Times New Roman" panose="02020503050405090304" pitchFamily="18" charset="0"/>
+                <a:cs typeface="Times New Roman" panose="02020503050405090304" pitchFamily="18" charset="0"/>
               </a:rPr>
               <a:t>(b)</a:t>
             </a:r>
             <a:r>
-              <a:rPr lang="en-US" altLang="zh-CN" sz="2067" b="1" dirty="0">
-                <a:latin typeface="Times New Roman" panose="02020603050405020304" pitchFamily="18" charset="0"/>
-                <a:cs typeface="Times New Roman" panose="02020603050405020304" pitchFamily="18" charset="0"/>
+              <a:rPr lang="en-US" altLang="zh-CN" sz="2065" b="1" dirty="0">
+                <a:latin typeface="Times New Roman" panose="02020503050405090304" pitchFamily="18" charset="0"/>
+                <a:cs typeface="Times New Roman" panose="02020503050405090304" pitchFamily="18" charset="0"/>
               </a:rPr>
               <a:t>VSS Block</a:t>
             </a:r>
-            <a:endParaRPr lang="zh-CN" altLang="en-US" sz="2067" b="1" dirty="0">
-              <a:latin typeface="Times New Roman" panose="02020603050405020304" pitchFamily="18" charset="0"/>
-              <a:cs typeface="Times New Roman" panose="02020603050405020304" pitchFamily="18" charset="0"/>
+            <a:endParaRPr lang="zh-CN" altLang="en-US" sz="2065" b="1" dirty="0">
+              <a:latin typeface="Times New Roman" panose="02020503050405090304" pitchFamily="18" charset="0"/>
+              <a:cs typeface="Times New Roman" panose="02020503050405090304" pitchFamily="18" charset="0"/>
             </a:endParaRPr>
           </a:p>
         </p:txBody>
       </p:sp>
       <p:sp>
         <p:nvSpPr>
-          <p:cNvPr id="202" name="文本框 201">
-            <a:extLst>
-              <a:ext uri="{FF2B5EF4-FFF2-40B4-BE49-F238E27FC236}">
-                <a16:creationId xmlns:a16="http://schemas.microsoft.com/office/drawing/2014/main" id="{7BD2D6CB-0AB8-40BD-B47D-9D023D7CC18E}"/>
-              </a:ext>
-            </a:extLst>
-          </p:cNvPr>
+          <p:cNvPr id="202" name="文本框 201"/>
           <p:cNvSpPr txBox="1"/>
           <p:nvPr/>
         </p:nvSpPr>
@@ -8478,35 +7922,29 @@
           <a:p>
             <a:pPr algn="ctr"/>
             <a:r>
-              <a:rPr lang="en-US" altLang="zh-CN" sz="2067" dirty="0">
-                <a:latin typeface="Times New Roman" panose="02020603050405020304" pitchFamily="18" charset="0"/>
-                <a:cs typeface="Times New Roman" panose="02020603050405020304" pitchFamily="18" charset="0"/>
+              <a:rPr lang="en-US" altLang="zh-CN" sz="2065" dirty="0">
+                <a:latin typeface="Times New Roman" panose="02020503050405090304" pitchFamily="18" charset="0"/>
+                <a:cs typeface="Times New Roman" panose="02020503050405090304" pitchFamily="18" charset="0"/>
               </a:rPr>
               <a:t>(e) </a:t>
             </a:r>
             <a:r>
-              <a:rPr lang="en-US" altLang="zh-CN" sz="2067" b="1" dirty="0">
-                <a:latin typeface="Times New Roman" panose="02020603050405020304" pitchFamily="18" charset="0"/>
-                <a:cs typeface="Times New Roman" panose="02020603050405020304" pitchFamily="18" charset="0"/>
+              <a:rPr lang="en-US" altLang="zh-CN" sz="2065" b="1" dirty="0">
+                <a:latin typeface="Times New Roman" panose="02020503050405090304" pitchFamily="18" charset="0"/>
+                <a:cs typeface="Times New Roman" panose="02020503050405090304" pitchFamily="18" charset="0"/>
               </a:rPr>
               <a:t>SC</a:t>
             </a:r>
-            <a:endParaRPr lang="zh-CN" altLang="en-US" sz="2067" b="1" dirty="0">
-              <a:latin typeface="Times New Roman" panose="02020603050405020304" pitchFamily="18" charset="0"/>
-              <a:cs typeface="Times New Roman" panose="02020603050405020304" pitchFamily="18" charset="0"/>
+            <a:endParaRPr lang="zh-CN" altLang="en-US" sz="2065" b="1" dirty="0">
+              <a:latin typeface="Times New Roman" panose="02020503050405090304" pitchFamily="18" charset="0"/>
+              <a:cs typeface="Times New Roman" panose="02020503050405090304" pitchFamily="18" charset="0"/>
             </a:endParaRPr>
           </a:p>
         </p:txBody>
       </p:sp>
       <p:sp>
         <p:nvSpPr>
-          <p:cNvPr id="203" name="矩形: 圆角 202">
-            <a:extLst>
-              <a:ext uri="{FF2B5EF4-FFF2-40B4-BE49-F238E27FC236}">
-                <a16:creationId xmlns:a16="http://schemas.microsoft.com/office/drawing/2014/main" id="{AAA2E79E-0D10-487E-9519-3A79D19D63AB}"/>
-              </a:ext>
-            </a:extLst>
-          </p:cNvPr>
+          <p:cNvPr id="203" name="矩形: 圆角 202"/>
           <p:cNvSpPr/>
           <p:nvPr/>
         </p:nvSpPr>
@@ -8552,34 +7990,28 @@
           <a:p>
             <a:pPr algn="ctr"/>
             <a:r>
-              <a:rPr lang="en-US" altLang="zh-CN" sz="1241" dirty="0">
+              <a:rPr lang="en-US" altLang="zh-CN" sz="1240" dirty="0">
                 <a:solidFill>
                   <a:schemeClr val="tx1"/>
                 </a:solidFill>
-                <a:latin typeface="Times New Roman" panose="02020603050405020304" pitchFamily="18" charset="0"/>
-                <a:cs typeface="Times New Roman" panose="02020603050405020304" pitchFamily="18" charset="0"/>
+                <a:latin typeface="Times New Roman" panose="02020503050405090304" pitchFamily="18" charset="0"/>
+                <a:cs typeface="Times New Roman" panose="02020503050405090304" pitchFamily="18" charset="0"/>
               </a:rPr>
               <a:t>Norm</a:t>
             </a:r>
-            <a:endParaRPr lang="zh-CN" altLang="en-US" sz="1241" dirty="0">
+            <a:endParaRPr lang="zh-CN" altLang="en-US" sz="1240" dirty="0">
               <a:solidFill>
                 <a:schemeClr val="tx1"/>
               </a:solidFill>
-              <a:latin typeface="Times New Roman" panose="02020603050405020304" pitchFamily="18" charset="0"/>
-              <a:cs typeface="Times New Roman" panose="02020603050405020304" pitchFamily="18" charset="0"/>
+              <a:latin typeface="Times New Roman" panose="02020503050405090304" pitchFamily="18" charset="0"/>
+              <a:cs typeface="Times New Roman" panose="02020503050405090304" pitchFamily="18" charset="0"/>
             </a:endParaRPr>
           </a:p>
         </p:txBody>
       </p:sp>
       <p:sp>
         <p:nvSpPr>
-          <p:cNvPr id="205" name="矩形: 圆角 204">
-            <a:extLst>
-              <a:ext uri="{FF2B5EF4-FFF2-40B4-BE49-F238E27FC236}">
-                <a16:creationId xmlns:a16="http://schemas.microsoft.com/office/drawing/2014/main" id="{E2E752A3-AE57-4D6A-B77F-3D317B26734D}"/>
-              </a:ext>
-            </a:extLst>
-          </p:cNvPr>
+          <p:cNvPr id="205" name="矩形: 圆角 204"/>
           <p:cNvSpPr/>
           <p:nvPr/>
         </p:nvSpPr>
@@ -8625,34 +8057,28 @@
           <a:p>
             <a:pPr algn="ctr"/>
             <a:r>
-              <a:rPr lang="en-US" altLang="zh-CN" sz="1241" dirty="0">
+              <a:rPr lang="en-US" altLang="zh-CN" sz="1240" dirty="0">
                 <a:solidFill>
                   <a:schemeClr val="tx1"/>
                 </a:solidFill>
-                <a:latin typeface="Times New Roman" panose="02020603050405020304" pitchFamily="18" charset="0"/>
-                <a:cs typeface="Times New Roman" panose="02020603050405020304" pitchFamily="18" charset="0"/>
+                <a:latin typeface="Times New Roman" panose="02020503050405090304" pitchFamily="18" charset="0"/>
+                <a:cs typeface="Times New Roman" panose="02020503050405090304" pitchFamily="18" charset="0"/>
               </a:rPr>
               <a:t>Full Connect</a:t>
             </a:r>
-            <a:endParaRPr lang="zh-CN" altLang="en-US" sz="1241" dirty="0">
+            <a:endParaRPr lang="zh-CN" altLang="en-US" sz="1240" dirty="0">
               <a:solidFill>
                 <a:schemeClr val="tx1"/>
               </a:solidFill>
-              <a:latin typeface="Times New Roman" panose="02020603050405020304" pitchFamily="18" charset="0"/>
-              <a:cs typeface="Times New Roman" panose="02020603050405020304" pitchFamily="18" charset="0"/>
+              <a:latin typeface="Times New Roman" panose="02020503050405090304" pitchFamily="18" charset="0"/>
+              <a:cs typeface="Times New Roman" panose="02020503050405090304" pitchFamily="18" charset="0"/>
             </a:endParaRPr>
           </a:p>
         </p:txBody>
       </p:sp>
       <p:sp>
         <p:nvSpPr>
-          <p:cNvPr id="206" name="矩形: 圆角 205">
-            <a:extLst>
-              <a:ext uri="{FF2B5EF4-FFF2-40B4-BE49-F238E27FC236}">
-                <a16:creationId xmlns:a16="http://schemas.microsoft.com/office/drawing/2014/main" id="{8E902D00-522D-47E7-AB43-21FDA138D007}"/>
-              </a:ext>
-            </a:extLst>
-          </p:cNvPr>
+          <p:cNvPr id="206" name="矩形: 圆角 205"/>
           <p:cNvSpPr/>
           <p:nvPr/>
         </p:nvSpPr>
@@ -8698,34 +8124,28 @@
           <a:p>
             <a:pPr algn="ctr"/>
             <a:r>
-              <a:rPr lang="en-US" altLang="zh-CN" sz="1241" dirty="0">
+              <a:rPr lang="en-US" altLang="zh-CN" sz="1240" dirty="0">
                 <a:solidFill>
                   <a:schemeClr val="tx1"/>
                 </a:solidFill>
-                <a:latin typeface="Times New Roman" panose="02020603050405020304" pitchFamily="18" charset="0"/>
-                <a:cs typeface="Times New Roman" panose="02020603050405020304" pitchFamily="18" charset="0"/>
+                <a:latin typeface="Times New Roman" panose="02020503050405090304" pitchFamily="18" charset="0"/>
+                <a:cs typeface="Times New Roman" panose="02020503050405090304" pitchFamily="18" charset="0"/>
               </a:rPr>
               <a:t>GeLU</a:t>
             </a:r>
-            <a:endParaRPr lang="zh-CN" altLang="en-US" sz="1241" dirty="0">
+            <a:endParaRPr lang="zh-CN" altLang="en-US" sz="1240" dirty="0">
               <a:solidFill>
                 <a:schemeClr val="tx1"/>
               </a:solidFill>
-              <a:latin typeface="Times New Roman" panose="02020603050405020304" pitchFamily="18" charset="0"/>
-              <a:cs typeface="Times New Roman" panose="02020603050405020304" pitchFamily="18" charset="0"/>
+              <a:latin typeface="Times New Roman" panose="02020503050405090304" pitchFamily="18" charset="0"/>
+              <a:cs typeface="Times New Roman" panose="02020503050405090304" pitchFamily="18" charset="0"/>
             </a:endParaRPr>
           </a:p>
         </p:txBody>
       </p:sp>
       <p:sp>
         <p:nvSpPr>
-          <p:cNvPr id="209" name="矩形: 圆角 208">
-            <a:extLst>
-              <a:ext uri="{FF2B5EF4-FFF2-40B4-BE49-F238E27FC236}">
-                <a16:creationId xmlns:a16="http://schemas.microsoft.com/office/drawing/2014/main" id="{8175C45E-6168-4F66-AEE7-038870C33E8B}"/>
-              </a:ext>
-            </a:extLst>
-          </p:cNvPr>
+          <p:cNvPr id="209" name="矩形: 圆角 208"/>
           <p:cNvSpPr/>
           <p:nvPr/>
         </p:nvSpPr>
@@ -8771,34 +8191,28 @@
           <a:p>
             <a:pPr algn="ctr"/>
             <a:r>
-              <a:rPr lang="en-US" altLang="zh-CN" sz="1241" dirty="0">
+              <a:rPr lang="en-US" altLang="zh-CN" sz="1240" dirty="0">
                 <a:solidFill>
                   <a:schemeClr val="tx1"/>
                 </a:solidFill>
-                <a:latin typeface="Times New Roman" panose="02020603050405020304" pitchFamily="18" charset="0"/>
-                <a:cs typeface="Times New Roman" panose="02020603050405020304" pitchFamily="18" charset="0"/>
+                <a:latin typeface="Times New Roman" panose="02020503050405090304" pitchFamily="18" charset="0"/>
+                <a:cs typeface="Times New Roman" panose="02020503050405090304" pitchFamily="18" charset="0"/>
               </a:rPr>
               <a:t>Full Connect</a:t>
             </a:r>
-            <a:endParaRPr lang="zh-CN" altLang="en-US" sz="1241" dirty="0">
+            <a:endParaRPr lang="zh-CN" altLang="en-US" sz="1240" dirty="0">
               <a:solidFill>
                 <a:schemeClr val="tx1"/>
               </a:solidFill>
-              <a:latin typeface="Times New Roman" panose="02020603050405020304" pitchFamily="18" charset="0"/>
-              <a:cs typeface="Times New Roman" panose="02020603050405020304" pitchFamily="18" charset="0"/>
+              <a:latin typeface="Times New Roman" panose="02020503050405090304" pitchFamily="18" charset="0"/>
+              <a:cs typeface="Times New Roman" panose="02020503050405090304" pitchFamily="18" charset="0"/>
             </a:endParaRPr>
           </a:p>
         </p:txBody>
       </p:sp>
       <p:sp>
         <p:nvSpPr>
-          <p:cNvPr id="210" name="矩形: 圆角 209">
-            <a:extLst>
-              <a:ext uri="{FF2B5EF4-FFF2-40B4-BE49-F238E27FC236}">
-                <a16:creationId xmlns:a16="http://schemas.microsoft.com/office/drawing/2014/main" id="{0487718F-4477-4169-A2C8-2047A4B73478}"/>
-              </a:ext>
-            </a:extLst>
-          </p:cNvPr>
+          <p:cNvPr id="210" name="矩形: 圆角 209"/>
           <p:cNvSpPr/>
           <p:nvPr/>
         </p:nvSpPr>
@@ -8844,34 +8258,28 @@
           <a:p>
             <a:pPr algn="ctr"/>
             <a:r>
-              <a:rPr lang="en-US" altLang="zh-CN" sz="1241">
+              <a:rPr lang="en-US" altLang="zh-CN" sz="1240">
                 <a:solidFill>
                   <a:schemeClr val="tx1"/>
                 </a:solidFill>
-                <a:latin typeface="Times New Roman" panose="02020603050405020304" pitchFamily="18" charset="0"/>
-                <a:cs typeface="Times New Roman" panose="02020603050405020304" pitchFamily="18" charset="0"/>
+                <a:latin typeface="Times New Roman" panose="02020503050405090304" pitchFamily="18" charset="0"/>
+                <a:cs typeface="Times New Roman" panose="02020503050405090304" pitchFamily="18" charset="0"/>
               </a:rPr>
               <a:t>DWC 5x5</a:t>
             </a:r>
-            <a:endParaRPr lang="zh-CN" altLang="en-US" sz="1241" dirty="0">
+            <a:endParaRPr lang="zh-CN" altLang="en-US" sz="1240" dirty="0">
               <a:solidFill>
                 <a:schemeClr val="tx1"/>
               </a:solidFill>
-              <a:latin typeface="Times New Roman" panose="02020603050405020304" pitchFamily="18" charset="0"/>
-              <a:cs typeface="Times New Roman" panose="02020603050405020304" pitchFamily="18" charset="0"/>
+              <a:latin typeface="Times New Roman" panose="02020503050405090304" pitchFamily="18" charset="0"/>
+              <a:cs typeface="Times New Roman" panose="02020503050405090304" pitchFamily="18" charset="0"/>
             </a:endParaRPr>
           </a:p>
         </p:txBody>
       </p:sp>
       <p:sp>
         <p:nvSpPr>
-          <p:cNvPr id="211" name="矩形: 圆角 210">
-            <a:extLst>
-              <a:ext uri="{FF2B5EF4-FFF2-40B4-BE49-F238E27FC236}">
-                <a16:creationId xmlns:a16="http://schemas.microsoft.com/office/drawing/2014/main" id="{BD3C55FC-1BCC-4506-A342-305AB3481872}"/>
-              </a:ext>
-            </a:extLst>
-          </p:cNvPr>
+          <p:cNvPr id="211" name="矩形: 圆角 210"/>
           <p:cNvSpPr/>
           <p:nvPr/>
         </p:nvSpPr>
@@ -8917,34 +8325,28 @@
           <a:p>
             <a:pPr algn="ctr"/>
             <a:r>
-              <a:rPr lang="en-US" altLang="zh-CN" sz="1241" dirty="0">
+              <a:rPr lang="en-US" altLang="zh-CN" sz="1240" dirty="0">
                 <a:solidFill>
                   <a:schemeClr val="tx1"/>
                 </a:solidFill>
-                <a:latin typeface="Times New Roman" panose="02020603050405020304" pitchFamily="18" charset="0"/>
-                <a:cs typeface="Times New Roman" panose="02020603050405020304" pitchFamily="18" charset="0"/>
+                <a:latin typeface="Times New Roman" panose="02020503050405090304" pitchFamily="18" charset="0"/>
+                <a:cs typeface="Times New Roman" panose="02020503050405090304" pitchFamily="18" charset="0"/>
               </a:rPr>
               <a:t>H Strip Conv</a:t>
             </a:r>
-            <a:endParaRPr lang="zh-CN" altLang="en-US" sz="1241" dirty="0">
+            <a:endParaRPr lang="zh-CN" altLang="en-US" sz="1240" dirty="0">
               <a:solidFill>
                 <a:schemeClr val="tx1"/>
               </a:solidFill>
-              <a:latin typeface="Times New Roman" panose="02020603050405020304" pitchFamily="18" charset="0"/>
-              <a:cs typeface="Times New Roman" panose="02020603050405020304" pitchFamily="18" charset="0"/>
+              <a:latin typeface="Times New Roman" panose="02020503050405090304" pitchFamily="18" charset="0"/>
+              <a:cs typeface="Times New Roman" panose="02020503050405090304" pitchFamily="18" charset="0"/>
             </a:endParaRPr>
           </a:p>
         </p:txBody>
       </p:sp>
       <p:sp>
         <p:nvSpPr>
-          <p:cNvPr id="212" name="矩形: 圆角 211">
-            <a:extLst>
-              <a:ext uri="{FF2B5EF4-FFF2-40B4-BE49-F238E27FC236}">
-                <a16:creationId xmlns:a16="http://schemas.microsoft.com/office/drawing/2014/main" id="{D18FEA08-073F-47D7-A15B-B84A092A9899}"/>
-              </a:ext>
-            </a:extLst>
-          </p:cNvPr>
+          <p:cNvPr id="212" name="矩形: 圆角 211"/>
           <p:cNvSpPr/>
           <p:nvPr/>
         </p:nvSpPr>
@@ -8990,34 +8392,28 @@
           <a:p>
             <a:pPr algn="ctr"/>
             <a:r>
-              <a:rPr lang="en-US" altLang="zh-CN" sz="1241" dirty="0">
+              <a:rPr lang="en-US" altLang="zh-CN" sz="1240" dirty="0">
                 <a:solidFill>
                   <a:schemeClr val="tx1"/>
                 </a:solidFill>
-                <a:latin typeface="Times New Roman" panose="02020603050405020304" pitchFamily="18" charset="0"/>
-                <a:cs typeface="Times New Roman" panose="02020603050405020304" pitchFamily="18" charset="0"/>
+                <a:latin typeface="Times New Roman" panose="02020503050405090304" pitchFamily="18" charset="0"/>
+                <a:cs typeface="Times New Roman" panose="02020503050405090304" pitchFamily="18" charset="0"/>
               </a:rPr>
               <a:t>V Strip Conv</a:t>
             </a:r>
-            <a:endParaRPr lang="zh-CN" altLang="en-US" sz="1241" dirty="0">
+            <a:endParaRPr lang="zh-CN" altLang="en-US" sz="1240" dirty="0">
               <a:solidFill>
                 <a:schemeClr val="tx1"/>
               </a:solidFill>
-              <a:latin typeface="Times New Roman" panose="02020603050405020304" pitchFamily="18" charset="0"/>
-              <a:cs typeface="Times New Roman" panose="02020603050405020304" pitchFamily="18" charset="0"/>
+              <a:latin typeface="Times New Roman" panose="02020503050405090304" pitchFamily="18" charset="0"/>
+              <a:cs typeface="Times New Roman" panose="02020503050405090304" pitchFamily="18" charset="0"/>
             </a:endParaRPr>
           </a:p>
         </p:txBody>
       </p:sp>
       <p:sp>
         <p:nvSpPr>
-          <p:cNvPr id="213" name="矩形: 圆角 212">
-            <a:extLst>
-              <a:ext uri="{FF2B5EF4-FFF2-40B4-BE49-F238E27FC236}">
-                <a16:creationId xmlns:a16="http://schemas.microsoft.com/office/drawing/2014/main" id="{EFBEA1C8-1647-4C84-9C3B-E248E67097D6}"/>
-              </a:ext>
-            </a:extLst>
-          </p:cNvPr>
+          <p:cNvPr id="213" name="矩形: 圆角 212"/>
           <p:cNvSpPr/>
           <p:nvPr/>
         </p:nvSpPr>
@@ -9063,34 +8459,28 @@
           <a:p>
             <a:pPr algn="ctr"/>
             <a:r>
-              <a:rPr lang="en-US" altLang="zh-CN" sz="1241" dirty="0">
+              <a:rPr lang="en-US" altLang="zh-CN" sz="1240" dirty="0">
                 <a:solidFill>
                   <a:schemeClr val="tx1"/>
                 </a:solidFill>
-                <a:latin typeface="Times New Roman" panose="02020603050405020304" pitchFamily="18" charset="0"/>
-                <a:cs typeface="Times New Roman" panose="02020603050405020304" pitchFamily="18" charset="0"/>
+                <a:latin typeface="Times New Roman" panose="02020503050405090304" pitchFamily="18" charset="0"/>
+                <a:cs typeface="Times New Roman" panose="02020503050405090304" pitchFamily="18" charset="0"/>
               </a:rPr>
               <a:t>PWC</a:t>
             </a:r>
-            <a:endParaRPr lang="zh-CN" altLang="en-US" sz="1241" dirty="0">
+            <a:endParaRPr lang="zh-CN" altLang="en-US" sz="1240" dirty="0">
               <a:solidFill>
                 <a:schemeClr val="tx1"/>
               </a:solidFill>
-              <a:latin typeface="Times New Roman" panose="02020603050405020304" pitchFamily="18" charset="0"/>
-              <a:cs typeface="Times New Roman" panose="02020603050405020304" pitchFamily="18" charset="0"/>
+              <a:latin typeface="Times New Roman" panose="02020503050405090304" pitchFamily="18" charset="0"/>
+              <a:cs typeface="Times New Roman" panose="02020503050405090304" pitchFamily="18" charset="0"/>
             </a:endParaRPr>
           </a:p>
         </p:txBody>
       </p:sp>
       <p:sp>
         <p:nvSpPr>
-          <p:cNvPr id="214" name="流程图: 汇总连接 213">
-            <a:extLst>
-              <a:ext uri="{FF2B5EF4-FFF2-40B4-BE49-F238E27FC236}">
-                <a16:creationId xmlns:a16="http://schemas.microsoft.com/office/drawing/2014/main" id="{592D875B-A6F8-487D-966C-6B99C0C05C14}"/>
-              </a:ext>
-            </a:extLst>
-          </p:cNvPr>
+          <p:cNvPr id="214" name="流程图: 汇总连接 213"/>
           <p:cNvSpPr/>
           <p:nvPr/>
         </p:nvSpPr>
@@ -9132,21 +8522,14 @@
           <a:lstStyle/>
           <a:p>
             <a:pPr algn="ctr"/>
-            <a:endParaRPr lang="zh-CN" altLang="en-US" sz="1861" dirty="0"/>
+            <a:endParaRPr lang="zh-CN" altLang="en-US" sz="1860" dirty="0"/>
           </a:p>
         </p:txBody>
       </p:sp>
       <p:cxnSp>
         <p:nvCxnSpPr>
-          <p:cNvPr id="245" name="直接箭头连接符 244">
-            <a:extLst>
-              <a:ext uri="{FF2B5EF4-FFF2-40B4-BE49-F238E27FC236}">
-                <a16:creationId xmlns:a16="http://schemas.microsoft.com/office/drawing/2014/main" id="{A4D39DCA-982C-46AF-97C1-41CE410DD708}"/>
-              </a:ext>
-            </a:extLst>
-          </p:cNvPr>
+          <p:cNvPr id="245" name="直接箭头连接符 244"/>
           <p:cNvCxnSpPr>
-            <a:cxnSpLocks/>
             <a:stCxn id="213" idx="2"/>
             <a:endCxn id="214" idx="0"/>
           </p:cNvCxnSpPr>
@@ -9184,15 +8567,8 @@
       </p:cxnSp>
       <p:cxnSp>
         <p:nvCxnSpPr>
-          <p:cNvPr id="248" name="直接箭头连接符 247">
-            <a:extLst>
-              <a:ext uri="{FF2B5EF4-FFF2-40B4-BE49-F238E27FC236}">
-                <a16:creationId xmlns:a16="http://schemas.microsoft.com/office/drawing/2014/main" id="{51A1219A-F447-4CF0-AC29-7036FD9701D8}"/>
-              </a:ext>
-            </a:extLst>
-          </p:cNvPr>
+          <p:cNvPr id="248" name="直接箭头连接符 247"/>
           <p:cNvCxnSpPr>
-            <a:cxnSpLocks/>
             <a:stCxn id="214" idx="4"/>
             <a:endCxn id="209" idx="0"/>
           </p:cNvCxnSpPr>
@@ -9230,13 +8606,7 @@
       </p:cxnSp>
       <p:sp>
         <p:nvSpPr>
-          <p:cNvPr id="253" name="流程图: 或者 252">
-            <a:extLst>
-              <a:ext uri="{FF2B5EF4-FFF2-40B4-BE49-F238E27FC236}">
-                <a16:creationId xmlns:a16="http://schemas.microsoft.com/office/drawing/2014/main" id="{49F17968-BB3C-4A76-8BEB-F6AC643A2D78}"/>
-              </a:ext>
-            </a:extLst>
-          </p:cNvPr>
+          <p:cNvPr id="253" name="流程图: 或者 252"/>
           <p:cNvSpPr/>
           <p:nvPr/>
         </p:nvSpPr>
@@ -9278,19 +8648,13 @@
           <a:lstStyle/>
           <a:p>
             <a:pPr algn="ctr"/>
-            <a:endParaRPr lang="zh-CN" altLang="en-US" sz="1861"/>
-          </a:p>
-        </p:txBody>
-      </p:sp>
-      <p:sp>
-        <p:nvSpPr>
-          <p:cNvPr id="269" name="矩形: 圆角 268">
-            <a:extLst>
-              <a:ext uri="{FF2B5EF4-FFF2-40B4-BE49-F238E27FC236}">
-                <a16:creationId xmlns:a16="http://schemas.microsoft.com/office/drawing/2014/main" id="{73DE45F7-3F59-4C82-8438-A30A46B0D7CF}"/>
-              </a:ext>
-            </a:extLst>
-          </p:cNvPr>
+            <a:endParaRPr lang="zh-CN" altLang="en-US" sz="1860"/>
+          </a:p>
+        </p:txBody>
+      </p:sp>
+      <p:sp>
+        <p:nvSpPr>
+          <p:cNvPr id="269" name="矩形: 圆角 268"/>
           <p:cNvSpPr/>
           <p:nvPr/>
         </p:nvSpPr>
@@ -9336,34 +8700,28 @@
           <a:p>
             <a:pPr algn="ctr"/>
             <a:r>
-              <a:rPr lang="en-US" altLang="zh-CN" sz="1241" dirty="0">
+              <a:rPr lang="en-US" altLang="zh-CN" sz="1240" dirty="0">
                 <a:solidFill>
                   <a:schemeClr val="tx1"/>
                 </a:solidFill>
-                <a:latin typeface="Times New Roman" panose="02020603050405020304" pitchFamily="18" charset="0"/>
-                <a:cs typeface="Times New Roman" panose="02020603050405020304" pitchFamily="18" charset="0"/>
+                <a:latin typeface="Times New Roman" panose="02020503050405090304" pitchFamily="18" charset="0"/>
+                <a:cs typeface="Times New Roman" panose="02020503050405090304" pitchFamily="18" charset="0"/>
               </a:rPr>
               <a:t>Norm</a:t>
             </a:r>
-            <a:endParaRPr lang="zh-CN" altLang="en-US" sz="1241" dirty="0">
+            <a:endParaRPr lang="zh-CN" altLang="en-US" sz="1240" dirty="0">
               <a:solidFill>
                 <a:schemeClr val="tx1"/>
               </a:solidFill>
-              <a:latin typeface="Times New Roman" panose="02020603050405020304" pitchFamily="18" charset="0"/>
-              <a:cs typeface="Times New Roman" panose="02020603050405020304" pitchFamily="18" charset="0"/>
+              <a:latin typeface="Times New Roman" panose="02020503050405090304" pitchFamily="18" charset="0"/>
+              <a:cs typeface="Times New Roman" panose="02020503050405090304" pitchFamily="18" charset="0"/>
             </a:endParaRPr>
           </a:p>
         </p:txBody>
       </p:sp>
       <p:sp>
         <p:nvSpPr>
-          <p:cNvPr id="270" name="矩形: 圆角 269">
-            <a:extLst>
-              <a:ext uri="{FF2B5EF4-FFF2-40B4-BE49-F238E27FC236}">
-                <a16:creationId xmlns:a16="http://schemas.microsoft.com/office/drawing/2014/main" id="{17D39D9B-5901-47F0-A912-E4D1D37A0F76}"/>
-              </a:ext>
-            </a:extLst>
-          </p:cNvPr>
+          <p:cNvPr id="270" name="矩形: 圆角 269"/>
           <p:cNvSpPr/>
           <p:nvPr/>
         </p:nvSpPr>
@@ -9409,36 +8767,29 @@
           <a:p>
             <a:pPr algn="ctr"/>
             <a:r>
-              <a:rPr lang="en-US" altLang="zh-CN" sz="1241" dirty="0">
+              <a:rPr lang="en-US" altLang="zh-CN" sz="1240" dirty="0">
                 <a:solidFill>
                   <a:schemeClr val="tx1"/>
                 </a:solidFill>
-                <a:latin typeface="Times New Roman" panose="02020603050405020304" pitchFamily="18" charset="0"/>
-                <a:cs typeface="Times New Roman" panose="02020603050405020304" pitchFamily="18" charset="0"/>
+                <a:latin typeface="Times New Roman" panose="02020503050405090304" pitchFamily="18" charset="0"/>
+                <a:cs typeface="Times New Roman" panose="02020503050405090304" pitchFamily="18" charset="0"/>
               </a:rPr>
               <a:t>Full Connect</a:t>
             </a:r>
-            <a:endParaRPr lang="zh-CN" altLang="en-US" sz="1241" dirty="0">
+            <a:endParaRPr lang="zh-CN" altLang="en-US" sz="1240" dirty="0">
               <a:solidFill>
                 <a:schemeClr val="tx1"/>
               </a:solidFill>
-              <a:latin typeface="Times New Roman" panose="02020603050405020304" pitchFamily="18" charset="0"/>
-              <a:cs typeface="Times New Roman" panose="02020603050405020304" pitchFamily="18" charset="0"/>
+              <a:latin typeface="Times New Roman" panose="02020503050405090304" pitchFamily="18" charset="0"/>
+              <a:cs typeface="Times New Roman" panose="02020503050405090304" pitchFamily="18" charset="0"/>
             </a:endParaRPr>
           </a:p>
         </p:txBody>
       </p:sp>
       <p:cxnSp>
         <p:nvCxnSpPr>
-          <p:cNvPr id="271" name="直接箭头连接符 270">
-            <a:extLst>
-              <a:ext uri="{FF2B5EF4-FFF2-40B4-BE49-F238E27FC236}">
-                <a16:creationId xmlns:a16="http://schemas.microsoft.com/office/drawing/2014/main" id="{6EA9024D-6B6D-484B-B74D-6841188D7555}"/>
-              </a:ext>
-            </a:extLst>
-          </p:cNvPr>
+          <p:cNvPr id="271" name="直接箭头连接符 270"/>
           <p:cNvCxnSpPr>
-            <a:cxnSpLocks/>
             <a:stCxn id="253" idx="4"/>
             <a:endCxn id="269" idx="0"/>
           </p:cNvCxnSpPr>
@@ -9476,13 +8827,7 @@
       </p:cxnSp>
       <p:sp>
         <p:nvSpPr>
-          <p:cNvPr id="280" name="流程图: 或者 279">
-            <a:extLst>
-              <a:ext uri="{FF2B5EF4-FFF2-40B4-BE49-F238E27FC236}">
-                <a16:creationId xmlns:a16="http://schemas.microsoft.com/office/drawing/2014/main" id="{CDA4E25D-0D19-44BA-9CA7-9930C3658064}"/>
-              </a:ext>
-            </a:extLst>
-          </p:cNvPr>
+          <p:cNvPr id="280" name="流程图: 或者 279"/>
           <p:cNvSpPr/>
           <p:nvPr/>
         </p:nvSpPr>
@@ -9524,22 +8869,14 @@
           <a:lstStyle/>
           <a:p>
             <a:pPr algn="ctr"/>
-            <a:endParaRPr lang="zh-CN" altLang="en-US" sz="1861"/>
+            <a:endParaRPr lang="zh-CN" altLang="en-US" sz="1860"/>
           </a:p>
         </p:txBody>
       </p:sp>
       <p:cxnSp>
         <p:nvCxnSpPr>
-          <p:cNvPr id="284" name="直接箭头连接符 283">
-            <a:extLst>
-              <a:ext uri="{FF2B5EF4-FFF2-40B4-BE49-F238E27FC236}">
-                <a16:creationId xmlns:a16="http://schemas.microsoft.com/office/drawing/2014/main" id="{E6054A0C-F4D8-49C4-B99D-57608762992F}"/>
-              </a:ext>
-            </a:extLst>
-          </p:cNvPr>
-          <p:cNvCxnSpPr>
-            <a:cxnSpLocks/>
-          </p:cNvCxnSpPr>
+          <p:cNvPr id="284" name="直接箭头连接符 283"/>
+          <p:cNvCxnSpPr/>
           <p:nvPr/>
         </p:nvCxnSpPr>
         <p:spPr>
@@ -9574,15 +8911,8 @@
       </p:cxnSp>
       <p:cxnSp>
         <p:nvCxnSpPr>
-          <p:cNvPr id="329" name="直接箭头连接符 328">
-            <a:extLst>
-              <a:ext uri="{FF2B5EF4-FFF2-40B4-BE49-F238E27FC236}">
-                <a16:creationId xmlns:a16="http://schemas.microsoft.com/office/drawing/2014/main" id="{5E211579-322B-4CE3-B9DA-D1FB4D757E85}"/>
-              </a:ext>
-            </a:extLst>
-          </p:cNvPr>
+          <p:cNvPr id="329" name="直接箭头连接符 328"/>
           <p:cNvCxnSpPr>
-            <a:cxnSpLocks/>
             <a:stCxn id="209" idx="2"/>
             <a:endCxn id="253" idx="0"/>
           </p:cNvCxnSpPr>
@@ -9620,13 +8950,7 @@
       </p:cxnSp>
       <p:sp>
         <p:nvSpPr>
-          <p:cNvPr id="355" name="文本框 354">
-            <a:extLst>
-              <a:ext uri="{FF2B5EF4-FFF2-40B4-BE49-F238E27FC236}">
-                <a16:creationId xmlns:a16="http://schemas.microsoft.com/office/drawing/2014/main" id="{7DCCE4E2-243A-4256-9F00-9B3B62AF4450}"/>
-              </a:ext>
-            </a:extLst>
-          </p:cNvPr>
+          <p:cNvPr id="355" name="文本框 354"/>
           <p:cNvSpPr txBox="1"/>
           <p:nvPr/>
         </p:nvSpPr>
@@ -9648,35 +8972,29 @@
           <a:p>
             <a:pPr algn="ctr"/>
             <a:r>
-              <a:rPr lang="en-US" altLang="zh-CN" sz="1654" dirty="0">
-                <a:latin typeface="Times New Roman" panose="02020603050405020304" pitchFamily="18" charset="0"/>
-                <a:cs typeface="Times New Roman" panose="02020603050405020304" pitchFamily="18" charset="0"/>
+              <a:rPr lang="en-US" altLang="zh-CN" sz="1655" dirty="0">
+                <a:latin typeface="Times New Roman" panose="02020503050405090304" pitchFamily="18" charset="0"/>
+                <a:cs typeface="Times New Roman" panose="02020503050405090304" pitchFamily="18" charset="0"/>
               </a:rPr>
               <a:t>(i) </a:t>
             </a:r>
             <a:r>
-              <a:rPr lang="en-US" altLang="zh-CN" sz="1654" b="1" dirty="0">
-                <a:latin typeface="Times New Roman" panose="02020603050405020304" pitchFamily="18" charset="0"/>
-                <a:cs typeface="Times New Roman" panose="02020603050405020304" pitchFamily="18" charset="0"/>
+              <a:rPr lang="en-US" altLang="zh-CN" sz="1655" b="1" dirty="0">
+                <a:latin typeface="Times New Roman" panose="02020503050405090304" pitchFamily="18" charset="0"/>
+                <a:cs typeface="Times New Roman" panose="02020503050405090304" pitchFamily="18" charset="0"/>
               </a:rPr>
               <a:t>Strip Block</a:t>
             </a:r>
-            <a:endParaRPr lang="zh-CN" altLang="en-US" sz="1654" b="1" dirty="0">
-              <a:latin typeface="Times New Roman" panose="02020603050405020304" pitchFamily="18" charset="0"/>
-              <a:cs typeface="Times New Roman" panose="02020603050405020304" pitchFamily="18" charset="0"/>
+            <a:endParaRPr lang="zh-CN" altLang="en-US" sz="1655" b="1" dirty="0">
+              <a:latin typeface="Times New Roman" panose="02020503050405090304" pitchFamily="18" charset="0"/>
+              <a:cs typeface="Times New Roman" panose="02020503050405090304" pitchFamily="18" charset="0"/>
             </a:endParaRPr>
           </a:p>
         </p:txBody>
       </p:sp>
       <p:sp>
         <p:nvSpPr>
-          <p:cNvPr id="366" name="文本框 365">
-            <a:extLst>
-              <a:ext uri="{FF2B5EF4-FFF2-40B4-BE49-F238E27FC236}">
-                <a16:creationId xmlns:a16="http://schemas.microsoft.com/office/drawing/2014/main" id="{3C6BB25D-24E5-4F63-846A-5F4128E95B1B}"/>
-              </a:ext>
-            </a:extLst>
-          </p:cNvPr>
+          <p:cNvPr id="366" name="文本框 365"/>
           <p:cNvSpPr txBox="1"/>
           <p:nvPr/>
         </p:nvSpPr>
@@ -9698,35 +9016,29 @@
           <a:p>
             <a:pPr algn="ctr"/>
             <a:r>
-              <a:rPr lang="en-US" altLang="zh-CN" sz="1654" dirty="0">
-                <a:latin typeface="Times New Roman" panose="02020603050405020304" pitchFamily="18" charset="0"/>
-                <a:cs typeface="Times New Roman" panose="02020603050405020304" pitchFamily="18" charset="0"/>
+              <a:rPr lang="en-US" altLang="zh-CN" sz="1655" dirty="0">
+                <a:latin typeface="Times New Roman" panose="02020503050405090304" pitchFamily="18" charset="0"/>
+                <a:cs typeface="Times New Roman" panose="02020503050405090304" pitchFamily="18" charset="0"/>
               </a:rPr>
               <a:t>(j) </a:t>
             </a:r>
             <a:r>
-              <a:rPr lang="en-US" altLang="zh-CN" sz="1654" b="1" dirty="0">
-                <a:latin typeface="Times New Roman" panose="02020603050405020304" pitchFamily="18" charset="0"/>
-                <a:cs typeface="Times New Roman" panose="02020603050405020304" pitchFamily="18" charset="0"/>
+              <a:rPr lang="en-US" altLang="zh-CN" sz="1655" b="1" dirty="0">
+                <a:latin typeface="Times New Roman" panose="02020503050405090304" pitchFamily="18" charset="0"/>
+                <a:cs typeface="Times New Roman" panose="02020503050405090304" pitchFamily="18" charset="0"/>
               </a:rPr>
               <a:t>Strip Module</a:t>
             </a:r>
-            <a:endParaRPr lang="zh-CN" altLang="en-US" sz="1654" b="1" dirty="0">
-              <a:latin typeface="Times New Roman" panose="02020603050405020304" pitchFamily="18" charset="0"/>
-              <a:cs typeface="Times New Roman" panose="02020603050405020304" pitchFamily="18" charset="0"/>
+            <a:endParaRPr lang="zh-CN" altLang="en-US" sz="1655" b="1" dirty="0">
+              <a:latin typeface="Times New Roman" panose="02020503050405090304" pitchFamily="18" charset="0"/>
+              <a:cs typeface="Times New Roman" panose="02020503050405090304" pitchFamily="18" charset="0"/>
             </a:endParaRPr>
           </a:p>
         </p:txBody>
       </p:sp>
       <p:sp>
         <p:nvSpPr>
-          <p:cNvPr id="194" name="流程图: 汇总连接 193">
-            <a:extLst>
-              <a:ext uri="{FF2B5EF4-FFF2-40B4-BE49-F238E27FC236}">
-                <a16:creationId xmlns:a16="http://schemas.microsoft.com/office/drawing/2014/main" id="{7E8B1D4D-F1E2-4E5E-9E77-C2DC81EEBBF2}"/>
-              </a:ext>
-            </a:extLst>
-          </p:cNvPr>
+          <p:cNvPr id="194" name="流程图: 汇总连接 193"/>
           <p:cNvSpPr/>
           <p:nvPr/>
         </p:nvSpPr>
@@ -9768,19 +9080,13 @@
           <a:lstStyle/>
           <a:p>
             <a:pPr algn="ctr"/>
-            <a:endParaRPr lang="zh-CN" altLang="en-US" sz="1861" dirty="0"/>
-          </a:p>
-        </p:txBody>
-      </p:sp>
-      <p:sp>
-        <p:nvSpPr>
-          <p:cNvPr id="195" name="文本框 194">
-            <a:extLst>
-              <a:ext uri="{FF2B5EF4-FFF2-40B4-BE49-F238E27FC236}">
-                <a16:creationId xmlns:a16="http://schemas.microsoft.com/office/drawing/2014/main" id="{164E292F-4C7C-4A08-A93C-11A64B999E83}"/>
-              </a:ext>
-            </a:extLst>
-          </p:cNvPr>
+            <a:endParaRPr lang="zh-CN" altLang="en-US" sz="1860" dirty="0"/>
+          </a:p>
+        </p:txBody>
+      </p:sp>
+      <p:sp>
+        <p:nvSpPr>
+          <p:cNvPr id="195" name="文本框 194"/>
           <p:cNvSpPr txBox="1"/>
           <p:nvPr/>
         </p:nvSpPr>
@@ -9801,28 +9107,22 @@
           <a:lstStyle/>
           <a:p>
             <a:r>
-              <a:rPr lang="en-US" altLang="zh-CN" sz="1654" dirty="0">
-                <a:latin typeface="Times New Roman" panose="02020603050405020304" pitchFamily="18" charset="0"/>
-                <a:cs typeface="Times New Roman" panose="02020603050405020304" pitchFamily="18" charset="0"/>
+              <a:rPr lang="en-US" altLang="zh-CN" sz="1655" dirty="0">
+                <a:latin typeface="Times New Roman" panose="02020503050405090304" pitchFamily="18" charset="0"/>
+                <a:cs typeface="Times New Roman" panose="02020503050405090304" pitchFamily="18" charset="0"/>
               </a:rPr>
               <a:t>Hadamard Product</a:t>
             </a:r>
-            <a:endParaRPr lang="zh-CN" altLang="en-US" sz="1654" b="1" dirty="0">
-              <a:latin typeface="Times New Roman" panose="02020603050405020304" pitchFamily="18" charset="0"/>
-              <a:cs typeface="Times New Roman" panose="02020603050405020304" pitchFamily="18" charset="0"/>
+            <a:endParaRPr lang="zh-CN" altLang="en-US" sz="1655" b="1" dirty="0">
+              <a:latin typeface="Times New Roman" panose="02020503050405090304" pitchFamily="18" charset="0"/>
+              <a:cs typeface="Times New Roman" panose="02020503050405090304" pitchFamily="18" charset="0"/>
             </a:endParaRPr>
           </a:p>
         </p:txBody>
       </p:sp>
       <p:sp>
         <p:nvSpPr>
-          <p:cNvPr id="198" name="流程图: 或者 197">
-            <a:extLst>
-              <a:ext uri="{FF2B5EF4-FFF2-40B4-BE49-F238E27FC236}">
-                <a16:creationId xmlns:a16="http://schemas.microsoft.com/office/drawing/2014/main" id="{BA376CCC-9D42-494A-AC76-9EA16B0D54CD}"/>
-              </a:ext>
-            </a:extLst>
-          </p:cNvPr>
+          <p:cNvPr id="198" name="流程图: 或者 197"/>
           <p:cNvSpPr/>
           <p:nvPr/>
         </p:nvSpPr>
@@ -9864,19 +9164,13 @@
           <a:lstStyle/>
           <a:p>
             <a:pPr algn="ctr"/>
-            <a:endParaRPr lang="zh-CN" altLang="en-US" sz="1861"/>
-          </a:p>
-        </p:txBody>
-      </p:sp>
-      <p:sp>
-        <p:nvSpPr>
-          <p:cNvPr id="199" name="文本框 198">
-            <a:extLst>
-              <a:ext uri="{FF2B5EF4-FFF2-40B4-BE49-F238E27FC236}">
-                <a16:creationId xmlns:a16="http://schemas.microsoft.com/office/drawing/2014/main" id="{7B5AEF44-39B5-42D6-BC13-310ADC83042C}"/>
-              </a:ext>
-            </a:extLst>
-          </p:cNvPr>
+            <a:endParaRPr lang="zh-CN" altLang="en-US" sz="1860"/>
+          </a:p>
+        </p:txBody>
+      </p:sp>
+      <p:sp>
+        <p:nvSpPr>
+          <p:cNvPr id="199" name="文本框 198"/>
           <p:cNvSpPr txBox="1"/>
           <p:nvPr/>
         </p:nvSpPr>
@@ -9897,28 +9191,22 @@
           <a:lstStyle/>
           <a:p>
             <a:r>
-              <a:rPr lang="en-US" altLang="zh-CN" sz="1654" dirty="0">
-                <a:latin typeface="Times New Roman" panose="02020603050405020304" pitchFamily="18" charset="0"/>
-                <a:cs typeface="Times New Roman" panose="02020603050405020304" pitchFamily="18" charset="0"/>
+              <a:rPr lang="en-US" altLang="zh-CN" sz="1655" dirty="0">
+                <a:latin typeface="Times New Roman" panose="02020503050405090304" pitchFamily="18" charset="0"/>
+                <a:cs typeface="Times New Roman" panose="02020503050405090304" pitchFamily="18" charset="0"/>
               </a:rPr>
               <a:t>Bit-wise Addition</a:t>
             </a:r>
-            <a:endParaRPr lang="zh-CN" altLang="en-US" sz="1654" b="1" dirty="0">
-              <a:latin typeface="Times New Roman" panose="02020603050405020304" pitchFamily="18" charset="0"/>
-              <a:cs typeface="Times New Roman" panose="02020603050405020304" pitchFamily="18" charset="0"/>
+            <a:endParaRPr lang="zh-CN" altLang="en-US" sz="1655" b="1" dirty="0">
+              <a:latin typeface="Times New Roman" panose="02020503050405090304" pitchFamily="18" charset="0"/>
+              <a:cs typeface="Times New Roman" panose="02020503050405090304" pitchFamily="18" charset="0"/>
             </a:endParaRPr>
           </a:p>
         </p:txBody>
       </p:sp>
       <p:sp>
         <p:nvSpPr>
-          <p:cNvPr id="208" name="椭圆 207">
-            <a:extLst>
-              <a:ext uri="{FF2B5EF4-FFF2-40B4-BE49-F238E27FC236}">
-                <a16:creationId xmlns:a16="http://schemas.microsoft.com/office/drawing/2014/main" id="{DC7392FF-EBBC-440F-8B2B-6D7D37CD1EA0}"/>
-              </a:ext>
-            </a:extLst>
-          </p:cNvPr>
+          <p:cNvPr id="208" name="椭圆 207"/>
           <p:cNvSpPr/>
           <p:nvPr/>
         </p:nvSpPr>
@@ -9961,7 +9249,7 @@
           <a:p>
             <a:pPr algn="ctr"/>
             <a:r>
-              <a:rPr lang="en-US" altLang="zh-CN" sz="1861" dirty="0">
+              <a:rPr lang="en-US" altLang="zh-CN" sz="1860" dirty="0">
                 <a:solidFill>
                   <a:schemeClr val="tx1"/>
                 </a:solidFill>
@@ -9969,7 +9257,7 @@
               </a:rPr>
               <a:t>c</a:t>
             </a:r>
-            <a:endParaRPr lang="zh-CN" altLang="en-US" sz="1861" dirty="0">
+            <a:endParaRPr lang="zh-CN" altLang="en-US" sz="1860" dirty="0">
               <a:solidFill>
                 <a:schemeClr val="tx1"/>
               </a:solidFill>
@@ -9980,13 +9268,7 @@
       </p:sp>
       <p:sp>
         <p:nvSpPr>
-          <p:cNvPr id="216" name="文本框 215">
-            <a:extLst>
-              <a:ext uri="{FF2B5EF4-FFF2-40B4-BE49-F238E27FC236}">
-                <a16:creationId xmlns:a16="http://schemas.microsoft.com/office/drawing/2014/main" id="{654B2318-C228-4BE2-8F74-06D47B52F611}"/>
-              </a:ext>
-            </a:extLst>
-          </p:cNvPr>
+          <p:cNvPr id="216" name="文本框 215"/>
           <p:cNvSpPr txBox="1"/>
           <p:nvPr/>
         </p:nvSpPr>
@@ -10007,28 +9289,22 @@
           <a:lstStyle/>
           <a:p>
             <a:r>
-              <a:rPr lang="en-US" altLang="zh-CN" sz="1654" dirty="0">
-                <a:latin typeface="Times New Roman" panose="02020603050405020304" pitchFamily="18" charset="0"/>
-                <a:cs typeface="Times New Roman" panose="02020603050405020304" pitchFamily="18" charset="0"/>
+              <a:rPr lang="en-US" altLang="zh-CN" sz="1655" dirty="0">
+                <a:latin typeface="Times New Roman" panose="02020503050405090304" pitchFamily="18" charset="0"/>
+                <a:cs typeface="Times New Roman" panose="02020503050405090304" pitchFamily="18" charset="0"/>
               </a:rPr>
               <a:t> Concatenation</a:t>
             </a:r>
-            <a:endParaRPr lang="zh-CN" altLang="en-US" sz="1654" b="1" dirty="0">
-              <a:latin typeface="Times New Roman" panose="02020603050405020304" pitchFamily="18" charset="0"/>
-              <a:cs typeface="Times New Roman" panose="02020603050405020304" pitchFamily="18" charset="0"/>
+            <a:endParaRPr lang="zh-CN" altLang="en-US" sz="1655" b="1" dirty="0">
+              <a:latin typeface="Times New Roman" panose="02020503050405090304" pitchFamily="18" charset="0"/>
+              <a:cs typeface="Times New Roman" panose="02020503050405090304" pitchFamily="18" charset="0"/>
             </a:endParaRPr>
           </a:p>
         </p:txBody>
       </p:sp>
       <p:sp>
         <p:nvSpPr>
-          <p:cNvPr id="243" name="矩形: 圆角 242">
-            <a:extLst>
-              <a:ext uri="{FF2B5EF4-FFF2-40B4-BE49-F238E27FC236}">
-                <a16:creationId xmlns:a16="http://schemas.microsoft.com/office/drawing/2014/main" id="{153F5B4F-3824-4FE4-8E99-2D7B2F463BBA}"/>
-              </a:ext>
-            </a:extLst>
-          </p:cNvPr>
+          <p:cNvPr id="243" name="矩形: 圆角 242"/>
           <p:cNvSpPr/>
           <p:nvPr/>
         </p:nvSpPr>
@@ -10074,34 +9350,28 @@
           <a:p>
             <a:pPr algn="ctr"/>
             <a:r>
-              <a:rPr lang="en-US" altLang="zh-CN" sz="1036" dirty="0">
+              <a:rPr lang="en-US" altLang="zh-CN" sz="1035" dirty="0">
                 <a:solidFill>
                   <a:schemeClr val="tx1"/>
                 </a:solidFill>
-                <a:latin typeface="Times New Roman" panose="02020603050405020304" pitchFamily="18" charset="0"/>
-                <a:cs typeface="Times New Roman" panose="02020603050405020304" pitchFamily="18" charset="0"/>
+                <a:latin typeface="Times New Roman" panose="02020503050405090304" pitchFamily="18" charset="0"/>
+                <a:cs typeface="Times New Roman" panose="02020503050405090304" pitchFamily="18" charset="0"/>
               </a:rPr>
               <a:t>AAP </a:t>
             </a:r>
-            <a:endParaRPr lang="zh-CN" altLang="en-US" sz="1036" dirty="0">
+            <a:endParaRPr lang="zh-CN" altLang="en-US" sz="1035" dirty="0">
               <a:solidFill>
                 <a:schemeClr val="tx1"/>
               </a:solidFill>
-              <a:latin typeface="Times New Roman" panose="02020603050405020304" pitchFamily="18" charset="0"/>
-              <a:cs typeface="Times New Roman" panose="02020603050405020304" pitchFamily="18" charset="0"/>
+              <a:latin typeface="Times New Roman" panose="02020503050405090304" pitchFamily="18" charset="0"/>
+              <a:cs typeface="Times New Roman" panose="02020503050405090304" pitchFamily="18" charset="0"/>
             </a:endParaRPr>
           </a:p>
         </p:txBody>
       </p:sp>
       <p:sp>
         <p:nvSpPr>
-          <p:cNvPr id="246" name="矩形: 圆角 245">
-            <a:extLst>
-              <a:ext uri="{FF2B5EF4-FFF2-40B4-BE49-F238E27FC236}">
-                <a16:creationId xmlns:a16="http://schemas.microsoft.com/office/drawing/2014/main" id="{941938F4-3AA8-4223-AF7F-992F40416736}"/>
-              </a:ext>
-            </a:extLst>
-          </p:cNvPr>
+          <p:cNvPr id="246" name="矩形: 圆角 245"/>
           <p:cNvSpPr/>
           <p:nvPr/>
         </p:nvSpPr>
@@ -10147,34 +9417,28 @@
           <a:p>
             <a:pPr algn="ctr"/>
             <a:r>
-              <a:rPr lang="en-US" altLang="zh-CN" sz="1036" dirty="0">
+              <a:rPr lang="en-US" altLang="zh-CN" sz="1035" dirty="0">
                 <a:solidFill>
                   <a:schemeClr val="tx1"/>
                 </a:solidFill>
-                <a:latin typeface="Times New Roman" panose="02020603050405020304" pitchFamily="18" charset="0"/>
-                <a:cs typeface="Times New Roman" panose="02020603050405020304" pitchFamily="18" charset="0"/>
+                <a:latin typeface="Times New Roman" panose="02020503050405090304" pitchFamily="18" charset="0"/>
+                <a:cs typeface="Times New Roman" panose="02020503050405090304" pitchFamily="18" charset="0"/>
               </a:rPr>
               <a:t>AMP </a:t>
             </a:r>
-            <a:endParaRPr lang="zh-CN" altLang="en-US" sz="1036" dirty="0">
+            <a:endParaRPr lang="zh-CN" altLang="en-US" sz="1035" dirty="0">
               <a:solidFill>
                 <a:schemeClr val="tx1"/>
               </a:solidFill>
-              <a:latin typeface="Times New Roman" panose="02020603050405020304" pitchFamily="18" charset="0"/>
-              <a:cs typeface="Times New Roman" panose="02020603050405020304" pitchFamily="18" charset="0"/>
+              <a:latin typeface="Times New Roman" panose="02020503050405090304" pitchFamily="18" charset="0"/>
+              <a:cs typeface="Times New Roman" panose="02020503050405090304" pitchFamily="18" charset="0"/>
             </a:endParaRPr>
           </a:p>
         </p:txBody>
       </p:sp>
       <p:sp>
         <p:nvSpPr>
-          <p:cNvPr id="247" name="文本框 246">
-            <a:extLst>
-              <a:ext uri="{FF2B5EF4-FFF2-40B4-BE49-F238E27FC236}">
-                <a16:creationId xmlns:a16="http://schemas.microsoft.com/office/drawing/2014/main" id="{09A1347D-459C-428B-9A2B-F4BC0ED77D17}"/>
-              </a:ext>
-            </a:extLst>
-          </p:cNvPr>
+          <p:cNvPr id="247" name="文本框 246"/>
           <p:cNvSpPr txBox="1"/>
           <p:nvPr/>
         </p:nvSpPr>
@@ -10195,28 +9459,22 @@
           <a:lstStyle/>
           <a:p>
             <a:r>
-              <a:rPr lang="en-US" altLang="zh-CN" sz="1448" dirty="0">
-                <a:latin typeface="Times New Roman" panose="02020603050405020304" pitchFamily="18" charset="0"/>
-                <a:cs typeface="Times New Roman" panose="02020603050405020304" pitchFamily="18" charset="0"/>
+              <a:rPr lang="en-US" altLang="zh-CN" sz="1450" dirty="0">
+                <a:latin typeface="Times New Roman" panose="02020503050405090304" pitchFamily="18" charset="0"/>
+                <a:cs typeface="Times New Roman" panose="02020503050405090304" pitchFamily="18" charset="0"/>
               </a:rPr>
               <a:t> Adapted Average Pooling</a:t>
             </a:r>
-            <a:endParaRPr lang="zh-CN" altLang="en-US" sz="1448" b="1" dirty="0">
-              <a:latin typeface="Times New Roman" panose="02020603050405020304" pitchFamily="18" charset="0"/>
-              <a:cs typeface="Times New Roman" panose="02020603050405020304" pitchFamily="18" charset="0"/>
+            <a:endParaRPr lang="zh-CN" altLang="en-US" sz="1450" b="1" dirty="0">
+              <a:latin typeface="Times New Roman" panose="02020503050405090304" pitchFamily="18" charset="0"/>
+              <a:cs typeface="Times New Roman" panose="02020503050405090304" pitchFamily="18" charset="0"/>
             </a:endParaRPr>
           </a:p>
         </p:txBody>
       </p:sp>
       <p:sp>
         <p:nvSpPr>
-          <p:cNvPr id="249" name="文本框 248">
-            <a:extLst>
-              <a:ext uri="{FF2B5EF4-FFF2-40B4-BE49-F238E27FC236}">
-                <a16:creationId xmlns:a16="http://schemas.microsoft.com/office/drawing/2014/main" id="{FCE74F4F-5FBF-43AE-AAB7-3AAF99C9CD84}"/>
-              </a:ext>
-            </a:extLst>
-          </p:cNvPr>
+          <p:cNvPr id="249" name="文本框 248"/>
           <p:cNvSpPr txBox="1"/>
           <p:nvPr/>
         </p:nvSpPr>
@@ -10237,28 +9495,22 @@
           <a:lstStyle/>
           <a:p>
             <a:r>
-              <a:rPr lang="en-US" altLang="zh-CN" sz="1448" dirty="0">
-                <a:latin typeface="Times New Roman" panose="02020603050405020304" pitchFamily="18" charset="0"/>
-                <a:cs typeface="Times New Roman" panose="02020603050405020304" pitchFamily="18" charset="0"/>
+              <a:rPr lang="en-US" altLang="zh-CN" sz="1450" dirty="0">
+                <a:latin typeface="Times New Roman" panose="02020503050405090304" pitchFamily="18" charset="0"/>
+                <a:cs typeface="Times New Roman" panose="02020503050405090304" pitchFamily="18" charset="0"/>
               </a:rPr>
               <a:t> Adapted Max Pooling</a:t>
             </a:r>
-            <a:endParaRPr lang="zh-CN" altLang="en-US" sz="1448" b="1" dirty="0">
-              <a:latin typeface="Times New Roman" panose="02020603050405020304" pitchFamily="18" charset="0"/>
-              <a:cs typeface="Times New Roman" panose="02020603050405020304" pitchFamily="18" charset="0"/>
+            <a:endParaRPr lang="zh-CN" altLang="en-US" sz="1450" b="1" dirty="0">
+              <a:latin typeface="Times New Roman" panose="02020503050405090304" pitchFamily="18" charset="0"/>
+              <a:cs typeface="Times New Roman" panose="02020503050405090304" pitchFamily="18" charset="0"/>
             </a:endParaRPr>
           </a:p>
         </p:txBody>
       </p:sp>
       <p:sp>
         <p:nvSpPr>
-          <p:cNvPr id="250" name="矩形: 圆角 249">
-            <a:extLst>
-              <a:ext uri="{FF2B5EF4-FFF2-40B4-BE49-F238E27FC236}">
-                <a16:creationId xmlns:a16="http://schemas.microsoft.com/office/drawing/2014/main" id="{18E0EFAC-888B-401B-B620-628956BA1B98}"/>
-              </a:ext>
-            </a:extLst>
-          </p:cNvPr>
+          <p:cNvPr id="250" name="矩形: 圆角 249"/>
           <p:cNvSpPr/>
           <p:nvPr/>
         </p:nvSpPr>
@@ -10303,34 +9555,28 @@
           <a:p>
             <a:pPr algn="ctr"/>
             <a:r>
-              <a:rPr lang="en-US" altLang="zh-CN" sz="1036" dirty="0">
+              <a:rPr lang="en-US" altLang="zh-CN" sz="1035" dirty="0">
                 <a:solidFill>
                   <a:schemeClr val="tx1"/>
                 </a:solidFill>
-                <a:latin typeface="Times New Roman" panose="02020603050405020304" pitchFamily="18" charset="0"/>
-                <a:cs typeface="Times New Roman" panose="02020603050405020304" pitchFamily="18" charset="0"/>
+                <a:latin typeface="Times New Roman" panose="02020503050405090304" pitchFamily="18" charset="0"/>
+                <a:cs typeface="Times New Roman" panose="02020503050405090304" pitchFamily="18" charset="0"/>
               </a:rPr>
               <a:t>SH </a:t>
             </a:r>
-            <a:endParaRPr lang="zh-CN" altLang="en-US" sz="1036" dirty="0">
+            <a:endParaRPr lang="zh-CN" altLang="en-US" sz="1035" dirty="0">
               <a:solidFill>
                 <a:schemeClr val="tx1"/>
               </a:solidFill>
-              <a:latin typeface="Times New Roman" panose="02020603050405020304" pitchFamily="18" charset="0"/>
-              <a:cs typeface="Times New Roman" panose="02020603050405020304" pitchFamily="18" charset="0"/>
+              <a:latin typeface="Times New Roman" panose="02020503050405090304" pitchFamily="18" charset="0"/>
+              <a:cs typeface="Times New Roman" panose="02020503050405090304" pitchFamily="18" charset="0"/>
             </a:endParaRPr>
           </a:p>
         </p:txBody>
       </p:sp>
       <p:sp>
         <p:nvSpPr>
-          <p:cNvPr id="251" name="文本框 250">
-            <a:extLst>
-              <a:ext uri="{FF2B5EF4-FFF2-40B4-BE49-F238E27FC236}">
-                <a16:creationId xmlns:a16="http://schemas.microsoft.com/office/drawing/2014/main" id="{69168B35-9185-49BD-A74C-F753A37555C5}"/>
-              </a:ext>
-            </a:extLst>
-          </p:cNvPr>
+          <p:cNvPr id="251" name="文本框 250"/>
           <p:cNvSpPr txBox="1"/>
           <p:nvPr/>
         </p:nvSpPr>
@@ -10351,28 +9597,22 @@
           <a:lstStyle/>
           <a:p>
             <a:r>
-              <a:rPr lang="en-US" altLang="zh-CN" sz="1241" dirty="0">
-                <a:latin typeface="Times New Roman" panose="02020603050405020304" pitchFamily="18" charset="0"/>
-                <a:cs typeface="Times New Roman" panose="02020603050405020304" pitchFamily="18" charset="0"/>
+              <a:rPr lang="en-US" altLang="zh-CN" sz="1240" dirty="0">
+                <a:latin typeface="Times New Roman" panose="02020503050405090304" pitchFamily="18" charset="0"/>
+                <a:cs typeface="Times New Roman" panose="02020503050405090304" pitchFamily="18" charset="0"/>
               </a:rPr>
               <a:t>Segmentation Heads Conv 1x1</a:t>
             </a:r>
-            <a:endParaRPr lang="zh-CN" altLang="en-US" sz="1241" b="1" dirty="0">
-              <a:latin typeface="Times New Roman" panose="02020603050405020304" pitchFamily="18" charset="0"/>
-              <a:cs typeface="Times New Roman" panose="02020603050405020304" pitchFamily="18" charset="0"/>
+            <a:endParaRPr lang="zh-CN" altLang="en-US" sz="1240" b="1" dirty="0">
+              <a:latin typeface="Times New Roman" panose="02020503050405090304" pitchFamily="18" charset="0"/>
+              <a:cs typeface="Times New Roman" panose="02020503050405090304" pitchFamily="18" charset="0"/>
             </a:endParaRPr>
           </a:p>
         </p:txBody>
       </p:sp>
       <p:sp>
         <p:nvSpPr>
-          <p:cNvPr id="302" name="矩形: 圆角 301">
-            <a:extLst>
-              <a:ext uri="{FF2B5EF4-FFF2-40B4-BE49-F238E27FC236}">
-                <a16:creationId xmlns:a16="http://schemas.microsoft.com/office/drawing/2014/main" id="{262F72C3-C8A1-4412-B08D-398F2612B5D9}"/>
-              </a:ext>
-            </a:extLst>
-          </p:cNvPr>
+          <p:cNvPr id="302" name="矩形: 圆角 301"/>
           <p:cNvSpPr/>
           <p:nvPr/>
         </p:nvSpPr>
@@ -10418,34 +9658,28 @@
           <a:p>
             <a:pPr algn="ctr"/>
             <a:r>
-              <a:rPr lang="en-US" altLang="zh-CN" sz="1036" dirty="0">
+              <a:rPr lang="en-US" altLang="zh-CN" sz="1035" dirty="0">
                 <a:solidFill>
                   <a:schemeClr val="tx1"/>
                 </a:solidFill>
-                <a:latin typeface="Times New Roman" panose="02020603050405020304" pitchFamily="18" charset="0"/>
-                <a:cs typeface="Times New Roman" panose="02020603050405020304" pitchFamily="18" charset="0"/>
+                <a:latin typeface="Times New Roman" panose="02020503050405090304" pitchFamily="18" charset="0"/>
+                <a:cs typeface="Times New Roman" panose="02020503050405090304" pitchFamily="18" charset="0"/>
               </a:rPr>
               <a:t>PWC C, BN</a:t>
             </a:r>
-            <a:endParaRPr lang="zh-CN" altLang="en-US" sz="1036" dirty="0">
+            <a:endParaRPr lang="zh-CN" altLang="en-US" sz="1035" dirty="0">
               <a:solidFill>
                 <a:schemeClr val="tx1"/>
               </a:solidFill>
-              <a:latin typeface="Times New Roman" panose="02020603050405020304" pitchFamily="18" charset="0"/>
-              <a:cs typeface="Times New Roman" panose="02020603050405020304" pitchFamily="18" charset="0"/>
+              <a:latin typeface="Times New Roman" panose="02020503050405090304" pitchFamily="18" charset="0"/>
+              <a:cs typeface="Times New Roman" panose="02020503050405090304" pitchFamily="18" charset="0"/>
             </a:endParaRPr>
           </a:p>
         </p:txBody>
       </p:sp>
       <p:sp>
         <p:nvSpPr>
-          <p:cNvPr id="308" name="矩形: 圆角 307">
-            <a:extLst>
-              <a:ext uri="{FF2B5EF4-FFF2-40B4-BE49-F238E27FC236}">
-                <a16:creationId xmlns:a16="http://schemas.microsoft.com/office/drawing/2014/main" id="{533FD14D-C158-4D9C-AD71-7423595C4B75}"/>
-              </a:ext>
-            </a:extLst>
-          </p:cNvPr>
+          <p:cNvPr id="308" name="矩形: 圆角 307"/>
           <p:cNvSpPr/>
           <p:nvPr/>
         </p:nvSpPr>
@@ -10491,34 +9725,28 @@
           <a:p>
             <a:pPr algn="ctr"/>
             <a:r>
-              <a:rPr lang="en-US" altLang="zh-CN" sz="1036" dirty="0">
+              <a:rPr lang="en-US" altLang="zh-CN" sz="1035" dirty="0">
                 <a:solidFill>
                   <a:schemeClr val="tx1"/>
                 </a:solidFill>
-                <a:latin typeface="Times New Roman" panose="02020603050405020304" pitchFamily="18" charset="0"/>
-                <a:cs typeface="Times New Roman" panose="02020603050405020304" pitchFamily="18" charset="0"/>
+                <a:latin typeface="Times New Roman" panose="02020503050405090304" pitchFamily="18" charset="0"/>
+                <a:cs typeface="Times New Roman" panose="02020503050405090304" pitchFamily="18" charset="0"/>
               </a:rPr>
               <a:t>PWC, Cx2</a:t>
             </a:r>
-            <a:endParaRPr lang="zh-CN" altLang="en-US" sz="1036" dirty="0">
+            <a:endParaRPr lang="zh-CN" altLang="en-US" sz="1035" dirty="0">
               <a:solidFill>
                 <a:schemeClr val="tx1"/>
               </a:solidFill>
-              <a:latin typeface="Times New Roman" panose="02020603050405020304" pitchFamily="18" charset="0"/>
-              <a:cs typeface="Times New Roman" panose="02020603050405020304" pitchFamily="18" charset="0"/>
+              <a:latin typeface="Times New Roman" panose="02020503050405090304" pitchFamily="18" charset="0"/>
+              <a:cs typeface="Times New Roman" panose="02020503050405090304" pitchFamily="18" charset="0"/>
             </a:endParaRPr>
           </a:p>
         </p:txBody>
       </p:sp>
       <p:sp>
         <p:nvSpPr>
-          <p:cNvPr id="309" name="矩形: 圆角 308">
-            <a:extLst>
-              <a:ext uri="{FF2B5EF4-FFF2-40B4-BE49-F238E27FC236}">
-                <a16:creationId xmlns:a16="http://schemas.microsoft.com/office/drawing/2014/main" id="{E5E6F93A-8F91-4213-8749-C6922E30E447}"/>
-              </a:ext>
-            </a:extLst>
-          </p:cNvPr>
+          <p:cNvPr id="309" name="矩形: 圆角 308"/>
           <p:cNvSpPr/>
           <p:nvPr/>
         </p:nvSpPr>
@@ -10564,36 +9792,29 @@
           <a:p>
             <a:pPr algn="ctr"/>
             <a:r>
-              <a:rPr lang="en-US" altLang="zh-CN" sz="1036" dirty="0">
+              <a:rPr lang="en-US" altLang="zh-CN" sz="1035" dirty="0">
                 <a:solidFill>
                   <a:schemeClr val="tx1"/>
                 </a:solidFill>
-                <a:latin typeface="Times New Roman" panose="02020603050405020304" pitchFamily="18" charset="0"/>
-                <a:cs typeface="Times New Roman" panose="02020603050405020304" pitchFamily="18" charset="0"/>
+                <a:latin typeface="Times New Roman" panose="02020503050405090304" pitchFamily="18" charset="0"/>
+                <a:cs typeface="Times New Roman" panose="02020503050405090304" pitchFamily="18" charset="0"/>
               </a:rPr>
               <a:t>BN, ReLU6</a:t>
             </a:r>
-            <a:endParaRPr lang="zh-CN" altLang="en-US" sz="1036" dirty="0">
+            <a:endParaRPr lang="zh-CN" altLang="en-US" sz="1035" dirty="0">
               <a:solidFill>
                 <a:schemeClr val="tx1"/>
               </a:solidFill>
-              <a:latin typeface="Times New Roman" panose="02020603050405020304" pitchFamily="18" charset="0"/>
-              <a:cs typeface="Times New Roman" panose="02020603050405020304" pitchFamily="18" charset="0"/>
+              <a:latin typeface="Times New Roman" panose="02020503050405090304" pitchFamily="18" charset="0"/>
+              <a:cs typeface="Times New Roman" panose="02020503050405090304" pitchFamily="18" charset="0"/>
             </a:endParaRPr>
           </a:p>
         </p:txBody>
       </p:sp>
       <p:cxnSp>
         <p:nvCxnSpPr>
-          <p:cNvPr id="310" name="直接箭头连接符 309">
-            <a:extLst>
-              <a:ext uri="{FF2B5EF4-FFF2-40B4-BE49-F238E27FC236}">
-                <a16:creationId xmlns:a16="http://schemas.microsoft.com/office/drawing/2014/main" id="{C904DD09-70A9-411B-A58A-461DA062DB8F}"/>
-              </a:ext>
-            </a:extLst>
-          </p:cNvPr>
+          <p:cNvPr id="310" name="直接箭头连接符 309"/>
           <p:cNvCxnSpPr>
-            <a:cxnSpLocks/>
             <a:stCxn id="119" idx="2"/>
             <a:endCxn id="308" idx="0"/>
           </p:cNvCxnSpPr>
@@ -10631,15 +9852,8 @@
       </p:cxnSp>
       <p:cxnSp>
         <p:nvCxnSpPr>
-          <p:cNvPr id="316" name="连接符: 肘形 315">
-            <a:extLst>
-              <a:ext uri="{FF2B5EF4-FFF2-40B4-BE49-F238E27FC236}">
-                <a16:creationId xmlns:a16="http://schemas.microsoft.com/office/drawing/2014/main" id="{CAD1452B-6539-4B1D-B8D4-0ACA48A8419A}"/>
-              </a:ext>
-            </a:extLst>
-          </p:cNvPr>
+          <p:cNvPr id="316" name="连接符: 肘形 315"/>
           <p:cNvCxnSpPr>
-            <a:cxnSpLocks/>
             <a:stCxn id="128" idx="0"/>
             <a:endCxn id="125" idx="0"/>
           </p:cNvCxnSpPr>
@@ -10680,13 +9894,7 @@
       </p:cxnSp>
       <p:sp>
         <p:nvSpPr>
-          <p:cNvPr id="327" name="流程图: 或者 326">
-            <a:extLst>
-              <a:ext uri="{FF2B5EF4-FFF2-40B4-BE49-F238E27FC236}">
-                <a16:creationId xmlns:a16="http://schemas.microsoft.com/office/drawing/2014/main" id="{21AEADB2-74F2-4F94-AA91-B06A21E8FE2B}"/>
-              </a:ext>
-            </a:extLst>
-          </p:cNvPr>
+          <p:cNvPr id="327" name="流程图: 或者 326"/>
           <p:cNvSpPr/>
           <p:nvPr/>
         </p:nvSpPr>
@@ -10728,19 +9936,13 @@
           <a:lstStyle/>
           <a:p>
             <a:pPr algn="ctr"/>
-            <a:endParaRPr lang="zh-CN" altLang="en-US" sz="1861"/>
-          </a:p>
-        </p:txBody>
-      </p:sp>
-      <p:sp>
-        <p:nvSpPr>
-          <p:cNvPr id="328" name="矩形: 圆角 327">
-            <a:extLst>
-              <a:ext uri="{FF2B5EF4-FFF2-40B4-BE49-F238E27FC236}">
-                <a16:creationId xmlns:a16="http://schemas.microsoft.com/office/drawing/2014/main" id="{066857BE-C2A3-4CE4-B50F-A4A41CE6C32A}"/>
-              </a:ext>
-            </a:extLst>
-          </p:cNvPr>
+            <a:endParaRPr lang="zh-CN" altLang="en-US" sz="1860"/>
+          </a:p>
+        </p:txBody>
+      </p:sp>
+      <p:sp>
+        <p:nvSpPr>
+          <p:cNvPr id="328" name="矩形: 圆角 327"/>
           <p:cNvSpPr/>
           <p:nvPr/>
         </p:nvSpPr>
@@ -10790,8 +9992,8 @@
                 <a:solidFill>
                   <a:schemeClr val="tx1"/>
                 </a:solidFill>
-                <a:latin typeface="Times New Roman" panose="02020603050405020304" pitchFamily="18" charset="0"/>
-                <a:cs typeface="Times New Roman" panose="02020603050405020304" pitchFamily="18" charset="0"/>
+                <a:latin typeface="Times New Roman" panose="02020503050405090304" pitchFamily="18" charset="0"/>
+                <a:cs typeface="Times New Roman" panose="02020503050405090304" pitchFamily="18" charset="0"/>
               </a:rPr>
               <a:t>BN, ReLU6 </a:t>
             </a:r>
@@ -10799,23 +10001,16 @@
               <a:solidFill>
                 <a:schemeClr val="tx1"/>
               </a:solidFill>
-              <a:latin typeface="Times New Roman" panose="02020603050405020304" pitchFamily="18" charset="0"/>
-              <a:cs typeface="Times New Roman" panose="02020603050405020304" pitchFamily="18" charset="0"/>
+              <a:latin typeface="Times New Roman" panose="02020503050405090304" pitchFamily="18" charset="0"/>
+              <a:cs typeface="Times New Roman" panose="02020503050405090304" pitchFamily="18" charset="0"/>
             </a:endParaRPr>
           </a:p>
         </p:txBody>
       </p:sp>
       <p:cxnSp>
         <p:nvCxnSpPr>
-          <p:cNvPr id="337" name="直接箭头连接符 336">
-            <a:extLst>
-              <a:ext uri="{FF2B5EF4-FFF2-40B4-BE49-F238E27FC236}">
-                <a16:creationId xmlns:a16="http://schemas.microsoft.com/office/drawing/2014/main" id="{EADD3723-2C8E-4688-B0A8-94A4D5E6AC64}"/>
-              </a:ext>
-            </a:extLst>
-          </p:cNvPr>
+          <p:cNvPr id="337" name="直接箭头连接符 336"/>
           <p:cNvCxnSpPr>
-            <a:cxnSpLocks/>
             <a:stCxn id="309" idx="2"/>
             <a:endCxn id="122" idx="0"/>
           </p:cNvCxnSpPr>
@@ -10853,13 +10048,7 @@
       </p:cxnSp>
       <p:sp>
         <p:nvSpPr>
-          <p:cNvPr id="360" name="矩形: 圆角 359">
-            <a:extLst>
-              <a:ext uri="{FF2B5EF4-FFF2-40B4-BE49-F238E27FC236}">
-                <a16:creationId xmlns:a16="http://schemas.microsoft.com/office/drawing/2014/main" id="{90DA1E38-FACE-4E4B-8F99-13D2DD60486C}"/>
-              </a:ext>
-            </a:extLst>
-          </p:cNvPr>
+          <p:cNvPr id="360" name="矩形: 圆角 359"/>
           <p:cNvSpPr/>
           <p:nvPr/>
         </p:nvSpPr>
@@ -10905,34 +10094,28 @@
           <a:p>
             <a:pPr algn="ctr"/>
             <a:r>
-              <a:rPr lang="en-US" altLang="zh-CN" sz="1448" dirty="0">
+              <a:rPr lang="en-US" altLang="zh-CN" sz="1450" dirty="0">
                 <a:solidFill>
                   <a:schemeClr val="tx1"/>
                 </a:solidFill>
-                <a:latin typeface="Times New Roman" panose="02020603050405020304" pitchFamily="18" charset="0"/>
-                <a:cs typeface="Times New Roman" panose="02020603050405020304" pitchFamily="18" charset="0"/>
+                <a:latin typeface="Times New Roman" panose="02020503050405090304" pitchFamily="18" charset="0"/>
+                <a:cs typeface="Times New Roman" panose="02020503050405090304" pitchFamily="18" charset="0"/>
               </a:rPr>
               <a:t>VSS Block *2</a:t>
             </a:r>
-            <a:endParaRPr lang="zh-CN" altLang="en-US" sz="1448" dirty="0">
+            <a:endParaRPr lang="zh-CN" altLang="en-US" sz="1450" dirty="0">
               <a:solidFill>
                 <a:schemeClr val="tx1"/>
               </a:solidFill>
-              <a:latin typeface="Times New Roman" panose="02020603050405020304" pitchFamily="18" charset="0"/>
-              <a:cs typeface="Times New Roman" panose="02020603050405020304" pitchFamily="18" charset="0"/>
+              <a:latin typeface="Times New Roman" panose="02020503050405090304" pitchFamily="18" charset="0"/>
+              <a:cs typeface="Times New Roman" panose="02020503050405090304" pitchFamily="18" charset="0"/>
             </a:endParaRPr>
           </a:p>
         </p:txBody>
       </p:sp>
       <p:sp>
         <p:nvSpPr>
-          <p:cNvPr id="361" name="矩形: 圆角 360">
-            <a:extLst>
-              <a:ext uri="{FF2B5EF4-FFF2-40B4-BE49-F238E27FC236}">
-                <a16:creationId xmlns:a16="http://schemas.microsoft.com/office/drawing/2014/main" id="{2374549A-10C2-4CA4-B28E-516CA7654C20}"/>
-              </a:ext>
-            </a:extLst>
-          </p:cNvPr>
+          <p:cNvPr id="361" name="矩形: 圆角 360"/>
           <p:cNvSpPr/>
           <p:nvPr/>
         </p:nvSpPr>
@@ -10978,34 +10161,28 @@
           <a:p>
             <a:pPr algn="ctr"/>
             <a:r>
-              <a:rPr lang="en-US" altLang="zh-CN" sz="1241" dirty="0">
+              <a:rPr lang="en-US" altLang="zh-CN" sz="1240" dirty="0">
                 <a:solidFill>
                   <a:schemeClr val="tx1"/>
                 </a:solidFill>
-                <a:latin typeface="Times New Roman" panose="02020603050405020304" pitchFamily="18" charset="0"/>
-                <a:cs typeface="Times New Roman" panose="02020603050405020304" pitchFamily="18" charset="0"/>
+                <a:latin typeface="Times New Roman" panose="02020503050405090304" pitchFamily="18" charset="0"/>
+                <a:cs typeface="Times New Roman" panose="02020503050405090304" pitchFamily="18" charset="0"/>
               </a:rPr>
               <a:t>Patch Merging</a:t>
             </a:r>
-            <a:endParaRPr lang="zh-CN" altLang="en-US" sz="1241" dirty="0">
+            <a:endParaRPr lang="zh-CN" altLang="en-US" sz="1240" dirty="0">
               <a:solidFill>
                 <a:schemeClr val="tx1"/>
               </a:solidFill>
-              <a:latin typeface="Times New Roman" panose="02020603050405020304" pitchFamily="18" charset="0"/>
-              <a:cs typeface="Times New Roman" panose="02020603050405020304" pitchFamily="18" charset="0"/>
+              <a:latin typeface="Times New Roman" panose="02020503050405090304" pitchFamily="18" charset="0"/>
+              <a:cs typeface="Times New Roman" panose="02020503050405090304" pitchFamily="18" charset="0"/>
             </a:endParaRPr>
           </a:p>
         </p:txBody>
       </p:sp>
       <p:sp>
         <p:nvSpPr>
-          <p:cNvPr id="362" name="流程图: 或者 361">
-            <a:extLst>
-              <a:ext uri="{FF2B5EF4-FFF2-40B4-BE49-F238E27FC236}">
-                <a16:creationId xmlns:a16="http://schemas.microsoft.com/office/drawing/2014/main" id="{1C1D1FBD-3407-492D-8583-971EA640A9B1}"/>
-              </a:ext>
-            </a:extLst>
-          </p:cNvPr>
+          <p:cNvPr id="362" name="流程图: 或者 361"/>
           <p:cNvSpPr/>
           <p:nvPr/>
         </p:nvSpPr>
@@ -11047,19 +10224,13 @@
           <a:lstStyle/>
           <a:p>
             <a:pPr algn="ctr"/>
-            <a:endParaRPr lang="zh-CN" altLang="en-US" sz="1861"/>
-          </a:p>
-        </p:txBody>
-      </p:sp>
-      <p:sp>
-        <p:nvSpPr>
-          <p:cNvPr id="363" name="矩形: 圆角 362">
-            <a:extLst>
-              <a:ext uri="{FF2B5EF4-FFF2-40B4-BE49-F238E27FC236}">
-                <a16:creationId xmlns:a16="http://schemas.microsoft.com/office/drawing/2014/main" id="{BE20B049-4E59-486E-9736-6F53816A318A}"/>
-              </a:ext>
-            </a:extLst>
-          </p:cNvPr>
+            <a:endParaRPr lang="zh-CN" altLang="en-US" sz="1860"/>
+          </a:p>
+        </p:txBody>
+      </p:sp>
+      <p:sp>
+        <p:nvSpPr>
+          <p:cNvPr id="363" name="矩形: 圆角 362"/>
           <p:cNvSpPr/>
           <p:nvPr/>
         </p:nvSpPr>
@@ -11105,36 +10276,29 @@
           <a:p>
             <a:pPr algn="ctr"/>
             <a:r>
-              <a:rPr lang="en-US" altLang="zh-CN" sz="1448" dirty="0">
+              <a:rPr lang="en-US" altLang="zh-CN" sz="1450" dirty="0">
                 <a:solidFill>
                   <a:schemeClr val="tx1"/>
                 </a:solidFill>
-                <a:latin typeface="Times New Roman" panose="02020603050405020304" pitchFamily="18" charset="0"/>
-                <a:cs typeface="Times New Roman" panose="02020603050405020304" pitchFamily="18" charset="0"/>
+                <a:latin typeface="Times New Roman" panose="02020503050405090304" pitchFamily="18" charset="0"/>
+                <a:cs typeface="Times New Roman" panose="02020503050405090304" pitchFamily="18" charset="0"/>
               </a:rPr>
               <a:t>SLGAG</a:t>
             </a:r>
-            <a:endParaRPr lang="zh-CN" altLang="en-US" sz="1448" dirty="0">
+            <a:endParaRPr lang="zh-CN" altLang="en-US" sz="1450" dirty="0">
               <a:solidFill>
                 <a:schemeClr val="tx1"/>
               </a:solidFill>
-              <a:latin typeface="Times New Roman" panose="02020603050405020304" pitchFamily="18" charset="0"/>
-              <a:cs typeface="Times New Roman" panose="02020603050405020304" pitchFamily="18" charset="0"/>
+              <a:latin typeface="Times New Roman" panose="02020503050405090304" pitchFamily="18" charset="0"/>
+              <a:cs typeface="Times New Roman" panose="02020503050405090304" pitchFamily="18" charset="0"/>
             </a:endParaRPr>
           </a:p>
         </p:txBody>
       </p:sp>
       <p:cxnSp>
         <p:nvCxnSpPr>
-          <p:cNvPr id="364" name="连接符: 肘形 363">
-            <a:extLst>
-              <a:ext uri="{FF2B5EF4-FFF2-40B4-BE49-F238E27FC236}">
-                <a16:creationId xmlns:a16="http://schemas.microsoft.com/office/drawing/2014/main" id="{EAA537DB-6DB0-466A-B996-01863E0273A8}"/>
-              </a:ext>
-            </a:extLst>
-          </p:cNvPr>
+          <p:cNvPr id="364" name="连接符: 肘形 363"/>
           <p:cNvCxnSpPr>
-            <a:cxnSpLocks/>
             <a:stCxn id="398" idx="2"/>
             <a:endCxn id="363" idx="1"/>
           </p:cNvCxnSpPr>
@@ -11173,15 +10337,8 @@
       </p:cxnSp>
       <p:cxnSp>
         <p:nvCxnSpPr>
-          <p:cNvPr id="365" name="直接箭头连接符 364">
-            <a:extLst>
-              <a:ext uri="{FF2B5EF4-FFF2-40B4-BE49-F238E27FC236}">
-                <a16:creationId xmlns:a16="http://schemas.microsoft.com/office/drawing/2014/main" id="{6D7A4BAD-1AE1-4F0C-BFBA-BA8BBEC17DB1}"/>
-              </a:ext>
-            </a:extLst>
-          </p:cNvPr>
+          <p:cNvPr id="365" name="直接箭头连接符 364"/>
           <p:cNvCxnSpPr>
-            <a:cxnSpLocks/>
             <a:stCxn id="398" idx="2"/>
             <a:endCxn id="399" idx="0"/>
           </p:cNvCxnSpPr>
@@ -11219,13 +10376,7 @@
       </p:cxnSp>
       <p:sp>
         <p:nvSpPr>
-          <p:cNvPr id="367" name="矩形: 圆角 366">
-            <a:extLst>
-              <a:ext uri="{FF2B5EF4-FFF2-40B4-BE49-F238E27FC236}">
-                <a16:creationId xmlns:a16="http://schemas.microsoft.com/office/drawing/2014/main" id="{553D3468-FD1A-4FA9-B14D-49126C271416}"/>
-              </a:ext>
-            </a:extLst>
-          </p:cNvPr>
+          <p:cNvPr id="367" name="矩形: 圆角 366"/>
           <p:cNvSpPr/>
           <p:nvPr/>
         </p:nvSpPr>
@@ -11271,34 +10422,28 @@
           <a:p>
             <a:pPr algn="ctr"/>
             <a:r>
-              <a:rPr lang="en-US" altLang="zh-CN" sz="1448" dirty="0">
+              <a:rPr lang="en-US" altLang="zh-CN" sz="1450" dirty="0">
                 <a:solidFill>
                   <a:schemeClr val="tx1"/>
                 </a:solidFill>
-                <a:latin typeface="Times New Roman" panose="02020603050405020304" pitchFamily="18" charset="0"/>
-                <a:cs typeface="Times New Roman" panose="02020603050405020304" pitchFamily="18" charset="0"/>
+                <a:latin typeface="Times New Roman" panose="02020503050405090304" pitchFamily="18" charset="0"/>
+                <a:cs typeface="Times New Roman" panose="02020503050405090304" pitchFamily="18" charset="0"/>
               </a:rPr>
               <a:t>SLGAG</a:t>
             </a:r>
-            <a:endParaRPr lang="zh-CN" altLang="en-US" sz="1448" dirty="0">
+            <a:endParaRPr lang="zh-CN" altLang="en-US" sz="1450" dirty="0">
               <a:solidFill>
                 <a:schemeClr val="tx1"/>
               </a:solidFill>
-              <a:latin typeface="Times New Roman" panose="02020603050405020304" pitchFamily="18" charset="0"/>
-              <a:cs typeface="Times New Roman" panose="02020603050405020304" pitchFamily="18" charset="0"/>
+              <a:latin typeface="Times New Roman" panose="02020503050405090304" pitchFamily="18" charset="0"/>
+              <a:cs typeface="Times New Roman" panose="02020503050405090304" pitchFamily="18" charset="0"/>
             </a:endParaRPr>
           </a:p>
         </p:txBody>
       </p:sp>
       <p:sp>
         <p:nvSpPr>
-          <p:cNvPr id="368" name="矩形: 圆角 367">
-            <a:extLst>
-              <a:ext uri="{FF2B5EF4-FFF2-40B4-BE49-F238E27FC236}">
-                <a16:creationId xmlns:a16="http://schemas.microsoft.com/office/drawing/2014/main" id="{3DBBDB71-AE47-4F92-A3B1-B0D56C4A765A}"/>
-              </a:ext>
-            </a:extLst>
-          </p:cNvPr>
+          <p:cNvPr id="368" name="矩形: 圆角 367"/>
           <p:cNvSpPr/>
           <p:nvPr/>
         </p:nvSpPr>
@@ -11344,36 +10489,29 @@
           <a:p>
             <a:pPr algn="ctr"/>
             <a:r>
-              <a:rPr lang="en-US" altLang="zh-CN" sz="1448" dirty="0">
+              <a:rPr lang="en-US" altLang="zh-CN" sz="1450" dirty="0">
                 <a:solidFill>
                   <a:schemeClr val="tx1"/>
                 </a:solidFill>
-                <a:latin typeface="Times New Roman" panose="02020603050405020304" pitchFamily="18" charset="0"/>
-                <a:cs typeface="Times New Roman" panose="02020603050405020304" pitchFamily="18" charset="0"/>
+                <a:latin typeface="Times New Roman" panose="02020503050405090304" pitchFamily="18" charset="0"/>
+                <a:cs typeface="Times New Roman" panose="02020503050405090304" pitchFamily="18" charset="0"/>
               </a:rPr>
               <a:t>SLGAG</a:t>
             </a:r>
-            <a:endParaRPr lang="zh-CN" altLang="en-US" sz="1448" dirty="0">
+            <a:endParaRPr lang="zh-CN" altLang="en-US" sz="1450" dirty="0">
               <a:solidFill>
                 <a:schemeClr val="tx1"/>
               </a:solidFill>
-              <a:latin typeface="Times New Roman" panose="02020603050405020304" pitchFamily="18" charset="0"/>
-              <a:cs typeface="Times New Roman" panose="02020603050405020304" pitchFamily="18" charset="0"/>
+              <a:latin typeface="Times New Roman" panose="02020503050405090304" pitchFamily="18" charset="0"/>
+              <a:cs typeface="Times New Roman" panose="02020503050405090304" pitchFamily="18" charset="0"/>
             </a:endParaRPr>
           </a:p>
         </p:txBody>
       </p:sp>
       <p:cxnSp>
         <p:nvCxnSpPr>
-          <p:cNvPr id="369" name="连接符: 肘形 368">
-            <a:extLst>
-              <a:ext uri="{FF2B5EF4-FFF2-40B4-BE49-F238E27FC236}">
-                <a16:creationId xmlns:a16="http://schemas.microsoft.com/office/drawing/2014/main" id="{34C3CD85-7CDF-4613-A0EB-14D96BE5603E}"/>
-              </a:ext>
-            </a:extLst>
-          </p:cNvPr>
+          <p:cNvPr id="369" name="连接符: 肘形 368"/>
           <p:cNvCxnSpPr>
-            <a:cxnSpLocks/>
             <a:stCxn id="396" idx="2"/>
             <a:endCxn id="367" idx="1"/>
           </p:cNvCxnSpPr>
@@ -11412,15 +10550,8 @@
       </p:cxnSp>
       <p:cxnSp>
         <p:nvCxnSpPr>
-          <p:cNvPr id="370" name="直接箭头连接符 369">
-            <a:extLst>
-              <a:ext uri="{FF2B5EF4-FFF2-40B4-BE49-F238E27FC236}">
-                <a16:creationId xmlns:a16="http://schemas.microsoft.com/office/drawing/2014/main" id="{612C3528-FC69-4CDC-9B0A-C9088C770DCE}"/>
-              </a:ext>
-            </a:extLst>
-          </p:cNvPr>
+          <p:cNvPr id="370" name="直接箭头连接符 369"/>
           <p:cNvCxnSpPr>
-            <a:cxnSpLocks/>
             <a:stCxn id="396" idx="2"/>
             <a:endCxn id="397" idx="0"/>
           </p:cNvCxnSpPr>
@@ -11458,15 +10589,8 @@
       </p:cxnSp>
       <p:cxnSp>
         <p:nvCxnSpPr>
-          <p:cNvPr id="371" name="连接符: 肘形 370">
-            <a:extLst>
-              <a:ext uri="{FF2B5EF4-FFF2-40B4-BE49-F238E27FC236}">
-                <a16:creationId xmlns:a16="http://schemas.microsoft.com/office/drawing/2014/main" id="{9861BC18-240B-471E-8783-FCFBB11BC441}"/>
-              </a:ext>
-            </a:extLst>
-          </p:cNvPr>
+          <p:cNvPr id="371" name="连接符: 肘形 370"/>
           <p:cNvCxnSpPr>
-            <a:cxnSpLocks/>
             <a:stCxn id="361" idx="2"/>
             <a:endCxn id="368" idx="1"/>
           </p:cNvCxnSpPr>
@@ -11505,15 +10629,8 @@
       </p:cxnSp>
       <p:cxnSp>
         <p:nvCxnSpPr>
-          <p:cNvPr id="372" name="直接箭头连接符 371">
-            <a:extLst>
-              <a:ext uri="{FF2B5EF4-FFF2-40B4-BE49-F238E27FC236}">
-                <a16:creationId xmlns:a16="http://schemas.microsoft.com/office/drawing/2014/main" id="{827DCEBB-58CE-4436-8575-7559AED13851}"/>
-              </a:ext>
-            </a:extLst>
-          </p:cNvPr>
+          <p:cNvPr id="372" name="直接箭头连接符 371"/>
           <p:cNvCxnSpPr>
-            <a:cxnSpLocks/>
             <a:stCxn id="361" idx="2"/>
             <a:endCxn id="395" idx="0"/>
           </p:cNvCxnSpPr>
@@ -11551,13 +10668,7 @@
       </p:cxnSp>
       <p:sp>
         <p:nvSpPr>
-          <p:cNvPr id="373" name="流程图: 内部贮存 372">
-            <a:extLst>
-              <a:ext uri="{FF2B5EF4-FFF2-40B4-BE49-F238E27FC236}">
-                <a16:creationId xmlns:a16="http://schemas.microsoft.com/office/drawing/2014/main" id="{868E55EC-5B71-4C0D-950F-56E6BA118C7C}"/>
-              </a:ext>
-            </a:extLst>
-          </p:cNvPr>
+          <p:cNvPr id="373" name="流程图: 内部贮存 372"/>
           <p:cNvSpPr/>
           <p:nvPr/>
         </p:nvSpPr>
@@ -11603,34 +10714,28 @@
           <a:p>
             <a:pPr algn="ctr"/>
             <a:r>
-              <a:rPr lang="en-US" altLang="zh-CN" sz="1241" dirty="0">
+              <a:rPr lang="en-US" altLang="zh-CN" sz="1240" dirty="0">
                 <a:solidFill>
                   <a:schemeClr val="tx1"/>
                 </a:solidFill>
-                <a:latin typeface="Times New Roman" panose="02020603050405020304" pitchFamily="18" charset="0"/>
-                <a:cs typeface="Times New Roman" panose="02020603050405020304" pitchFamily="18" charset="0"/>
+                <a:latin typeface="Times New Roman" panose="02020503050405090304" pitchFamily="18" charset="0"/>
+                <a:cs typeface="Times New Roman" panose="02020503050405090304" pitchFamily="18" charset="0"/>
               </a:rPr>
               <a:t>Input</a:t>
             </a:r>
-            <a:endParaRPr lang="zh-CN" altLang="en-US" sz="1241" dirty="0">
+            <a:endParaRPr lang="zh-CN" altLang="en-US" sz="1240" dirty="0">
               <a:solidFill>
                 <a:schemeClr val="tx1"/>
               </a:solidFill>
-              <a:latin typeface="Times New Roman" panose="02020603050405020304" pitchFamily="18" charset="0"/>
-              <a:cs typeface="Times New Roman" panose="02020603050405020304" pitchFamily="18" charset="0"/>
+              <a:latin typeface="Times New Roman" panose="02020503050405090304" pitchFamily="18" charset="0"/>
+              <a:cs typeface="Times New Roman" panose="02020503050405090304" pitchFamily="18" charset="0"/>
             </a:endParaRPr>
           </a:p>
         </p:txBody>
       </p:sp>
       <p:sp>
         <p:nvSpPr>
-          <p:cNvPr id="374" name="流程图: 内部贮存 373">
-            <a:extLst>
-              <a:ext uri="{FF2B5EF4-FFF2-40B4-BE49-F238E27FC236}">
-                <a16:creationId xmlns:a16="http://schemas.microsoft.com/office/drawing/2014/main" id="{0E1C7EE5-1DF4-4CF2-B6AF-30864CB38CE7}"/>
-              </a:ext>
-            </a:extLst>
-          </p:cNvPr>
+          <p:cNvPr id="374" name="流程图: 内部贮存 373"/>
           <p:cNvSpPr/>
           <p:nvPr/>
         </p:nvSpPr>
@@ -11676,36 +10781,29 @@
           <a:p>
             <a:pPr algn="ctr"/>
             <a:r>
-              <a:rPr lang="en-US" altLang="zh-CN" sz="1241" dirty="0">
+              <a:rPr lang="en-US" altLang="zh-CN" sz="1240" dirty="0">
                 <a:solidFill>
                   <a:schemeClr val="tx1"/>
                 </a:solidFill>
-                <a:latin typeface="Times New Roman" panose="02020603050405020304" pitchFamily="18" charset="0"/>
-                <a:cs typeface="Times New Roman" panose="02020603050405020304" pitchFamily="18" charset="0"/>
+                <a:latin typeface="Times New Roman" panose="02020503050405090304" pitchFamily="18" charset="0"/>
+                <a:cs typeface="Times New Roman" panose="02020503050405090304" pitchFamily="18" charset="0"/>
               </a:rPr>
               <a:t>Output</a:t>
             </a:r>
-            <a:endParaRPr lang="zh-CN" altLang="en-US" sz="1241" dirty="0">
+            <a:endParaRPr lang="zh-CN" altLang="en-US" sz="1240" dirty="0">
               <a:solidFill>
                 <a:schemeClr val="tx1"/>
               </a:solidFill>
-              <a:latin typeface="Times New Roman" panose="02020603050405020304" pitchFamily="18" charset="0"/>
-              <a:cs typeface="Times New Roman" panose="02020603050405020304" pitchFamily="18" charset="0"/>
+              <a:latin typeface="Times New Roman" panose="02020503050405090304" pitchFamily="18" charset="0"/>
+              <a:cs typeface="Times New Roman" panose="02020503050405090304" pitchFamily="18" charset="0"/>
             </a:endParaRPr>
           </a:p>
         </p:txBody>
       </p:sp>
       <p:cxnSp>
         <p:nvCxnSpPr>
-          <p:cNvPr id="375" name="直接箭头连接符 374">
-            <a:extLst>
-              <a:ext uri="{FF2B5EF4-FFF2-40B4-BE49-F238E27FC236}">
-                <a16:creationId xmlns:a16="http://schemas.microsoft.com/office/drawing/2014/main" id="{45E144F3-3F64-4EDE-B3FA-E30DB3CBFA3D}"/>
-              </a:ext>
-            </a:extLst>
-          </p:cNvPr>
+          <p:cNvPr id="375" name="直接箭头连接符 374"/>
           <p:cNvCxnSpPr>
-            <a:cxnSpLocks/>
             <a:stCxn id="379" idx="0"/>
             <a:endCxn id="374" idx="2"/>
           </p:cNvCxnSpPr>
@@ -11743,13 +10841,7 @@
       </p:cxnSp>
       <p:sp>
         <p:nvSpPr>
-          <p:cNvPr id="376" name="矩形: 圆角 375">
-            <a:extLst>
-              <a:ext uri="{FF2B5EF4-FFF2-40B4-BE49-F238E27FC236}">
-                <a16:creationId xmlns:a16="http://schemas.microsoft.com/office/drawing/2014/main" id="{183D582E-CC55-474F-A2C8-B99EECA96B43}"/>
-              </a:ext>
-            </a:extLst>
-          </p:cNvPr>
+          <p:cNvPr id="376" name="矩形: 圆角 375"/>
           <p:cNvSpPr/>
           <p:nvPr/>
         </p:nvSpPr>
@@ -11795,34 +10887,28 @@
           <a:p>
             <a:pPr algn="ctr"/>
             <a:r>
-              <a:rPr lang="en-US" altLang="zh-CN" sz="1861" dirty="0">
+              <a:rPr lang="en-US" altLang="zh-CN" sz="1860" dirty="0">
                 <a:solidFill>
                   <a:schemeClr val="tx1"/>
                 </a:solidFill>
-                <a:latin typeface="Times New Roman" panose="02020603050405020304" pitchFamily="18" charset="0"/>
-                <a:cs typeface="Times New Roman" panose="02020603050405020304" pitchFamily="18" charset="0"/>
+                <a:latin typeface="Times New Roman" panose="02020503050405090304" pitchFamily="18" charset="0"/>
+                <a:cs typeface="Times New Roman" panose="02020503050405090304" pitchFamily="18" charset="0"/>
               </a:rPr>
               <a:t>SLCB</a:t>
             </a:r>
-            <a:endParaRPr lang="zh-CN" altLang="en-US" sz="1861" dirty="0">
+            <a:endParaRPr lang="zh-CN" altLang="en-US" sz="1860" dirty="0">
               <a:solidFill>
                 <a:schemeClr val="tx1"/>
               </a:solidFill>
-              <a:latin typeface="Times New Roman" panose="02020603050405020304" pitchFamily="18" charset="0"/>
-              <a:cs typeface="Times New Roman" panose="02020603050405020304" pitchFamily="18" charset="0"/>
+              <a:latin typeface="Times New Roman" panose="02020503050405090304" pitchFamily="18" charset="0"/>
+              <a:cs typeface="Times New Roman" panose="02020503050405090304" pitchFamily="18" charset="0"/>
             </a:endParaRPr>
           </a:p>
         </p:txBody>
       </p:sp>
       <p:sp>
         <p:nvSpPr>
-          <p:cNvPr id="377" name="矩形: 圆角 376">
-            <a:extLst>
-              <a:ext uri="{FF2B5EF4-FFF2-40B4-BE49-F238E27FC236}">
-                <a16:creationId xmlns:a16="http://schemas.microsoft.com/office/drawing/2014/main" id="{196C8671-12C5-4552-B54B-F25A8F17A1A2}"/>
-              </a:ext>
-            </a:extLst>
-          </p:cNvPr>
+          <p:cNvPr id="377" name="矩形: 圆角 376"/>
           <p:cNvSpPr/>
           <p:nvPr/>
         </p:nvSpPr>
@@ -11867,34 +10953,28 @@
           <a:p>
             <a:pPr algn="ctr"/>
             <a:r>
-              <a:rPr lang="en-US" altLang="zh-CN" sz="1241" dirty="0">
+              <a:rPr lang="en-US" altLang="zh-CN" sz="1240" dirty="0">
                 <a:solidFill>
                   <a:schemeClr val="tx1"/>
                 </a:solidFill>
-                <a:latin typeface="Times New Roman" panose="02020603050405020304" pitchFamily="18" charset="0"/>
-                <a:cs typeface="Times New Roman" panose="02020603050405020304" pitchFamily="18" charset="0"/>
+                <a:latin typeface="Times New Roman" panose="02020503050405090304" pitchFamily="18" charset="0"/>
+                <a:cs typeface="Times New Roman" panose="02020503050405090304" pitchFamily="18" charset="0"/>
               </a:rPr>
               <a:t>Patch Embedding</a:t>
             </a:r>
-            <a:endParaRPr lang="zh-CN" altLang="en-US" sz="1241" dirty="0">
+            <a:endParaRPr lang="zh-CN" altLang="en-US" sz="1240" dirty="0">
               <a:solidFill>
                 <a:schemeClr val="tx1"/>
               </a:solidFill>
-              <a:latin typeface="Times New Roman" panose="02020603050405020304" pitchFamily="18" charset="0"/>
-              <a:cs typeface="Times New Roman" panose="02020603050405020304" pitchFamily="18" charset="0"/>
+              <a:latin typeface="Times New Roman" panose="02020503050405090304" pitchFamily="18" charset="0"/>
+              <a:cs typeface="Times New Roman" panose="02020503050405090304" pitchFamily="18" charset="0"/>
             </a:endParaRPr>
           </a:p>
         </p:txBody>
       </p:sp>
       <p:sp>
         <p:nvSpPr>
-          <p:cNvPr id="378" name="矩形: 圆角 377">
-            <a:extLst>
-              <a:ext uri="{FF2B5EF4-FFF2-40B4-BE49-F238E27FC236}">
-                <a16:creationId xmlns:a16="http://schemas.microsoft.com/office/drawing/2014/main" id="{3E83196E-9799-4CD7-823D-D8373788498F}"/>
-              </a:ext>
-            </a:extLst>
-          </p:cNvPr>
+          <p:cNvPr id="378" name="矩形: 圆角 377"/>
           <p:cNvSpPr/>
           <p:nvPr/>
         </p:nvSpPr>
@@ -11940,34 +11020,28 @@
           <a:p>
             <a:pPr algn="ctr"/>
             <a:r>
-              <a:rPr lang="en-US" altLang="zh-CN" sz="1861" dirty="0">
+              <a:rPr lang="en-US" altLang="zh-CN" sz="1860" dirty="0">
                 <a:solidFill>
                   <a:schemeClr val="tx1"/>
                 </a:solidFill>
-                <a:latin typeface="Times New Roman" panose="02020603050405020304" pitchFamily="18" charset="0"/>
-                <a:cs typeface="Times New Roman" panose="02020603050405020304" pitchFamily="18" charset="0"/>
+                <a:latin typeface="Times New Roman" panose="02020503050405090304" pitchFamily="18" charset="0"/>
+                <a:cs typeface="Times New Roman" panose="02020503050405090304" pitchFamily="18" charset="0"/>
               </a:rPr>
               <a:t>SLCB</a:t>
             </a:r>
-            <a:endParaRPr lang="zh-CN" altLang="en-US" sz="1861" dirty="0">
+            <a:endParaRPr lang="zh-CN" altLang="en-US" sz="1860" dirty="0">
               <a:solidFill>
                 <a:schemeClr val="tx1"/>
               </a:solidFill>
-              <a:latin typeface="Times New Roman" panose="02020603050405020304" pitchFamily="18" charset="0"/>
-              <a:cs typeface="Times New Roman" panose="02020603050405020304" pitchFamily="18" charset="0"/>
+              <a:latin typeface="Times New Roman" panose="02020503050405090304" pitchFamily="18" charset="0"/>
+              <a:cs typeface="Times New Roman" panose="02020503050405090304" pitchFamily="18" charset="0"/>
             </a:endParaRPr>
           </a:p>
         </p:txBody>
       </p:sp>
       <p:sp>
         <p:nvSpPr>
-          <p:cNvPr id="379" name="矩形: 圆角 378">
-            <a:extLst>
-              <a:ext uri="{FF2B5EF4-FFF2-40B4-BE49-F238E27FC236}">
-                <a16:creationId xmlns:a16="http://schemas.microsoft.com/office/drawing/2014/main" id="{1D03F581-1D88-4883-8F28-DD6209B6E4C2}"/>
-              </a:ext>
-            </a:extLst>
-          </p:cNvPr>
+          <p:cNvPr id="379" name="矩形: 圆角 378"/>
           <p:cNvSpPr/>
           <p:nvPr/>
         </p:nvSpPr>
@@ -12012,36 +11086,29 @@
           <a:p>
             <a:pPr algn="ctr"/>
             <a:r>
-              <a:rPr lang="en-US" altLang="zh-CN" sz="1861" dirty="0">
+              <a:rPr lang="en-US" altLang="zh-CN" sz="1860" dirty="0">
                 <a:solidFill>
                   <a:schemeClr val="tx1"/>
                 </a:solidFill>
-                <a:latin typeface="Times New Roman" panose="02020603050405020304" pitchFamily="18" charset="0"/>
-                <a:cs typeface="Times New Roman" panose="02020603050405020304" pitchFamily="18" charset="0"/>
+                <a:latin typeface="Times New Roman" panose="02020503050405090304" pitchFamily="18" charset="0"/>
+                <a:cs typeface="Times New Roman" panose="02020503050405090304" pitchFamily="18" charset="0"/>
               </a:rPr>
               <a:t>SH</a:t>
             </a:r>
-            <a:endParaRPr lang="zh-CN" altLang="en-US" sz="1861" dirty="0">
+            <a:endParaRPr lang="zh-CN" altLang="en-US" sz="1860" dirty="0">
               <a:solidFill>
                 <a:schemeClr val="tx1"/>
               </a:solidFill>
-              <a:latin typeface="Times New Roman" panose="02020603050405020304" pitchFamily="18" charset="0"/>
-              <a:cs typeface="Times New Roman" panose="02020603050405020304" pitchFamily="18" charset="0"/>
+              <a:latin typeface="Times New Roman" panose="02020503050405090304" pitchFamily="18" charset="0"/>
+              <a:cs typeface="Times New Roman" panose="02020503050405090304" pitchFamily="18" charset="0"/>
             </a:endParaRPr>
           </a:p>
         </p:txBody>
       </p:sp>
       <p:cxnSp>
         <p:nvCxnSpPr>
-          <p:cNvPr id="380" name="直接箭头连接符 379">
-            <a:extLst>
-              <a:ext uri="{FF2B5EF4-FFF2-40B4-BE49-F238E27FC236}">
-                <a16:creationId xmlns:a16="http://schemas.microsoft.com/office/drawing/2014/main" id="{739274FE-DD60-401E-BD83-288BB377C92B}"/>
-              </a:ext>
-            </a:extLst>
-          </p:cNvPr>
+          <p:cNvPr id="380" name="直接箭头连接符 379"/>
           <p:cNvCxnSpPr>
-            <a:cxnSpLocks/>
             <a:stCxn id="413" idx="0"/>
             <a:endCxn id="379" idx="2"/>
           </p:cNvCxnSpPr>
@@ -12079,15 +11146,8 @@
       </p:cxnSp>
       <p:cxnSp>
         <p:nvCxnSpPr>
-          <p:cNvPr id="381" name="直接箭头连接符 380">
-            <a:extLst>
-              <a:ext uri="{FF2B5EF4-FFF2-40B4-BE49-F238E27FC236}">
-                <a16:creationId xmlns:a16="http://schemas.microsoft.com/office/drawing/2014/main" id="{7BD91E01-FF10-4DF0-8675-7FDB4548D72F}"/>
-              </a:ext>
-            </a:extLst>
-          </p:cNvPr>
+          <p:cNvPr id="381" name="直接箭头连接符 380"/>
           <p:cNvCxnSpPr>
-            <a:cxnSpLocks/>
             <a:stCxn id="377" idx="2"/>
             <a:endCxn id="360" idx="0"/>
           </p:cNvCxnSpPr>
@@ -12125,15 +11185,8 @@
       </p:cxnSp>
       <p:cxnSp>
         <p:nvCxnSpPr>
-          <p:cNvPr id="382" name="直接箭头连接符 381">
-            <a:extLst>
-              <a:ext uri="{FF2B5EF4-FFF2-40B4-BE49-F238E27FC236}">
-                <a16:creationId xmlns:a16="http://schemas.microsoft.com/office/drawing/2014/main" id="{07CC588B-B0FE-4B20-8C5B-30688EC7F8CB}"/>
-              </a:ext>
-            </a:extLst>
-          </p:cNvPr>
+          <p:cNvPr id="382" name="直接箭头连接符 381"/>
           <p:cNvCxnSpPr>
-            <a:cxnSpLocks/>
             <a:stCxn id="373" idx="2"/>
             <a:endCxn id="377" idx="0"/>
           </p:cNvCxnSpPr>
@@ -12171,15 +11224,8 @@
       </p:cxnSp>
       <p:cxnSp>
         <p:nvCxnSpPr>
-          <p:cNvPr id="383" name="连接符: 肘形 382">
-            <a:extLst>
-              <a:ext uri="{FF2B5EF4-FFF2-40B4-BE49-F238E27FC236}">
-                <a16:creationId xmlns:a16="http://schemas.microsoft.com/office/drawing/2014/main" id="{225750D3-A828-41E0-81AF-E015FC7D2D42}"/>
-              </a:ext>
-            </a:extLst>
-          </p:cNvPr>
+          <p:cNvPr id="383" name="连接符: 肘形 382"/>
           <p:cNvCxnSpPr>
-            <a:cxnSpLocks/>
             <a:stCxn id="399" idx="2"/>
             <a:endCxn id="376" idx="2"/>
           </p:cNvCxnSpPr>
@@ -12219,15 +11265,8 @@
       </p:cxnSp>
       <p:cxnSp>
         <p:nvCxnSpPr>
-          <p:cNvPr id="384" name="连接符: 肘形 383">
-            <a:extLst>
-              <a:ext uri="{FF2B5EF4-FFF2-40B4-BE49-F238E27FC236}">
-                <a16:creationId xmlns:a16="http://schemas.microsoft.com/office/drawing/2014/main" id="{257B7BAB-9A5D-4911-A5C5-1F090315D8B1}"/>
-              </a:ext>
-            </a:extLst>
-          </p:cNvPr>
+          <p:cNvPr id="384" name="连接符: 肘形 383"/>
           <p:cNvCxnSpPr>
-            <a:cxnSpLocks/>
             <a:stCxn id="376" idx="1"/>
             <a:endCxn id="363" idx="2"/>
           </p:cNvCxnSpPr>
@@ -12265,15 +11304,8 @@
       </p:cxnSp>
       <p:cxnSp>
         <p:nvCxnSpPr>
-          <p:cNvPr id="385" name="连接符: 肘形 384">
-            <a:extLst>
-              <a:ext uri="{FF2B5EF4-FFF2-40B4-BE49-F238E27FC236}">
-                <a16:creationId xmlns:a16="http://schemas.microsoft.com/office/drawing/2014/main" id="{9C5EAB30-A3E7-4F17-9655-44B788DFF2D8}"/>
-              </a:ext>
-            </a:extLst>
-          </p:cNvPr>
+          <p:cNvPr id="385" name="连接符: 肘形 384"/>
           <p:cNvCxnSpPr>
-            <a:cxnSpLocks/>
             <a:stCxn id="400" idx="1"/>
             <a:endCxn id="367" idx="2"/>
           </p:cNvCxnSpPr>
@@ -12311,15 +11343,8 @@
       </p:cxnSp>
       <p:cxnSp>
         <p:nvCxnSpPr>
-          <p:cNvPr id="386" name="连接符: 肘形 385">
-            <a:extLst>
-              <a:ext uri="{FF2B5EF4-FFF2-40B4-BE49-F238E27FC236}">
-                <a16:creationId xmlns:a16="http://schemas.microsoft.com/office/drawing/2014/main" id="{EE565C35-281F-42BC-8EE4-9C9D7059D3FD}"/>
-              </a:ext>
-            </a:extLst>
-          </p:cNvPr>
+          <p:cNvPr id="386" name="连接符: 肘形 385"/>
           <p:cNvCxnSpPr>
-            <a:cxnSpLocks/>
             <a:stCxn id="402" idx="1"/>
             <a:endCxn id="368" idx="2"/>
           </p:cNvCxnSpPr>
@@ -12357,15 +11382,8 @@
       </p:cxnSp>
       <p:cxnSp>
         <p:nvCxnSpPr>
-          <p:cNvPr id="387" name="直接箭头连接符 386">
-            <a:extLst>
-              <a:ext uri="{FF2B5EF4-FFF2-40B4-BE49-F238E27FC236}">
-                <a16:creationId xmlns:a16="http://schemas.microsoft.com/office/drawing/2014/main" id="{D7739AE3-17E3-405C-8D50-A19366AE1EFA}"/>
-              </a:ext>
-            </a:extLst>
-          </p:cNvPr>
+          <p:cNvPr id="387" name="直接箭头连接符 386"/>
           <p:cNvCxnSpPr>
-            <a:cxnSpLocks/>
             <a:stCxn id="368" idx="3"/>
             <a:endCxn id="362" idx="2"/>
           </p:cNvCxnSpPr>
@@ -12403,15 +11421,8 @@
       </p:cxnSp>
       <p:cxnSp>
         <p:nvCxnSpPr>
-          <p:cNvPr id="388" name="直接箭头连接符 387">
-            <a:extLst>
-              <a:ext uri="{FF2B5EF4-FFF2-40B4-BE49-F238E27FC236}">
-                <a16:creationId xmlns:a16="http://schemas.microsoft.com/office/drawing/2014/main" id="{56E00ABF-B980-4D1C-99B5-1F6167A91A2A}"/>
-              </a:ext>
-            </a:extLst>
-          </p:cNvPr>
+          <p:cNvPr id="388" name="直接箭头连接符 387"/>
           <p:cNvCxnSpPr>
-            <a:cxnSpLocks/>
             <a:stCxn id="367" idx="3"/>
             <a:endCxn id="392" idx="2"/>
           </p:cNvCxnSpPr>
@@ -12449,15 +11460,8 @@
       </p:cxnSp>
       <p:cxnSp>
         <p:nvCxnSpPr>
-          <p:cNvPr id="389" name="直接箭头连接符 388">
-            <a:extLst>
-              <a:ext uri="{FF2B5EF4-FFF2-40B4-BE49-F238E27FC236}">
-                <a16:creationId xmlns:a16="http://schemas.microsoft.com/office/drawing/2014/main" id="{6CC80136-0412-4002-B92F-28B6EF17D5C8}"/>
-              </a:ext>
-            </a:extLst>
-          </p:cNvPr>
+          <p:cNvPr id="389" name="直接箭头连接符 388"/>
           <p:cNvCxnSpPr>
-            <a:cxnSpLocks/>
             <a:stCxn id="363" idx="3"/>
             <a:endCxn id="393" idx="2"/>
           </p:cNvCxnSpPr>
@@ -12495,15 +11499,8 @@
       </p:cxnSp>
       <p:cxnSp>
         <p:nvCxnSpPr>
-          <p:cNvPr id="390" name="直接箭头连接符 389">
-            <a:extLst>
-              <a:ext uri="{FF2B5EF4-FFF2-40B4-BE49-F238E27FC236}">
-                <a16:creationId xmlns:a16="http://schemas.microsoft.com/office/drawing/2014/main" id="{1592A452-C825-47D6-AAF5-43E5E2904447}"/>
-              </a:ext>
-            </a:extLst>
-          </p:cNvPr>
+          <p:cNvPr id="390" name="直接箭头连接符 389"/>
           <p:cNvCxnSpPr>
-            <a:cxnSpLocks/>
             <a:stCxn id="402" idx="0"/>
             <a:endCxn id="362" idx="4"/>
           </p:cNvCxnSpPr>
@@ -12541,15 +11538,8 @@
       </p:cxnSp>
       <p:cxnSp>
         <p:nvCxnSpPr>
-          <p:cNvPr id="391" name="直接箭头连接符 390">
-            <a:extLst>
-              <a:ext uri="{FF2B5EF4-FFF2-40B4-BE49-F238E27FC236}">
-                <a16:creationId xmlns:a16="http://schemas.microsoft.com/office/drawing/2014/main" id="{3242CE42-E365-4B44-AB42-72ED550DBB7B}"/>
-              </a:ext>
-            </a:extLst>
-          </p:cNvPr>
+          <p:cNvPr id="391" name="直接箭头连接符 390"/>
           <p:cNvCxnSpPr>
-            <a:cxnSpLocks/>
             <a:stCxn id="362" idx="0"/>
             <a:endCxn id="378" idx="2"/>
           </p:cNvCxnSpPr>
@@ -12587,13 +11577,7 @@
       </p:cxnSp>
       <p:sp>
         <p:nvSpPr>
-          <p:cNvPr id="392" name="流程图: 或者 391">
-            <a:extLst>
-              <a:ext uri="{FF2B5EF4-FFF2-40B4-BE49-F238E27FC236}">
-                <a16:creationId xmlns:a16="http://schemas.microsoft.com/office/drawing/2014/main" id="{A5CEA024-55F8-479C-9AB5-C707CC4CE4A6}"/>
-              </a:ext>
-            </a:extLst>
-          </p:cNvPr>
+          <p:cNvPr id="392" name="流程图: 或者 391"/>
           <p:cNvSpPr/>
           <p:nvPr/>
         </p:nvSpPr>
@@ -12635,19 +11619,13 @@
           <a:lstStyle/>
           <a:p>
             <a:pPr algn="ctr"/>
-            <a:endParaRPr lang="zh-CN" altLang="en-US" sz="1861"/>
-          </a:p>
-        </p:txBody>
-      </p:sp>
-      <p:sp>
-        <p:nvSpPr>
-          <p:cNvPr id="393" name="流程图: 或者 392">
-            <a:extLst>
-              <a:ext uri="{FF2B5EF4-FFF2-40B4-BE49-F238E27FC236}">
-                <a16:creationId xmlns:a16="http://schemas.microsoft.com/office/drawing/2014/main" id="{5AA4F664-04DD-409B-9D0A-56B3990FEAFC}"/>
-              </a:ext>
-            </a:extLst>
-          </p:cNvPr>
+            <a:endParaRPr lang="zh-CN" altLang="en-US" sz="1860"/>
+          </a:p>
+        </p:txBody>
+      </p:sp>
+      <p:sp>
+        <p:nvSpPr>
+          <p:cNvPr id="393" name="流程图: 或者 392"/>
           <p:cNvSpPr/>
           <p:nvPr/>
         </p:nvSpPr>
@@ -12689,21 +11667,14 @@
           <a:lstStyle/>
           <a:p>
             <a:pPr algn="ctr"/>
-            <a:endParaRPr lang="zh-CN" altLang="en-US" sz="1861"/>
+            <a:endParaRPr lang="zh-CN" altLang="en-US" sz="1860"/>
           </a:p>
         </p:txBody>
       </p:sp>
       <p:cxnSp>
         <p:nvCxnSpPr>
-          <p:cNvPr id="394" name="直接箭头连接符 393">
-            <a:extLst>
-              <a:ext uri="{FF2B5EF4-FFF2-40B4-BE49-F238E27FC236}">
-                <a16:creationId xmlns:a16="http://schemas.microsoft.com/office/drawing/2014/main" id="{9D1A616E-30C7-47D9-BF0B-10371878A801}"/>
-              </a:ext>
-            </a:extLst>
-          </p:cNvPr>
+          <p:cNvPr id="394" name="直接箭头连接符 393"/>
           <p:cNvCxnSpPr>
-            <a:cxnSpLocks/>
             <a:stCxn id="400" idx="0"/>
             <a:endCxn id="392" idx="4"/>
           </p:cNvCxnSpPr>
@@ -12741,13 +11712,7 @@
       </p:cxnSp>
       <p:sp>
         <p:nvSpPr>
-          <p:cNvPr id="395" name="矩形: 圆角 394">
-            <a:extLst>
-              <a:ext uri="{FF2B5EF4-FFF2-40B4-BE49-F238E27FC236}">
-                <a16:creationId xmlns:a16="http://schemas.microsoft.com/office/drawing/2014/main" id="{9320FCC5-9252-426E-8B54-67735B629F5B}"/>
-              </a:ext>
-            </a:extLst>
-          </p:cNvPr>
+          <p:cNvPr id="395" name="矩形: 圆角 394"/>
           <p:cNvSpPr/>
           <p:nvPr/>
         </p:nvSpPr>
@@ -12793,34 +11758,28 @@
           <a:p>
             <a:pPr algn="ctr"/>
             <a:r>
-              <a:rPr lang="en-US" altLang="zh-CN" sz="1448" dirty="0">
+              <a:rPr lang="en-US" altLang="zh-CN" sz="1450" dirty="0">
                 <a:solidFill>
                   <a:schemeClr val="tx1"/>
                 </a:solidFill>
-                <a:latin typeface="Times New Roman" panose="02020603050405020304" pitchFamily="18" charset="0"/>
-                <a:cs typeface="Times New Roman" panose="02020603050405020304" pitchFamily="18" charset="0"/>
+                <a:latin typeface="Times New Roman" panose="02020503050405090304" pitchFamily="18" charset="0"/>
+                <a:cs typeface="Times New Roman" panose="02020503050405090304" pitchFamily="18" charset="0"/>
               </a:rPr>
               <a:t>VSS Block *2</a:t>
             </a:r>
-            <a:endParaRPr lang="zh-CN" altLang="en-US" sz="1448" dirty="0">
+            <a:endParaRPr lang="zh-CN" altLang="en-US" sz="1450" dirty="0">
               <a:solidFill>
                 <a:schemeClr val="tx1"/>
               </a:solidFill>
-              <a:latin typeface="Times New Roman" panose="02020603050405020304" pitchFamily="18" charset="0"/>
-              <a:cs typeface="Times New Roman" panose="02020603050405020304" pitchFamily="18" charset="0"/>
+              <a:latin typeface="Times New Roman" panose="02020503050405090304" pitchFamily="18" charset="0"/>
+              <a:cs typeface="Times New Roman" panose="02020503050405090304" pitchFamily="18" charset="0"/>
             </a:endParaRPr>
           </a:p>
         </p:txBody>
       </p:sp>
       <p:sp>
         <p:nvSpPr>
-          <p:cNvPr id="396" name="矩形: 圆角 395">
-            <a:extLst>
-              <a:ext uri="{FF2B5EF4-FFF2-40B4-BE49-F238E27FC236}">
-                <a16:creationId xmlns:a16="http://schemas.microsoft.com/office/drawing/2014/main" id="{7FD2CA1F-2E8D-4240-AD14-472BFA24CF37}"/>
-              </a:ext>
-            </a:extLst>
-          </p:cNvPr>
+          <p:cNvPr id="396" name="矩形: 圆角 395"/>
           <p:cNvSpPr/>
           <p:nvPr/>
         </p:nvSpPr>
@@ -12866,34 +11825,28 @@
           <a:p>
             <a:pPr algn="ctr"/>
             <a:r>
-              <a:rPr lang="en-US" altLang="zh-CN" sz="1241" dirty="0">
+              <a:rPr lang="en-US" altLang="zh-CN" sz="1240" dirty="0">
                 <a:solidFill>
                   <a:schemeClr val="tx1"/>
                 </a:solidFill>
-                <a:latin typeface="Times New Roman" panose="02020603050405020304" pitchFamily="18" charset="0"/>
-                <a:cs typeface="Times New Roman" panose="02020603050405020304" pitchFamily="18" charset="0"/>
+                <a:latin typeface="Times New Roman" panose="02020503050405090304" pitchFamily="18" charset="0"/>
+                <a:cs typeface="Times New Roman" panose="02020503050405090304" pitchFamily="18" charset="0"/>
               </a:rPr>
               <a:t>Patch Merging</a:t>
             </a:r>
-            <a:endParaRPr lang="zh-CN" altLang="en-US" sz="1241" dirty="0">
+            <a:endParaRPr lang="zh-CN" altLang="en-US" sz="1240" dirty="0">
               <a:solidFill>
                 <a:schemeClr val="tx1"/>
               </a:solidFill>
-              <a:latin typeface="Times New Roman" panose="02020603050405020304" pitchFamily="18" charset="0"/>
-              <a:cs typeface="Times New Roman" panose="02020603050405020304" pitchFamily="18" charset="0"/>
+              <a:latin typeface="Times New Roman" panose="02020503050405090304" pitchFamily="18" charset="0"/>
+              <a:cs typeface="Times New Roman" panose="02020503050405090304" pitchFamily="18" charset="0"/>
             </a:endParaRPr>
           </a:p>
         </p:txBody>
       </p:sp>
       <p:sp>
         <p:nvSpPr>
-          <p:cNvPr id="397" name="矩形: 圆角 396">
-            <a:extLst>
-              <a:ext uri="{FF2B5EF4-FFF2-40B4-BE49-F238E27FC236}">
-                <a16:creationId xmlns:a16="http://schemas.microsoft.com/office/drawing/2014/main" id="{9A3D99DC-5BCA-4966-ABBE-49989EE4C286}"/>
-              </a:ext>
-            </a:extLst>
-          </p:cNvPr>
+          <p:cNvPr id="397" name="矩形: 圆角 396"/>
           <p:cNvSpPr/>
           <p:nvPr/>
         </p:nvSpPr>
@@ -12939,34 +11892,28 @@
           <a:p>
             <a:pPr algn="ctr"/>
             <a:r>
-              <a:rPr lang="en-US" altLang="zh-CN" sz="1448" dirty="0">
+              <a:rPr lang="en-US" altLang="zh-CN" sz="1450" dirty="0">
                 <a:solidFill>
                   <a:schemeClr val="tx1"/>
                 </a:solidFill>
-                <a:latin typeface="Times New Roman" panose="02020603050405020304" pitchFamily="18" charset="0"/>
-                <a:cs typeface="Times New Roman" panose="02020603050405020304" pitchFamily="18" charset="0"/>
+                <a:latin typeface="Times New Roman" panose="02020503050405090304" pitchFamily="18" charset="0"/>
+                <a:cs typeface="Times New Roman" panose="02020503050405090304" pitchFamily="18" charset="0"/>
               </a:rPr>
               <a:t>VSS Block *2</a:t>
             </a:r>
-            <a:endParaRPr lang="zh-CN" altLang="en-US" sz="1448" dirty="0">
+            <a:endParaRPr lang="zh-CN" altLang="en-US" sz="1450" dirty="0">
               <a:solidFill>
                 <a:schemeClr val="tx1"/>
               </a:solidFill>
-              <a:latin typeface="Times New Roman" panose="02020603050405020304" pitchFamily="18" charset="0"/>
-              <a:cs typeface="Times New Roman" panose="02020603050405020304" pitchFamily="18" charset="0"/>
+              <a:latin typeface="Times New Roman" panose="02020503050405090304" pitchFamily="18" charset="0"/>
+              <a:cs typeface="Times New Roman" panose="02020503050405090304" pitchFamily="18" charset="0"/>
             </a:endParaRPr>
           </a:p>
         </p:txBody>
       </p:sp>
       <p:sp>
         <p:nvSpPr>
-          <p:cNvPr id="398" name="矩形: 圆角 397">
-            <a:extLst>
-              <a:ext uri="{FF2B5EF4-FFF2-40B4-BE49-F238E27FC236}">
-                <a16:creationId xmlns:a16="http://schemas.microsoft.com/office/drawing/2014/main" id="{8FD7721A-DA98-44AD-926C-D73521085825}"/>
-              </a:ext>
-            </a:extLst>
-          </p:cNvPr>
+          <p:cNvPr id="398" name="矩形: 圆角 397"/>
           <p:cNvSpPr/>
           <p:nvPr/>
         </p:nvSpPr>
@@ -13012,34 +11959,28 @@
           <a:p>
             <a:pPr algn="ctr"/>
             <a:r>
-              <a:rPr lang="en-US" altLang="zh-CN" sz="1241" dirty="0">
+              <a:rPr lang="en-US" altLang="zh-CN" sz="1240" dirty="0">
                 <a:solidFill>
                   <a:schemeClr val="tx1"/>
                 </a:solidFill>
-                <a:latin typeface="Times New Roman" panose="02020603050405020304" pitchFamily="18" charset="0"/>
-                <a:cs typeface="Times New Roman" panose="02020603050405020304" pitchFamily="18" charset="0"/>
+                <a:latin typeface="Times New Roman" panose="02020503050405090304" pitchFamily="18" charset="0"/>
+                <a:cs typeface="Times New Roman" panose="02020503050405090304" pitchFamily="18" charset="0"/>
               </a:rPr>
               <a:t>Patch Merging</a:t>
             </a:r>
-            <a:endParaRPr lang="zh-CN" altLang="en-US" sz="1241" dirty="0">
+            <a:endParaRPr lang="zh-CN" altLang="en-US" sz="1240" dirty="0">
               <a:solidFill>
                 <a:schemeClr val="tx1"/>
               </a:solidFill>
-              <a:latin typeface="Times New Roman" panose="02020603050405020304" pitchFamily="18" charset="0"/>
-              <a:cs typeface="Times New Roman" panose="02020603050405020304" pitchFamily="18" charset="0"/>
+              <a:latin typeface="Times New Roman" panose="02020503050405090304" pitchFamily="18" charset="0"/>
+              <a:cs typeface="Times New Roman" panose="02020503050405090304" pitchFamily="18" charset="0"/>
             </a:endParaRPr>
           </a:p>
         </p:txBody>
       </p:sp>
       <p:sp>
         <p:nvSpPr>
-          <p:cNvPr id="399" name="矩形: 圆角 398">
-            <a:extLst>
-              <a:ext uri="{FF2B5EF4-FFF2-40B4-BE49-F238E27FC236}">
-                <a16:creationId xmlns:a16="http://schemas.microsoft.com/office/drawing/2014/main" id="{96A8A120-EAB6-4517-997F-B47316CEB525}"/>
-              </a:ext>
-            </a:extLst>
-          </p:cNvPr>
+          <p:cNvPr id="399" name="矩形: 圆角 398"/>
           <p:cNvSpPr/>
           <p:nvPr/>
         </p:nvSpPr>
@@ -13085,34 +12026,28 @@
           <a:p>
             <a:pPr algn="ctr"/>
             <a:r>
-              <a:rPr lang="en-US" altLang="zh-CN" sz="1448" dirty="0">
+              <a:rPr lang="en-US" altLang="zh-CN" sz="1450" dirty="0">
                 <a:solidFill>
                   <a:schemeClr val="tx1"/>
                 </a:solidFill>
-                <a:latin typeface="Times New Roman" panose="02020603050405020304" pitchFamily="18" charset="0"/>
-                <a:cs typeface="Times New Roman" panose="02020603050405020304" pitchFamily="18" charset="0"/>
+                <a:latin typeface="Times New Roman" panose="02020503050405090304" pitchFamily="18" charset="0"/>
+                <a:cs typeface="Times New Roman" panose="02020503050405090304" pitchFamily="18" charset="0"/>
               </a:rPr>
               <a:t>VSS Block *2</a:t>
             </a:r>
-            <a:endParaRPr lang="zh-CN" altLang="en-US" sz="1448" dirty="0">
+            <a:endParaRPr lang="zh-CN" altLang="en-US" sz="1450" dirty="0">
               <a:solidFill>
                 <a:schemeClr val="tx1"/>
               </a:solidFill>
-              <a:latin typeface="Times New Roman" panose="02020603050405020304" pitchFamily="18" charset="0"/>
-              <a:cs typeface="Times New Roman" panose="02020603050405020304" pitchFamily="18" charset="0"/>
+              <a:latin typeface="Times New Roman" panose="02020503050405090304" pitchFamily="18" charset="0"/>
+              <a:cs typeface="Times New Roman" panose="02020503050405090304" pitchFamily="18" charset="0"/>
             </a:endParaRPr>
           </a:p>
         </p:txBody>
       </p:sp>
       <p:sp>
         <p:nvSpPr>
-          <p:cNvPr id="400" name="矩形: 圆角 399">
-            <a:extLst>
-              <a:ext uri="{FF2B5EF4-FFF2-40B4-BE49-F238E27FC236}">
-                <a16:creationId xmlns:a16="http://schemas.microsoft.com/office/drawing/2014/main" id="{F2080F80-3EDD-42BF-B461-57289CF06EC3}"/>
-              </a:ext>
-            </a:extLst>
-          </p:cNvPr>
+          <p:cNvPr id="400" name="矩形: 圆角 399"/>
           <p:cNvSpPr/>
           <p:nvPr/>
         </p:nvSpPr>
@@ -13158,34 +12093,28 @@
           <a:p>
             <a:pPr algn="ctr"/>
             <a:r>
-              <a:rPr lang="en-US" altLang="zh-CN" sz="1241" dirty="0">
+              <a:rPr lang="en-US" altLang="zh-CN" sz="1240" dirty="0">
                 <a:solidFill>
                   <a:schemeClr val="tx1"/>
                 </a:solidFill>
-                <a:latin typeface="Times New Roman" panose="02020603050405020304" pitchFamily="18" charset="0"/>
-                <a:cs typeface="Times New Roman" panose="02020603050405020304" pitchFamily="18" charset="0"/>
+                <a:latin typeface="Times New Roman" panose="02020503050405090304" pitchFamily="18" charset="0"/>
+                <a:cs typeface="Times New Roman" panose="02020503050405090304" pitchFamily="18" charset="0"/>
               </a:rPr>
               <a:t>Patch Expanding</a:t>
             </a:r>
-            <a:endParaRPr lang="zh-CN" altLang="en-US" sz="1241" dirty="0">
+            <a:endParaRPr lang="zh-CN" altLang="en-US" sz="1240" dirty="0">
               <a:solidFill>
                 <a:schemeClr val="tx1"/>
               </a:solidFill>
-              <a:latin typeface="Times New Roman" panose="02020603050405020304" pitchFamily="18" charset="0"/>
-              <a:cs typeface="Times New Roman" panose="02020603050405020304" pitchFamily="18" charset="0"/>
+              <a:latin typeface="Times New Roman" panose="02020503050405090304" pitchFamily="18" charset="0"/>
+              <a:cs typeface="Times New Roman" panose="02020503050405090304" pitchFamily="18" charset="0"/>
             </a:endParaRPr>
           </a:p>
         </p:txBody>
       </p:sp>
       <p:sp>
         <p:nvSpPr>
-          <p:cNvPr id="401" name="矩形: 圆角 400">
-            <a:extLst>
-              <a:ext uri="{FF2B5EF4-FFF2-40B4-BE49-F238E27FC236}">
-                <a16:creationId xmlns:a16="http://schemas.microsoft.com/office/drawing/2014/main" id="{24470C1C-0F2E-4A74-ADA7-630CD2F744BA}"/>
-              </a:ext>
-            </a:extLst>
-          </p:cNvPr>
+          <p:cNvPr id="401" name="矩形: 圆角 400"/>
           <p:cNvSpPr/>
           <p:nvPr/>
         </p:nvSpPr>
@@ -13231,34 +12160,28 @@
           <a:p>
             <a:pPr algn="ctr"/>
             <a:r>
-              <a:rPr lang="en-US" altLang="zh-CN" sz="1861" dirty="0">
+              <a:rPr lang="en-US" altLang="zh-CN" sz="1860" dirty="0">
                 <a:solidFill>
                   <a:schemeClr val="tx1"/>
                 </a:solidFill>
-                <a:latin typeface="Times New Roman" panose="02020603050405020304" pitchFamily="18" charset="0"/>
-                <a:cs typeface="Times New Roman" panose="02020603050405020304" pitchFamily="18" charset="0"/>
+                <a:latin typeface="Times New Roman" panose="02020503050405090304" pitchFamily="18" charset="0"/>
+                <a:cs typeface="Times New Roman" panose="02020503050405090304" pitchFamily="18" charset="0"/>
               </a:rPr>
               <a:t>SLCB</a:t>
             </a:r>
-            <a:endParaRPr lang="zh-CN" altLang="en-US" sz="1861" dirty="0">
+            <a:endParaRPr lang="zh-CN" altLang="en-US" sz="1860" dirty="0">
               <a:solidFill>
                 <a:schemeClr val="tx1"/>
               </a:solidFill>
-              <a:latin typeface="Times New Roman" panose="02020603050405020304" pitchFamily="18" charset="0"/>
-              <a:cs typeface="Times New Roman" panose="02020603050405020304" pitchFamily="18" charset="0"/>
+              <a:latin typeface="Times New Roman" panose="02020503050405090304" pitchFamily="18" charset="0"/>
+              <a:cs typeface="Times New Roman" panose="02020503050405090304" pitchFamily="18" charset="0"/>
             </a:endParaRPr>
           </a:p>
         </p:txBody>
       </p:sp>
       <p:sp>
         <p:nvSpPr>
-          <p:cNvPr id="402" name="矩形: 圆角 401">
-            <a:extLst>
-              <a:ext uri="{FF2B5EF4-FFF2-40B4-BE49-F238E27FC236}">
-                <a16:creationId xmlns:a16="http://schemas.microsoft.com/office/drawing/2014/main" id="{09DFD344-7DC7-4855-BFAC-1778B71262B9}"/>
-              </a:ext>
-            </a:extLst>
-          </p:cNvPr>
+          <p:cNvPr id="402" name="矩形: 圆角 401"/>
           <p:cNvSpPr/>
           <p:nvPr/>
         </p:nvSpPr>
@@ -13304,34 +12227,28 @@
           <a:p>
             <a:pPr algn="ctr"/>
             <a:r>
-              <a:rPr lang="en-US" altLang="zh-CN" sz="1241" dirty="0">
+              <a:rPr lang="en-US" altLang="zh-CN" sz="1240" dirty="0">
                 <a:solidFill>
                   <a:schemeClr val="tx1"/>
                 </a:solidFill>
-                <a:latin typeface="Times New Roman" panose="02020603050405020304" pitchFamily="18" charset="0"/>
-                <a:cs typeface="Times New Roman" panose="02020603050405020304" pitchFamily="18" charset="0"/>
+                <a:latin typeface="Times New Roman" panose="02020503050405090304" pitchFamily="18" charset="0"/>
+                <a:cs typeface="Times New Roman" panose="02020503050405090304" pitchFamily="18" charset="0"/>
               </a:rPr>
               <a:t>Patch Expanding</a:t>
             </a:r>
-            <a:endParaRPr lang="zh-CN" altLang="en-US" sz="1241" dirty="0">
+            <a:endParaRPr lang="zh-CN" altLang="en-US" sz="1240" dirty="0">
               <a:solidFill>
                 <a:schemeClr val="tx1"/>
               </a:solidFill>
-              <a:latin typeface="Times New Roman" panose="02020603050405020304" pitchFamily="18" charset="0"/>
-              <a:cs typeface="Times New Roman" panose="02020603050405020304" pitchFamily="18" charset="0"/>
+              <a:latin typeface="Times New Roman" panose="02020503050405090304" pitchFamily="18" charset="0"/>
+              <a:cs typeface="Times New Roman" panose="02020503050405090304" pitchFamily="18" charset="0"/>
             </a:endParaRPr>
           </a:p>
         </p:txBody>
       </p:sp>
       <p:sp>
         <p:nvSpPr>
-          <p:cNvPr id="403" name="矩形: 圆角 402">
-            <a:extLst>
-              <a:ext uri="{FF2B5EF4-FFF2-40B4-BE49-F238E27FC236}">
-                <a16:creationId xmlns:a16="http://schemas.microsoft.com/office/drawing/2014/main" id="{F9D1E80F-8588-4797-9A17-F6F8C0BA6053}"/>
-              </a:ext>
-            </a:extLst>
-          </p:cNvPr>
+          <p:cNvPr id="403" name="矩形: 圆角 402"/>
           <p:cNvSpPr/>
           <p:nvPr/>
         </p:nvSpPr>
@@ -13377,36 +12294,29 @@
           <a:p>
             <a:pPr algn="ctr"/>
             <a:r>
-              <a:rPr lang="en-US" altLang="zh-CN" sz="1861" dirty="0">
+              <a:rPr lang="en-US" altLang="zh-CN" sz="1860" dirty="0">
                 <a:solidFill>
                   <a:schemeClr val="tx1"/>
                 </a:solidFill>
-                <a:latin typeface="Times New Roman" panose="02020603050405020304" pitchFamily="18" charset="0"/>
-                <a:cs typeface="Times New Roman" panose="02020603050405020304" pitchFamily="18" charset="0"/>
+                <a:latin typeface="Times New Roman" panose="02020503050405090304" pitchFamily="18" charset="0"/>
+                <a:cs typeface="Times New Roman" panose="02020503050405090304" pitchFamily="18" charset="0"/>
               </a:rPr>
               <a:t>SLCB</a:t>
             </a:r>
-            <a:endParaRPr lang="zh-CN" altLang="en-US" sz="1861" dirty="0">
+            <a:endParaRPr lang="zh-CN" altLang="en-US" sz="1860" dirty="0">
               <a:solidFill>
                 <a:schemeClr val="tx1"/>
               </a:solidFill>
-              <a:latin typeface="Times New Roman" panose="02020603050405020304" pitchFamily="18" charset="0"/>
-              <a:cs typeface="Times New Roman" panose="02020603050405020304" pitchFamily="18" charset="0"/>
+              <a:latin typeface="Times New Roman" panose="02020503050405090304" pitchFamily="18" charset="0"/>
+              <a:cs typeface="Times New Roman" panose="02020503050405090304" pitchFamily="18" charset="0"/>
             </a:endParaRPr>
           </a:p>
         </p:txBody>
       </p:sp>
       <p:cxnSp>
         <p:nvCxnSpPr>
-          <p:cNvPr id="404" name="直接箭头连接符 403">
-            <a:extLst>
-              <a:ext uri="{FF2B5EF4-FFF2-40B4-BE49-F238E27FC236}">
-                <a16:creationId xmlns:a16="http://schemas.microsoft.com/office/drawing/2014/main" id="{F698B7DF-F19F-4FB3-81E9-CB0291396660}"/>
-              </a:ext>
-            </a:extLst>
-          </p:cNvPr>
+          <p:cNvPr id="404" name="直接箭头连接符 403"/>
           <p:cNvCxnSpPr>
-            <a:cxnSpLocks/>
             <a:stCxn id="392" idx="0"/>
             <a:endCxn id="403" idx="2"/>
           </p:cNvCxnSpPr>
@@ -13444,15 +12354,8 @@
       </p:cxnSp>
       <p:cxnSp>
         <p:nvCxnSpPr>
-          <p:cNvPr id="405" name="直接箭头连接符 404">
-            <a:extLst>
-              <a:ext uri="{FF2B5EF4-FFF2-40B4-BE49-F238E27FC236}">
-                <a16:creationId xmlns:a16="http://schemas.microsoft.com/office/drawing/2014/main" id="{193F7069-8F78-414A-849E-582BE6CAEA27}"/>
-              </a:ext>
-            </a:extLst>
-          </p:cNvPr>
+          <p:cNvPr id="405" name="直接箭头连接符 404"/>
           <p:cNvCxnSpPr>
-            <a:cxnSpLocks/>
             <a:stCxn id="393" idx="0"/>
             <a:endCxn id="401" idx="2"/>
           </p:cNvCxnSpPr>
@@ -13490,15 +12393,8 @@
       </p:cxnSp>
       <p:cxnSp>
         <p:nvCxnSpPr>
-          <p:cNvPr id="406" name="直接箭头连接符 405">
-            <a:extLst>
-              <a:ext uri="{FF2B5EF4-FFF2-40B4-BE49-F238E27FC236}">
-                <a16:creationId xmlns:a16="http://schemas.microsoft.com/office/drawing/2014/main" id="{2CBEA19B-DE7D-4B39-952C-69EF60991BD1}"/>
-              </a:ext>
-            </a:extLst>
-          </p:cNvPr>
+          <p:cNvPr id="406" name="直接箭头连接符 405"/>
           <p:cNvCxnSpPr>
-            <a:cxnSpLocks/>
             <a:stCxn id="376" idx="0"/>
             <a:endCxn id="393" idx="4"/>
           </p:cNvCxnSpPr>
@@ -13536,13 +12432,7 @@
       </p:cxnSp>
       <p:sp>
         <p:nvSpPr>
-          <p:cNvPr id="407" name="文本框 406">
-            <a:extLst>
-              <a:ext uri="{FF2B5EF4-FFF2-40B4-BE49-F238E27FC236}">
-                <a16:creationId xmlns:a16="http://schemas.microsoft.com/office/drawing/2014/main" id="{9C5C1174-095D-4957-BCD4-F7AE3BDC27D0}"/>
-              </a:ext>
-            </a:extLst>
-          </p:cNvPr>
+          <p:cNvPr id="407" name="文本框 406"/>
           <p:cNvSpPr txBox="1"/>
           <p:nvPr/>
         </p:nvSpPr>
@@ -13564,35 +12454,29 @@
           <a:p>
             <a:pPr algn="ctr"/>
             <a:r>
-              <a:rPr lang="en-US" altLang="zh-CN" sz="2067" dirty="0">
-                <a:latin typeface="Times New Roman" panose="02020603050405020304" pitchFamily="18" charset="0"/>
-                <a:cs typeface="Times New Roman" panose="02020603050405020304" pitchFamily="18" charset="0"/>
+              <a:rPr lang="en-US" altLang="zh-CN" sz="2065" dirty="0">
+                <a:latin typeface="Times New Roman" panose="02020503050405090304" pitchFamily="18" charset="0"/>
+                <a:cs typeface="Times New Roman" panose="02020503050405090304" pitchFamily="18" charset="0"/>
               </a:rPr>
               <a:t>(a) </a:t>
             </a:r>
             <a:r>
-              <a:rPr lang="en-US" altLang="zh-CN" sz="2067" b="1" dirty="0" err="1">
-                <a:latin typeface="Times New Roman" panose="02020603050405020304" pitchFamily="18" charset="0"/>
-                <a:cs typeface="Times New Roman" panose="02020603050405020304" pitchFamily="18" charset="0"/>
+              <a:rPr lang="en-US" altLang="zh-CN" sz="2065" b="1" dirty="0" err="1">
+                <a:latin typeface="Times New Roman" panose="02020503050405090304" pitchFamily="18" charset="0"/>
+                <a:cs typeface="Times New Roman" panose="02020503050405090304" pitchFamily="18" charset="0"/>
               </a:rPr>
               <a:t>SLMamba</a:t>
             </a:r>
-            <a:endParaRPr lang="zh-CN" altLang="en-US" sz="2067" b="1" dirty="0">
-              <a:latin typeface="Times New Roman" panose="02020603050405020304" pitchFamily="18" charset="0"/>
-              <a:cs typeface="Times New Roman" panose="02020603050405020304" pitchFamily="18" charset="0"/>
+            <a:endParaRPr lang="zh-CN" altLang="en-US" sz="2065" b="1" dirty="0">
+              <a:latin typeface="Times New Roman" panose="02020503050405090304" pitchFamily="18" charset="0"/>
+              <a:cs typeface="Times New Roman" panose="02020503050405090304" pitchFamily="18" charset="0"/>
             </a:endParaRPr>
           </a:p>
         </p:txBody>
       </p:sp>
       <p:sp>
         <p:nvSpPr>
-          <p:cNvPr id="408" name="文本框 407">
-            <a:extLst>
-              <a:ext uri="{FF2B5EF4-FFF2-40B4-BE49-F238E27FC236}">
-                <a16:creationId xmlns:a16="http://schemas.microsoft.com/office/drawing/2014/main" id="{6EC18FAA-971D-4749-87B6-2394D5595595}"/>
-              </a:ext>
-            </a:extLst>
-          </p:cNvPr>
+          <p:cNvPr id="408" name="文本框 407"/>
           <p:cNvSpPr txBox="1"/>
           <p:nvPr/>
         </p:nvSpPr>
@@ -13614,38 +12498,32 @@
           <a:p>
             <a:pPr algn="ctr"/>
             <a:r>
-              <a:rPr lang="en-US" altLang="zh-CN" sz="1654" dirty="0">
+              <a:rPr lang="en-US" altLang="zh-CN" sz="1655" dirty="0">
                 <a:solidFill>
                   <a:schemeClr val="bg1">
                     <a:lumMod val="50000"/>
                   </a:schemeClr>
                 </a:solidFill>
-                <a:latin typeface="Times New Roman" panose="02020603050405020304" pitchFamily="18" charset="0"/>
-                <a:cs typeface="Times New Roman" panose="02020603050405020304" pitchFamily="18" charset="0"/>
+                <a:latin typeface="Times New Roman" panose="02020503050405090304" pitchFamily="18" charset="0"/>
+                <a:cs typeface="Times New Roman" panose="02020503050405090304" pitchFamily="18" charset="0"/>
               </a:rPr>
               <a:t>x1</a:t>
             </a:r>
-            <a:endParaRPr lang="zh-CN" altLang="en-US" sz="1654" b="1" dirty="0">
+            <a:endParaRPr lang="zh-CN" altLang="en-US" sz="1655" b="1" dirty="0">
               <a:solidFill>
                 <a:schemeClr val="bg1">
                   <a:lumMod val="50000"/>
                 </a:schemeClr>
               </a:solidFill>
-              <a:latin typeface="Times New Roman" panose="02020603050405020304" pitchFamily="18" charset="0"/>
-              <a:cs typeface="Times New Roman" panose="02020603050405020304" pitchFamily="18" charset="0"/>
+              <a:latin typeface="Times New Roman" panose="02020503050405090304" pitchFamily="18" charset="0"/>
+              <a:cs typeface="Times New Roman" panose="02020503050405090304" pitchFamily="18" charset="0"/>
             </a:endParaRPr>
           </a:p>
         </p:txBody>
       </p:sp>
       <p:sp>
         <p:nvSpPr>
-          <p:cNvPr id="409" name="文本框 408">
-            <a:extLst>
-              <a:ext uri="{FF2B5EF4-FFF2-40B4-BE49-F238E27FC236}">
-                <a16:creationId xmlns:a16="http://schemas.microsoft.com/office/drawing/2014/main" id="{48CF0A85-B56C-489F-9485-A029BF38AD7B}"/>
-              </a:ext>
-            </a:extLst>
-          </p:cNvPr>
+          <p:cNvPr id="409" name="文本框 408"/>
           <p:cNvSpPr txBox="1"/>
           <p:nvPr/>
         </p:nvSpPr>
@@ -13667,38 +12545,32 @@
           <a:p>
             <a:pPr algn="ctr"/>
             <a:r>
-              <a:rPr lang="en-US" altLang="zh-CN" sz="1654" dirty="0">
+              <a:rPr lang="en-US" altLang="zh-CN" sz="1655" dirty="0">
                 <a:solidFill>
                   <a:schemeClr val="bg1">
                     <a:lumMod val="50000"/>
                   </a:schemeClr>
                 </a:solidFill>
-                <a:latin typeface="Times New Roman" panose="02020603050405020304" pitchFamily="18" charset="0"/>
-                <a:cs typeface="Times New Roman" panose="02020603050405020304" pitchFamily="18" charset="0"/>
+                <a:latin typeface="Times New Roman" panose="02020503050405090304" pitchFamily="18" charset="0"/>
+                <a:cs typeface="Times New Roman" panose="02020503050405090304" pitchFamily="18" charset="0"/>
               </a:rPr>
               <a:t>x2</a:t>
             </a:r>
-            <a:endParaRPr lang="zh-CN" altLang="en-US" sz="1654" b="1" dirty="0">
+            <a:endParaRPr lang="zh-CN" altLang="en-US" sz="1655" b="1" dirty="0">
               <a:solidFill>
                 <a:schemeClr val="bg1">
                   <a:lumMod val="50000"/>
                 </a:schemeClr>
               </a:solidFill>
-              <a:latin typeface="Times New Roman" panose="02020603050405020304" pitchFamily="18" charset="0"/>
-              <a:cs typeface="Times New Roman" panose="02020603050405020304" pitchFamily="18" charset="0"/>
+              <a:latin typeface="Times New Roman" panose="02020503050405090304" pitchFamily="18" charset="0"/>
+              <a:cs typeface="Times New Roman" panose="02020503050405090304" pitchFamily="18" charset="0"/>
             </a:endParaRPr>
           </a:p>
         </p:txBody>
       </p:sp>
       <p:sp>
         <p:nvSpPr>
-          <p:cNvPr id="410" name="文本框 409">
-            <a:extLst>
-              <a:ext uri="{FF2B5EF4-FFF2-40B4-BE49-F238E27FC236}">
-                <a16:creationId xmlns:a16="http://schemas.microsoft.com/office/drawing/2014/main" id="{27B13D45-DA14-4C97-AFA8-D1225C75B5AD}"/>
-              </a:ext>
-            </a:extLst>
-          </p:cNvPr>
+          <p:cNvPr id="410" name="文本框 409"/>
           <p:cNvSpPr txBox="1"/>
           <p:nvPr/>
         </p:nvSpPr>
@@ -13720,38 +12592,32 @@
           <a:p>
             <a:pPr algn="ctr"/>
             <a:r>
-              <a:rPr lang="en-US" altLang="zh-CN" sz="1654" dirty="0">
+              <a:rPr lang="en-US" altLang="zh-CN" sz="1655" dirty="0">
                 <a:solidFill>
                   <a:schemeClr val="bg1">
                     <a:lumMod val="50000"/>
                   </a:schemeClr>
                 </a:solidFill>
-                <a:latin typeface="Times New Roman" panose="02020603050405020304" pitchFamily="18" charset="0"/>
-                <a:cs typeface="Times New Roman" panose="02020603050405020304" pitchFamily="18" charset="0"/>
+                <a:latin typeface="Times New Roman" panose="02020503050405090304" pitchFamily="18" charset="0"/>
+                <a:cs typeface="Times New Roman" panose="02020503050405090304" pitchFamily="18" charset="0"/>
               </a:rPr>
               <a:t>x3</a:t>
             </a:r>
-            <a:endParaRPr lang="zh-CN" altLang="en-US" sz="1654" b="1" dirty="0">
+            <a:endParaRPr lang="zh-CN" altLang="en-US" sz="1655" b="1" dirty="0">
               <a:solidFill>
                 <a:schemeClr val="bg1">
                   <a:lumMod val="50000"/>
                 </a:schemeClr>
               </a:solidFill>
-              <a:latin typeface="Times New Roman" panose="02020603050405020304" pitchFamily="18" charset="0"/>
-              <a:cs typeface="Times New Roman" panose="02020603050405020304" pitchFamily="18" charset="0"/>
+              <a:latin typeface="Times New Roman" panose="02020503050405090304" pitchFamily="18" charset="0"/>
+              <a:cs typeface="Times New Roman" panose="02020503050405090304" pitchFamily="18" charset="0"/>
             </a:endParaRPr>
           </a:p>
         </p:txBody>
       </p:sp>
       <p:sp>
         <p:nvSpPr>
-          <p:cNvPr id="411" name="文本框 410">
-            <a:extLst>
-              <a:ext uri="{FF2B5EF4-FFF2-40B4-BE49-F238E27FC236}">
-                <a16:creationId xmlns:a16="http://schemas.microsoft.com/office/drawing/2014/main" id="{A891B6CB-F9BB-4735-8E79-E8917FCE8737}"/>
-              </a:ext>
-            </a:extLst>
-          </p:cNvPr>
+          <p:cNvPr id="411" name="文本框 410"/>
           <p:cNvSpPr txBox="1"/>
           <p:nvPr/>
         </p:nvSpPr>
@@ -13773,40 +12639,34 @@
           <a:p>
             <a:pPr algn="ctr"/>
             <a:r>
-              <a:rPr lang="en-US" altLang="zh-CN" sz="1654" dirty="0">
+              <a:rPr lang="en-US" altLang="zh-CN" sz="1655" dirty="0">
                 <a:solidFill>
                   <a:schemeClr val="bg1">
                     <a:lumMod val="50000"/>
                   </a:schemeClr>
                 </a:solidFill>
-                <a:latin typeface="Times New Roman" panose="02020603050405020304" pitchFamily="18" charset="0"/>
-                <a:cs typeface="Times New Roman" panose="02020603050405020304" pitchFamily="18" charset="0"/>
+                <a:latin typeface="Times New Roman" panose="02020503050405090304" pitchFamily="18" charset="0"/>
+                <a:cs typeface="Times New Roman" panose="02020503050405090304" pitchFamily="18" charset="0"/>
               </a:rPr>
               <a:t>x4</a:t>
             </a:r>
-            <a:endParaRPr lang="zh-CN" altLang="en-US" sz="1654" b="1" dirty="0">
+            <a:endParaRPr lang="zh-CN" altLang="en-US" sz="1655" b="1" dirty="0">
               <a:solidFill>
                 <a:schemeClr val="bg1">
                   <a:lumMod val="50000"/>
                 </a:schemeClr>
               </a:solidFill>
-              <a:latin typeface="Times New Roman" panose="02020603050405020304" pitchFamily="18" charset="0"/>
-              <a:cs typeface="Times New Roman" panose="02020603050405020304" pitchFamily="18" charset="0"/>
+              <a:latin typeface="Times New Roman" panose="02020503050405090304" pitchFamily="18" charset="0"/>
+              <a:cs typeface="Times New Roman" panose="02020503050405090304" pitchFamily="18" charset="0"/>
             </a:endParaRPr>
           </a:p>
         </p:txBody>
       </p:sp>
-      <mc:AlternateContent xmlns:mc="http://schemas.openxmlformats.org/markup-compatibility/2006" xmlns:a14="http://schemas.microsoft.com/office/drawing/2010/main">
-        <mc:Choice Requires="a14">
+      <mc:AlternateContent xmlns:mc="http://schemas.openxmlformats.org/markup-compatibility/2006">
+        <mc:Choice xmlns:a14="http://schemas.microsoft.com/office/drawing/2010/main" Requires="a14">
           <p:sp>
             <p:nvSpPr>
-              <p:cNvPr id="412" name="文本框 411">
-                <a:extLst>
-                  <a:ext uri="{FF2B5EF4-FFF2-40B4-BE49-F238E27FC236}">
-                    <a16:creationId xmlns:a16="http://schemas.microsoft.com/office/drawing/2014/main" id="{9804BE4A-0871-42E1-A204-BCB51C9AEA6C}"/>
-                  </a:ext>
-                </a:extLst>
-              </p:cNvPr>
+              <p:cNvPr id="412" name="文本框 411"/>
               <p:cNvSpPr txBox="1"/>
               <p:nvPr/>
             </p:nvSpPr>
@@ -13832,7 +12692,7 @@
                     <m:f>
                       <m:fPr>
                         <m:ctrlPr>
-                          <a:rPr lang="en-US" altLang="zh-CN" sz="1654" i="1">
+                          <a:rPr lang="en-US" altLang="zh-CN" sz="1655" i="1">
                             <a:solidFill>
                               <a:schemeClr val="bg1">
                                 <a:lumMod val="50000"/>
@@ -13844,7 +12704,7 @@
                       </m:fPr>
                       <m:num>
                         <m:r>
-                          <a:rPr lang="en-US" altLang="zh-CN" sz="1654" i="1">
+                          <a:rPr lang="en-US" altLang="zh-CN" sz="1655" i="1">
                             <a:solidFill>
                               <a:schemeClr val="bg1">
                                 <a:lumMod val="50000"/>
@@ -13857,7 +12717,7 @@
                       </m:num>
                       <m:den>
                         <m:r>
-                          <a:rPr lang="en-US" altLang="zh-CN" sz="1654">
+                          <a:rPr lang="en-US" altLang="zh-CN" sz="1655">
                             <a:solidFill>
                               <a:schemeClr val="bg1">
                                 <a:lumMod val="50000"/>
@@ -13870,7 +12730,7 @@
                       </m:den>
                     </m:f>
                     <m:r>
-                      <a:rPr lang="en-US" altLang="zh-CN" sz="1654" i="1">
+                      <a:rPr lang="en-US" altLang="zh-CN" sz="1655" i="1">
                         <a:solidFill>
                           <a:schemeClr val="bg1">
                             <a:lumMod val="50000"/>
@@ -13884,7 +12744,7 @@
                     <m:f>
                       <m:fPr>
                         <m:ctrlPr>
-                          <a:rPr lang="en-US" altLang="zh-CN" sz="1654" i="1">
+                          <a:rPr lang="en-US" altLang="zh-CN" sz="1655" i="1">
                             <a:solidFill>
                               <a:schemeClr val="bg1">
                                 <a:lumMod val="50000"/>
@@ -13896,7 +12756,7 @@
                       </m:fPr>
                       <m:num>
                         <m:r>
-                          <a:rPr lang="en-US" altLang="zh-CN" sz="1654" i="1">
+                          <a:rPr lang="en-US" altLang="zh-CN" sz="1655" i="1">
                             <a:solidFill>
                               <a:schemeClr val="bg1">
                                 <a:lumMod val="50000"/>
@@ -13909,7 +12769,7 @@
                       </m:num>
                       <m:den>
                         <m:r>
-                          <a:rPr lang="en-US" altLang="zh-CN" sz="1654">
+                          <a:rPr lang="en-US" altLang="zh-CN" sz="1655">
                             <a:solidFill>
                               <a:schemeClr val="bg1">
                                 <a:lumMod val="50000"/>
@@ -13924,7 +12784,7 @@
                   </m:oMath>
                 </a14:m>
                 <a:r>
-                  <a:rPr lang="en-US" altLang="zh-CN" sz="1654" dirty="0">
+                  <a:rPr lang="en-US" altLang="zh-CN" sz="1655" dirty="0">
                     <a:solidFill>
                       <a:schemeClr val="bg1">
                         <a:lumMod val="50000"/>
@@ -13937,7 +12797,7 @@
                 <a14:m>
                   <m:oMath xmlns:m="http://schemas.openxmlformats.org/officeDocument/2006/math">
                     <m:r>
-                      <a:rPr lang="en-US" altLang="zh-CN" sz="1654" i="1">
+                      <a:rPr lang="en-US" altLang="zh-CN" sz="1655" i="1">
                         <a:solidFill>
                           <a:schemeClr val="bg1">
                             <a:lumMod val="50000"/>
@@ -13951,40 +12811,34 @@
                   </m:oMath>
                 </a14:m>
                 <a:r>
-                  <a:rPr lang="en-US" altLang="zh-CN" sz="1654" dirty="0">
+                  <a:rPr lang="en-US" altLang="zh-CN" sz="1655" dirty="0">
                     <a:solidFill>
                       <a:schemeClr val="bg1">
                         <a:lumMod val="50000"/>
                       </a:schemeClr>
                     </a:solidFill>
-                    <a:latin typeface="Times New Roman" panose="02020603050405020304" pitchFamily="18" charset="0"/>
-                    <a:cs typeface="Times New Roman" panose="02020603050405020304" pitchFamily="18" charset="0"/>
+                    <a:latin typeface="Times New Roman" panose="02020503050405090304" pitchFamily="18" charset="0"/>
+                    <a:cs typeface="Times New Roman" panose="02020503050405090304" pitchFamily="18" charset="0"/>
                   </a:rPr>
                   <a:t>C</a:t>
                 </a:r>
-                <a:endParaRPr lang="zh-CN" altLang="en-US" sz="1654" dirty="0">
+                <a:endParaRPr lang="zh-CN" altLang="en-US" sz="1655" dirty="0">
                   <a:solidFill>
                     <a:schemeClr val="bg1">
                       <a:lumMod val="50000"/>
                     </a:schemeClr>
                   </a:solidFill>
-                  <a:latin typeface="Times New Roman" panose="02020603050405020304" pitchFamily="18" charset="0"/>
-                  <a:cs typeface="Times New Roman" panose="02020603050405020304" pitchFamily="18" charset="0"/>
+                  <a:latin typeface="Times New Roman" panose="02020503050405090304" pitchFamily="18" charset="0"/>
+                  <a:cs typeface="Times New Roman" panose="02020503050405090304" pitchFamily="18" charset="0"/>
                 </a:endParaRPr>
               </a:p>
             </p:txBody>
           </p:sp>
         </mc:Choice>
-        <mc:Fallback xmlns="">
+        <mc:Fallback>
           <p:sp>
             <p:nvSpPr>
-              <p:cNvPr id="412" name="文本框 411">
-                <a:extLst>
-                  <a:ext uri="{FF2B5EF4-FFF2-40B4-BE49-F238E27FC236}">
-                    <a16:creationId xmlns:a16="http://schemas.microsoft.com/office/drawing/2014/main" id="{9804BE4A-0871-42E1-A204-BCB51C9AEA6C}"/>
-                  </a:ext>
-                </a:extLst>
-              </p:cNvPr>
+              <p:cNvPr id="412" name="文本框 411"/>
               <p:cNvSpPr txBox="1">
                 <a:spLocks noRot="1" noChangeAspect="1" noMove="1" noResize="1" noEditPoints="1" noAdjustHandles="1" noChangeArrowheads="1" noChangeShapeType="1" noTextEdit="1"/>
               </p:cNvSpPr>
@@ -13998,10 +12852,10 @@
               <a:prstGeom prst="rect">
                 <a:avLst/>
               </a:prstGeom>
-              <a:blipFill>
-                <a:blip r:embed="rId3"/>
+              <a:blipFill rotWithShape="1">
+                <a:blip r:embed="rId1"/>
                 <a:stretch>
-                  <a:fillRect r="-1099" b="-1299"/>
+                  <a:fillRect l="-8" t="-109" r="54" b="11"/>
                 </a:stretch>
               </a:blipFill>
             </p:spPr>
@@ -14022,13 +12876,7 @@
       </mc:AlternateContent>
       <p:sp>
         <p:nvSpPr>
-          <p:cNvPr id="413" name="矩形: 圆角 412">
-            <a:extLst>
-              <a:ext uri="{FF2B5EF4-FFF2-40B4-BE49-F238E27FC236}">
-                <a16:creationId xmlns:a16="http://schemas.microsoft.com/office/drawing/2014/main" id="{07A9301A-9DD1-4401-96CC-8A8BEA71F821}"/>
-              </a:ext>
-            </a:extLst>
-          </p:cNvPr>
+          <p:cNvPr id="413" name="矩形: 圆角 412"/>
           <p:cNvSpPr/>
           <p:nvPr/>
         </p:nvSpPr>
@@ -14074,36 +12922,30 @@
           <a:p>
             <a:pPr algn="ctr"/>
             <a:r>
-              <a:rPr lang="en-US" altLang="zh-CN" sz="1241" dirty="0">
+              <a:rPr lang="en-US" altLang="zh-CN" sz="1240" dirty="0">
                 <a:solidFill>
                   <a:schemeClr val="tx1"/>
                 </a:solidFill>
-                <a:latin typeface="Times New Roman" panose="02020603050405020304" pitchFamily="18" charset="0"/>
-                <a:cs typeface="Times New Roman" panose="02020603050405020304" pitchFamily="18" charset="0"/>
+                <a:latin typeface="Times New Roman" panose="02020503050405090304" pitchFamily="18" charset="0"/>
+                <a:cs typeface="Times New Roman" panose="02020503050405090304" pitchFamily="18" charset="0"/>
               </a:rPr>
               <a:t>Patch Expanding</a:t>
             </a:r>
-            <a:endParaRPr lang="zh-CN" altLang="en-US" sz="1241" dirty="0">
+            <a:endParaRPr lang="zh-CN" altLang="en-US" sz="1240" dirty="0">
               <a:solidFill>
                 <a:schemeClr val="tx1"/>
               </a:solidFill>
-              <a:latin typeface="Times New Roman" panose="02020603050405020304" pitchFamily="18" charset="0"/>
-              <a:cs typeface="Times New Roman" panose="02020603050405020304" pitchFamily="18" charset="0"/>
+              <a:latin typeface="Times New Roman" panose="02020503050405090304" pitchFamily="18" charset="0"/>
+              <a:cs typeface="Times New Roman" panose="02020503050405090304" pitchFamily="18" charset="0"/>
             </a:endParaRPr>
           </a:p>
         </p:txBody>
       </p:sp>
-      <mc:AlternateContent xmlns:mc="http://schemas.openxmlformats.org/markup-compatibility/2006" xmlns:a14="http://schemas.microsoft.com/office/drawing/2010/main">
-        <mc:Choice Requires="a14">
+      <mc:AlternateContent xmlns:mc="http://schemas.openxmlformats.org/markup-compatibility/2006">
+        <mc:Choice xmlns:a14="http://schemas.microsoft.com/office/drawing/2010/main" Requires="a14">
           <p:sp>
             <p:nvSpPr>
-              <p:cNvPr id="414" name="文本框 413">
-                <a:extLst>
-                  <a:ext uri="{FF2B5EF4-FFF2-40B4-BE49-F238E27FC236}">
-                    <a16:creationId xmlns:a16="http://schemas.microsoft.com/office/drawing/2014/main" id="{AD20ADCF-41FC-4D5A-9826-CA4726063F9C}"/>
-                  </a:ext>
-                </a:extLst>
-              </p:cNvPr>
+              <p:cNvPr id="414" name="文本框 413"/>
               <p:cNvSpPr txBox="1"/>
               <p:nvPr/>
             </p:nvSpPr>
@@ -14129,7 +12971,7 @@
                     <m:f>
                       <m:fPr>
                         <m:ctrlPr>
-                          <a:rPr lang="en-US" altLang="zh-CN" sz="1654" i="1">
+                          <a:rPr lang="en-US" altLang="zh-CN" sz="1655" i="1">
                             <a:solidFill>
                               <a:schemeClr val="bg1">
                                 <a:lumMod val="50000"/>
@@ -14141,7 +12983,7 @@
                       </m:fPr>
                       <m:num>
                         <m:r>
-                          <a:rPr lang="en-US" altLang="zh-CN" sz="1654" i="1">
+                          <a:rPr lang="en-US" altLang="zh-CN" sz="1655" i="1">
                             <a:solidFill>
                               <a:schemeClr val="bg1">
                                 <a:lumMod val="50000"/>
@@ -14154,7 +12996,7 @@
                       </m:num>
                       <m:den>
                         <m:r>
-                          <a:rPr lang="en-US" altLang="zh-CN" sz="1654">
+                          <a:rPr lang="en-US" altLang="zh-CN" sz="1655">
                             <a:solidFill>
                               <a:schemeClr val="bg1">
                                 <a:lumMod val="50000"/>
@@ -14167,7 +13009,7 @@
                       </m:den>
                     </m:f>
                     <m:r>
-                      <a:rPr lang="en-US" altLang="zh-CN" sz="1654" i="1">
+                      <a:rPr lang="en-US" altLang="zh-CN" sz="1655" i="1">
                         <a:solidFill>
                           <a:schemeClr val="bg1">
                             <a:lumMod val="50000"/>
@@ -14181,7 +13023,7 @@
                     <m:f>
                       <m:fPr>
                         <m:ctrlPr>
-                          <a:rPr lang="en-US" altLang="zh-CN" sz="1654" i="1">
+                          <a:rPr lang="en-US" altLang="zh-CN" sz="1655" i="1">
                             <a:solidFill>
                               <a:schemeClr val="bg1">
                                 <a:lumMod val="50000"/>
@@ -14193,7 +13035,7 @@
                       </m:fPr>
                       <m:num>
                         <m:r>
-                          <a:rPr lang="en-US" altLang="zh-CN" sz="1654" i="1">
+                          <a:rPr lang="en-US" altLang="zh-CN" sz="1655" i="1">
                             <a:solidFill>
                               <a:schemeClr val="bg1">
                                 <a:lumMod val="50000"/>
@@ -14206,7 +13048,7 @@
                       </m:num>
                       <m:den>
                         <m:r>
-                          <a:rPr lang="en-US" altLang="zh-CN" sz="1654">
+                          <a:rPr lang="en-US" altLang="zh-CN" sz="1655">
                             <a:solidFill>
                               <a:schemeClr val="bg1">
                                 <a:lumMod val="50000"/>
@@ -14221,7 +13063,7 @@
                   </m:oMath>
                 </a14:m>
                 <a:r>
-                  <a:rPr lang="en-US" altLang="zh-CN" sz="1654" dirty="0">
+                  <a:rPr lang="en-US" altLang="zh-CN" sz="1655" dirty="0">
                     <a:solidFill>
                       <a:schemeClr val="bg1">
                         <a:lumMod val="50000"/>
@@ -14234,7 +13076,7 @@
                 <a14:m>
                   <m:oMath xmlns:m="http://schemas.openxmlformats.org/officeDocument/2006/math">
                     <m:r>
-                      <a:rPr lang="en-US" altLang="zh-CN" sz="1654" i="1">
+                      <a:rPr lang="en-US" altLang="zh-CN" sz="1655" i="1">
                         <a:solidFill>
                           <a:schemeClr val="bg1">
                             <a:lumMod val="50000"/>
@@ -14248,40 +13090,34 @@
                   </m:oMath>
                 </a14:m>
                 <a:r>
-                  <a:rPr lang="en-US" altLang="zh-CN" sz="1654" dirty="0">
+                  <a:rPr lang="en-US" altLang="zh-CN" sz="1655" dirty="0">
                     <a:solidFill>
                       <a:schemeClr val="bg1">
                         <a:lumMod val="50000"/>
                       </a:schemeClr>
                     </a:solidFill>
-                    <a:latin typeface="Times New Roman" panose="02020603050405020304" pitchFamily="18" charset="0"/>
-                    <a:cs typeface="Times New Roman" panose="02020603050405020304" pitchFamily="18" charset="0"/>
+                    <a:latin typeface="Times New Roman" panose="02020503050405090304" pitchFamily="18" charset="0"/>
+                    <a:cs typeface="Times New Roman" panose="02020503050405090304" pitchFamily="18" charset="0"/>
                   </a:rPr>
                   <a:t>2C</a:t>
                 </a:r>
-                <a:endParaRPr lang="zh-CN" altLang="en-US" sz="1654" dirty="0">
+                <a:endParaRPr lang="zh-CN" altLang="en-US" sz="1655" dirty="0">
                   <a:solidFill>
                     <a:schemeClr val="bg1">
                       <a:lumMod val="50000"/>
                     </a:schemeClr>
                   </a:solidFill>
-                  <a:latin typeface="Times New Roman" panose="02020603050405020304" pitchFamily="18" charset="0"/>
-                  <a:cs typeface="Times New Roman" panose="02020603050405020304" pitchFamily="18" charset="0"/>
+                  <a:latin typeface="Times New Roman" panose="02020503050405090304" pitchFamily="18" charset="0"/>
+                  <a:cs typeface="Times New Roman" panose="02020503050405090304" pitchFamily="18" charset="0"/>
                 </a:endParaRPr>
               </a:p>
             </p:txBody>
           </p:sp>
         </mc:Choice>
-        <mc:Fallback xmlns="">
+        <mc:Fallback>
           <p:sp>
             <p:nvSpPr>
-              <p:cNvPr id="414" name="文本框 413">
-                <a:extLst>
-                  <a:ext uri="{FF2B5EF4-FFF2-40B4-BE49-F238E27FC236}">
-                    <a16:creationId xmlns:a16="http://schemas.microsoft.com/office/drawing/2014/main" id="{AD20ADCF-41FC-4D5A-9826-CA4726063F9C}"/>
-                  </a:ext>
-                </a:extLst>
-              </p:cNvPr>
+              <p:cNvPr id="414" name="文本框 413"/>
               <p:cNvSpPr txBox="1">
                 <a:spLocks noRot="1" noChangeAspect="1" noMove="1" noResize="1" noEditPoints="1" noAdjustHandles="1" noChangeArrowheads="1" noChangeShapeType="1" noTextEdit="1"/>
               </p:cNvSpPr>
@@ -14295,10 +13131,10 @@
               <a:prstGeom prst="rect">
                 <a:avLst/>
               </a:prstGeom>
-              <a:blipFill>
-                <a:blip r:embed="rId4"/>
+              <a:blipFill rotWithShape="1">
+                <a:blip r:embed="rId2"/>
                 <a:stretch>
-                  <a:fillRect r="-1005" b="-1299"/>
+                  <a:fillRect l="-28" t="-111" r="36" b="125"/>
                 </a:stretch>
               </a:blipFill>
             </p:spPr>
@@ -14317,17 +13153,11 @@
           </p:sp>
         </mc:Fallback>
       </mc:AlternateContent>
-      <mc:AlternateContent xmlns:mc="http://schemas.openxmlformats.org/markup-compatibility/2006" xmlns:a14="http://schemas.microsoft.com/office/drawing/2010/main">
-        <mc:Choice Requires="a14">
+      <mc:AlternateContent xmlns:mc="http://schemas.openxmlformats.org/markup-compatibility/2006">
+        <mc:Choice xmlns:a14="http://schemas.microsoft.com/office/drawing/2010/main" Requires="a14">
           <p:sp>
             <p:nvSpPr>
-              <p:cNvPr id="415" name="文本框 414">
-                <a:extLst>
-                  <a:ext uri="{FF2B5EF4-FFF2-40B4-BE49-F238E27FC236}">
-                    <a16:creationId xmlns:a16="http://schemas.microsoft.com/office/drawing/2014/main" id="{36D7A11D-9B7E-471E-B8D8-9B12901E6A81}"/>
-                  </a:ext>
-                </a:extLst>
-              </p:cNvPr>
+              <p:cNvPr id="415" name="文本框 414"/>
               <p:cNvSpPr txBox="1"/>
               <p:nvPr/>
             </p:nvSpPr>
@@ -14353,7 +13183,7 @@
                     <m:f>
                       <m:fPr>
                         <m:ctrlPr>
-                          <a:rPr lang="en-US" altLang="zh-CN" sz="1654" i="1">
+                          <a:rPr lang="en-US" altLang="zh-CN" sz="1655" i="1">
                             <a:solidFill>
                               <a:schemeClr val="bg1">
                                 <a:lumMod val="50000"/>
@@ -14365,7 +13195,7 @@
                       </m:fPr>
                       <m:num>
                         <m:r>
-                          <a:rPr lang="en-US" altLang="zh-CN" sz="1654" i="1">
+                          <a:rPr lang="en-US" altLang="zh-CN" sz="1655" i="1">
                             <a:solidFill>
                               <a:schemeClr val="bg1">
                                 <a:lumMod val="50000"/>
@@ -14378,7 +13208,7 @@
                       </m:num>
                       <m:den>
                         <m:r>
-                          <a:rPr lang="en-US" altLang="zh-CN" sz="1654">
+                          <a:rPr lang="en-US" altLang="zh-CN" sz="1655">
                             <a:solidFill>
                               <a:schemeClr val="bg1">
                                 <a:lumMod val="50000"/>
@@ -14391,7 +13221,7 @@
                       </m:den>
                     </m:f>
                     <m:r>
-                      <a:rPr lang="en-US" altLang="zh-CN" sz="1654" i="1">
+                      <a:rPr lang="en-US" altLang="zh-CN" sz="1655" i="1">
                         <a:solidFill>
                           <a:schemeClr val="bg1">
                             <a:lumMod val="50000"/>
@@ -14405,7 +13235,7 @@
                     <m:f>
                       <m:fPr>
                         <m:ctrlPr>
-                          <a:rPr lang="en-US" altLang="zh-CN" sz="1654" i="1">
+                          <a:rPr lang="en-US" altLang="zh-CN" sz="1655" i="1">
                             <a:solidFill>
                               <a:schemeClr val="bg1">
                                 <a:lumMod val="50000"/>
@@ -14417,7 +13247,7 @@
                       </m:fPr>
                       <m:num>
                         <m:r>
-                          <a:rPr lang="en-US" altLang="zh-CN" sz="1654" i="1">
+                          <a:rPr lang="en-US" altLang="zh-CN" sz="1655" i="1">
                             <a:solidFill>
                               <a:schemeClr val="bg1">
                                 <a:lumMod val="50000"/>
@@ -14430,7 +13260,7 @@
                       </m:num>
                       <m:den>
                         <m:r>
-                          <a:rPr lang="en-US" altLang="zh-CN" sz="1654">
+                          <a:rPr lang="en-US" altLang="zh-CN" sz="1655">
                             <a:solidFill>
                               <a:schemeClr val="bg1">
                                 <a:lumMod val="50000"/>
@@ -14445,7 +13275,7 @@
                   </m:oMath>
                 </a14:m>
                 <a:r>
-                  <a:rPr lang="en-US" altLang="zh-CN" sz="1654" dirty="0">
+                  <a:rPr lang="en-US" altLang="zh-CN" sz="1655" dirty="0">
                     <a:solidFill>
                       <a:schemeClr val="bg1">
                         <a:lumMod val="50000"/>
@@ -14458,7 +13288,7 @@
                 <a14:m>
                   <m:oMath xmlns:m="http://schemas.openxmlformats.org/officeDocument/2006/math">
                     <m:r>
-                      <a:rPr lang="en-US" altLang="zh-CN" sz="1654" i="1">
+                      <a:rPr lang="en-US" altLang="zh-CN" sz="1655" i="1">
                         <a:solidFill>
                           <a:schemeClr val="bg1">
                             <a:lumMod val="50000"/>
@@ -14472,40 +13302,34 @@
                   </m:oMath>
                 </a14:m>
                 <a:r>
-                  <a:rPr lang="en-US" altLang="zh-CN" sz="1654" dirty="0">
+                  <a:rPr lang="en-US" altLang="zh-CN" sz="1655" dirty="0">
                     <a:solidFill>
                       <a:schemeClr val="bg1">
                         <a:lumMod val="50000"/>
                       </a:schemeClr>
                     </a:solidFill>
-                    <a:latin typeface="Times New Roman" panose="02020603050405020304" pitchFamily="18" charset="0"/>
-                    <a:cs typeface="Times New Roman" panose="02020603050405020304" pitchFamily="18" charset="0"/>
+                    <a:latin typeface="Times New Roman" panose="02020503050405090304" pitchFamily="18" charset="0"/>
+                    <a:cs typeface="Times New Roman" panose="02020503050405090304" pitchFamily="18" charset="0"/>
                   </a:rPr>
                   <a:t>4C</a:t>
                 </a:r>
-                <a:endParaRPr lang="zh-CN" altLang="en-US" sz="1654" dirty="0">
+                <a:endParaRPr lang="zh-CN" altLang="en-US" sz="1655" dirty="0">
                   <a:solidFill>
                     <a:schemeClr val="bg1">
                       <a:lumMod val="50000"/>
                     </a:schemeClr>
                   </a:solidFill>
-                  <a:latin typeface="Times New Roman" panose="02020603050405020304" pitchFamily="18" charset="0"/>
-                  <a:cs typeface="Times New Roman" panose="02020603050405020304" pitchFamily="18" charset="0"/>
+                  <a:latin typeface="Times New Roman" panose="02020503050405090304" pitchFamily="18" charset="0"/>
+                  <a:cs typeface="Times New Roman" panose="02020503050405090304" pitchFamily="18" charset="0"/>
                 </a:endParaRPr>
               </a:p>
             </p:txBody>
           </p:sp>
         </mc:Choice>
-        <mc:Fallback xmlns="">
+        <mc:Fallback>
           <p:sp>
             <p:nvSpPr>
-              <p:cNvPr id="415" name="文本框 414">
-                <a:extLst>
-                  <a:ext uri="{FF2B5EF4-FFF2-40B4-BE49-F238E27FC236}">
-                    <a16:creationId xmlns:a16="http://schemas.microsoft.com/office/drawing/2014/main" id="{36D7A11D-9B7E-471E-B8D8-9B12901E6A81}"/>
-                  </a:ext>
-                </a:extLst>
-              </p:cNvPr>
+              <p:cNvPr id="415" name="文本框 414"/>
               <p:cNvSpPr txBox="1">
                 <a:spLocks noRot="1" noChangeAspect="1" noMove="1" noResize="1" noEditPoints="1" noAdjustHandles="1" noChangeArrowheads="1" noChangeShapeType="1" noTextEdit="1"/>
               </p:cNvSpPr>
@@ -14519,10 +13343,10 @@
               <a:prstGeom prst="rect">
                 <a:avLst/>
               </a:prstGeom>
-              <a:blipFill>
-                <a:blip r:embed="rId5"/>
+              <a:blipFill rotWithShape="1">
+                <a:blip r:embed="rId3"/>
                 <a:stretch>
-                  <a:fillRect r="-459" b="-1299"/>
+                  <a:fillRect l="-2" t="-61" r="3" b="46"/>
                 </a:stretch>
               </a:blipFill>
             </p:spPr>
@@ -14541,17 +13365,11 @@
           </p:sp>
         </mc:Fallback>
       </mc:AlternateContent>
-      <mc:AlternateContent xmlns:mc="http://schemas.openxmlformats.org/markup-compatibility/2006" xmlns:a14="http://schemas.microsoft.com/office/drawing/2010/main">
-        <mc:Choice Requires="a14">
+      <mc:AlternateContent xmlns:mc="http://schemas.openxmlformats.org/markup-compatibility/2006">
+        <mc:Choice xmlns:a14="http://schemas.microsoft.com/office/drawing/2010/main" Requires="a14">
           <p:sp>
             <p:nvSpPr>
-              <p:cNvPr id="416" name="文本框 415">
-                <a:extLst>
-                  <a:ext uri="{FF2B5EF4-FFF2-40B4-BE49-F238E27FC236}">
-                    <a16:creationId xmlns:a16="http://schemas.microsoft.com/office/drawing/2014/main" id="{735C3EA7-36CE-4DEC-A083-FB3C10D10E77}"/>
-                  </a:ext>
-                </a:extLst>
-              </p:cNvPr>
+              <p:cNvPr id="416" name="文本框 415"/>
               <p:cNvSpPr txBox="1"/>
               <p:nvPr/>
             </p:nvSpPr>
@@ -14577,7 +13395,7 @@
                     <m:f>
                       <m:fPr>
                         <m:ctrlPr>
-                          <a:rPr lang="en-US" altLang="zh-CN" sz="1654" i="1">
+                          <a:rPr lang="en-US" altLang="zh-CN" sz="1655" i="1">
                             <a:solidFill>
                               <a:schemeClr val="bg1">
                                 <a:lumMod val="50000"/>
@@ -14589,7 +13407,7 @@
                       </m:fPr>
                       <m:num>
                         <m:r>
-                          <a:rPr lang="en-US" altLang="zh-CN" sz="1654" i="1">
+                          <a:rPr lang="en-US" altLang="zh-CN" sz="1655" i="1">
                             <a:solidFill>
                               <a:schemeClr val="bg1">
                                 <a:lumMod val="50000"/>
@@ -14602,7 +13420,7 @@
                       </m:num>
                       <m:den>
                         <m:r>
-                          <a:rPr lang="en-US" altLang="zh-CN" sz="1654">
+                          <a:rPr lang="en-US" altLang="zh-CN" sz="1655">
                             <a:solidFill>
                               <a:schemeClr val="bg1">
                                 <a:lumMod val="50000"/>
@@ -14615,7 +13433,7 @@
                       </m:den>
                     </m:f>
                     <m:r>
-                      <a:rPr lang="en-US" altLang="zh-CN" sz="1654" i="1">
+                      <a:rPr lang="en-US" altLang="zh-CN" sz="1655" i="1">
                         <a:solidFill>
                           <a:schemeClr val="bg1">
                             <a:lumMod val="50000"/>
@@ -14629,7 +13447,7 @@
                     <m:f>
                       <m:fPr>
                         <m:ctrlPr>
-                          <a:rPr lang="en-US" altLang="zh-CN" sz="1654" i="1">
+                          <a:rPr lang="en-US" altLang="zh-CN" sz="1655" i="1">
                             <a:solidFill>
                               <a:schemeClr val="bg1">
                                 <a:lumMod val="50000"/>
@@ -14641,7 +13459,7 @@
                       </m:fPr>
                       <m:num>
                         <m:r>
-                          <a:rPr lang="en-US" altLang="zh-CN" sz="1654" i="1">
+                          <a:rPr lang="en-US" altLang="zh-CN" sz="1655" i="1">
                             <a:solidFill>
                               <a:schemeClr val="bg1">
                                 <a:lumMod val="50000"/>
@@ -14654,7 +13472,7 @@
                       </m:num>
                       <m:den>
                         <m:r>
-                          <a:rPr lang="en-US" altLang="zh-CN" sz="1654">
+                          <a:rPr lang="en-US" altLang="zh-CN" sz="1655">
                             <a:solidFill>
                               <a:schemeClr val="bg1">
                                 <a:lumMod val="50000"/>
@@ -14669,7 +13487,7 @@
                   </m:oMath>
                 </a14:m>
                 <a:r>
-                  <a:rPr lang="en-US" altLang="zh-CN" sz="1654" dirty="0">
+                  <a:rPr lang="en-US" altLang="zh-CN" sz="1655" dirty="0">
                     <a:solidFill>
                       <a:schemeClr val="bg1">
                         <a:lumMod val="50000"/>
@@ -14682,7 +13500,7 @@
                 <a14:m>
                   <m:oMath xmlns:m="http://schemas.openxmlformats.org/officeDocument/2006/math">
                     <m:r>
-                      <a:rPr lang="en-US" altLang="zh-CN" sz="1654" i="1">
+                      <a:rPr lang="en-US" altLang="zh-CN" sz="1655" i="1">
                         <a:solidFill>
                           <a:schemeClr val="bg1">
                             <a:lumMod val="50000"/>
@@ -14691,45 +13509,51 @@
                         <a:latin typeface="Cambria Math" panose="02040503050406030204" pitchFamily="18" charset="0"/>
                         <a:ea typeface="Cambria Math" panose="02040503050406030204" pitchFamily="18" charset="0"/>
                       </a:rPr>
-                      <m:t>×8</m:t>
+                      <m:t>×</m:t>
+                    </m:r>
+                    <m:r>
+                      <a:rPr lang="en-US" altLang="zh-CN" sz="1655" i="1">
+                        <a:solidFill>
+                          <a:schemeClr val="bg1">
+                            <a:lumMod val="50000"/>
+                          </a:schemeClr>
+                        </a:solidFill>
+                        <a:latin typeface="Cambria Math" panose="02040503050406030204" pitchFamily="18" charset="0"/>
+                        <a:ea typeface="Cambria Math" panose="02040503050406030204" pitchFamily="18" charset="0"/>
+                      </a:rPr>
+                      <m:t>8</m:t>
                     </m:r>
                   </m:oMath>
                 </a14:m>
                 <a:r>
-                  <a:rPr lang="en-US" altLang="zh-CN" sz="1654" dirty="0">
+                  <a:rPr lang="en-US" altLang="zh-CN" sz="1655" dirty="0">
                     <a:solidFill>
                       <a:schemeClr val="bg1">
                         <a:lumMod val="50000"/>
                       </a:schemeClr>
                     </a:solidFill>
-                    <a:latin typeface="Times New Roman" panose="02020603050405020304" pitchFamily="18" charset="0"/>
-                    <a:cs typeface="Times New Roman" panose="02020603050405020304" pitchFamily="18" charset="0"/>
+                    <a:latin typeface="Times New Roman" panose="02020503050405090304" pitchFamily="18" charset="0"/>
+                    <a:cs typeface="Times New Roman" panose="02020503050405090304" pitchFamily="18" charset="0"/>
                   </a:rPr>
                   <a:t>C</a:t>
                 </a:r>
-                <a:endParaRPr lang="zh-CN" altLang="en-US" sz="1654" dirty="0">
+                <a:endParaRPr lang="zh-CN" altLang="en-US" sz="1655" dirty="0">
                   <a:solidFill>
                     <a:schemeClr val="bg1">
                       <a:lumMod val="50000"/>
                     </a:schemeClr>
                   </a:solidFill>
-                  <a:latin typeface="Times New Roman" panose="02020603050405020304" pitchFamily="18" charset="0"/>
-                  <a:cs typeface="Times New Roman" panose="02020603050405020304" pitchFamily="18" charset="0"/>
+                  <a:latin typeface="Times New Roman" panose="02020503050405090304" pitchFamily="18" charset="0"/>
+                  <a:cs typeface="Times New Roman" panose="02020503050405090304" pitchFamily="18" charset="0"/>
                 </a:endParaRPr>
               </a:p>
             </p:txBody>
           </p:sp>
         </mc:Choice>
-        <mc:Fallback xmlns="">
+        <mc:Fallback>
           <p:sp>
             <p:nvSpPr>
-              <p:cNvPr id="416" name="文本框 415">
-                <a:extLst>
-                  <a:ext uri="{FF2B5EF4-FFF2-40B4-BE49-F238E27FC236}">
-                    <a16:creationId xmlns:a16="http://schemas.microsoft.com/office/drawing/2014/main" id="{735C3EA7-36CE-4DEC-A083-FB3C10D10E77}"/>
-                  </a:ext>
-                </a:extLst>
-              </p:cNvPr>
+              <p:cNvPr id="416" name="文本框 415"/>
               <p:cNvSpPr txBox="1">
                 <a:spLocks noRot="1" noChangeAspect="1" noMove="1" noResize="1" noEditPoints="1" noAdjustHandles="1" noChangeArrowheads="1" noChangeShapeType="1" noTextEdit="1"/>
               </p:cNvSpPr>
@@ -14743,10 +13567,10 @@
               <a:prstGeom prst="rect">
                 <a:avLst/>
               </a:prstGeom>
-              <a:blipFill>
-                <a:blip r:embed="rId6"/>
+              <a:blipFill rotWithShape="1">
+                <a:blip r:embed="rId4"/>
                 <a:stretch>
-                  <a:fillRect r="-455" b="-1299"/>
+                  <a:fillRect l="-33" t="-55" r="7" b="105"/>
                 </a:stretch>
               </a:blipFill>
             </p:spPr>
@@ -14767,13 +13591,7 @@
       </mc:AlternateContent>
       <p:sp>
         <p:nvSpPr>
-          <p:cNvPr id="419" name="文本框 418">
-            <a:extLst>
-              <a:ext uri="{FF2B5EF4-FFF2-40B4-BE49-F238E27FC236}">
-                <a16:creationId xmlns:a16="http://schemas.microsoft.com/office/drawing/2014/main" id="{1EA8BE70-A005-4A0D-BF8E-AB37ED449D4E}"/>
-              </a:ext>
-            </a:extLst>
-          </p:cNvPr>
+          <p:cNvPr id="419" name="文本框 418"/>
           <p:cNvSpPr txBox="1"/>
           <p:nvPr/>
         </p:nvSpPr>
@@ -14794,28 +13612,22 @@
           <a:lstStyle/>
           <a:p>
             <a:r>
-              <a:rPr lang="en-US" altLang="zh-CN" sz="1654" dirty="0">
-                <a:latin typeface="Times New Roman" panose="02020603050405020304" pitchFamily="18" charset="0"/>
-                <a:cs typeface="Times New Roman" panose="02020603050405020304" pitchFamily="18" charset="0"/>
+              <a:rPr lang="en-US" altLang="zh-CN" sz="1655" dirty="0">
+                <a:latin typeface="Times New Roman" panose="02020503050405090304" pitchFamily="18" charset="0"/>
+                <a:cs typeface="Times New Roman" panose="02020503050405090304" pitchFamily="18" charset="0"/>
               </a:rPr>
               <a:t> C: Number of input channels</a:t>
             </a:r>
-            <a:endParaRPr lang="zh-CN" altLang="en-US" sz="1654" b="1" dirty="0">
-              <a:latin typeface="Times New Roman" panose="02020603050405020304" pitchFamily="18" charset="0"/>
-              <a:cs typeface="Times New Roman" panose="02020603050405020304" pitchFamily="18" charset="0"/>
+            <a:endParaRPr lang="zh-CN" altLang="en-US" sz="1655" b="1" dirty="0">
+              <a:latin typeface="Times New Roman" panose="02020503050405090304" pitchFamily="18" charset="0"/>
+              <a:cs typeface="Times New Roman" panose="02020503050405090304" pitchFamily="18" charset="0"/>
             </a:endParaRPr>
           </a:p>
         </p:txBody>
       </p:sp>
       <p:sp>
         <p:nvSpPr>
-          <p:cNvPr id="228" name="矩形: 圆角 227">
-            <a:extLst>
-              <a:ext uri="{FF2B5EF4-FFF2-40B4-BE49-F238E27FC236}">
-                <a16:creationId xmlns:a16="http://schemas.microsoft.com/office/drawing/2014/main" id="{59AAF16D-30B3-4069-9874-E335BE321B65}"/>
-              </a:ext>
-            </a:extLst>
-          </p:cNvPr>
+          <p:cNvPr id="228" name="矩形: 圆角 227"/>
           <p:cNvSpPr/>
           <p:nvPr/>
         </p:nvSpPr>
@@ -14861,34 +13673,28 @@
           <a:p>
             <a:pPr algn="ctr"/>
             <a:r>
-              <a:rPr lang="en-US" altLang="zh-CN" sz="1241" dirty="0">
+              <a:rPr lang="en-US" altLang="zh-CN" sz="1240" dirty="0">
                 <a:solidFill>
                   <a:schemeClr val="tx1"/>
                 </a:solidFill>
-                <a:latin typeface="Times New Roman" panose="02020603050405020304" pitchFamily="18" charset="0"/>
-                <a:cs typeface="Times New Roman" panose="02020603050405020304" pitchFamily="18" charset="0"/>
+                <a:latin typeface="Times New Roman" panose="02020503050405090304" pitchFamily="18" charset="0"/>
+                <a:cs typeface="Times New Roman" panose="02020503050405090304" pitchFamily="18" charset="0"/>
               </a:rPr>
               <a:t>DWC</a:t>
             </a:r>
-            <a:endParaRPr lang="zh-CN" altLang="en-US" sz="1241" dirty="0">
+            <a:endParaRPr lang="zh-CN" altLang="en-US" sz="1240" dirty="0">
               <a:solidFill>
                 <a:schemeClr val="tx1"/>
               </a:solidFill>
-              <a:latin typeface="Times New Roman" panose="02020603050405020304" pitchFamily="18" charset="0"/>
-              <a:cs typeface="Times New Roman" panose="02020603050405020304" pitchFamily="18" charset="0"/>
+              <a:latin typeface="Times New Roman" panose="02020503050405090304" pitchFamily="18" charset="0"/>
+              <a:cs typeface="Times New Roman" panose="02020503050405090304" pitchFamily="18" charset="0"/>
             </a:endParaRPr>
           </a:p>
         </p:txBody>
       </p:sp>
       <p:sp>
         <p:nvSpPr>
-          <p:cNvPr id="229" name="矩形: 圆角 228">
-            <a:extLst>
-              <a:ext uri="{FF2B5EF4-FFF2-40B4-BE49-F238E27FC236}">
-                <a16:creationId xmlns:a16="http://schemas.microsoft.com/office/drawing/2014/main" id="{397C3B9E-6E6A-48B3-A062-FC7ABAB455F6}"/>
-              </a:ext>
-            </a:extLst>
-          </p:cNvPr>
+          <p:cNvPr id="229" name="矩形: 圆角 228"/>
           <p:cNvSpPr/>
           <p:nvPr/>
         </p:nvSpPr>
@@ -14934,34 +13740,28 @@
           <a:p>
             <a:pPr algn="ctr"/>
             <a:r>
-              <a:rPr lang="en-US" altLang="zh-CN" sz="1241" dirty="0">
+              <a:rPr lang="en-US" altLang="zh-CN" sz="1240" dirty="0">
                 <a:solidFill>
                   <a:schemeClr val="tx1"/>
                 </a:solidFill>
-                <a:latin typeface="Times New Roman" panose="02020603050405020304" pitchFamily="18" charset="0"/>
-                <a:cs typeface="Times New Roman" panose="02020603050405020304" pitchFamily="18" charset="0"/>
+                <a:latin typeface="Times New Roman" panose="02020503050405090304" pitchFamily="18" charset="0"/>
+                <a:cs typeface="Times New Roman" panose="02020503050405090304" pitchFamily="18" charset="0"/>
               </a:rPr>
               <a:t>GeLU</a:t>
             </a:r>
-            <a:endParaRPr lang="zh-CN" altLang="en-US" sz="1241" dirty="0">
+            <a:endParaRPr lang="zh-CN" altLang="en-US" sz="1240" dirty="0">
               <a:solidFill>
                 <a:schemeClr val="tx1"/>
               </a:solidFill>
-              <a:latin typeface="Times New Roman" panose="02020603050405020304" pitchFamily="18" charset="0"/>
-              <a:cs typeface="Times New Roman" panose="02020603050405020304" pitchFamily="18" charset="0"/>
+              <a:latin typeface="Times New Roman" panose="02020503050405090304" pitchFamily="18" charset="0"/>
+              <a:cs typeface="Times New Roman" panose="02020503050405090304" pitchFamily="18" charset="0"/>
             </a:endParaRPr>
           </a:p>
         </p:txBody>
       </p:sp>
       <p:sp>
         <p:nvSpPr>
-          <p:cNvPr id="235" name="矩形: 圆角 234">
-            <a:extLst>
-              <a:ext uri="{FF2B5EF4-FFF2-40B4-BE49-F238E27FC236}">
-                <a16:creationId xmlns:a16="http://schemas.microsoft.com/office/drawing/2014/main" id="{FD68BEC9-A02D-4A99-866C-7179338447A6}"/>
-              </a:ext>
-            </a:extLst>
-          </p:cNvPr>
+          <p:cNvPr id="235" name="矩形: 圆角 234"/>
           <p:cNvSpPr/>
           <p:nvPr/>
         </p:nvSpPr>
@@ -15007,36 +13807,29 @@
           <a:p>
             <a:pPr algn="ctr"/>
             <a:r>
-              <a:rPr lang="en-US" altLang="zh-CN" sz="1241" dirty="0">
+              <a:rPr lang="en-US" altLang="zh-CN" sz="1240" dirty="0">
                 <a:solidFill>
                   <a:schemeClr val="tx1"/>
                 </a:solidFill>
-                <a:latin typeface="Times New Roman" panose="02020603050405020304" pitchFamily="18" charset="0"/>
-                <a:cs typeface="Times New Roman" panose="02020603050405020304" pitchFamily="18" charset="0"/>
+                <a:latin typeface="Times New Roman" panose="02020503050405090304" pitchFamily="18" charset="0"/>
+                <a:cs typeface="Times New Roman" panose="02020503050405090304" pitchFamily="18" charset="0"/>
               </a:rPr>
               <a:t>Full Connect</a:t>
             </a:r>
-            <a:endParaRPr lang="zh-CN" altLang="en-US" sz="1241" dirty="0">
+            <a:endParaRPr lang="zh-CN" altLang="en-US" sz="1240" dirty="0">
               <a:solidFill>
                 <a:schemeClr val="tx1"/>
               </a:solidFill>
-              <a:latin typeface="Times New Roman" panose="02020603050405020304" pitchFamily="18" charset="0"/>
-              <a:cs typeface="Times New Roman" panose="02020603050405020304" pitchFamily="18" charset="0"/>
+              <a:latin typeface="Times New Roman" panose="02020503050405090304" pitchFamily="18" charset="0"/>
+              <a:cs typeface="Times New Roman" panose="02020503050405090304" pitchFamily="18" charset="0"/>
             </a:endParaRPr>
           </a:p>
         </p:txBody>
       </p:sp>
       <p:cxnSp>
         <p:nvCxnSpPr>
-          <p:cNvPr id="252" name="连接符: 肘形 251">
-            <a:extLst>
-              <a:ext uri="{FF2B5EF4-FFF2-40B4-BE49-F238E27FC236}">
-                <a16:creationId xmlns:a16="http://schemas.microsoft.com/office/drawing/2014/main" id="{EB2BF118-3958-4FEB-9B36-A2A0AE282A9C}"/>
-              </a:ext>
-            </a:extLst>
-          </p:cNvPr>
+          <p:cNvPr id="252" name="连接符: 肘形 251"/>
           <p:cNvCxnSpPr>
-            <a:cxnSpLocks/>
             <a:stCxn id="270" idx="0"/>
             <a:endCxn id="280" idx="2"/>
           </p:cNvCxnSpPr>
@@ -15077,15 +13870,8 @@
       </p:cxnSp>
       <p:cxnSp>
         <p:nvCxnSpPr>
-          <p:cNvPr id="254" name="直接箭头连接符 253">
-            <a:extLst>
-              <a:ext uri="{FF2B5EF4-FFF2-40B4-BE49-F238E27FC236}">
-                <a16:creationId xmlns:a16="http://schemas.microsoft.com/office/drawing/2014/main" id="{844C3382-2226-4024-9C91-B557EF8B50BA}"/>
-              </a:ext>
-            </a:extLst>
-          </p:cNvPr>
+          <p:cNvPr id="254" name="直接箭头连接符 253"/>
           <p:cNvCxnSpPr>
-            <a:cxnSpLocks/>
             <a:stCxn id="269" idx="2"/>
             <a:endCxn id="270" idx="0"/>
           </p:cNvCxnSpPr>
@@ -15123,15 +13909,8 @@
       </p:cxnSp>
       <p:cxnSp>
         <p:nvCxnSpPr>
-          <p:cNvPr id="263" name="直接箭头连接符 262">
-            <a:extLst>
-              <a:ext uri="{FF2B5EF4-FFF2-40B4-BE49-F238E27FC236}">
-                <a16:creationId xmlns:a16="http://schemas.microsoft.com/office/drawing/2014/main" id="{DB536AD9-77F9-4E3F-82C6-7D6B718478C3}"/>
-              </a:ext>
-            </a:extLst>
-          </p:cNvPr>
+          <p:cNvPr id="263" name="直接箭头连接符 262"/>
           <p:cNvCxnSpPr>
-            <a:cxnSpLocks/>
             <a:stCxn id="235" idx="2"/>
             <a:endCxn id="280" idx="0"/>
           </p:cNvCxnSpPr>
@@ -15169,13 +13948,7 @@
       </p:cxnSp>
       <p:sp>
         <p:nvSpPr>
-          <p:cNvPr id="221" name="文本框 220">
-            <a:extLst>
-              <a:ext uri="{FF2B5EF4-FFF2-40B4-BE49-F238E27FC236}">
-                <a16:creationId xmlns:a16="http://schemas.microsoft.com/office/drawing/2014/main" id="{0C529EA8-9AAE-410F-B1E3-E219E5919736}"/>
-              </a:ext>
-            </a:extLst>
-          </p:cNvPr>
+          <p:cNvPr id="221" name="文本框 220"/>
           <p:cNvSpPr txBox="1"/>
           <p:nvPr/>
         </p:nvSpPr>
@@ -15197,37 +13970,30 @@
           <a:p>
             <a:pPr algn="ctr"/>
             <a:r>
-              <a:rPr lang="en-US" altLang="zh-CN" sz="1654" dirty="0">
-                <a:latin typeface="Times New Roman" panose="02020603050405020304" pitchFamily="18" charset="0"/>
-                <a:cs typeface="Times New Roman" panose="02020603050405020304" pitchFamily="18" charset="0"/>
+              <a:rPr lang="en-US" altLang="zh-CN" sz="1655" dirty="0">
+                <a:latin typeface="Times New Roman" panose="02020503050405090304" pitchFamily="18" charset="0"/>
+                <a:cs typeface="Times New Roman" panose="02020503050405090304" pitchFamily="18" charset="0"/>
               </a:rPr>
               <a:t>(k) </a:t>
             </a:r>
             <a:r>
-              <a:rPr lang="en-US" altLang="zh-CN" sz="1654" b="1" dirty="0">
-                <a:latin typeface="Times New Roman" panose="02020603050405020304" pitchFamily="18" charset="0"/>
-                <a:cs typeface="Times New Roman" panose="02020603050405020304" pitchFamily="18" charset="0"/>
+              <a:rPr lang="en-US" altLang="zh-CN" sz="1655" b="1" dirty="0">
+                <a:latin typeface="Times New Roman" panose="02020503050405090304" pitchFamily="18" charset="0"/>
+                <a:cs typeface="Times New Roman" panose="02020503050405090304" pitchFamily="18" charset="0"/>
               </a:rPr>
               <a:t>FFN</a:t>
             </a:r>
-            <a:endParaRPr lang="zh-CN" altLang="en-US" sz="1654" b="1" dirty="0">
-              <a:latin typeface="Times New Roman" panose="02020603050405020304" pitchFamily="18" charset="0"/>
-              <a:cs typeface="Times New Roman" panose="02020603050405020304" pitchFamily="18" charset="0"/>
+            <a:endParaRPr lang="zh-CN" altLang="en-US" sz="1655" b="1" dirty="0">
+              <a:latin typeface="Times New Roman" panose="02020503050405090304" pitchFamily="18" charset="0"/>
+              <a:cs typeface="Times New Roman" panose="02020503050405090304" pitchFamily="18" charset="0"/>
             </a:endParaRPr>
           </a:p>
         </p:txBody>
       </p:sp>
       <p:cxnSp>
         <p:nvCxnSpPr>
-          <p:cNvPr id="306" name="连接符: 肘形 305">
-            <a:extLst>
-              <a:ext uri="{FF2B5EF4-FFF2-40B4-BE49-F238E27FC236}">
-                <a16:creationId xmlns:a16="http://schemas.microsoft.com/office/drawing/2014/main" id="{B96F7005-7C5F-4B64-9F70-5481D274A4E5}"/>
-              </a:ext>
-            </a:extLst>
-          </p:cNvPr>
+          <p:cNvPr id="306" name="连接符: 肘形 305"/>
           <p:cNvCxnSpPr>
-            <a:cxnSpLocks/>
             <a:stCxn id="144" idx="2"/>
             <a:endCxn id="145" idx="0"/>
           </p:cNvCxnSpPr>
@@ -15267,15 +14033,8 @@
       </p:cxnSp>
       <p:cxnSp>
         <p:nvCxnSpPr>
-          <p:cNvPr id="311" name="连接符: 肘形 310">
-            <a:extLst>
-              <a:ext uri="{FF2B5EF4-FFF2-40B4-BE49-F238E27FC236}">
-                <a16:creationId xmlns:a16="http://schemas.microsoft.com/office/drawing/2014/main" id="{6FB679C7-9653-49C2-B5AA-F986DF22F2E5}"/>
-              </a:ext>
-            </a:extLst>
-          </p:cNvPr>
+          <p:cNvPr id="311" name="连接符: 肘形 310"/>
           <p:cNvCxnSpPr>
-            <a:cxnSpLocks/>
             <a:stCxn id="144" idx="2"/>
             <a:endCxn id="151" idx="0"/>
           </p:cNvCxnSpPr>
@@ -15315,15 +14074,8 @@
       </p:cxnSp>
       <p:cxnSp>
         <p:nvCxnSpPr>
-          <p:cNvPr id="313" name="连接符: 肘形 312">
-            <a:extLst>
-              <a:ext uri="{FF2B5EF4-FFF2-40B4-BE49-F238E27FC236}">
-                <a16:creationId xmlns:a16="http://schemas.microsoft.com/office/drawing/2014/main" id="{39BF07D8-7446-4102-B994-14F467D5CB24}"/>
-              </a:ext>
-            </a:extLst>
-          </p:cNvPr>
+          <p:cNvPr id="313" name="连接符: 肘形 312"/>
           <p:cNvCxnSpPr>
-            <a:cxnSpLocks/>
             <a:stCxn id="152" idx="2"/>
             <a:endCxn id="150" idx="6"/>
           </p:cNvCxnSpPr>
@@ -15361,15 +14113,8 @@
       </p:cxnSp>
       <p:cxnSp>
         <p:nvCxnSpPr>
-          <p:cNvPr id="314" name="连接符: 肘形 313">
-            <a:extLst>
-              <a:ext uri="{FF2B5EF4-FFF2-40B4-BE49-F238E27FC236}">
-                <a16:creationId xmlns:a16="http://schemas.microsoft.com/office/drawing/2014/main" id="{62690952-D17B-4BF1-AA67-BF744480FC9B}"/>
-              </a:ext>
-            </a:extLst>
-          </p:cNvPr>
+          <p:cNvPr id="314" name="连接符: 肘形 313"/>
           <p:cNvCxnSpPr>
-            <a:cxnSpLocks/>
             <a:stCxn id="149" idx="2"/>
             <a:endCxn id="150" idx="2"/>
           </p:cNvCxnSpPr>
@@ -15407,15 +14152,8 @@
       </p:cxnSp>
       <p:cxnSp>
         <p:nvCxnSpPr>
-          <p:cNvPr id="325" name="直接箭头连接符 324">
-            <a:extLst>
-              <a:ext uri="{FF2B5EF4-FFF2-40B4-BE49-F238E27FC236}">
-                <a16:creationId xmlns:a16="http://schemas.microsoft.com/office/drawing/2014/main" id="{D1D78792-7A7C-4C51-8A67-30DB5073A56E}"/>
-              </a:ext>
-            </a:extLst>
-          </p:cNvPr>
+          <p:cNvPr id="325" name="直接箭头连接符 324"/>
           <p:cNvCxnSpPr>
-            <a:cxnSpLocks/>
             <a:stCxn id="59" idx="4"/>
             <a:endCxn id="102" idx="0"/>
           </p:cNvCxnSpPr>
@@ -15453,15 +14191,8 @@
       </p:cxnSp>
       <p:cxnSp>
         <p:nvCxnSpPr>
-          <p:cNvPr id="330" name="直接箭头连接符 329">
-            <a:extLst>
-              <a:ext uri="{FF2B5EF4-FFF2-40B4-BE49-F238E27FC236}">
-                <a16:creationId xmlns:a16="http://schemas.microsoft.com/office/drawing/2014/main" id="{6D97873A-36EA-43AD-9BEF-33F586FCE79E}"/>
-              </a:ext>
-            </a:extLst>
-          </p:cNvPr>
+          <p:cNvPr id="330" name="直接箭头连接符 329"/>
           <p:cNvCxnSpPr>
-            <a:cxnSpLocks/>
             <a:endCxn id="144" idx="0"/>
           </p:cNvCxnSpPr>
           <p:nvPr/>
@@ -15498,15 +14229,8 @@
       </p:cxnSp>
       <p:cxnSp>
         <p:nvCxnSpPr>
-          <p:cNvPr id="333" name="连接符: 肘形 332">
-            <a:extLst>
-              <a:ext uri="{FF2B5EF4-FFF2-40B4-BE49-F238E27FC236}">
-                <a16:creationId xmlns:a16="http://schemas.microsoft.com/office/drawing/2014/main" id="{DB56153E-21E1-4B82-8660-7386D86B4341}"/>
-              </a:ext>
-            </a:extLst>
-          </p:cNvPr>
+          <p:cNvPr id="333" name="连接符: 肘形 332"/>
           <p:cNvCxnSpPr>
-            <a:cxnSpLocks/>
             <a:stCxn id="144" idx="0"/>
             <a:endCxn id="179" idx="6"/>
           </p:cNvCxnSpPr>
@@ -15547,15 +14271,8 @@
       </p:cxnSp>
       <p:cxnSp>
         <p:nvCxnSpPr>
-          <p:cNvPr id="341" name="连接符: 肘形 340">
-            <a:extLst>
-              <a:ext uri="{FF2B5EF4-FFF2-40B4-BE49-F238E27FC236}">
-                <a16:creationId xmlns:a16="http://schemas.microsoft.com/office/drawing/2014/main" id="{F64F5CF0-FB83-43DD-901D-9CA8779B5613}"/>
-              </a:ext>
-            </a:extLst>
-          </p:cNvPr>
+          <p:cNvPr id="341" name="连接符: 肘形 340"/>
           <p:cNvCxnSpPr>
-            <a:cxnSpLocks/>
             <a:stCxn id="74" idx="0"/>
             <a:endCxn id="77" idx="2"/>
           </p:cNvCxnSpPr>
@@ -15597,15 +14314,8 @@
       </p:cxnSp>
       <p:cxnSp>
         <p:nvCxnSpPr>
-          <p:cNvPr id="343" name="直接箭头连接符 342">
-            <a:extLst>
-              <a:ext uri="{FF2B5EF4-FFF2-40B4-BE49-F238E27FC236}">
-                <a16:creationId xmlns:a16="http://schemas.microsoft.com/office/drawing/2014/main" id="{6A10FA04-3D47-4F0F-8463-6DE295510D25}"/>
-              </a:ext>
-            </a:extLst>
-          </p:cNvPr>
+          <p:cNvPr id="343" name="直接箭头连接符 342"/>
           <p:cNvCxnSpPr>
-            <a:cxnSpLocks/>
             <a:stCxn id="62" idx="2"/>
             <a:endCxn id="77" idx="0"/>
           </p:cNvCxnSpPr>
@@ -15643,15 +14353,8 @@
       </p:cxnSp>
       <p:cxnSp>
         <p:nvCxnSpPr>
-          <p:cNvPr id="346" name="直接箭头连接符 345">
-            <a:extLst>
-              <a:ext uri="{FF2B5EF4-FFF2-40B4-BE49-F238E27FC236}">
-                <a16:creationId xmlns:a16="http://schemas.microsoft.com/office/drawing/2014/main" id="{8AE44E42-A12F-47D9-A2F8-679F91E7A951}"/>
-              </a:ext>
-            </a:extLst>
-          </p:cNvPr>
+          <p:cNvPr id="346" name="直接箭头连接符 345"/>
           <p:cNvCxnSpPr>
-            <a:cxnSpLocks/>
             <a:stCxn id="77" idx="4"/>
           </p:cNvCxnSpPr>
           <p:nvPr/>
@@ -15688,15 +14391,8 @@
       </p:cxnSp>
       <p:cxnSp>
         <p:nvCxnSpPr>
-          <p:cNvPr id="353" name="连接符: 肘形 352">
-            <a:extLst>
-              <a:ext uri="{FF2B5EF4-FFF2-40B4-BE49-F238E27FC236}">
-                <a16:creationId xmlns:a16="http://schemas.microsoft.com/office/drawing/2014/main" id="{86C9330B-5C6E-4FFA-A62E-6E1977982B79}"/>
-              </a:ext>
-            </a:extLst>
-          </p:cNvPr>
+          <p:cNvPr id="353" name="连接符: 肘形 352"/>
           <p:cNvCxnSpPr>
-            <a:cxnSpLocks/>
             <a:stCxn id="74" idx="0"/>
             <a:endCxn id="56" idx="0"/>
           </p:cNvCxnSpPr>
@@ -15737,15 +14433,8 @@
       </p:cxnSp>
       <p:cxnSp>
         <p:nvCxnSpPr>
-          <p:cNvPr id="357" name="直接箭头连接符 356">
-            <a:extLst>
-              <a:ext uri="{FF2B5EF4-FFF2-40B4-BE49-F238E27FC236}">
-                <a16:creationId xmlns:a16="http://schemas.microsoft.com/office/drawing/2014/main" id="{23299905-5C0D-4F4E-B48E-9483896DA3A8}"/>
-              </a:ext>
-            </a:extLst>
-          </p:cNvPr>
+          <p:cNvPr id="357" name="直接箭头连接符 356"/>
           <p:cNvCxnSpPr>
-            <a:cxnSpLocks/>
             <a:endCxn id="74" idx="0"/>
           </p:cNvCxnSpPr>
           <p:nvPr/>
@@ -15783,15 +14472,8 @@
       </p:cxnSp>
       <p:cxnSp>
         <p:nvCxnSpPr>
-          <p:cNvPr id="2" name="直接箭头连接符 1">
-            <a:extLst>
-              <a:ext uri="{FF2B5EF4-FFF2-40B4-BE49-F238E27FC236}">
-                <a16:creationId xmlns:a16="http://schemas.microsoft.com/office/drawing/2014/main" id="{8411F6C8-FC93-DE47-546D-7A542BFB591E}"/>
-              </a:ext>
-            </a:extLst>
-          </p:cNvPr>
+          <p:cNvPr id="2" name="直接箭头连接符 1"/>
           <p:cNvCxnSpPr>
-            <a:cxnSpLocks/>
             <a:stCxn id="121" idx="2"/>
             <a:endCxn id="327" idx="0"/>
           </p:cNvCxnSpPr>
@@ -15829,15 +14511,8 @@
       </p:cxnSp>
       <p:cxnSp>
         <p:nvCxnSpPr>
-          <p:cNvPr id="6" name="直接箭头连接符 5">
-            <a:extLst>
-              <a:ext uri="{FF2B5EF4-FFF2-40B4-BE49-F238E27FC236}">
-                <a16:creationId xmlns:a16="http://schemas.microsoft.com/office/drawing/2014/main" id="{97B451BD-54A4-4521-67C2-2CBAD9B2C97E}"/>
-              </a:ext>
-            </a:extLst>
-          </p:cNvPr>
+          <p:cNvPr id="6" name="直接箭头连接符 5"/>
           <p:cNvCxnSpPr>
-            <a:cxnSpLocks/>
             <a:stCxn id="327" idx="4"/>
             <a:endCxn id="302" idx="0"/>
           </p:cNvCxnSpPr>
@@ -15875,15 +14550,8 @@
       </p:cxnSp>
       <p:cxnSp>
         <p:nvCxnSpPr>
-          <p:cNvPr id="10" name="直接箭头连接符 9">
-            <a:extLst>
-              <a:ext uri="{FF2B5EF4-FFF2-40B4-BE49-F238E27FC236}">
-                <a16:creationId xmlns:a16="http://schemas.microsoft.com/office/drawing/2014/main" id="{FE79F154-8B29-5C97-FAF5-F8EC02F0B7F8}"/>
-              </a:ext>
-            </a:extLst>
-          </p:cNvPr>
+          <p:cNvPr id="10" name="直接箭头连接符 9"/>
           <p:cNvCxnSpPr>
-            <a:cxnSpLocks/>
             <a:stCxn id="302" idx="2"/>
             <a:endCxn id="131" idx="0"/>
           </p:cNvCxnSpPr>
@@ -15921,15 +14589,8 @@
       </p:cxnSp>
       <p:cxnSp>
         <p:nvCxnSpPr>
-          <p:cNvPr id="13" name="直接箭头连接符 12">
-            <a:extLst>
-              <a:ext uri="{FF2B5EF4-FFF2-40B4-BE49-F238E27FC236}">
-                <a16:creationId xmlns:a16="http://schemas.microsoft.com/office/drawing/2014/main" id="{F66BA6A7-9F8D-1333-FD12-228E5A88C27E}"/>
-              </a:ext>
-            </a:extLst>
-          </p:cNvPr>
+          <p:cNvPr id="13" name="直接箭头连接符 12"/>
           <p:cNvCxnSpPr>
-            <a:cxnSpLocks/>
             <a:stCxn id="131" idx="2"/>
             <a:endCxn id="132" idx="0"/>
           </p:cNvCxnSpPr>
@@ -15967,15 +14628,8 @@
       </p:cxnSp>
       <p:cxnSp>
         <p:nvCxnSpPr>
-          <p:cNvPr id="21" name="直接箭头连接符 20">
-            <a:extLst>
-              <a:ext uri="{FF2B5EF4-FFF2-40B4-BE49-F238E27FC236}">
-                <a16:creationId xmlns:a16="http://schemas.microsoft.com/office/drawing/2014/main" id="{D9FC7DAD-6214-9EBC-3E83-E8EC4106BAFA}"/>
-              </a:ext>
-            </a:extLst>
-          </p:cNvPr>
+          <p:cNvPr id="21" name="直接箭头连接符 20"/>
           <p:cNvCxnSpPr>
-            <a:cxnSpLocks/>
             <a:stCxn id="132" idx="4"/>
           </p:cNvCxnSpPr>
           <p:nvPr/>
@@ -16012,15 +14666,8 @@
       </p:cxnSp>
       <p:cxnSp>
         <p:nvCxnSpPr>
-          <p:cNvPr id="24" name="连接符: 肘形 23">
-            <a:extLst>
-              <a:ext uri="{FF2B5EF4-FFF2-40B4-BE49-F238E27FC236}">
-                <a16:creationId xmlns:a16="http://schemas.microsoft.com/office/drawing/2014/main" id="{CD4B11B5-239F-A555-44F1-8432336E977B}"/>
-              </a:ext>
-            </a:extLst>
-          </p:cNvPr>
+          <p:cNvPr id="24" name="连接符: 肘形 23"/>
           <p:cNvCxnSpPr>
-            <a:cxnSpLocks/>
             <a:stCxn id="105" idx="2"/>
             <a:endCxn id="108" idx="2"/>
           </p:cNvCxnSpPr>
@@ -16058,15 +14705,8 @@
       </p:cxnSp>
       <p:cxnSp>
         <p:nvCxnSpPr>
-          <p:cNvPr id="27" name="连接符: 肘形 26">
-            <a:extLst>
-              <a:ext uri="{FF2B5EF4-FFF2-40B4-BE49-F238E27FC236}">
-                <a16:creationId xmlns:a16="http://schemas.microsoft.com/office/drawing/2014/main" id="{70B887FA-FA52-F87A-B258-3F125197442B}"/>
-              </a:ext>
-            </a:extLst>
-          </p:cNvPr>
+          <p:cNvPr id="27" name="连接符: 肘形 26"/>
           <p:cNvCxnSpPr>
-            <a:cxnSpLocks/>
             <a:stCxn id="106" idx="2"/>
             <a:endCxn id="108" idx="6"/>
           </p:cNvCxnSpPr>
@@ -16104,15 +14744,8 @@
       </p:cxnSp>
       <p:cxnSp>
         <p:nvCxnSpPr>
-          <p:cNvPr id="30" name="连接符: 肘形 29">
-            <a:extLst>
-              <a:ext uri="{FF2B5EF4-FFF2-40B4-BE49-F238E27FC236}">
-                <a16:creationId xmlns:a16="http://schemas.microsoft.com/office/drawing/2014/main" id="{40A81FEC-248F-F54F-1110-74FD8019E54D}"/>
-              </a:ext>
-            </a:extLst>
-          </p:cNvPr>
+          <p:cNvPr id="30" name="连接符: 肘形 29"/>
           <p:cNvCxnSpPr>
-            <a:cxnSpLocks/>
             <a:stCxn id="89" idx="2"/>
             <a:endCxn id="92" idx="6"/>
           </p:cNvCxnSpPr>
@@ -16150,15 +14783,8 @@
       </p:cxnSp>
       <p:cxnSp>
         <p:nvCxnSpPr>
-          <p:cNvPr id="33" name="连接符: 肘形 32">
-            <a:extLst>
-              <a:ext uri="{FF2B5EF4-FFF2-40B4-BE49-F238E27FC236}">
-                <a16:creationId xmlns:a16="http://schemas.microsoft.com/office/drawing/2014/main" id="{4568C439-9F6B-0B4C-4700-0DA618789F26}"/>
-              </a:ext>
-            </a:extLst>
-          </p:cNvPr>
+          <p:cNvPr id="33" name="连接符: 肘形 32"/>
           <p:cNvCxnSpPr>
-            <a:cxnSpLocks/>
             <a:stCxn id="85" idx="2"/>
             <a:endCxn id="92" idx="2"/>
           </p:cNvCxnSpPr>
@@ -16196,15 +14822,8 @@
       </p:cxnSp>
       <p:cxnSp>
         <p:nvCxnSpPr>
-          <p:cNvPr id="36" name="直接箭头连接符 35">
-            <a:extLst>
-              <a:ext uri="{FF2B5EF4-FFF2-40B4-BE49-F238E27FC236}">
-                <a16:creationId xmlns:a16="http://schemas.microsoft.com/office/drawing/2014/main" id="{B93887F1-B894-59B8-B60A-0C9BBB2DDE82}"/>
-              </a:ext>
-            </a:extLst>
-          </p:cNvPr>
+          <p:cNvPr id="36" name="直接箭头连接符 35"/>
           <p:cNvCxnSpPr>
-            <a:cxnSpLocks/>
             <a:stCxn id="92" idx="4"/>
             <a:endCxn id="90" idx="0"/>
           </p:cNvCxnSpPr>
@@ -16242,15 +14861,8 @@
       </p:cxnSp>
       <p:cxnSp>
         <p:nvCxnSpPr>
-          <p:cNvPr id="40" name="直接箭头连接符 39">
-            <a:extLst>
-              <a:ext uri="{FF2B5EF4-FFF2-40B4-BE49-F238E27FC236}">
-                <a16:creationId xmlns:a16="http://schemas.microsoft.com/office/drawing/2014/main" id="{96DEFDC0-77FE-C05D-3CF7-41EB42C1E390}"/>
-              </a:ext>
-            </a:extLst>
-          </p:cNvPr>
+          <p:cNvPr id="40" name="直接箭头连接符 39"/>
           <p:cNvCxnSpPr>
-            <a:cxnSpLocks/>
             <a:stCxn id="90" idx="2"/>
             <a:endCxn id="91" idx="0"/>
           </p:cNvCxnSpPr>
@@ -16288,15 +14900,8 @@
       </p:cxnSp>
       <p:cxnSp>
         <p:nvCxnSpPr>
-          <p:cNvPr id="52" name="连接符: 肘形 51">
-            <a:extLst>
-              <a:ext uri="{FF2B5EF4-FFF2-40B4-BE49-F238E27FC236}">
-                <a16:creationId xmlns:a16="http://schemas.microsoft.com/office/drawing/2014/main" id="{6B8DD6ED-5E95-2F66-3658-30015EEAB970}"/>
-              </a:ext>
-            </a:extLst>
-          </p:cNvPr>
+          <p:cNvPr id="52" name="连接符: 肘形 51"/>
           <p:cNvCxnSpPr>
-            <a:cxnSpLocks/>
             <a:stCxn id="82" idx="0"/>
             <a:endCxn id="86" idx="0"/>
           </p:cNvCxnSpPr>
@@ -16337,15 +14942,8 @@
       </p:cxnSp>
       <p:cxnSp>
         <p:nvCxnSpPr>
-          <p:cNvPr id="67" name="连接符: 肘形 66">
-            <a:extLst>
-              <a:ext uri="{FF2B5EF4-FFF2-40B4-BE49-F238E27FC236}">
-                <a16:creationId xmlns:a16="http://schemas.microsoft.com/office/drawing/2014/main" id="{EE4F5CC5-1A8E-838A-B38B-C3096F995719}"/>
-              </a:ext>
-            </a:extLst>
-          </p:cNvPr>
+          <p:cNvPr id="67" name="连接符: 肘形 66"/>
           <p:cNvCxnSpPr>
-            <a:cxnSpLocks/>
             <a:stCxn id="105" idx="0"/>
             <a:endCxn id="106" idx="0"/>
           </p:cNvCxnSpPr>
@@ -16386,15 +14984,8 @@
       </p:cxnSp>
       <p:cxnSp>
         <p:nvCxnSpPr>
-          <p:cNvPr id="120" name="直接连接符 119">
-            <a:extLst>
-              <a:ext uri="{FF2B5EF4-FFF2-40B4-BE49-F238E27FC236}">
-                <a16:creationId xmlns:a16="http://schemas.microsoft.com/office/drawing/2014/main" id="{CE3F7465-8A0C-B4C8-9112-9411FDBED50B}"/>
-              </a:ext>
-            </a:extLst>
-          </p:cNvPr>
+          <p:cNvPr id="120" name="直接连接符 119"/>
           <p:cNvCxnSpPr>
-            <a:cxnSpLocks/>
             <a:stCxn id="91" idx="4"/>
           </p:cNvCxnSpPr>
           <p:nvPr/>
@@ -16430,15 +15021,8 @@
       </p:cxnSp>
       <p:cxnSp>
         <p:nvCxnSpPr>
-          <p:cNvPr id="126" name="直接箭头连接符 125">
-            <a:extLst>
-              <a:ext uri="{FF2B5EF4-FFF2-40B4-BE49-F238E27FC236}">
-                <a16:creationId xmlns:a16="http://schemas.microsoft.com/office/drawing/2014/main" id="{26CA10DC-43B0-AF65-2E42-2E3EC891F7F2}"/>
-              </a:ext>
-            </a:extLst>
-          </p:cNvPr>
+          <p:cNvPr id="126" name="直接箭头连接符 125"/>
           <p:cNvCxnSpPr>
-            <a:cxnSpLocks/>
             <a:endCxn id="203" idx="0"/>
           </p:cNvCxnSpPr>
           <p:nvPr/>
@@ -16475,15 +15059,8 @@
       </p:cxnSp>
       <p:cxnSp>
         <p:nvCxnSpPr>
-          <p:cNvPr id="133" name="直接箭头连接符 132">
-            <a:extLst>
-              <a:ext uri="{FF2B5EF4-FFF2-40B4-BE49-F238E27FC236}">
-                <a16:creationId xmlns:a16="http://schemas.microsoft.com/office/drawing/2014/main" id="{F543A597-CBAA-8F4A-0486-B5DDFD114DC5}"/>
-              </a:ext>
-            </a:extLst>
-          </p:cNvPr>
+          <p:cNvPr id="133" name="直接箭头连接符 132"/>
           <p:cNvCxnSpPr>
-            <a:cxnSpLocks/>
             <a:stCxn id="203" idx="2"/>
             <a:endCxn id="206" idx="0"/>
           </p:cNvCxnSpPr>
@@ -16521,15 +15098,8 @@
       </p:cxnSp>
       <p:cxnSp>
         <p:nvCxnSpPr>
-          <p:cNvPr id="136" name="直接箭头连接符 135">
-            <a:extLst>
-              <a:ext uri="{FF2B5EF4-FFF2-40B4-BE49-F238E27FC236}">
-                <a16:creationId xmlns:a16="http://schemas.microsoft.com/office/drawing/2014/main" id="{ACF7E430-8D5E-E766-95AE-7F8F57BB330B}"/>
-              </a:ext>
-            </a:extLst>
-          </p:cNvPr>
+          <p:cNvPr id="136" name="直接箭头连接符 135"/>
           <p:cNvCxnSpPr>
-            <a:cxnSpLocks/>
             <a:stCxn id="205" idx="2"/>
             <a:endCxn id="210" idx="0"/>
           </p:cNvCxnSpPr>
@@ -16567,15 +15137,8 @@
       </p:cxnSp>
       <p:cxnSp>
         <p:nvCxnSpPr>
-          <p:cNvPr id="11" name="连接符: 肘形 10">
-            <a:extLst>
-              <a:ext uri="{FF2B5EF4-FFF2-40B4-BE49-F238E27FC236}">
-                <a16:creationId xmlns:a16="http://schemas.microsoft.com/office/drawing/2014/main" id="{1B6D21FA-4228-02A1-A974-C8EA8F110E57}"/>
-              </a:ext>
-            </a:extLst>
-          </p:cNvPr>
+          <p:cNvPr id="11" name="连接符: 肘形 10"/>
           <p:cNvCxnSpPr>
-            <a:cxnSpLocks/>
             <a:endCxn id="132" idx="2"/>
           </p:cNvCxnSpPr>
           <p:nvPr/>
@@ -16615,15 +15178,8 @@
       </p:cxnSp>
       <p:cxnSp>
         <p:nvCxnSpPr>
-          <p:cNvPr id="5" name="连接符: 肘形 4">
-            <a:extLst>
-              <a:ext uri="{FF2B5EF4-FFF2-40B4-BE49-F238E27FC236}">
-                <a16:creationId xmlns:a16="http://schemas.microsoft.com/office/drawing/2014/main" id="{82AEDC8C-38CA-1C1C-81C2-C57068EB8512}"/>
-              </a:ext>
-            </a:extLst>
-          </p:cNvPr>
+          <p:cNvPr id="5" name="连接符: 肘形 4"/>
           <p:cNvCxnSpPr>
-            <a:cxnSpLocks/>
             <a:stCxn id="328" idx="2"/>
             <a:endCxn id="327" idx="2"/>
           </p:cNvCxnSpPr>
@@ -16661,15 +15217,8 @@
       </p:cxnSp>
       <p:cxnSp>
         <p:nvCxnSpPr>
-          <p:cNvPr id="8" name="连接符: 肘形 7">
-            <a:extLst>
-              <a:ext uri="{FF2B5EF4-FFF2-40B4-BE49-F238E27FC236}">
-                <a16:creationId xmlns:a16="http://schemas.microsoft.com/office/drawing/2014/main" id="{E942FE7E-CFE1-0B0A-EE7D-DED58143F6DA}"/>
-              </a:ext>
-            </a:extLst>
-          </p:cNvPr>
+          <p:cNvPr id="8" name="连接符: 肘形 7"/>
           <p:cNvCxnSpPr>
-            <a:cxnSpLocks/>
             <a:stCxn id="124" idx="2"/>
             <a:endCxn id="327" idx="6"/>
           </p:cNvCxnSpPr>
@@ -16707,15 +15256,8 @@
       </p:cxnSp>
       <p:cxnSp>
         <p:nvCxnSpPr>
-          <p:cNvPr id="3" name="连接符: 肘形 2">
-            <a:extLst>
-              <a:ext uri="{FF2B5EF4-FFF2-40B4-BE49-F238E27FC236}">
-                <a16:creationId xmlns:a16="http://schemas.microsoft.com/office/drawing/2014/main" id="{1A3E148B-F28B-5EA9-9D0B-B16502E974F7}"/>
-              </a:ext>
-            </a:extLst>
-          </p:cNvPr>
+          <p:cNvPr id="3" name="连接符: 肘形 2"/>
           <p:cNvCxnSpPr>
-            <a:cxnSpLocks/>
             <a:stCxn id="205" idx="2"/>
             <a:endCxn id="214" idx="2"/>
           </p:cNvCxnSpPr>
@@ -16756,15 +15298,8 @@
       </p:cxnSp>
       <p:cxnSp>
         <p:nvCxnSpPr>
-          <p:cNvPr id="15" name="连接符: 肘形 14">
-            <a:extLst>
-              <a:ext uri="{FF2B5EF4-FFF2-40B4-BE49-F238E27FC236}">
-                <a16:creationId xmlns:a16="http://schemas.microsoft.com/office/drawing/2014/main" id="{03DF58E5-5226-7E24-9C13-DB5556DF8D17}"/>
-              </a:ext>
-            </a:extLst>
-          </p:cNvPr>
+          <p:cNvPr id="15" name="连接符: 肘形 14"/>
           <p:cNvCxnSpPr>
-            <a:cxnSpLocks/>
             <a:stCxn id="203" idx="0"/>
             <a:endCxn id="253" idx="2"/>
           </p:cNvCxnSpPr>
@@ -16803,12 +15338,49 @@
           </a:fontRef>
         </p:style>
       </p:cxnSp>
+      <p:cxnSp>
+        <p:nvCxnSpPr>
+          <p:cNvPr id="7" name="连接符: 肘形 116"/>
+          <p:cNvCxnSpPr>
+            <a:stCxn id="86" idx="0"/>
+            <a:endCxn id="91" idx="2"/>
+          </p:cNvCxnSpPr>
+          <p:nvPr/>
+        </p:nvCxnSpPr>
+        <p:spPr>
+          <a:xfrm rot="16200000" flipH="1" flipV="1">
+            <a:off x="10537190" y="1487805"/>
+            <a:ext cx="1901825" cy="683260"/>
+          </a:xfrm>
+          <a:prstGeom prst="bentConnector4">
+            <a:avLst>
+              <a:gd name="adj1" fmla="val -10701"/>
+              <a:gd name="adj2" fmla="val 250418"/>
+            </a:avLst>
+          </a:prstGeom>
+          <a:ln w="19050">
+            <a:solidFill>
+              <a:schemeClr val="tx1"/>
+            </a:solidFill>
+            <a:tailEnd type="triangle"/>
+          </a:ln>
+        </p:spPr>
+        <p:style>
+          <a:lnRef idx="1">
+            <a:schemeClr val="accent1"/>
+          </a:lnRef>
+          <a:fillRef idx="0">
+            <a:schemeClr val="accent1"/>
+          </a:fillRef>
+          <a:effectRef idx="0">
+            <a:schemeClr val="accent1"/>
+          </a:effectRef>
+          <a:fontRef idx="minor">
+            <a:schemeClr val="tx1"/>
+          </a:fontRef>
+        </p:style>
+      </p:cxnSp>
     </p:spTree>
-    <p:extLst>
-      <p:ext uri="{BB962C8B-B14F-4D97-AF65-F5344CB8AC3E}">
-        <p14:creationId xmlns:p14="http://schemas.microsoft.com/office/powerpoint/2010/main" val="1222498881"/>
-      </p:ext>
-    </p:extLst>
   </p:cSld>
   <p:clrMapOvr>
     <a:masterClrMapping/>
@@ -16859,7 +15431,7 @@
     </a:clrScheme>
     <a:fontScheme name="Office 2013 - 2022 主题">
       <a:majorFont>
-        <a:latin typeface="Calibri Light" panose="020F0302020204030204"/>
+        <a:latin typeface="Calibri Light"/>
         <a:ea typeface=""/>
         <a:cs typeface=""/>
         <a:font script="Jpan" typeface="游ゴシック Light"/>
@@ -16894,7 +15466,7 @@
         <a:font script="Geor" typeface="Sylfaen"/>
       </a:majorFont>
       <a:minorFont>
-        <a:latin typeface="Calibri" panose="020F0502020204030204"/>
+        <a:latin typeface="Calibri"/>
         <a:ea typeface=""/>
         <a:cs typeface=""/>
         <a:font script="Jpan" typeface="游ゴシック"/>
@@ -17067,11 +15639,9 @@
       </a:bgFillStyleLst>
     </a:fmtScheme>
   </a:themeElements>
-  <a:objectDefaults/>
-  <a:extraClrSchemeLst/>
   <a:extLst>
     <a:ext uri="{05A4C25C-085E-4340-85A3-A5531E510DB2}">
-      <thm15:themeFamily xmlns:thm15="http://schemas.microsoft.com/office/thememl/2012/main" name="Office 2013 - 2022 Theme" id="{62F939B6-93AF-4DB8-9C6B-D6C7DFDC589F}" vid="{4A3C46E8-61CC-4603-A589-7422A47A8E4A}"/>
+      <thm15:themeFamily xmlns:thm15="http://schemas.microsoft.com/office/thememl/2012/main" name="Office Theme" id="{62F939B6-93AF-4DB8-9C6B-D6C7DFDC589F}" vid="{4A3C46E8-61CC-4603-A589-7422A47A8E4A}"/>
     </a:ext>
   </a:extLst>
 </a:theme>
@@ -17120,7 +15690,7 @@
     </a:clrScheme>
     <a:fontScheme name="Office">
       <a:majorFont>
-        <a:latin typeface="等线 Light" panose="020F0302020204030204"/>
+        <a:latin typeface="等线 Light"/>
         <a:ea typeface=""/>
         <a:cs typeface=""/>
         <a:font script="Jpan" typeface="游ゴシック Light"/>
@@ -17153,26 +15723,9 @@
         <a:font script="Viet" typeface="Times New Roman"/>
         <a:font script="Uigh" typeface="Microsoft Uighur"/>
         <a:font script="Geor" typeface="Sylfaen"/>
-        <a:font script="Armn" typeface="Arial"/>
-        <a:font script="Bugi" typeface="Leelawadee UI"/>
-        <a:font script="Bopo" typeface="Microsoft JhengHei"/>
-        <a:font script="Java" typeface="Javanese Text"/>
-        <a:font script="Lisu" typeface="Segoe UI"/>
-        <a:font script="Mymr" typeface="Myanmar Text"/>
-        <a:font script="Nkoo" typeface="Ebrima"/>
-        <a:font script="Olck" typeface="Nirmala UI"/>
-        <a:font script="Osma" typeface="Ebrima"/>
-        <a:font script="Phag" typeface="Phagspa"/>
-        <a:font script="Syrn" typeface="Estrangelo Edessa"/>
-        <a:font script="Syrj" typeface="Estrangelo Edessa"/>
-        <a:font script="Syre" typeface="Estrangelo Edessa"/>
-        <a:font script="Sora" typeface="Nirmala UI"/>
-        <a:font script="Tale" typeface="Microsoft Tai Le"/>
-        <a:font script="Talu" typeface="Microsoft New Tai Lue"/>
-        <a:font script="Tfng" typeface="Ebrima"/>
       </a:majorFont>
       <a:minorFont>
-        <a:latin typeface="等线" panose="020F0502020204030204"/>
+        <a:latin typeface="等线"/>
         <a:ea typeface=""/>
         <a:cs typeface=""/>
         <a:font script="Jpan" typeface="游ゴシック"/>
@@ -17205,23 +15758,6 @@
         <a:font script="Viet" typeface="Arial"/>
         <a:font script="Uigh" typeface="Microsoft Uighur"/>
         <a:font script="Geor" typeface="Sylfaen"/>
-        <a:font script="Armn" typeface="Arial"/>
-        <a:font script="Bugi" typeface="Leelawadee UI"/>
-        <a:font script="Bopo" typeface="Microsoft JhengHei"/>
-        <a:font script="Java" typeface="Javanese Text"/>
-        <a:font script="Lisu" typeface="Segoe UI"/>
-        <a:font script="Mymr" typeface="Myanmar Text"/>
-        <a:font script="Nkoo" typeface="Ebrima"/>
-        <a:font script="Olck" typeface="Nirmala UI"/>
-        <a:font script="Osma" typeface="Ebrima"/>
-        <a:font script="Phag" typeface="Phagspa"/>
-        <a:font script="Syrn" typeface="Estrangelo Edessa"/>
-        <a:font script="Syrj" typeface="Estrangelo Edessa"/>
-        <a:font script="Syre" typeface="Estrangelo Edessa"/>
-        <a:font script="Sora" typeface="Nirmala UI"/>
-        <a:font script="Tale" typeface="Microsoft Tai Le"/>
-        <a:font script="Talu" typeface="Microsoft New Tai Lue"/>
-        <a:font script="Tfng" typeface="Ebrima"/>
       </a:minorFont>
     </a:fontScheme>
     <a:fmtScheme name="Office">
@@ -17362,8 +15898,6 @@
       </a:bgFillStyleLst>
     </a:fmtScheme>
   </a:themeElements>
-  <a:objectDefaults/>
-  <a:extraClrSchemeLst/>
   <a:extLst>
     <a:ext uri="{05A4C25C-085E-4340-85A3-A5531E510DB2}">
       <thm15:themeFamily xmlns:thm15="http://schemas.microsoft.com/office/thememl/2012/main" name="Office Theme" id="{62F939B6-93AF-4DB8-9C6B-D6C7DFDC589F}" vid="{4A3C46E8-61CC-4603-A589-7422A47A8E4A}"/>

--- a/pptx_old/SLMamba.pptx
+++ b/pptx_old/SLMamba.pptx
@@ -3099,7 +3099,7 @@
         <a:spcBef>
           <a:spcPts val="1310"/>
         </a:spcBef>
-        <a:buFont typeface="Arial" panose="020B0604020202090204" pitchFamily="34" charset="0"/>
+        <a:buFont typeface="Arial" panose="020B0604020202020204" pitchFamily="34" charset="0"/>
         <a:buChar char="•"/>
         <a:defRPr sz="3675" kern="1200">
           <a:solidFill>
@@ -3117,7 +3117,7 @@
         <a:spcBef>
           <a:spcPts val="655"/>
         </a:spcBef>
-        <a:buFont typeface="Arial" panose="020B0604020202090204" pitchFamily="34" charset="0"/>
+        <a:buFont typeface="Arial" panose="020B0604020202020204" pitchFamily="34" charset="0"/>
         <a:buChar char="•"/>
         <a:defRPr sz="3150" kern="1200">
           <a:solidFill>
@@ -3135,7 +3135,7 @@
         <a:spcBef>
           <a:spcPts val="655"/>
         </a:spcBef>
-        <a:buFont typeface="Arial" panose="020B0604020202090204" pitchFamily="34" charset="0"/>
+        <a:buFont typeface="Arial" panose="020B0604020202020204" pitchFamily="34" charset="0"/>
         <a:buChar char="•"/>
         <a:defRPr sz="2625" kern="1200">
           <a:solidFill>
@@ -3153,7 +3153,7 @@
         <a:spcBef>
           <a:spcPts val="655"/>
         </a:spcBef>
-        <a:buFont typeface="Arial" panose="020B0604020202090204" pitchFamily="34" charset="0"/>
+        <a:buFont typeface="Arial" panose="020B0604020202020204" pitchFamily="34" charset="0"/>
         <a:buChar char="•"/>
         <a:defRPr sz="2360" kern="1200">
           <a:solidFill>
@@ -3171,7 +3171,7 @@
         <a:spcBef>
           <a:spcPts val="655"/>
         </a:spcBef>
-        <a:buFont typeface="Arial" panose="020B0604020202090204" pitchFamily="34" charset="0"/>
+        <a:buFont typeface="Arial" panose="020B0604020202020204" pitchFamily="34" charset="0"/>
         <a:buChar char="•"/>
         <a:defRPr sz="2360" kern="1200">
           <a:solidFill>
@@ -3189,7 +3189,7 @@
         <a:spcBef>
           <a:spcPts val="655"/>
         </a:spcBef>
-        <a:buFont typeface="Arial" panose="020B0604020202090204" pitchFamily="34" charset="0"/>
+        <a:buFont typeface="Arial" panose="020B0604020202020204" pitchFamily="34" charset="0"/>
         <a:buChar char="•"/>
         <a:defRPr sz="2360" kern="1200">
           <a:solidFill>
@@ -3207,7 +3207,7 @@
         <a:spcBef>
           <a:spcPts val="655"/>
         </a:spcBef>
-        <a:buFont typeface="Arial" panose="020B0604020202090204" pitchFamily="34" charset="0"/>
+        <a:buFont typeface="Arial" panose="020B0604020202020204" pitchFamily="34" charset="0"/>
         <a:buChar char="•"/>
         <a:defRPr sz="2360" kern="1200">
           <a:solidFill>
@@ -3225,7 +3225,7 @@
         <a:spcBef>
           <a:spcPts val="655"/>
         </a:spcBef>
-        <a:buFont typeface="Arial" panose="020B0604020202090204" pitchFamily="34" charset="0"/>
+        <a:buFont typeface="Arial" panose="020B0604020202020204" pitchFamily="34" charset="0"/>
         <a:buChar char="•"/>
         <a:defRPr sz="2360" kern="1200">
           <a:solidFill>
@@ -3243,7 +3243,7 @@
         <a:spcBef>
           <a:spcPts val="655"/>
         </a:spcBef>
-        <a:buFont typeface="Arial" panose="020B0604020202090204" pitchFamily="34" charset="0"/>
+        <a:buFont typeface="Arial" panose="020B0604020202020204" pitchFamily="34" charset="0"/>
         <a:buChar char="•"/>
         <a:defRPr sz="2360" kern="1200">
           <a:solidFill>
@@ -4083,8 +4083,8 @@
                 <a:solidFill>
                   <a:schemeClr val="tx1"/>
                 </a:solidFill>
-                <a:latin typeface="Times New Roman" panose="02020503050405090304" pitchFamily="18" charset="0"/>
-                <a:cs typeface="Times New Roman" panose="02020503050405090304" pitchFamily="18" charset="0"/>
+                <a:latin typeface="Times New Roman" panose="02020603050405020304" pitchFamily="18" charset="0"/>
+                <a:cs typeface="Times New Roman" panose="02020603050405020304" pitchFamily="18" charset="0"/>
               </a:rPr>
               <a:t>SC</a:t>
             </a:r>
@@ -4092,8 +4092,8 @@
               <a:solidFill>
                 <a:schemeClr val="tx1"/>
               </a:solidFill>
-              <a:latin typeface="Times New Roman" panose="02020503050405090304" pitchFamily="18" charset="0"/>
-              <a:cs typeface="Times New Roman" panose="02020503050405090304" pitchFamily="18" charset="0"/>
+              <a:latin typeface="Times New Roman" panose="02020603050405020304" pitchFamily="18" charset="0"/>
+              <a:cs typeface="Times New Roman" panose="02020603050405020304" pitchFamily="18" charset="0"/>
             </a:endParaRPr>
           </a:p>
         </p:txBody>
@@ -4150,8 +4150,8 @@
                 <a:solidFill>
                   <a:schemeClr val="tx1"/>
                 </a:solidFill>
-                <a:latin typeface="Times New Roman" panose="02020503050405090304" pitchFamily="18" charset="0"/>
-                <a:cs typeface="Times New Roman" panose="02020503050405090304" pitchFamily="18" charset="0"/>
+                <a:latin typeface="Times New Roman" panose="02020603050405020304" pitchFamily="18" charset="0"/>
+                <a:cs typeface="Times New Roman" panose="02020603050405020304" pitchFamily="18" charset="0"/>
               </a:rPr>
               <a:t>Conv 3x3 </a:t>
             </a:r>
@@ -4159,8 +4159,8 @@
               <a:solidFill>
                 <a:schemeClr val="tx1"/>
               </a:solidFill>
-              <a:latin typeface="Times New Roman" panose="02020503050405090304" pitchFamily="18" charset="0"/>
-              <a:cs typeface="Times New Roman" panose="02020503050405090304" pitchFamily="18" charset="0"/>
+              <a:latin typeface="Times New Roman" panose="02020603050405020304" pitchFamily="18" charset="0"/>
+              <a:cs typeface="Times New Roman" panose="02020603050405020304" pitchFamily="18" charset="0"/>
             </a:endParaRPr>
           </a:p>
         </p:txBody>
@@ -4217,8 +4217,8 @@
                 <a:solidFill>
                   <a:schemeClr val="tx1"/>
                 </a:solidFill>
-                <a:latin typeface="Times New Roman" panose="02020503050405090304" pitchFamily="18" charset="0"/>
-                <a:cs typeface="Times New Roman" panose="02020503050405090304" pitchFamily="18" charset="0"/>
+                <a:latin typeface="Times New Roman" panose="02020603050405020304" pitchFamily="18" charset="0"/>
+                <a:cs typeface="Times New Roman" panose="02020603050405020304" pitchFamily="18" charset="0"/>
               </a:rPr>
               <a:t>SC</a:t>
             </a:r>
@@ -4226,8 +4226,8 @@
               <a:solidFill>
                 <a:schemeClr val="tx1"/>
               </a:solidFill>
-              <a:latin typeface="Times New Roman" panose="02020503050405090304" pitchFamily="18" charset="0"/>
-              <a:cs typeface="Times New Roman" panose="02020503050405090304" pitchFamily="18" charset="0"/>
+              <a:latin typeface="Times New Roman" panose="02020603050405020304" pitchFamily="18" charset="0"/>
+              <a:cs typeface="Times New Roman" panose="02020603050405020304" pitchFamily="18" charset="0"/>
             </a:endParaRPr>
           </a:p>
         </p:txBody>
@@ -4332,8 +4332,8 @@
                 <a:solidFill>
                   <a:schemeClr val="tx1"/>
                 </a:solidFill>
-                <a:latin typeface="Times New Roman" panose="02020503050405090304" pitchFamily="18" charset="0"/>
-                <a:cs typeface="Times New Roman" panose="02020503050405090304" pitchFamily="18" charset="0"/>
+                <a:latin typeface="Times New Roman" panose="02020603050405020304" pitchFamily="18" charset="0"/>
+                <a:cs typeface="Times New Roman" panose="02020603050405020304" pitchFamily="18" charset="0"/>
               </a:rPr>
               <a:t>BN</a:t>
             </a:r>
@@ -4341,8 +4341,8 @@
               <a:solidFill>
                 <a:schemeClr val="tx1"/>
               </a:solidFill>
-              <a:latin typeface="Times New Roman" panose="02020503050405090304" pitchFamily="18" charset="0"/>
-              <a:cs typeface="Times New Roman" panose="02020503050405090304" pitchFamily="18" charset="0"/>
+              <a:latin typeface="Times New Roman" panose="02020603050405020304" pitchFamily="18" charset="0"/>
+              <a:cs typeface="Times New Roman" panose="02020603050405020304" pitchFamily="18" charset="0"/>
             </a:endParaRPr>
           </a:p>
         </p:txBody>
@@ -4399,8 +4399,8 @@
                 <a:solidFill>
                   <a:schemeClr val="tx1"/>
                 </a:solidFill>
-                <a:latin typeface="Times New Roman" panose="02020503050405090304" pitchFamily="18" charset="0"/>
-                <a:cs typeface="Times New Roman" panose="02020503050405090304" pitchFamily="18" charset="0"/>
+                <a:latin typeface="Times New Roman" panose="02020603050405020304" pitchFamily="18" charset="0"/>
+                <a:cs typeface="Times New Roman" panose="02020603050405020304" pitchFamily="18" charset="0"/>
               </a:rPr>
               <a:t>BN</a:t>
             </a:r>
@@ -4408,8 +4408,8 @@
               <a:solidFill>
                 <a:schemeClr val="tx1"/>
               </a:solidFill>
-              <a:latin typeface="Times New Roman" panose="02020503050405090304" pitchFamily="18" charset="0"/>
-              <a:cs typeface="Times New Roman" panose="02020503050405090304" pitchFamily="18" charset="0"/>
+              <a:latin typeface="Times New Roman" panose="02020603050405020304" pitchFamily="18" charset="0"/>
+              <a:cs typeface="Times New Roman" panose="02020603050405020304" pitchFamily="18" charset="0"/>
             </a:endParaRPr>
           </a:p>
         </p:txBody>
@@ -4466,8 +4466,8 @@
                 <a:solidFill>
                   <a:schemeClr val="tx1"/>
                 </a:solidFill>
-                <a:latin typeface="Times New Roman" panose="02020503050405090304" pitchFamily="18" charset="0"/>
-                <a:cs typeface="Times New Roman" panose="02020503050405090304" pitchFamily="18" charset="0"/>
+                <a:latin typeface="Times New Roman" panose="02020603050405020304" pitchFamily="18" charset="0"/>
+                <a:cs typeface="Times New Roman" panose="02020603050405020304" pitchFamily="18" charset="0"/>
               </a:rPr>
               <a:t>Sigmoid </a:t>
             </a:r>
@@ -4475,8 +4475,8 @@
               <a:solidFill>
                 <a:schemeClr val="tx1"/>
               </a:solidFill>
-              <a:latin typeface="Times New Roman" panose="02020503050405090304" pitchFamily="18" charset="0"/>
-              <a:cs typeface="Times New Roman" panose="02020503050405090304" pitchFamily="18" charset="0"/>
+              <a:latin typeface="Times New Roman" panose="02020603050405020304" pitchFamily="18" charset="0"/>
+              <a:cs typeface="Times New Roman" panose="02020603050405020304" pitchFamily="18" charset="0"/>
             </a:endParaRPr>
           </a:p>
         </p:txBody>
@@ -4769,8 +4769,8 @@
                 <a:solidFill>
                   <a:schemeClr val="tx1"/>
                 </a:solidFill>
-                <a:latin typeface="Times New Roman" panose="02020503050405090304" pitchFamily="18" charset="0"/>
-                <a:cs typeface="Times New Roman" panose="02020503050405090304" pitchFamily="18" charset="0"/>
+                <a:latin typeface="Times New Roman" panose="02020603050405020304" pitchFamily="18" charset="0"/>
+                <a:cs typeface="Times New Roman" panose="02020603050405020304" pitchFamily="18" charset="0"/>
               </a:rPr>
               <a:t>Conv 3x3 </a:t>
             </a:r>
@@ -4778,8 +4778,8 @@
               <a:solidFill>
                 <a:schemeClr val="tx1"/>
               </a:solidFill>
-              <a:latin typeface="Times New Roman" panose="02020503050405090304" pitchFamily="18" charset="0"/>
-              <a:cs typeface="Times New Roman" panose="02020503050405090304" pitchFamily="18" charset="0"/>
+              <a:latin typeface="Times New Roman" panose="02020603050405020304" pitchFamily="18" charset="0"/>
+              <a:cs typeface="Times New Roman" panose="02020603050405020304" pitchFamily="18" charset="0"/>
             </a:endParaRPr>
           </a:p>
         </p:txBody>
@@ -4809,21 +4809,21 @@
             <a:pPr algn="ctr"/>
             <a:r>
               <a:rPr lang="en-US" altLang="zh-CN" sz="2065" dirty="0">
-                <a:latin typeface="Times New Roman" panose="02020503050405090304" pitchFamily="18" charset="0"/>
-                <a:cs typeface="Times New Roman" panose="02020503050405090304" pitchFamily="18" charset="0"/>
+                <a:latin typeface="Times New Roman" panose="02020603050405020304" pitchFamily="18" charset="0"/>
+                <a:cs typeface="Times New Roman" panose="02020603050405020304" pitchFamily="18" charset="0"/>
               </a:rPr>
               <a:t>(c) </a:t>
             </a:r>
             <a:r>
               <a:rPr lang="en-US" altLang="zh-CN" sz="2065" b="1" dirty="0">
-                <a:latin typeface="Times New Roman" panose="02020503050405090304" pitchFamily="18" charset="0"/>
-                <a:cs typeface="Times New Roman" panose="02020503050405090304" pitchFamily="18" charset="0"/>
+                <a:latin typeface="Times New Roman" panose="02020603050405020304" pitchFamily="18" charset="0"/>
+                <a:cs typeface="Times New Roman" panose="02020603050405020304" pitchFamily="18" charset="0"/>
               </a:rPr>
               <a:t>SLGAG</a:t>
             </a:r>
             <a:endParaRPr lang="zh-CN" altLang="en-US" sz="2065" b="1" dirty="0">
-              <a:latin typeface="Times New Roman" panose="02020503050405090304" pitchFamily="18" charset="0"/>
-              <a:cs typeface="Times New Roman" panose="02020503050405090304" pitchFamily="18" charset="0"/>
+              <a:latin typeface="Times New Roman" panose="02020603050405020304" pitchFamily="18" charset="0"/>
+              <a:cs typeface="Times New Roman" panose="02020603050405020304" pitchFamily="18" charset="0"/>
             </a:endParaRPr>
           </a:p>
         </p:txBody>
@@ -4928,8 +4928,8 @@
                 <a:solidFill>
                   <a:schemeClr val="tx1"/>
                 </a:solidFill>
-                <a:latin typeface="Times New Roman" panose="02020503050405090304" pitchFamily="18" charset="0"/>
-                <a:cs typeface="Times New Roman" panose="02020503050405090304" pitchFamily="18" charset="0"/>
+                <a:latin typeface="Times New Roman" panose="02020603050405020304" pitchFamily="18" charset="0"/>
+                <a:cs typeface="Times New Roman" panose="02020603050405020304" pitchFamily="18" charset="0"/>
               </a:rPr>
               <a:t>AMP </a:t>
             </a:r>
@@ -4937,8 +4937,8 @@
               <a:solidFill>
                 <a:schemeClr val="tx1"/>
               </a:solidFill>
-              <a:latin typeface="Times New Roman" panose="02020503050405090304" pitchFamily="18" charset="0"/>
-              <a:cs typeface="Times New Roman" panose="02020503050405090304" pitchFamily="18" charset="0"/>
+              <a:latin typeface="Times New Roman" panose="02020603050405020304" pitchFamily="18" charset="0"/>
+              <a:cs typeface="Times New Roman" panose="02020603050405020304" pitchFamily="18" charset="0"/>
             </a:endParaRPr>
           </a:p>
         </p:txBody>
@@ -4995,8 +4995,8 @@
                 <a:solidFill>
                   <a:schemeClr val="tx1"/>
                 </a:solidFill>
-                <a:latin typeface="Times New Roman" panose="02020503050405090304" pitchFamily="18" charset="0"/>
-                <a:cs typeface="Times New Roman" panose="02020503050405090304" pitchFamily="18" charset="0"/>
+                <a:latin typeface="Times New Roman" panose="02020603050405020304" pitchFamily="18" charset="0"/>
+                <a:cs typeface="Times New Roman" panose="02020603050405020304" pitchFamily="18" charset="0"/>
               </a:rPr>
               <a:t>PWC C/r </a:t>
             </a:r>
@@ -5004,8 +5004,8 @@
               <a:solidFill>
                 <a:schemeClr val="tx1"/>
               </a:solidFill>
-              <a:latin typeface="Times New Roman" panose="02020503050405090304" pitchFamily="18" charset="0"/>
-              <a:cs typeface="Times New Roman" panose="02020503050405090304" pitchFamily="18" charset="0"/>
+              <a:latin typeface="Times New Roman" panose="02020603050405020304" pitchFamily="18" charset="0"/>
+              <a:cs typeface="Times New Roman" panose="02020603050405020304" pitchFamily="18" charset="0"/>
             </a:endParaRPr>
           </a:p>
         </p:txBody>
@@ -5062,8 +5062,8 @@
                 <a:solidFill>
                   <a:schemeClr val="tx1"/>
                 </a:solidFill>
-                <a:latin typeface="Times New Roman" panose="02020503050405090304" pitchFamily="18" charset="0"/>
-                <a:cs typeface="Times New Roman" panose="02020503050405090304" pitchFamily="18" charset="0"/>
+                <a:latin typeface="Times New Roman" panose="02020603050405020304" pitchFamily="18" charset="0"/>
+                <a:cs typeface="Times New Roman" panose="02020603050405020304" pitchFamily="18" charset="0"/>
               </a:rPr>
               <a:t>ReLU </a:t>
             </a:r>
@@ -5071,8 +5071,8 @@
               <a:solidFill>
                 <a:schemeClr val="tx1"/>
               </a:solidFill>
-              <a:latin typeface="Times New Roman" panose="02020503050405090304" pitchFamily="18" charset="0"/>
-              <a:cs typeface="Times New Roman" panose="02020503050405090304" pitchFamily="18" charset="0"/>
+              <a:latin typeface="Times New Roman" panose="02020603050405020304" pitchFamily="18" charset="0"/>
+              <a:cs typeface="Times New Roman" panose="02020603050405020304" pitchFamily="18" charset="0"/>
             </a:endParaRPr>
           </a:p>
         </p:txBody>
@@ -5129,8 +5129,8 @@
                 <a:solidFill>
                   <a:schemeClr val="tx1"/>
                 </a:solidFill>
-                <a:latin typeface="Times New Roman" panose="02020503050405090304" pitchFamily="18" charset="0"/>
-                <a:cs typeface="Times New Roman" panose="02020503050405090304" pitchFamily="18" charset="0"/>
+                <a:latin typeface="Times New Roman" panose="02020603050405020304" pitchFamily="18" charset="0"/>
+                <a:cs typeface="Times New Roman" panose="02020603050405020304" pitchFamily="18" charset="0"/>
               </a:rPr>
               <a:t>PWC C </a:t>
             </a:r>
@@ -5138,8 +5138,8 @@
               <a:solidFill>
                 <a:schemeClr val="tx1"/>
               </a:solidFill>
-              <a:latin typeface="Times New Roman" panose="02020503050405090304" pitchFamily="18" charset="0"/>
-              <a:cs typeface="Times New Roman" panose="02020503050405090304" pitchFamily="18" charset="0"/>
+              <a:latin typeface="Times New Roman" panose="02020603050405020304" pitchFamily="18" charset="0"/>
+              <a:cs typeface="Times New Roman" panose="02020603050405020304" pitchFamily="18" charset="0"/>
             </a:endParaRPr>
           </a:p>
         </p:txBody>
@@ -5196,8 +5196,8 @@
                 <a:solidFill>
                   <a:schemeClr val="tx1"/>
                 </a:solidFill>
-                <a:latin typeface="Times New Roman" panose="02020503050405090304" pitchFamily="18" charset="0"/>
-                <a:cs typeface="Times New Roman" panose="02020503050405090304" pitchFamily="18" charset="0"/>
+                <a:latin typeface="Times New Roman" panose="02020603050405020304" pitchFamily="18" charset="0"/>
+                <a:cs typeface="Times New Roman" panose="02020603050405020304" pitchFamily="18" charset="0"/>
               </a:rPr>
               <a:t>AAP </a:t>
             </a:r>
@@ -5205,8 +5205,8 @@
               <a:solidFill>
                 <a:schemeClr val="tx1"/>
               </a:solidFill>
-              <a:latin typeface="Times New Roman" panose="02020503050405090304" pitchFamily="18" charset="0"/>
-              <a:cs typeface="Times New Roman" panose="02020503050405090304" pitchFamily="18" charset="0"/>
+              <a:latin typeface="Times New Roman" panose="02020603050405020304" pitchFamily="18" charset="0"/>
+              <a:cs typeface="Times New Roman" panose="02020603050405020304" pitchFamily="18" charset="0"/>
             </a:endParaRPr>
           </a:p>
         </p:txBody>
@@ -5263,8 +5263,8 @@
                 <a:solidFill>
                   <a:schemeClr val="tx1"/>
                 </a:solidFill>
-                <a:latin typeface="Times New Roman" panose="02020503050405090304" pitchFamily="18" charset="0"/>
-                <a:cs typeface="Times New Roman" panose="02020503050405090304" pitchFamily="18" charset="0"/>
+                <a:latin typeface="Times New Roman" panose="02020603050405020304" pitchFamily="18" charset="0"/>
+                <a:cs typeface="Times New Roman" panose="02020603050405020304" pitchFamily="18" charset="0"/>
               </a:rPr>
               <a:t>PWC C/r </a:t>
             </a:r>
@@ -5272,8 +5272,8 @@
               <a:solidFill>
                 <a:schemeClr val="tx1"/>
               </a:solidFill>
-              <a:latin typeface="Times New Roman" panose="02020503050405090304" pitchFamily="18" charset="0"/>
-              <a:cs typeface="Times New Roman" panose="02020503050405090304" pitchFamily="18" charset="0"/>
+              <a:latin typeface="Times New Roman" panose="02020603050405020304" pitchFamily="18" charset="0"/>
+              <a:cs typeface="Times New Roman" panose="02020603050405020304" pitchFamily="18" charset="0"/>
             </a:endParaRPr>
           </a:p>
         </p:txBody>
@@ -5330,8 +5330,8 @@
                 <a:solidFill>
                   <a:schemeClr val="tx1"/>
                 </a:solidFill>
-                <a:latin typeface="Times New Roman" panose="02020503050405090304" pitchFamily="18" charset="0"/>
-                <a:cs typeface="Times New Roman" panose="02020503050405090304" pitchFamily="18" charset="0"/>
+                <a:latin typeface="Times New Roman" panose="02020603050405020304" pitchFamily="18" charset="0"/>
+                <a:cs typeface="Times New Roman" panose="02020603050405020304" pitchFamily="18" charset="0"/>
               </a:rPr>
               <a:t>ReLU </a:t>
             </a:r>
@@ -5339,8 +5339,8 @@
               <a:solidFill>
                 <a:schemeClr val="tx1"/>
               </a:solidFill>
-              <a:latin typeface="Times New Roman" panose="02020503050405090304" pitchFamily="18" charset="0"/>
-              <a:cs typeface="Times New Roman" panose="02020503050405090304" pitchFamily="18" charset="0"/>
+              <a:latin typeface="Times New Roman" panose="02020603050405020304" pitchFamily="18" charset="0"/>
+              <a:cs typeface="Times New Roman" panose="02020603050405020304" pitchFamily="18" charset="0"/>
             </a:endParaRPr>
           </a:p>
         </p:txBody>
@@ -5397,8 +5397,8 @@
                 <a:solidFill>
                   <a:schemeClr val="tx1"/>
                 </a:solidFill>
-                <a:latin typeface="Times New Roman" panose="02020503050405090304" pitchFamily="18" charset="0"/>
-                <a:cs typeface="Times New Roman" panose="02020503050405090304" pitchFamily="18" charset="0"/>
+                <a:latin typeface="Times New Roman" panose="02020603050405020304" pitchFamily="18" charset="0"/>
+                <a:cs typeface="Times New Roman" panose="02020603050405020304" pitchFamily="18" charset="0"/>
               </a:rPr>
               <a:t>PWC C </a:t>
             </a:r>
@@ -5406,8 +5406,8 @@
               <a:solidFill>
                 <a:schemeClr val="tx1"/>
               </a:solidFill>
-              <a:latin typeface="Times New Roman" panose="02020503050405090304" pitchFamily="18" charset="0"/>
-              <a:cs typeface="Times New Roman" panose="02020503050405090304" pitchFamily="18" charset="0"/>
+              <a:latin typeface="Times New Roman" panose="02020603050405020304" pitchFamily="18" charset="0"/>
+              <a:cs typeface="Times New Roman" panose="02020603050405020304" pitchFamily="18" charset="0"/>
             </a:endParaRPr>
           </a:p>
         </p:txBody>
@@ -5464,8 +5464,8 @@
                 <a:solidFill>
                   <a:schemeClr val="tx1"/>
                 </a:solidFill>
-                <a:latin typeface="Times New Roman" panose="02020503050405090304" pitchFamily="18" charset="0"/>
-                <a:cs typeface="Times New Roman" panose="02020503050405090304" pitchFamily="18" charset="0"/>
+                <a:latin typeface="Times New Roman" panose="02020603050405020304" pitchFamily="18" charset="0"/>
+                <a:cs typeface="Times New Roman" panose="02020603050405020304" pitchFamily="18" charset="0"/>
               </a:rPr>
               <a:t>Sigmoid </a:t>
             </a:r>
@@ -5473,8 +5473,8 @@
               <a:solidFill>
                 <a:schemeClr val="tx1"/>
               </a:solidFill>
-              <a:latin typeface="Times New Roman" panose="02020503050405090304" pitchFamily="18" charset="0"/>
-              <a:cs typeface="Times New Roman" panose="02020503050405090304" pitchFamily="18" charset="0"/>
+              <a:latin typeface="Times New Roman" panose="02020603050405020304" pitchFamily="18" charset="0"/>
+              <a:cs typeface="Times New Roman" panose="02020603050405020304" pitchFamily="18" charset="0"/>
             </a:endParaRPr>
           </a:p>
         </p:txBody>
@@ -5627,8 +5627,8 @@
                 <a:solidFill>
                   <a:schemeClr val="tx1"/>
                 </a:solidFill>
-                <a:latin typeface="Times New Roman" panose="02020503050405090304" pitchFamily="18" charset="0"/>
-                <a:cs typeface="Times New Roman" panose="02020503050405090304" pitchFamily="18" charset="0"/>
+                <a:latin typeface="Times New Roman" panose="02020603050405020304" pitchFamily="18" charset="0"/>
+                <a:cs typeface="Times New Roman" panose="02020603050405020304" pitchFamily="18" charset="0"/>
               </a:rPr>
               <a:t>BN </a:t>
             </a:r>
@@ -5636,8 +5636,8 @@
               <a:solidFill>
                 <a:schemeClr val="tx1"/>
               </a:solidFill>
-              <a:latin typeface="Times New Roman" panose="02020503050405090304" pitchFamily="18" charset="0"/>
-              <a:cs typeface="Times New Roman" panose="02020503050405090304" pitchFamily="18" charset="0"/>
+              <a:latin typeface="Times New Roman" panose="02020603050405020304" pitchFamily="18" charset="0"/>
+              <a:cs typeface="Times New Roman" panose="02020603050405020304" pitchFamily="18" charset="0"/>
             </a:endParaRPr>
           </a:p>
         </p:txBody>
@@ -5694,8 +5694,8 @@
                 <a:solidFill>
                   <a:schemeClr val="tx1"/>
                 </a:solidFill>
-                <a:latin typeface="Times New Roman" panose="02020503050405090304" pitchFamily="18" charset="0"/>
-                <a:cs typeface="Times New Roman" panose="02020503050405090304" pitchFamily="18" charset="0"/>
+                <a:latin typeface="Times New Roman" panose="02020603050405020304" pitchFamily="18" charset="0"/>
+                <a:cs typeface="Times New Roman" panose="02020603050405020304" pitchFamily="18" charset="0"/>
               </a:rPr>
               <a:t>Conv 1x1 </a:t>
             </a:r>
@@ -5703,8 +5703,8 @@
               <a:solidFill>
                 <a:schemeClr val="tx1"/>
               </a:solidFill>
-              <a:latin typeface="Times New Roman" panose="02020503050405090304" pitchFamily="18" charset="0"/>
-              <a:cs typeface="Times New Roman" panose="02020503050405090304" pitchFamily="18" charset="0"/>
+              <a:latin typeface="Times New Roman" panose="02020603050405020304" pitchFamily="18" charset="0"/>
+              <a:cs typeface="Times New Roman" panose="02020603050405020304" pitchFamily="18" charset="0"/>
             </a:endParaRPr>
           </a:p>
         </p:txBody>
@@ -5761,8 +5761,8 @@
                 <a:solidFill>
                   <a:schemeClr val="tx1"/>
                 </a:solidFill>
-                <a:latin typeface="Times New Roman" panose="02020503050405090304" pitchFamily="18" charset="0"/>
-                <a:cs typeface="Times New Roman" panose="02020503050405090304" pitchFamily="18" charset="0"/>
+                <a:latin typeface="Times New Roman" panose="02020603050405020304" pitchFamily="18" charset="0"/>
+                <a:cs typeface="Times New Roman" panose="02020603050405020304" pitchFamily="18" charset="0"/>
               </a:rPr>
               <a:t>ReLU </a:t>
             </a:r>
@@ -5770,8 +5770,8 @@
               <a:solidFill>
                 <a:schemeClr val="tx1"/>
               </a:solidFill>
-              <a:latin typeface="Times New Roman" panose="02020503050405090304" pitchFamily="18" charset="0"/>
-              <a:cs typeface="Times New Roman" panose="02020503050405090304" pitchFamily="18" charset="0"/>
+              <a:latin typeface="Times New Roman" panose="02020603050405020304" pitchFamily="18" charset="0"/>
+              <a:cs typeface="Times New Roman" panose="02020603050405020304" pitchFamily="18" charset="0"/>
             </a:endParaRPr>
           </a:p>
         </p:txBody>
@@ -5836,21 +5836,21 @@
             <a:pPr algn="ctr"/>
             <a:r>
               <a:rPr lang="en-US" altLang="zh-CN" sz="1655" dirty="0">
-                <a:latin typeface="Times New Roman" panose="02020503050405090304" pitchFamily="18" charset="0"/>
-                <a:cs typeface="Times New Roman" panose="02020503050405090304" pitchFamily="18" charset="0"/>
+                <a:latin typeface="Times New Roman" panose="02020603050405020304" pitchFamily="18" charset="0"/>
+                <a:cs typeface="Times New Roman" panose="02020603050405020304" pitchFamily="18" charset="0"/>
               </a:rPr>
               <a:t>(f) </a:t>
             </a:r>
             <a:r>
               <a:rPr lang="en-US" altLang="zh-CN" sz="1655" b="1" dirty="0">
-                <a:latin typeface="Times New Roman" panose="02020503050405090304" pitchFamily="18" charset="0"/>
-                <a:cs typeface="Times New Roman" panose="02020503050405090304" pitchFamily="18" charset="0"/>
+                <a:latin typeface="Times New Roman" panose="02020603050405020304" pitchFamily="18" charset="0"/>
+                <a:cs typeface="Times New Roman" panose="02020603050405020304" pitchFamily="18" charset="0"/>
               </a:rPr>
               <a:t>CA</a:t>
             </a:r>
             <a:endParaRPr lang="zh-CN" altLang="en-US" sz="1655" b="1" dirty="0">
-              <a:latin typeface="Times New Roman" panose="02020503050405090304" pitchFamily="18" charset="0"/>
-              <a:cs typeface="Times New Roman" panose="02020503050405090304" pitchFamily="18" charset="0"/>
+              <a:latin typeface="Times New Roman" panose="02020603050405020304" pitchFamily="18" charset="0"/>
+              <a:cs typeface="Times New Roman" panose="02020603050405020304" pitchFamily="18" charset="0"/>
             </a:endParaRPr>
           </a:p>
         </p:txBody>
@@ -5907,8 +5907,8 @@
                 <a:solidFill>
                   <a:schemeClr val="tx1"/>
                 </a:solidFill>
-                <a:latin typeface="Times New Roman" panose="02020503050405090304" pitchFamily="18" charset="0"/>
-                <a:cs typeface="Times New Roman" panose="02020503050405090304" pitchFamily="18" charset="0"/>
+                <a:latin typeface="Times New Roman" panose="02020603050405020304" pitchFamily="18" charset="0"/>
+                <a:cs typeface="Times New Roman" panose="02020603050405020304" pitchFamily="18" charset="0"/>
               </a:rPr>
               <a:t>Channel Max</a:t>
             </a:r>
@@ -5916,8 +5916,8 @@
               <a:solidFill>
                 <a:schemeClr val="tx1"/>
               </a:solidFill>
-              <a:latin typeface="Times New Roman" panose="02020503050405090304" pitchFamily="18" charset="0"/>
-              <a:cs typeface="Times New Roman" panose="02020503050405090304" pitchFamily="18" charset="0"/>
+              <a:latin typeface="Times New Roman" panose="02020603050405020304" pitchFamily="18" charset="0"/>
+              <a:cs typeface="Times New Roman" panose="02020603050405020304" pitchFamily="18" charset="0"/>
             </a:endParaRPr>
           </a:p>
         </p:txBody>
@@ -5974,8 +5974,8 @@
                 <a:solidFill>
                   <a:schemeClr val="tx1"/>
                 </a:solidFill>
-                <a:latin typeface="Times New Roman" panose="02020503050405090304" pitchFamily="18" charset="0"/>
-                <a:cs typeface="Times New Roman" panose="02020503050405090304" pitchFamily="18" charset="0"/>
+                <a:latin typeface="Times New Roman" panose="02020603050405020304" pitchFamily="18" charset="0"/>
+                <a:cs typeface="Times New Roman" panose="02020603050405020304" pitchFamily="18" charset="0"/>
               </a:rPr>
               <a:t>Channel Average</a:t>
             </a:r>
@@ -5983,8 +5983,8 @@
               <a:solidFill>
                 <a:schemeClr val="tx1"/>
               </a:solidFill>
-              <a:latin typeface="Times New Roman" panose="02020503050405090304" pitchFamily="18" charset="0"/>
-              <a:cs typeface="Times New Roman" panose="02020503050405090304" pitchFamily="18" charset="0"/>
+              <a:latin typeface="Times New Roman" panose="02020603050405020304" pitchFamily="18" charset="0"/>
+              <a:cs typeface="Times New Roman" panose="02020603050405020304" pitchFamily="18" charset="0"/>
             </a:endParaRPr>
           </a:p>
         </p:txBody>
@@ -6041,8 +6041,8 @@
                 <a:solidFill>
                   <a:schemeClr val="tx1"/>
                 </a:solidFill>
-                <a:latin typeface="Times New Roman" panose="02020503050405090304" pitchFamily="18" charset="0"/>
-                <a:cs typeface="Times New Roman" panose="02020503050405090304" pitchFamily="18" charset="0"/>
+                <a:latin typeface="Times New Roman" panose="02020603050405020304" pitchFamily="18" charset="0"/>
+                <a:cs typeface="Times New Roman" panose="02020603050405020304" pitchFamily="18" charset="0"/>
               </a:rPr>
               <a:t>LKC 7x7 Pad:3 </a:t>
             </a:r>
@@ -6050,8 +6050,8 @@
               <a:solidFill>
                 <a:schemeClr val="tx1"/>
               </a:solidFill>
-              <a:latin typeface="Times New Roman" panose="02020503050405090304" pitchFamily="18" charset="0"/>
-              <a:cs typeface="Times New Roman" panose="02020503050405090304" pitchFamily="18" charset="0"/>
+              <a:latin typeface="Times New Roman" panose="02020603050405020304" pitchFamily="18" charset="0"/>
+              <a:cs typeface="Times New Roman" panose="02020603050405020304" pitchFamily="18" charset="0"/>
             </a:endParaRPr>
           </a:p>
         </p:txBody>
@@ -6168,8 +6168,8 @@
                 <a:solidFill>
                   <a:schemeClr val="tx1"/>
                 </a:solidFill>
-                <a:latin typeface="Times New Roman" panose="02020503050405090304" pitchFamily="18" charset="0"/>
-                <a:cs typeface="Times New Roman" panose="02020503050405090304" pitchFamily="18" charset="0"/>
+                <a:latin typeface="Times New Roman" panose="02020603050405020304" pitchFamily="18" charset="0"/>
+                <a:cs typeface="Times New Roman" panose="02020603050405020304" pitchFamily="18" charset="0"/>
               </a:rPr>
               <a:t>Sigmoid </a:t>
             </a:r>
@@ -6177,8 +6177,8 @@
               <a:solidFill>
                 <a:schemeClr val="tx1"/>
               </a:solidFill>
-              <a:latin typeface="Times New Roman" panose="02020503050405090304" pitchFamily="18" charset="0"/>
-              <a:cs typeface="Times New Roman" panose="02020503050405090304" pitchFamily="18" charset="0"/>
+              <a:latin typeface="Times New Roman" panose="02020603050405020304" pitchFamily="18" charset="0"/>
+              <a:cs typeface="Times New Roman" panose="02020603050405020304" pitchFamily="18" charset="0"/>
             </a:endParaRPr>
           </a:p>
         </p:txBody>
@@ -6376,21 +6376,21 @@
             <a:pPr algn="ctr"/>
             <a:r>
               <a:rPr lang="en-US" altLang="zh-CN" sz="1655" dirty="0">
-                <a:latin typeface="Times New Roman" panose="02020503050405090304" pitchFamily="18" charset="0"/>
-                <a:cs typeface="Times New Roman" panose="02020503050405090304" pitchFamily="18" charset="0"/>
+                <a:latin typeface="Times New Roman" panose="02020603050405020304" pitchFamily="18" charset="0"/>
+                <a:cs typeface="Times New Roman" panose="02020603050405020304" pitchFamily="18" charset="0"/>
               </a:rPr>
               <a:t>(g) </a:t>
             </a:r>
             <a:r>
               <a:rPr lang="en-US" altLang="zh-CN" sz="1655" b="1" dirty="0">
-                <a:latin typeface="Times New Roman" panose="02020503050405090304" pitchFamily="18" charset="0"/>
-                <a:cs typeface="Times New Roman" panose="02020503050405090304" pitchFamily="18" charset="0"/>
+                <a:latin typeface="Times New Roman" panose="02020603050405020304" pitchFamily="18" charset="0"/>
+                <a:cs typeface="Times New Roman" panose="02020603050405020304" pitchFamily="18" charset="0"/>
               </a:rPr>
               <a:t>SA</a:t>
             </a:r>
             <a:endParaRPr lang="zh-CN" altLang="en-US" sz="1655" b="1" dirty="0">
-              <a:latin typeface="Times New Roman" panose="02020503050405090304" pitchFamily="18" charset="0"/>
-              <a:cs typeface="Times New Roman" panose="02020503050405090304" pitchFamily="18" charset="0"/>
+              <a:latin typeface="Times New Roman" panose="02020603050405020304" pitchFamily="18" charset="0"/>
+              <a:cs typeface="Times New Roman" panose="02020603050405020304" pitchFamily="18" charset="0"/>
             </a:endParaRPr>
           </a:p>
         </p:txBody>
@@ -6447,8 +6447,8 @@
                 <a:solidFill>
                   <a:schemeClr val="tx1"/>
                 </a:solidFill>
-                <a:latin typeface="Times New Roman" panose="02020503050405090304" pitchFamily="18" charset="0"/>
-                <a:cs typeface="Times New Roman" panose="02020503050405090304" pitchFamily="18" charset="0"/>
+                <a:latin typeface="Times New Roman" panose="02020603050405020304" pitchFamily="18" charset="0"/>
+                <a:cs typeface="Times New Roman" panose="02020603050405020304" pitchFamily="18" charset="0"/>
               </a:rPr>
               <a:t>SC</a:t>
             </a:r>
@@ -6456,8 +6456,8 @@
               <a:solidFill>
                 <a:schemeClr val="tx1"/>
               </a:solidFill>
-              <a:latin typeface="Times New Roman" panose="02020503050405090304" pitchFamily="18" charset="0"/>
-              <a:cs typeface="Times New Roman" panose="02020503050405090304" pitchFamily="18" charset="0"/>
+              <a:latin typeface="Times New Roman" panose="02020603050405020304" pitchFamily="18" charset="0"/>
+              <a:cs typeface="Times New Roman" panose="02020603050405020304" pitchFamily="18" charset="0"/>
             </a:endParaRPr>
           </a:p>
         </p:txBody>
@@ -6514,8 +6514,8 @@
                 <a:solidFill>
                   <a:schemeClr val="tx1"/>
                 </a:solidFill>
-                <a:latin typeface="Times New Roman" panose="02020503050405090304" pitchFamily="18" charset="0"/>
-                <a:cs typeface="Times New Roman" panose="02020503050405090304" pitchFamily="18" charset="0"/>
+                <a:latin typeface="Times New Roman" panose="02020603050405020304" pitchFamily="18" charset="0"/>
+                <a:cs typeface="Times New Roman" panose="02020603050405020304" pitchFamily="18" charset="0"/>
               </a:rPr>
               <a:t>BN, ReLU6 </a:t>
             </a:r>
@@ -6523,8 +6523,8 @@
               <a:solidFill>
                 <a:schemeClr val="tx1"/>
               </a:solidFill>
-              <a:latin typeface="Times New Roman" panose="02020503050405090304" pitchFamily="18" charset="0"/>
-              <a:cs typeface="Times New Roman" panose="02020503050405090304" pitchFamily="18" charset="0"/>
+              <a:latin typeface="Times New Roman" panose="02020603050405020304" pitchFamily="18" charset="0"/>
+              <a:cs typeface="Times New Roman" panose="02020603050405020304" pitchFamily="18" charset="0"/>
             </a:endParaRPr>
           </a:p>
         </p:txBody>
@@ -6581,8 +6581,8 @@
                 <a:solidFill>
                   <a:schemeClr val="tx1"/>
                 </a:solidFill>
-                <a:latin typeface="Times New Roman" panose="02020503050405090304" pitchFamily="18" charset="0"/>
-                <a:cs typeface="Times New Roman" panose="02020503050405090304" pitchFamily="18" charset="0"/>
+                <a:latin typeface="Times New Roman" panose="02020603050405020304" pitchFamily="18" charset="0"/>
+                <a:cs typeface="Times New Roman" panose="02020603050405020304" pitchFamily="18" charset="0"/>
               </a:rPr>
               <a:t>DWC3x3</a:t>
             </a:r>
@@ -6590,8 +6590,8 @@
               <a:solidFill>
                 <a:schemeClr val="tx1"/>
               </a:solidFill>
-              <a:latin typeface="Times New Roman" panose="02020503050405090304" pitchFamily="18" charset="0"/>
-              <a:cs typeface="Times New Roman" panose="02020503050405090304" pitchFamily="18" charset="0"/>
+              <a:latin typeface="Times New Roman" panose="02020603050405020304" pitchFamily="18" charset="0"/>
+              <a:cs typeface="Times New Roman" panose="02020603050405020304" pitchFamily="18" charset="0"/>
             </a:endParaRPr>
           </a:p>
         </p:txBody>
@@ -6648,8 +6648,8 @@
                 <a:solidFill>
                   <a:schemeClr val="tx1"/>
                 </a:solidFill>
-                <a:latin typeface="Times New Roman" panose="02020503050405090304" pitchFamily="18" charset="0"/>
-                <a:cs typeface="Times New Roman" panose="02020503050405090304" pitchFamily="18" charset="0"/>
+                <a:latin typeface="Times New Roman" panose="02020603050405020304" pitchFamily="18" charset="0"/>
+                <a:cs typeface="Times New Roman" panose="02020603050405020304" pitchFamily="18" charset="0"/>
               </a:rPr>
               <a:t>BN, ReLU6 </a:t>
             </a:r>
@@ -6657,8 +6657,8 @@
               <a:solidFill>
                 <a:schemeClr val="tx1"/>
               </a:solidFill>
-              <a:latin typeface="Times New Roman" panose="02020503050405090304" pitchFamily="18" charset="0"/>
-              <a:cs typeface="Times New Roman" panose="02020503050405090304" pitchFamily="18" charset="0"/>
+              <a:latin typeface="Times New Roman" panose="02020603050405020304" pitchFamily="18" charset="0"/>
+              <a:cs typeface="Times New Roman" panose="02020603050405020304" pitchFamily="18" charset="0"/>
             </a:endParaRPr>
           </a:p>
         </p:txBody>
@@ -6715,8 +6715,8 @@
                 <a:solidFill>
                   <a:schemeClr val="tx1"/>
                 </a:solidFill>
-                <a:latin typeface="Times New Roman" panose="02020503050405090304" pitchFamily="18" charset="0"/>
-                <a:cs typeface="Times New Roman" panose="02020503050405090304" pitchFamily="18" charset="0"/>
+                <a:latin typeface="Times New Roman" panose="02020603050405020304" pitchFamily="18" charset="0"/>
+                <a:cs typeface="Times New Roman" panose="02020603050405020304" pitchFamily="18" charset="0"/>
               </a:rPr>
               <a:t>DWC5x5 </a:t>
             </a:r>
@@ -6724,8 +6724,8 @@
               <a:solidFill>
                 <a:schemeClr val="tx1"/>
               </a:solidFill>
-              <a:latin typeface="Times New Roman" panose="02020503050405090304" pitchFamily="18" charset="0"/>
-              <a:cs typeface="Times New Roman" panose="02020503050405090304" pitchFamily="18" charset="0"/>
+              <a:latin typeface="Times New Roman" panose="02020603050405020304" pitchFamily="18" charset="0"/>
+              <a:cs typeface="Times New Roman" panose="02020603050405020304" pitchFamily="18" charset="0"/>
             </a:endParaRPr>
           </a:p>
         </p:txBody>
@@ -6782,8 +6782,8 @@
                 <a:solidFill>
                   <a:schemeClr val="tx1"/>
                 </a:solidFill>
-                <a:latin typeface="Times New Roman" panose="02020503050405090304" pitchFamily="18" charset="0"/>
-                <a:cs typeface="Times New Roman" panose="02020503050405090304" pitchFamily="18" charset="0"/>
+                <a:latin typeface="Times New Roman" panose="02020603050405020304" pitchFamily="18" charset="0"/>
+                <a:cs typeface="Times New Roman" panose="02020603050405020304" pitchFamily="18" charset="0"/>
               </a:rPr>
               <a:t>DWC1x1 </a:t>
             </a:r>
@@ -6791,8 +6791,8 @@
               <a:solidFill>
                 <a:schemeClr val="tx1"/>
               </a:solidFill>
-              <a:latin typeface="Times New Roman" panose="02020503050405090304" pitchFamily="18" charset="0"/>
-              <a:cs typeface="Times New Roman" panose="02020503050405090304" pitchFamily="18" charset="0"/>
+              <a:latin typeface="Times New Roman" panose="02020603050405020304" pitchFamily="18" charset="0"/>
+              <a:cs typeface="Times New Roman" panose="02020603050405020304" pitchFamily="18" charset="0"/>
             </a:endParaRPr>
           </a:p>
         </p:txBody>
@@ -6888,8 +6888,8 @@
                 <a:solidFill>
                   <a:schemeClr val="tx1"/>
                 </a:solidFill>
-                <a:latin typeface="Times New Roman" panose="02020503050405090304" pitchFamily="18" charset="0"/>
-                <a:cs typeface="Times New Roman" panose="02020503050405090304" pitchFamily="18" charset="0"/>
+                <a:latin typeface="Times New Roman" panose="02020603050405020304" pitchFamily="18" charset="0"/>
+                <a:cs typeface="Times New Roman" panose="02020603050405020304" pitchFamily="18" charset="0"/>
               </a:rPr>
               <a:t>Channel Shuffle </a:t>
             </a:r>
@@ -6897,8 +6897,8 @@
               <a:solidFill>
                 <a:schemeClr val="tx1"/>
               </a:solidFill>
-              <a:latin typeface="Times New Roman" panose="02020503050405090304" pitchFamily="18" charset="0"/>
-              <a:cs typeface="Times New Roman" panose="02020503050405090304" pitchFamily="18" charset="0"/>
+              <a:latin typeface="Times New Roman" panose="02020603050405020304" pitchFamily="18" charset="0"/>
+              <a:cs typeface="Times New Roman" panose="02020603050405020304" pitchFamily="18" charset="0"/>
             </a:endParaRPr>
           </a:p>
         </p:txBody>
@@ -6976,21 +6976,21 @@
             <a:pPr algn="ctr"/>
             <a:r>
               <a:rPr lang="en-US" altLang="zh-CN" sz="2065" dirty="0">
-                <a:latin typeface="Times New Roman" panose="02020503050405090304" pitchFamily="18" charset="0"/>
-                <a:cs typeface="Times New Roman" panose="02020503050405090304" pitchFamily="18" charset="0"/>
+                <a:latin typeface="Times New Roman" panose="02020603050405020304" pitchFamily="18" charset="0"/>
+                <a:cs typeface="Times New Roman" panose="02020603050405020304" pitchFamily="18" charset="0"/>
               </a:rPr>
               <a:t>(d) </a:t>
             </a:r>
             <a:r>
               <a:rPr lang="en-US" altLang="zh-CN" sz="2065" b="1" dirty="0">
-                <a:latin typeface="Times New Roman" panose="02020503050405090304" pitchFamily="18" charset="0"/>
-                <a:cs typeface="Times New Roman" panose="02020503050405090304" pitchFamily="18" charset="0"/>
+                <a:latin typeface="Times New Roman" panose="02020603050405020304" pitchFamily="18" charset="0"/>
+                <a:cs typeface="Times New Roman" panose="02020603050405020304" pitchFamily="18" charset="0"/>
               </a:rPr>
               <a:t>SLCB</a:t>
             </a:r>
             <a:endParaRPr lang="zh-CN" altLang="en-US" sz="2065" b="1" dirty="0">
-              <a:latin typeface="Times New Roman" panose="02020503050405090304" pitchFamily="18" charset="0"/>
-              <a:cs typeface="Times New Roman" panose="02020503050405090304" pitchFamily="18" charset="0"/>
+              <a:latin typeface="Times New Roman" panose="02020603050405020304" pitchFamily="18" charset="0"/>
+              <a:cs typeface="Times New Roman" panose="02020603050405020304" pitchFamily="18" charset="0"/>
             </a:endParaRPr>
           </a:p>
         </p:txBody>
@@ -7020,21 +7020,21 @@
             <a:pPr algn="ctr"/>
             <a:r>
               <a:rPr lang="en-US" altLang="zh-CN" sz="1655" dirty="0">
-                <a:latin typeface="Times New Roman" panose="02020503050405090304" pitchFamily="18" charset="0"/>
-                <a:cs typeface="Times New Roman" panose="02020503050405090304" pitchFamily="18" charset="0"/>
+                <a:latin typeface="Times New Roman" panose="02020603050405020304" pitchFamily="18" charset="0"/>
+                <a:cs typeface="Times New Roman" panose="02020603050405020304" pitchFamily="18" charset="0"/>
               </a:rPr>
               <a:t>(h) </a:t>
             </a:r>
             <a:r>
               <a:rPr lang="en-US" altLang="zh-CN" sz="1655" b="1" dirty="0">
-                <a:latin typeface="Times New Roman" panose="02020503050405090304" pitchFamily="18" charset="0"/>
-                <a:cs typeface="Times New Roman" panose="02020503050405090304" pitchFamily="18" charset="0"/>
+                <a:latin typeface="Times New Roman" panose="02020603050405020304" pitchFamily="18" charset="0"/>
+                <a:cs typeface="Times New Roman" panose="02020603050405020304" pitchFamily="18" charset="0"/>
               </a:rPr>
               <a:t>MA</a:t>
             </a:r>
             <a:endParaRPr lang="zh-CN" altLang="en-US" sz="1655" b="1" dirty="0">
-              <a:latin typeface="Times New Roman" panose="02020503050405090304" pitchFamily="18" charset="0"/>
-              <a:cs typeface="Times New Roman" panose="02020503050405090304" pitchFamily="18" charset="0"/>
+              <a:latin typeface="Times New Roman" panose="02020603050405020304" pitchFamily="18" charset="0"/>
+              <a:cs typeface="Times New Roman" panose="02020603050405020304" pitchFamily="18" charset="0"/>
             </a:endParaRPr>
           </a:p>
         </p:txBody>
@@ -7091,8 +7091,8 @@
                 <a:solidFill>
                   <a:schemeClr val="tx1"/>
                 </a:solidFill>
-                <a:latin typeface="Times New Roman" panose="02020503050405090304" pitchFamily="18" charset="0"/>
-                <a:cs typeface="Times New Roman" panose="02020503050405090304" pitchFamily="18" charset="0"/>
+                <a:latin typeface="Times New Roman" panose="02020603050405020304" pitchFamily="18" charset="0"/>
+                <a:cs typeface="Times New Roman" panose="02020603050405020304" pitchFamily="18" charset="0"/>
               </a:rPr>
               <a:t>LN</a:t>
             </a:r>
@@ -7100,8 +7100,8 @@
               <a:solidFill>
                 <a:schemeClr val="tx1"/>
               </a:solidFill>
-              <a:latin typeface="Times New Roman" panose="02020503050405090304" pitchFamily="18" charset="0"/>
-              <a:cs typeface="Times New Roman" panose="02020503050405090304" pitchFamily="18" charset="0"/>
+              <a:latin typeface="Times New Roman" panose="02020603050405020304" pitchFamily="18" charset="0"/>
+              <a:cs typeface="Times New Roman" panose="02020603050405020304" pitchFamily="18" charset="0"/>
             </a:endParaRPr>
           </a:p>
         </p:txBody>
@@ -7158,8 +7158,8 @@
                 <a:solidFill>
                   <a:schemeClr val="tx1"/>
                 </a:solidFill>
-                <a:latin typeface="Times New Roman" panose="02020503050405090304" pitchFamily="18" charset="0"/>
-                <a:cs typeface="Times New Roman" panose="02020503050405090304" pitchFamily="18" charset="0"/>
+                <a:latin typeface="Times New Roman" panose="02020603050405020304" pitchFamily="18" charset="0"/>
+                <a:cs typeface="Times New Roman" panose="02020603050405020304" pitchFamily="18" charset="0"/>
               </a:rPr>
               <a:t>Linear Layer</a:t>
             </a:r>
@@ -7167,8 +7167,8 @@
               <a:solidFill>
                 <a:schemeClr val="tx1"/>
               </a:solidFill>
-              <a:latin typeface="Times New Roman" panose="02020503050405090304" pitchFamily="18" charset="0"/>
-              <a:cs typeface="Times New Roman" panose="02020503050405090304" pitchFamily="18" charset="0"/>
+              <a:latin typeface="Times New Roman" panose="02020603050405020304" pitchFamily="18" charset="0"/>
+              <a:cs typeface="Times New Roman" panose="02020603050405020304" pitchFamily="18" charset="0"/>
             </a:endParaRPr>
           </a:p>
         </p:txBody>
@@ -7225,8 +7225,8 @@
                 <a:solidFill>
                   <a:schemeClr val="tx1"/>
                 </a:solidFill>
-                <a:latin typeface="Times New Roman" panose="02020503050405090304" pitchFamily="18" charset="0"/>
-                <a:cs typeface="Times New Roman" panose="02020503050405090304" pitchFamily="18" charset="0"/>
+                <a:latin typeface="Times New Roman" panose="02020603050405020304" pitchFamily="18" charset="0"/>
+                <a:cs typeface="Times New Roman" panose="02020603050405020304" pitchFamily="18" charset="0"/>
               </a:rPr>
               <a:t>DWC</a:t>
             </a:r>
@@ -7234,8 +7234,8 @@
               <a:solidFill>
                 <a:schemeClr val="tx1"/>
               </a:solidFill>
-              <a:latin typeface="Times New Roman" panose="02020503050405090304" pitchFamily="18" charset="0"/>
-              <a:cs typeface="Times New Roman" panose="02020503050405090304" pitchFamily="18" charset="0"/>
+              <a:latin typeface="Times New Roman" panose="02020603050405020304" pitchFamily="18" charset="0"/>
+              <a:cs typeface="Times New Roman" panose="02020603050405020304" pitchFamily="18" charset="0"/>
             </a:endParaRPr>
           </a:p>
         </p:txBody>
@@ -7292,8 +7292,8 @@
                 <a:solidFill>
                   <a:schemeClr val="tx1"/>
                 </a:solidFill>
-                <a:latin typeface="Times New Roman" panose="02020503050405090304" pitchFamily="18" charset="0"/>
-                <a:cs typeface="Times New Roman" panose="02020503050405090304" pitchFamily="18" charset="0"/>
+                <a:latin typeface="Times New Roman" panose="02020603050405020304" pitchFamily="18" charset="0"/>
+                <a:cs typeface="Times New Roman" panose="02020603050405020304" pitchFamily="18" charset="0"/>
               </a:rPr>
               <a:t>ReLU</a:t>
             </a:r>
@@ -7301,8 +7301,8 @@
               <a:solidFill>
                 <a:schemeClr val="tx1"/>
               </a:solidFill>
-              <a:latin typeface="Times New Roman" panose="02020503050405090304" pitchFamily="18" charset="0"/>
-              <a:cs typeface="Times New Roman" panose="02020503050405090304" pitchFamily="18" charset="0"/>
+              <a:latin typeface="Times New Roman" panose="02020603050405020304" pitchFamily="18" charset="0"/>
+              <a:cs typeface="Times New Roman" panose="02020603050405020304" pitchFamily="18" charset="0"/>
             </a:endParaRPr>
           </a:p>
         </p:txBody>
@@ -7359,8 +7359,8 @@
                 <a:solidFill>
                   <a:schemeClr val="tx1"/>
                 </a:solidFill>
-                <a:latin typeface="Times New Roman" panose="02020503050405090304" pitchFamily="18" charset="0"/>
-                <a:cs typeface="Times New Roman" panose="02020503050405090304" pitchFamily="18" charset="0"/>
+                <a:latin typeface="Times New Roman" panose="02020603050405020304" pitchFamily="18" charset="0"/>
+                <a:cs typeface="Times New Roman" panose="02020603050405020304" pitchFamily="18" charset="0"/>
               </a:rPr>
               <a:t>SS2D</a:t>
             </a:r>
@@ -7368,8 +7368,8 @@
               <a:solidFill>
                 <a:schemeClr val="tx1"/>
               </a:solidFill>
-              <a:latin typeface="Times New Roman" panose="02020503050405090304" pitchFamily="18" charset="0"/>
-              <a:cs typeface="Times New Roman" panose="02020503050405090304" pitchFamily="18" charset="0"/>
+              <a:latin typeface="Times New Roman" panose="02020603050405020304" pitchFamily="18" charset="0"/>
+              <a:cs typeface="Times New Roman" panose="02020603050405020304" pitchFamily="18" charset="0"/>
             </a:endParaRPr>
           </a:p>
         </p:txBody>
@@ -7426,8 +7426,8 @@
                 <a:solidFill>
                   <a:schemeClr val="tx1"/>
                 </a:solidFill>
-                <a:latin typeface="Times New Roman" panose="02020503050405090304" pitchFamily="18" charset="0"/>
-                <a:cs typeface="Times New Roman" panose="02020503050405090304" pitchFamily="18" charset="0"/>
+                <a:latin typeface="Times New Roman" panose="02020603050405020304" pitchFamily="18" charset="0"/>
+                <a:cs typeface="Times New Roman" panose="02020603050405020304" pitchFamily="18" charset="0"/>
               </a:rPr>
               <a:t>LN</a:t>
             </a:r>
@@ -7435,8 +7435,8 @@
               <a:solidFill>
                 <a:schemeClr val="tx1"/>
               </a:solidFill>
-              <a:latin typeface="Times New Roman" panose="02020503050405090304" pitchFamily="18" charset="0"/>
-              <a:cs typeface="Times New Roman" panose="02020503050405090304" pitchFamily="18" charset="0"/>
+              <a:latin typeface="Times New Roman" panose="02020603050405020304" pitchFamily="18" charset="0"/>
+              <a:cs typeface="Times New Roman" panose="02020603050405020304" pitchFamily="18" charset="0"/>
             </a:endParaRPr>
           </a:p>
         </p:txBody>
@@ -7541,8 +7541,8 @@
                 <a:solidFill>
                   <a:schemeClr val="tx1"/>
                 </a:solidFill>
-                <a:latin typeface="Times New Roman" panose="02020503050405090304" pitchFamily="18" charset="0"/>
-                <a:cs typeface="Times New Roman" panose="02020503050405090304" pitchFamily="18" charset="0"/>
+                <a:latin typeface="Times New Roman" panose="02020603050405020304" pitchFamily="18" charset="0"/>
+                <a:cs typeface="Times New Roman" panose="02020603050405020304" pitchFamily="18" charset="0"/>
               </a:rPr>
               <a:t>Linear Layer</a:t>
             </a:r>
@@ -7550,8 +7550,8 @@
               <a:solidFill>
                 <a:schemeClr val="tx1"/>
               </a:solidFill>
-              <a:latin typeface="Times New Roman" panose="02020503050405090304" pitchFamily="18" charset="0"/>
-              <a:cs typeface="Times New Roman" panose="02020503050405090304" pitchFamily="18" charset="0"/>
+              <a:latin typeface="Times New Roman" panose="02020603050405020304" pitchFamily="18" charset="0"/>
+              <a:cs typeface="Times New Roman" panose="02020603050405020304" pitchFamily="18" charset="0"/>
             </a:endParaRPr>
           </a:p>
         </p:txBody>
@@ -7608,8 +7608,8 @@
                 <a:solidFill>
                   <a:schemeClr val="tx1"/>
                 </a:solidFill>
-                <a:latin typeface="Times New Roman" panose="02020503050405090304" pitchFamily="18" charset="0"/>
-                <a:cs typeface="Times New Roman" panose="02020503050405090304" pitchFamily="18" charset="0"/>
+                <a:latin typeface="Times New Roman" panose="02020603050405020304" pitchFamily="18" charset="0"/>
+                <a:cs typeface="Times New Roman" panose="02020603050405020304" pitchFamily="18" charset="0"/>
               </a:rPr>
               <a:t>ReLU</a:t>
             </a:r>
@@ -7617,8 +7617,8 @@
               <a:solidFill>
                 <a:schemeClr val="tx1"/>
               </a:solidFill>
-              <a:latin typeface="Times New Roman" panose="02020503050405090304" pitchFamily="18" charset="0"/>
-              <a:cs typeface="Times New Roman" panose="02020503050405090304" pitchFamily="18" charset="0"/>
+              <a:latin typeface="Times New Roman" panose="02020603050405020304" pitchFamily="18" charset="0"/>
+              <a:cs typeface="Times New Roman" panose="02020603050405020304" pitchFamily="18" charset="0"/>
             </a:endParaRPr>
           </a:p>
         </p:txBody>
@@ -7675,8 +7675,8 @@
                 <a:solidFill>
                   <a:schemeClr val="tx1"/>
                 </a:solidFill>
-                <a:latin typeface="Times New Roman" panose="02020503050405090304" pitchFamily="18" charset="0"/>
-                <a:cs typeface="Times New Roman" panose="02020503050405090304" pitchFamily="18" charset="0"/>
+                <a:latin typeface="Times New Roman" panose="02020603050405020304" pitchFamily="18" charset="0"/>
+                <a:cs typeface="Times New Roman" panose="02020603050405020304" pitchFamily="18" charset="0"/>
               </a:rPr>
               <a:t>Linear Layer</a:t>
             </a:r>
@@ -7684,8 +7684,8 @@
               <a:solidFill>
                 <a:schemeClr val="tx1"/>
               </a:solidFill>
-              <a:latin typeface="Times New Roman" panose="02020503050405090304" pitchFamily="18" charset="0"/>
-              <a:cs typeface="Times New Roman" panose="02020503050405090304" pitchFamily="18" charset="0"/>
+              <a:latin typeface="Times New Roman" panose="02020603050405020304" pitchFamily="18" charset="0"/>
+              <a:cs typeface="Times New Roman" panose="02020603050405020304" pitchFamily="18" charset="0"/>
             </a:endParaRPr>
           </a:p>
         </p:txBody>
@@ -7879,21 +7879,21 @@
             <a:pPr algn="ctr"/>
             <a:r>
               <a:rPr lang="en-US" altLang="zh-CN" sz="2065" dirty="0">
-                <a:latin typeface="Times New Roman" panose="02020503050405090304" pitchFamily="18" charset="0"/>
-                <a:cs typeface="Times New Roman" panose="02020503050405090304" pitchFamily="18" charset="0"/>
+                <a:latin typeface="Times New Roman" panose="02020603050405020304" pitchFamily="18" charset="0"/>
+                <a:cs typeface="Times New Roman" panose="02020603050405020304" pitchFamily="18" charset="0"/>
               </a:rPr>
               <a:t>(b)</a:t>
             </a:r>
             <a:r>
               <a:rPr lang="en-US" altLang="zh-CN" sz="2065" b="1" dirty="0">
-                <a:latin typeface="Times New Roman" panose="02020503050405090304" pitchFamily="18" charset="0"/>
-                <a:cs typeface="Times New Roman" panose="02020503050405090304" pitchFamily="18" charset="0"/>
+                <a:latin typeface="Times New Roman" panose="02020603050405020304" pitchFamily="18" charset="0"/>
+                <a:cs typeface="Times New Roman" panose="02020603050405020304" pitchFamily="18" charset="0"/>
               </a:rPr>
               <a:t>VSS Block</a:t>
             </a:r>
             <a:endParaRPr lang="zh-CN" altLang="en-US" sz="2065" b="1" dirty="0">
-              <a:latin typeface="Times New Roman" panose="02020503050405090304" pitchFamily="18" charset="0"/>
-              <a:cs typeface="Times New Roman" panose="02020503050405090304" pitchFamily="18" charset="0"/>
+              <a:latin typeface="Times New Roman" panose="02020603050405020304" pitchFamily="18" charset="0"/>
+              <a:cs typeface="Times New Roman" panose="02020603050405020304" pitchFamily="18" charset="0"/>
             </a:endParaRPr>
           </a:p>
         </p:txBody>
@@ -7923,21 +7923,21 @@
             <a:pPr algn="ctr"/>
             <a:r>
               <a:rPr lang="en-US" altLang="zh-CN" sz="2065" dirty="0">
-                <a:latin typeface="Times New Roman" panose="02020503050405090304" pitchFamily="18" charset="0"/>
-                <a:cs typeface="Times New Roman" panose="02020503050405090304" pitchFamily="18" charset="0"/>
+                <a:latin typeface="Times New Roman" panose="02020603050405020304" pitchFamily="18" charset="0"/>
+                <a:cs typeface="Times New Roman" panose="02020603050405020304" pitchFamily="18" charset="0"/>
               </a:rPr>
               <a:t>(e) </a:t>
             </a:r>
             <a:r>
               <a:rPr lang="en-US" altLang="zh-CN" sz="2065" b="1" dirty="0">
-                <a:latin typeface="Times New Roman" panose="02020503050405090304" pitchFamily="18" charset="0"/>
-                <a:cs typeface="Times New Roman" panose="02020503050405090304" pitchFamily="18" charset="0"/>
+                <a:latin typeface="Times New Roman" panose="02020603050405020304" pitchFamily="18" charset="0"/>
+                <a:cs typeface="Times New Roman" panose="02020603050405020304" pitchFamily="18" charset="0"/>
               </a:rPr>
               <a:t>SC</a:t>
             </a:r>
             <a:endParaRPr lang="zh-CN" altLang="en-US" sz="2065" b="1" dirty="0">
-              <a:latin typeface="Times New Roman" panose="02020503050405090304" pitchFamily="18" charset="0"/>
-              <a:cs typeface="Times New Roman" panose="02020503050405090304" pitchFamily="18" charset="0"/>
+              <a:latin typeface="Times New Roman" panose="02020603050405020304" pitchFamily="18" charset="0"/>
+              <a:cs typeface="Times New Roman" panose="02020603050405020304" pitchFamily="18" charset="0"/>
             </a:endParaRPr>
           </a:p>
         </p:txBody>
@@ -7994,8 +7994,8 @@
                 <a:solidFill>
                   <a:schemeClr val="tx1"/>
                 </a:solidFill>
-                <a:latin typeface="Times New Roman" panose="02020503050405090304" pitchFamily="18" charset="0"/>
-                <a:cs typeface="Times New Roman" panose="02020503050405090304" pitchFamily="18" charset="0"/>
+                <a:latin typeface="Times New Roman" panose="02020603050405020304" pitchFamily="18" charset="0"/>
+                <a:cs typeface="Times New Roman" panose="02020603050405020304" pitchFamily="18" charset="0"/>
               </a:rPr>
               <a:t>Norm</a:t>
             </a:r>
@@ -8003,8 +8003,8 @@
               <a:solidFill>
                 <a:schemeClr val="tx1"/>
               </a:solidFill>
-              <a:latin typeface="Times New Roman" panose="02020503050405090304" pitchFamily="18" charset="0"/>
-              <a:cs typeface="Times New Roman" panose="02020503050405090304" pitchFamily="18" charset="0"/>
+              <a:latin typeface="Times New Roman" panose="02020603050405020304" pitchFamily="18" charset="0"/>
+              <a:cs typeface="Times New Roman" panose="02020603050405020304" pitchFamily="18" charset="0"/>
             </a:endParaRPr>
           </a:p>
         </p:txBody>
@@ -8061,8 +8061,8 @@
                 <a:solidFill>
                   <a:schemeClr val="tx1"/>
                 </a:solidFill>
-                <a:latin typeface="Times New Roman" panose="02020503050405090304" pitchFamily="18" charset="0"/>
-                <a:cs typeface="Times New Roman" panose="02020503050405090304" pitchFamily="18" charset="0"/>
+                <a:latin typeface="Times New Roman" panose="02020603050405020304" pitchFamily="18" charset="0"/>
+                <a:cs typeface="Times New Roman" panose="02020603050405020304" pitchFamily="18" charset="0"/>
               </a:rPr>
               <a:t>Full Connect</a:t>
             </a:r>
@@ -8070,8 +8070,8 @@
               <a:solidFill>
                 <a:schemeClr val="tx1"/>
               </a:solidFill>
-              <a:latin typeface="Times New Roman" panose="02020503050405090304" pitchFamily="18" charset="0"/>
-              <a:cs typeface="Times New Roman" panose="02020503050405090304" pitchFamily="18" charset="0"/>
+              <a:latin typeface="Times New Roman" panose="02020603050405020304" pitchFamily="18" charset="0"/>
+              <a:cs typeface="Times New Roman" panose="02020603050405020304" pitchFamily="18" charset="0"/>
             </a:endParaRPr>
           </a:p>
         </p:txBody>
@@ -8128,8 +8128,8 @@
                 <a:solidFill>
                   <a:schemeClr val="tx1"/>
                 </a:solidFill>
-                <a:latin typeface="Times New Roman" panose="02020503050405090304" pitchFamily="18" charset="0"/>
-                <a:cs typeface="Times New Roman" panose="02020503050405090304" pitchFamily="18" charset="0"/>
+                <a:latin typeface="Times New Roman" panose="02020603050405020304" pitchFamily="18" charset="0"/>
+                <a:cs typeface="Times New Roman" panose="02020603050405020304" pitchFamily="18" charset="0"/>
               </a:rPr>
               <a:t>GeLU</a:t>
             </a:r>
@@ -8137,8 +8137,8 @@
               <a:solidFill>
                 <a:schemeClr val="tx1"/>
               </a:solidFill>
-              <a:latin typeface="Times New Roman" panose="02020503050405090304" pitchFamily="18" charset="0"/>
-              <a:cs typeface="Times New Roman" panose="02020503050405090304" pitchFamily="18" charset="0"/>
+              <a:latin typeface="Times New Roman" panose="02020603050405020304" pitchFamily="18" charset="0"/>
+              <a:cs typeface="Times New Roman" panose="02020603050405020304" pitchFamily="18" charset="0"/>
             </a:endParaRPr>
           </a:p>
         </p:txBody>
@@ -8195,8 +8195,8 @@
                 <a:solidFill>
                   <a:schemeClr val="tx1"/>
                 </a:solidFill>
-                <a:latin typeface="Times New Roman" panose="02020503050405090304" pitchFamily="18" charset="0"/>
-                <a:cs typeface="Times New Roman" panose="02020503050405090304" pitchFamily="18" charset="0"/>
+                <a:latin typeface="Times New Roman" panose="02020603050405020304" pitchFamily="18" charset="0"/>
+                <a:cs typeface="Times New Roman" panose="02020603050405020304" pitchFamily="18" charset="0"/>
               </a:rPr>
               <a:t>Full Connect</a:t>
             </a:r>
@@ -8204,8 +8204,8 @@
               <a:solidFill>
                 <a:schemeClr val="tx1"/>
               </a:solidFill>
-              <a:latin typeface="Times New Roman" panose="02020503050405090304" pitchFamily="18" charset="0"/>
-              <a:cs typeface="Times New Roman" panose="02020503050405090304" pitchFamily="18" charset="0"/>
+              <a:latin typeface="Times New Roman" panose="02020603050405020304" pitchFamily="18" charset="0"/>
+              <a:cs typeface="Times New Roman" panose="02020603050405020304" pitchFamily="18" charset="0"/>
             </a:endParaRPr>
           </a:p>
         </p:txBody>
@@ -8262,8 +8262,8 @@
                 <a:solidFill>
                   <a:schemeClr val="tx1"/>
                 </a:solidFill>
-                <a:latin typeface="Times New Roman" panose="02020503050405090304" pitchFamily="18" charset="0"/>
-                <a:cs typeface="Times New Roman" panose="02020503050405090304" pitchFamily="18" charset="0"/>
+                <a:latin typeface="Times New Roman" panose="02020603050405020304" pitchFamily="18" charset="0"/>
+                <a:cs typeface="Times New Roman" panose="02020603050405020304" pitchFamily="18" charset="0"/>
               </a:rPr>
               <a:t>DWC 5x5</a:t>
             </a:r>
@@ -8271,8 +8271,8 @@
               <a:solidFill>
                 <a:schemeClr val="tx1"/>
               </a:solidFill>
-              <a:latin typeface="Times New Roman" panose="02020503050405090304" pitchFamily="18" charset="0"/>
-              <a:cs typeface="Times New Roman" panose="02020503050405090304" pitchFamily="18" charset="0"/>
+              <a:latin typeface="Times New Roman" panose="02020603050405020304" pitchFamily="18" charset="0"/>
+              <a:cs typeface="Times New Roman" panose="02020603050405020304" pitchFamily="18" charset="0"/>
             </a:endParaRPr>
           </a:p>
         </p:txBody>
@@ -8329,8 +8329,8 @@
                 <a:solidFill>
                   <a:schemeClr val="tx1"/>
                 </a:solidFill>
-                <a:latin typeface="Times New Roman" panose="02020503050405090304" pitchFamily="18" charset="0"/>
-                <a:cs typeface="Times New Roman" panose="02020503050405090304" pitchFamily="18" charset="0"/>
+                <a:latin typeface="Times New Roman" panose="02020603050405020304" pitchFamily="18" charset="0"/>
+                <a:cs typeface="Times New Roman" panose="02020603050405020304" pitchFamily="18" charset="0"/>
               </a:rPr>
               <a:t>H Strip Conv</a:t>
             </a:r>
@@ -8338,8 +8338,8 @@
               <a:solidFill>
                 <a:schemeClr val="tx1"/>
               </a:solidFill>
-              <a:latin typeface="Times New Roman" panose="02020503050405090304" pitchFamily="18" charset="0"/>
-              <a:cs typeface="Times New Roman" panose="02020503050405090304" pitchFamily="18" charset="0"/>
+              <a:latin typeface="Times New Roman" panose="02020603050405020304" pitchFamily="18" charset="0"/>
+              <a:cs typeface="Times New Roman" panose="02020603050405020304" pitchFamily="18" charset="0"/>
             </a:endParaRPr>
           </a:p>
         </p:txBody>
@@ -8396,8 +8396,8 @@
                 <a:solidFill>
                   <a:schemeClr val="tx1"/>
                 </a:solidFill>
-                <a:latin typeface="Times New Roman" panose="02020503050405090304" pitchFamily="18" charset="0"/>
-                <a:cs typeface="Times New Roman" panose="02020503050405090304" pitchFamily="18" charset="0"/>
+                <a:latin typeface="Times New Roman" panose="02020603050405020304" pitchFamily="18" charset="0"/>
+                <a:cs typeface="Times New Roman" panose="02020603050405020304" pitchFamily="18" charset="0"/>
               </a:rPr>
               <a:t>V Strip Conv</a:t>
             </a:r>
@@ -8405,8 +8405,8 @@
               <a:solidFill>
                 <a:schemeClr val="tx1"/>
               </a:solidFill>
-              <a:latin typeface="Times New Roman" panose="02020503050405090304" pitchFamily="18" charset="0"/>
-              <a:cs typeface="Times New Roman" panose="02020503050405090304" pitchFamily="18" charset="0"/>
+              <a:latin typeface="Times New Roman" panose="02020603050405020304" pitchFamily="18" charset="0"/>
+              <a:cs typeface="Times New Roman" panose="02020603050405020304" pitchFamily="18" charset="0"/>
             </a:endParaRPr>
           </a:p>
         </p:txBody>
@@ -8463,8 +8463,8 @@
                 <a:solidFill>
                   <a:schemeClr val="tx1"/>
                 </a:solidFill>
-                <a:latin typeface="Times New Roman" panose="02020503050405090304" pitchFamily="18" charset="0"/>
-                <a:cs typeface="Times New Roman" panose="02020503050405090304" pitchFamily="18" charset="0"/>
+                <a:latin typeface="Times New Roman" panose="02020603050405020304" pitchFamily="18" charset="0"/>
+                <a:cs typeface="Times New Roman" panose="02020603050405020304" pitchFamily="18" charset="0"/>
               </a:rPr>
               <a:t>PWC</a:t>
             </a:r>
@@ -8472,8 +8472,8 @@
               <a:solidFill>
                 <a:schemeClr val="tx1"/>
               </a:solidFill>
-              <a:latin typeface="Times New Roman" panose="02020503050405090304" pitchFamily="18" charset="0"/>
-              <a:cs typeface="Times New Roman" panose="02020503050405090304" pitchFamily="18" charset="0"/>
+              <a:latin typeface="Times New Roman" panose="02020603050405020304" pitchFamily="18" charset="0"/>
+              <a:cs typeface="Times New Roman" panose="02020603050405020304" pitchFamily="18" charset="0"/>
             </a:endParaRPr>
           </a:p>
         </p:txBody>
@@ -8704,8 +8704,8 @@
                 <a:solidFill>
                   <a:schemeClr val="tx1"/>
                 </a:solidFill>
-                <a:latin typeface="Times New Roman" panose="02020503050405090304" pitchFamily="18" charset="0"/>
-                <a:cs typeface="Times New Roman" panose="02020503050405090304" pitchFamily="18" charset="0"/>
+                <a:latin typeface="Times New Roman" panose="02020603050405020304" pitchFamily="18" charset="0"/>
+                <a:cs typeface="Times New Roman" panose="02020603050405020304" pitchFamily="18" charset="0"/>
               </a:rPr>
               <a:t>Norm</a:t>
             </a:r>
@@ -8713,8 +8713,8 @@
               <a:solidFill>
                 <a:schemeClr val="tx1"/>
               </a:solidFill>
-              <a:latin typeface="Times New Roman" panose="02020503050405090304" pitchFamily="18" charset="0"/>
-              <a:cs typeface="Times New Roman" panose="02020503050405090304" pitchFamily="18" charset="0"/>
+              <a:latin typeface="Times New Roman" panose="02020603050405020304" pitchFamily="18" charset="0"/>
+              <a:cs typeface="Times New Roman" panose="02020603050405020304" pitchFamily="18" charset="0"/>
             </a:endParaRPr>
           </a:p>
         </p:txBody>
@@ -8771,8 +8771,8 @@
                 <a:solidFill>
                   <a:schemeClr val="tx1"/>
                 </a:solidFill>
-                <a:latin typeface="Times New Roman" panose="02020503050405090304" pitchFamily="18" charset="0"/>
-                <a:cs typeface="Times New Roman" panose="02020503050405090304" pitchFamily="18" charset="0"/>
+                <a:latin typeface="Times New Roman" panose="02020603050405020304" pitchFamily="18" charset="0"/>
+                <a:cs typeface="Times New Roman" panose="02020603050405020304" pitchFamily="18" charset="0"/>
               </a:rPr>
               <a:t>Full Connect</a:t>
             </a:r>
@@ -8780,8 +8780,8 @@
               <a:solidFill>
                 <a:schemeClr val="tx1"/>
               </a:solidFill>
-              <a:latin typeface="Times New Roman" panose="02020503050405090304" pitchFamily="18" charset="0"/>
-              <a:cs typeface="Times New Roman" panose="02020503050405090304" pitchFamily="18" charset="0"/>
+              <a:latin typeface="Times New Roman" panose="02020603050405020304" pitchFamily="18" charset="0"/>
+              <a:cs typeface="Times New Roman" panose="02020603050405020304" pitchFamily="18" charset="0"/>
             </a:endParaRPr>
           </a:p>
         </p:txBody>
@@ -8973,21 +8973,21 @@
             <a:pPr algn="ctr"/>
             <a:r>
               <a:rPr lang="en-US" altLang="zh-CN" sz="1655" dirty="0">
-                <a:latin typeface="Times New Roman" panose="02020503050405090304" pitchFamily="18" charset="0"/>
-                <a:cs typeface="Times New Roman" panose="02020503050405090304" pitchFamily="18" charset="0"/>
+                <a:latin typeface="Times New Roman" panose="02020603050405020304" pitchFamily="18" charset="0"/>
+                <a:cs typeface="Times New Roman" panose="02020603050405020304" pitchFamily="18" charset="0"/>
               </a:rPr>
               <a:t>(i) </a:t>
             </a:r>
             <a:r>
               <a:rPr lang="en-US" altLang="zh-CN" sz="1655" b="1" dirty="0">
-                <a:latin typeface="Times New Roman" panose="02020503050405090304" pitchFamily="18" charset="0"/>
-                <a:cs typeface="Times New Roman" panose="02020503050405090304" pitchFamily="18" charset="0"/>
+                <a:latin typeface="Times New Roman" panose="02020603050405020304" pitchFamily="18" charset="0"/>
+                <a:cs typeface="Times New Roman" panose="02020603050405020304" pitchFamily="18" charset="0"/>
               </a:rPr>
               <a:t>Strip Block</a:t>
             </a:r>
             <a:endParaRPr lang="zh-CN" altLang="en-US" sz="1655" b="1" dirty="0">
-              <a:latin typeface="Times New Roman" panose="02020503050405090304" pitchFamily="18" charset="0"/>
-              <a:cs typeface="Times New Roman" panose="02020503050405090304" pitchFamily="18" charset="0"/>
+              <a:latin typeface="Times New Roman" panose="02020603050405020304" pitchFamily="18" charset="0"/>
+              <a:cs typeface="Times New Roman" panose="02020603050405020304" pitchFamily="18" charset="0"/>
             </a:endParaRPr>
           </a:p>
         </p:txBody>
@@ -9017,21 +9017,21 @@
             <a:pPr algn="ctr"/>
             <a:r>
               <a:rPr lang="en-US" altLang="zh-CN" sz="1655" dirty="0">
-                <a:latin typeface="Times New Roman" panose="02020503050405090304" pitchFamily="18" charset="0"/>
-                <a:cs typeface="Times New Roman" panose="02020503050405090304" pitchFamily="18" charset="0"/>
+                <a:latin typeface="Times New Roman" panose="02020603050405020304" pitchFamily="18" charset="0"/>
+                <a:cs typeface="Times New Roman" panose="02020603050405020304" pitchFamily="18" charset="0"/>
               </a:rPr>
               <a:t>(j) </a:t>
             </a:r>
             <a:r>
               <a:rPr lang="en-US" altLang="zh-CN" sz="1655" b="1" dirty="0">
-                <a:latin typeface="Times New Roman" panose="02020503050405090304" pitchFamily="18" charset="0"/>
-                <a:cs typeface="Times New Roman" panose="02020503050405090304" pitchFamily="18" charset="0"/>
+                <a:latin typeface="Times New Roman" panose="02020603050405020304" pitchFamily="18" charset="0"/>
+                <a:cs typeface="Times New Roman" panose="02020603050405020304" pitchFamily="18" charset="0"/>
               </a:rPr>
               <a:t>Strip Module</a:t>
             </a:r>
             <a:endParaRPr lang="zh-CN" altLang="en-US" sz="1655" b="1" dirty="0">
-              <a:latin typeface="Times New Roman" panose="02020503050405090304" pitchFamily="18" charset="0"/>
-              <a:cs typeface="Times New Roman" panose="02020503050405090304" pitchFamily="18" charset="0"/>
+              <a:latin typeface="Times New Roman" panose="02020603050405020304" pitchFamily="18" charset="0"/>
+              <a:cs typeface="Times New Roman" panose="02020603050405020304" pitchFamily="18" charset="0"/>
             </a:endParaRPr>
           </a:p>
         </p:txBody>
@@ -9108,14 +9108,14 @@
           <a:p>
             <a:r>
               <a:rPr lang="en-US" altLang="zh-CN" sz="1655" dirty="0">
-                <a:latin typeface="Times New Roman" panose="02020503050405090304" pitchFamily="18" charset="0"/>
-                <a:cs typeface="Times New Roman" panose="02020503050405090304" pitchFamily="18" charset="0"/>
+                <a:latin typeface="Times New Roman" panose="02020603050405020304" pitchFamily="18" charset="0"/>
+                <a:cs typeface="Times New Roman" panose="02020603050405020304" pitchFamily="18" charset="0"/>
               </a:rPr>
               <a:t>Hadamard Product</a:t>
             </a:r>
             <a:endParaRPr lang="zh-CN" altLang="en-US" sz="1655" b="1" dirty="0">
-              <a:latin typeface="Times New Roman" panose="02020503050405090304" pitchFamily="18" charset="0"/>
-              <a:cs typeface="Times New Roman" panose="02020503050405090304" pitchFamily="18" charset="0"/>
+              <a:latin typeface="Times New Roman" panose="02020603050405020304" pitchFamily="18" charset="0"/>
+              <a:cs typeface="Times New Roman" panose="02020603050405020304" pitchFamily="18" charset="0"/>
             </a:endParaRPr>
           </a:p>
         </p:txBody>
@@ -9192,14 +9192,14 @@
           <a:p>
             <a:r>
               <a:rPr lang="en-US" altLang="zh-CN" sz="1655" dirty="0">
-                <a:latin typeface="Times New Roman" panose="02020503050405090304" pitchFamily="18" charset="0"/>
-                <a:cs typeface="Times New Roman" panose="02020503050405090304" pitchFamily="18" charset="0"/>
+                <a:latin typeface="Times New Roman" panose="02020603050405020304" pitchFamily="18" charset="0"/>
+                <a:cs typeface="Times New Roman" panose="02020603050405020304" pitchFamily="18" charset="0"/>
               </a:rPr>
               <a:t>Bit-wise Addition</a:t>
             </a:r>
             <a:endParaRPr lang="zh-CN" altLang="en-US" sz="1655" b="1" dirty="0">
-              <a:latin typeface="Times New Roman" panose="02020503050405090304" pitchFamily="18" charset="0"/>
-              <a:cs typeface="Times New Roman" panose="02020503050405090304" pitchFamily="18" charset="0"/>
+              <a:latin typeface="Times New Roman" panose="02020603050405020304" pitchFamily="18" charset="0"/>
+              <a:cs typeface="Times New Roman" panose="02020603050405020304" pitchFamily="18" charset="0"/>
             </a:endParaRPr>
           </a:p>
         </p:txBody>
@@ -9290,14 +9290,14 @@
           <a:p>
             <a:r>
               <a:rPr lang="en-US" altLang="zh-CN" sz="1655" dirty="0">
-                <a:latin typeface="Times New Roman" panose="02020503050405090304" pitchFamily="18" charset="0"/>
-                <a:cs typeface="Times New Roman" panose="02020503050405090304" pitchFamily="18" charset="0"/>
+                <a:latin typeface="Times New Roman" panose="02020603050405020304" pitchFamily="18" charset="0"/>
+                <a:cs typeface="Times New Roman" panose="02020603050405020304" pitchFamily="18" charset="0"/>
               </a:rPr>
               <a:t> Concatenation</a:t>
             </a:r>
             <a:endParaRPr lang="zh-CN" altLang="en-US" sz="1655" b="1" dirty="0">
-              <a:latin typeface="Times New Roman" panose="02020503050405090304" pitchFamily="18" charset="0"/>
-              <a:cs typeface="Times New Roman" panose="02020503050405090304" pitchFamily="18" charset="0"/>
+              <a:latin typeface="Times New Roman" panose="02020603050405020304" pitchFamily="18" charset="0"/>
+              <a:cs typeface="Times New Roman" panose="02020603050405020304" pitchFamily="18" charset="0"/>
             </a:endParaRPr>
           </a:p>
         </p:txBody>
@@ -9354,8 +9354,8 @@
                 <a:solidFill>
                   <a:schemeClr val="tx1"/>
                 </a:solidFill>
-                <a:latin typeface="Times New Roman" panose="02020503050405090304" pitchFamily="18" charset="0"/>
-                <a:cs typeface="Times New Roman" panose="02020503050405090304" pitchFamily="18" charset="0"/>
+                <a:latin typeface="Times New Roman" panose="02020603050405020304" pitchFamily="18" charset="0"/>
+                <a:cs typeface="Times New Roman" panose="02020603050405020304" pitchFamily="18" charset="0"/>
               </a:rPr>
               <a:t>AAP </a:t>
             </a:r>
@@ -9363,8 +9363,8 @@
               <a:solidFill>
                 <a:schemeClr val="tx1"/>
               </a:solidFill>
-              <a:latin typeface="Times New Roman" panose="02020503050405090304" pitchFamily="18" charset="0"/>
-              <a:cs typeface="Times New Roman" panose="02020503050405090304" pitchFamily="18" charset="0"/>
+              <a:latin typeface="Times New Roman" panose="02020603050405020304" pitchFamily="18" charset="0"/>
+              <a:cs typeface="Times New Roman" panose="02020603050405020304" pitchFamily="18" charset="0"/>
             </a:endParaRPr>
           </a:p>
         </p:txBody>
@@ -9421,8 +9421,8 @@
                 <a:solidFill>
                   <a:schemeClr val="tx1"/>
                 </a:solidFill>
-                <a:latin typeface="Times New Roman" panose="02020503050405090304" pitchFamily="18" charset="0"/>
-                <a:cs typeface="Times New Roman" panose="02020503050405090304" pitchFamily="18" charset="0"/>
+                <a:latin typeface="Times New Roman" panose="02020603050405020304" pitchFamily="18" charset="0"/>
+                <a:cs typeface="Times New Roman" panose="02020603050405020304" pitchFamily="18" charset="0"/>
               </a:rPr>
               <a:t>AMP </a:t>
             </a:r>
@@ -9430,8 +9430,8 @@
               <a:solidFill>
                 <a:schemeClr val="tx1"/>
               </a:solidFill>
-              <a:latin typeface="Times New Roman" panose="02020503050405090304" pitchFamily="18" charset="0"/>
-              <a:cs typeface="Times New Roman" panose="02020503050405090304" pitchFamily="18" charset="0"/>
+              <a:latin typeface="Times New Roman" panose="02020603050405020304" pitchFamily="18" charset="0"/>
+              <a:cs typeface="Times New Roman" panose="02020603050405020304" pitchFamily="18" charset="0"/>
             </a:endParaRPr>
           </a:p>
         </p:txBody>
@@ -9460,14 +9460,14 @@
           <a:p>
             <a:r>
               <a:rPr lang="en-US" altLang="zh-CN" sz="1450" dirty="0">
-                <a:latin typeface="Times New Roman" panose="02020503050405090304" pitchFamily="18" charset="0"/>
-                <a:cs typeface="Times New Roman" panose="02020503050405090304" pitchFamily="18" charset="0"/>
+                <a:latin typeface="Times New Roman" panose="02020603050405020304" pitchFamily="18" charset="0"/>
+                <a:cs typeface="Times New Roman" panose="02020603050405020304" pitchFamily="18" charset="0"/>
               </a:rPr>
               <a:t> Adapted Average Pooling</a:t>
             </a:r>
             <a:endParaRPr lang="zh-CN" altLang="en-US" sz="1450" b="1" dirty="0">
-              <a:latin typeface="Times New Roman" panose="02020503050405090304" pitchFamily="18" charset="0"/>
-              <a:cs typeface="Times New Roman" panose="02020503050405090304" pitchFamily="18" charset="0"/>
+              <a:latin typeface="Times New Roman" panose="02020603050405020304" pitchFamily="18" charset="0"/>
+              <a:cs typeface="Times New Roman" panose="02020603050405020304" pitchFamily="18" charset="0"/>
             </a:endParaRPr>
           </a:p>
         </p:txBody>
@@ -9496,14 +9496,14 @@
           <a:p>
             <a:r>
               <a:rPr lang="en-US" altLang="zh-CN" sz="1450" dirty="0">
-                <a:latin typeface="Times New Roman" panose="02020503050405090304" pitchFamily="18" charset="0"/>
-                <a:cs typeface="Times New Roman" panose="02020503050405090304" pitchFamily="18" charset="0"/>
+                <a:latin typeface="Times New Roman" panose="02020603050405020304" pitchFamily="18" charset="0"/>
+                <a:cs typeface="Times New Roman" panose="02020603050405020304" pitchFamily="18" charset="0"/>
               </a:rPr>
               <a:t> Adapted Max Pooling</a:t>
             </a:r>
             <a:endParaRPr lang="zh-CN" altLang="en-US" sz="1450" b="1" dirty="0">
-              <a:latin typeface="Times New Roman" panose="02020503050405090304" pitchFamily="18" charset="0"/>
-              <a:cs typeface="Times New Roman" panose="02020503050405090304" pitchFamily="18" charset="0"/>
+              <a:latin typeface="Times New Roman" panose="02020603050405020304" pitchFamily="18" charset="0"/>
+              <a:cs typeface="Times New Roman" panose="02020603050405020304" pitchFamily="18" charset="0"/>
             </a:endParaRPr>
           </a:p>
         </p:txBody>
@@ -9559,8 +9559,8 @@
                 <a:solidFill>
                   <a:schemeClr val="tx1"/>
                 </a:solidFill>
-                <a:latin typeface="Times New Roman" panose="02020503050405090304" pitchFamily="18" charset="0"/>
-                <a:cs typeface="Times New Roman" panose="02020503050405090304" pitchFamily="18" charset="0"/>
+                <a:latin typeface="Times New Roman" panose="02020603050405020304" pitchFamily="18" charset="0"/>
+                <a:cs typeface="Times New Roman" panose="02020603050405020304" pitchFamily="18" charset="0"/>
               </a:rPr>
               <a:t>SH </a:t>
             </a:r>
@@ -9568,8 +9568,8 @@
               <a:solidFill>
                 <a:schemeClr val="tx1"/>
               </a:solidFill>
-              <a:latin typeface="Times New Roman" panose="02020503050405090304" pitchFamily="18" charset="0"/>
-              <a:cs typeface="Times New Roman" panose="02020503050405090304" pitchFamily="18" charset="0"/>
+              <a:latin typeface="Times New Roman" panose="02020603050405020304" pitchFamily="18" charset="0"/>
+              <a:cs typeface="Times New Roman" panose="02020603050405020304" pitchFamily="18" charset="0"/>
             </a:endParaRPr>
           </a:p>
         </p:txBody>
@@ -9598,14 +9598,14 @@
           <a:p>
             <a:r>
               <a:rPr lang="en-US" altLang="zh-CN" sz="1240" dirty="0">
-                <a:latin typeface="Times New Roman" panose="02020503050405090304" pitchFamily="18" charset="0"/>
-                <a:cs typeface="Times New Roman" panose="02020503050405090304" pitchFamily="18" charset="0"/>
+                <a:latin typeface="Times New Roman" panose="02020603050405020304" pitchFamily="18" charset="0"/>
+                <a:cs typeface="Times New Roman" panose="02020603050405020304" pitchFamily="18" charset="0"/>
               </a:rPr>
               <a:t>Segmentation Heads Conv 1x1</a:t>
             </a:r>
             <a:endParaRPr lang="zh-CN" altLang="en-US" sz="1240" b="1" dirty="0">
-              <a:latin typeface="Times New Roman" panose="02020503050405090304" pitchFamily="18" charset="0"/>
-              <a:cs typeface="Times New Roman" panose="02020503050405090304" pitchFamily="18" charset="0"/>
+              <a:latin typeface="Times New Roman" panose="02020603050405020304" pitchFamily="18" charset="0"/>
+              <a:cs typeface="Times New Roman" panose="02020603050405020304" pitchFamily="18" charset="0"/>
             </a:endParaRPr>
           </a:p>
         </p:txBody>
@@ -9662,8 +9662,8 @@
                 <a:solidFill>
                   <a:schemeClr val="tx1"/>
                 </a:solidFill>
-                <a:latin typeface="Times New Roman" panose="02020503050405090304" pitchFamily="18" charset="0"/>
-                <a:cs typeface="Times New Roman" panose="02020503050405090304" pitchFamily="18" charset="0"/>
+                <a:latin typeface="Times New Roman" panose="02020603050405020304" pitchFamily="18" charset="0"/>
+                <a:cs typeface="Times New Roman" panose="02020603050405020304" pitchFamily="18" charset="0"/>
               </a:rPr>
               <a:t>PWC C, BN</a:t>
             </a:r>
@@ -9671,8 +9671,8 @@
               <a:solidFill>
                 <a:schemeClr val="tx1"/>
               </a:solidFill>
-              <a:latin typeface="Times New Roman" panose="02020503050405090304" pitchFamily="18" charset="0"/>
-              <a:cs typeface="Times New Roman" panose="02020503050405090304" pitchFamily="18" charset="0"/>
+              <a:latin typeface="Times New Roman" panose="02020603050405020304" pitchFamily="18" charset="0"/>
+              <a:cs typeface="Times New Roman" panose="02020603050405020304" pitchFamily="18" charset="0"/>
             </a:endParaRPr>
           </a:p>
         </p:txBody>
@@ -9729,8 +9729,8 @@
                 <a:solidFill>
                   <a:schemeClr val="tx1"/>
                 </a:solidFill>
-                <a:latin typeface="Times New Roman" panose="02020503050405090304" pitchFamily="18" charset="0"/>
-                <a:cs typeface="Times New Roman" panose="02020503050405090304" pitchFamily="18" charset="0"/>
+                <a:latin typeface="Times New Roman" panose="02020603050405020304" pitchFamily="18" charset="0"/>
+                <a:cs typeface="Times New Roman" panose="02020603050405020304" pitchFamily="18" charset="0"/>
               </a:rPr>
               <a:t>PWC, Cx2</a:t>
             </a:r>
@@ -9738,8 +9738,8 @@
               <a:solidFill>
                 <a:schemeClr val="tx1"/>
               </a:solidFill>
-              <a:latin typeface="Times New Roman" panose="02020503050405090304" pitchFamily="18" charset="0"/>
-              <a:cs typeface="Times New Roman" panose="02020503050405090304" pitchFamily="18" charset="0"/>
+              <a:latin typeface="Times New Roman" panose="02020603050405020304" pitchFamily="18" charset="0"/>
+              <a:cs typeface="Times New Roman" panose="02020603050405020304" pitchFamily="18" charset="0"/>
             </a:endParaRPr>
           </a:p>
         </p:txBody>
@@ -9796,8 +9796,8 @@
                 <a:solidFill>
                   <a:schemeClr val="tx1"/>
                 </a:solidFill>
-                <a:latin typeface="Times New Roman" panose="02020503050405090304" pitchFamily="18" charset="0"/>
-                <a:cs typeface="Times New Roman" panose="02020503050405090304" pitchFamily="18" charset="0"/>
+                <a:latin typeface="Times New Roman" panose="02020603050405020304" pitchFamily="18" charset="0"/>
+                <a:cs typeface="Times New Roman" panose="02020603050405020304" pitchFamily="18" charset="0"/>
               </a:rPr>
               <a:t>BN, ReLU6</a:t>
             </a:r>
@@ -9805,8 +9805,8 @@
               <a:solidFill>
                 <a:schemeClr val="tx1"/>
               </a:solidFill>
-              <a:latin typeface="Times New Roman" panose="02020503050405090304" pitchFamily="18" charset="0"/>
-              <a:cs typeface="Times New Roman" panose="02020503050405090304" pitchFamily="18" charset="0"/>
+              <a:latin typeface="Times New Roman" panose="02020603050405020304" pitchFamily="18" charset="0"/>
+              <a:cs typeface="Times New Roman" panose="02020603050405020304" pitchFamily="18" charset="0"/>
             </a:endParaRPr>
           </a:p>
         </p:txBody>
@@ -9992,8 +9992,8 @@
                 <a:solidFill>
                   <a:schemeClr val="tx1"/>
                 </a:solidFill>
-                <a:latin typeface="Times New Roman" panose="02020503050405090304" pitchFamily="18" charset="0"/>
-                <a:cs typeface="Times New Roman" panose="02020503050405090304" pitchFamily="18" charset="0"/>
+                <a:latin typeface="Times New Roman" panose="02020603050405020304" pitchFamily="18" charset="0"/>
+                <a:cs typeface="Times New Roman" panose="02020603050405020304" pitchFamily="18" charset="0"/>
               </a:rPr>
               <a:t>BN, ReLU6 </a:t>
             </a:r>
@@ -10001,8 +10001,8 @@
               <a:solidFill>
                 <a:schemeClr val="tx1"/>
               </a:solidFill>
-              <a:latin typeface="Times New Roman" panose="02020503050405090304" pitchFamily="18" charset="0"/>
-              <a:cs typeface="Times New Roman" panose="02020503050405090304" pitchFamily="18" charset="0"/>
+              <a:latin typeface="Times New Roman" panose="02020603050405020304" pitchFamily="18" charset="0"/>
+              <a:cs typeface="Times New Roman" panose="02020603050405020304" pitchFamily="18" charset="0"/>
             </a:endParaRPr>
           </a:p>
         </p:txBody>
@@ -10098,8 +10098,8 @@
                 <a:solidFill>
                   <a:schemeClr val="tx1"/>
                 </a:solidFill>
-                <a:latin typeface="Times New Roman" panose="02020503050405090304" pitchFamily="18" charset="0"/>
-                <a:cs typeface="Times New Roman" panose="02020503050405090304" pitchFamily="18" charset="0"/>
+                <a:latin typeface="Times New Roman" panose="02020603050405020304" pitchFamily="18" charset="0"/>
+                <a:cs typeface="Times New Roman" panose="02020603050405020304" pitchFamily="18" charset="0"/>
               </a:rPr>
               <a:t>VSS Block *2</a:t>
             </a:r>
@@ -10107,8 +10107,8 @@
               <a:solidFill>
                 <a:schemeClr val="tx1"/>
               </a:solidFill>
-              <a:latin typeface="Times New Roman" panose="02020503050405090304" pitchFamily="18" charset="0"/>
-              <a:cs typeface="Times New Roman" panose="02020503050405090304" pitchFamily="18" charset="0"/>
+              <a:latin typeface="Times New Roman" panose="02020603050405020304" pitchFamily="18" charset="0"/>
+              <a:cs typeface="Times New Roman" panose="02020603050405020304" pitchFamily="18" charset="0"/>
             </a:endParaRPr>
           </a:p>
         </p:txBody>
@@ -10165,8 +10165,8 @@
                 <a:solidFill>
                   <a:schemeClr val="tx1"/>
                 </a:solidFill>
-                <a:latin typeface="Times New Roman" panose="02020503050405090304" pitchFamily="18" charset="0"/>
-                <a:cs typeface="Times New Roman" panose="02020503050405090304" pitchFamily="18" charset="0"/>
+                <a:latin typeface="Times New Roman" panose="02020603050405020304" pitchFamily="18" charset="0"/>
+                <a:cs typeface="Times New Roman" panose="02020603050405020304" pitchFamily="18" charset="0"/>
               </a:rPr>
               <a:t>Patch Merging</a:t>
             </a:r>
@@ -10174,8 +10174,8 @@
               <a:solidFill>
                 <a:schemeClr val="tx1"/>
               </a:solidFill>
-              <a:latin typeface="Times New Roman" panose="02020503050405090304" pitchFamily="18" charset="0"/>
-              <a:cs typeface="Times New Roman" panose="02020503050405090304" pitchFamily="18" charset="0"/>
+              <a:latin typeface="Times New Roman" panose="02020603050405020304" pitchFamily="18" charset="0"/>
+              <a:cs typeface="Times New Roman" panose="02020603050405020304" pitchFamily="18" charset="0"/>
             </a:endParaRPr>
           </a:p>
         </p:txBody>
@@ -10280,8 +10280,8 @@
                 <a:solidFill>
                   <a:schemeClr val="tx1"/>
                 </a:solidFill>
-                <a:latin typeface="Times New Roman" panose="02020503050405090304" pitchFamily="18" charset="0"/>
-                <a:cs typeface="Times New Roman" panose="02020503050405090304" pitchFamily="18" charset="0"/>
+                <a:latin typeface="Times New Roman" panose="02020603050405020304" pitchFamily="18" charset="0"/>
+                <a:cs typeface="Times New Roman" panose="02020603050405020304" pitchFamily="18" charset="0"/>
               </a:rPr>
               <a:t>SLGAG</a:t>
             </a:r>
@@ -10289,8 +10289,8 @@
               <a:solidFill>
                 <a:schemeClr val="tx1"/>
               </a:solidFill>
-              <a:latin typeface="Times New Roman" panose="02020503050405090304" pitchFamily="18" charset="0"/>
-              <a:cs typeface="Times New Roman" panose="02020503050405090304" pitchFamily="18" charset="0"/>
+              <a:latin typeface="Times New Roman" panose="02020603050405020304" pitchFamily="18" charset="0"/>
+              <a:cs typeface="Times New Roman" panose="02020603050405020304" pitchFamily="18" charset="0"/>
             </a:endParaRPr>
           </a:p>
         </p:txBody>
@@ -10426,8 +10426,8 @@
                 <a:solidFill>
                   <a:schemeClr val="tx1"/>
                 </a:solidFill>
-                <a:latin typeface="Times New Roman" panose="02020503050405090304" pitchFamily="18" charset="0"/>
-                <a:cs typeface="Times New Roman" panose="02020503050405090304" pitchFamily="18" charset="0"/>
+                <a:latin typeface="Times New Roman" panose="02020603050405020304" pitchFamily="18" charset="0"/>
+                <a:cs typeface="Times New Roman" panose="02020603050405020304" pitchFamily="18" charset="0"/>
               </a:rPr>
               <a:t>SLGAG</a:t>
             </a:r>
@@ -10435,8 +10435,8 @@
               <a:solidFill>
                 <a:schemeClr val="tx1"/>
               </a:solidFill>
-              <a:latin typeface="Times New Roman" panose="02020503050405090304" pitchFamily="18" charset="0"/>
-              <a:cs typeface="Times New Roman" panose="02020503050405090304" pitchFamily="18" charset="0"/>
+              <a:latin typeface="Times New Roman" panose="02020603050405020304" pitchFamily="18" charset="0"/>
+              <a:cs typeface="Times New Roman" panose="02020603050405020304" pitchFamily="18" charset="0"/>
             </a:endParaRPr>
           </a:p>
         </p:txBody>
@@ -10493,8 +10493,8 @@
                 <a:solidFill>
                   <a:schemeClr val="tx1"/>
                 </a:solidFill>
-                <a:latin typeface="Times New Roman" panose="02020503050405090304" pitchFamily="18" charset="0"/>
-                <a:cs typeface="Times New Roman" panose="02020503050405090304" pitchFamily="18" charset="0"/>
+                <a:latin typeface="Times New Roman" panose="02020603050405020304" pitchFamily="18" charset="0"/>
+                <a:cs typeface="Times New Roman" panose="02020603050405020304" pitchFamily="18" charset="0"/>
               </a:rPr>
               <a:t>SLGAG</a:t>
             </a:r>
@@ -10502,8 +10502,8 @@
               <a:solidFill>
                 <a:schemeClr val="tx1"/>
               </a:solidFill>
-              <a:latin typeface="Times New Roman" panose="02020503050405090304" pitchFamily="18" charset="0"/>
-              <a:cs typeface="Times New Roman" panose="02020503050405090304" pitchFamily="18" charset="0"/>
+              <a:latin typeface="Times New Roman" panose="02020603050405020304" pitchFamily="18" charset="0"/>
+              <a:cs typeface="Times New Roman" panose="02020603050405020304" pitchFamily="18" charset="0"/>
             </a:endParaRPr>
           </a:p>
         </p:txBody>
@@ -10718,8 +10718,8 @@
                 <a:solidFill>
                   <a:schemeClr val="tx1"/>
                 </a:solidFill>
-                <a:latin typeface="Times New Roman" panose="02020503050405090304" pitchFamily="18" charset="0"/>
-                <a:cs typeface="Times New Roman" panose="02020503050405090304" pitchFamily="18" charset="0"/>
+                <a:latin typeface="Times New Roman" panose="02020603050405020304" pitchFamily="18" charset="0"/>
+                <a:cs typeface="Times New Roman" panose="02020603050405020304" pitchFamily="18" charset="0"/>
               </a:rPr>
               <a:t>Input</a:t>
             </a:r>
@@ -10727,8 +10727,8 @@
               <a:solidFill>
                 <a:schemeClr val="tx1"/>
               </a:solidFill>
-              <a:latin typeface="Times New Roman" panose="02020503050405090304" pitchFamily="18" charset="0"/>
-              <a:cs typeface="Times New Roman" panose="02020503050405090304" pitchFamily="18" charset="0"/>
+              <a:latin typeface="Times New Roman" panose="02020603050405020304" pitchFamily="18" charset="0"/>
+              <a:cs typeface="Times New Roman" panose="02020603050405020304" pitchFamily="18" charset="0"/>
             </a:endParaRPr>
           </a:p>
         </p:txBody>
@@ -10785,8 +10785,8 @@
                 <a:solidFill>
                   <a:schemeClr val="tx1"/>
                 </a:solidFill>
-                <a:latin typeface="Times New Roman" panose="02020503050405090304" pitchFamily="18" charset="0"/>
-                <a:cs typeface="Times New Roman" panose="02020503050405090304" pitchFamily="18" charset="0"/>
+                <a:latin typeface="Times New Roman" panose="02020603050405020304" pitchFamily="18" charset="0"/>
+                <a:cs typeface="Times New Roman" panose="02020603050405020304" pitchFamily="18" charset="0"/>
               </a:rPr>
               <a:t>Output</a:t>
             </a:r>
@@ -10794,8 +10794,8 @@
               <a:solidFill>
                 <a:schemeClr val="tx1"/>
               </a:solidFill>
-              <a:latin typeface="Times New Roman" panose="02020503050405090304" pitchFamily="18" charset="0"/>
-              <a:cs typeface="Times New Roman" panose="02020503050405090304" pitchFamily="18" charset="0"/>
+              <a:latin typeface="Times New Roman" panose="02020603050405020304" pitchFamily="18" charset="0"/>
+              <a:cs typeface="Times New Roman" panose="02020603050405020304" pitchFamily="18" charset="0"/>
             </a:endParaRPr>
           </a:p>
         </p:txBody>
@@ -10847,7 +10847,7 @@
         </p:nvSpPr>
         <p:spPr>
           <a:xfrm>
-            <a:off x="3952230" y="7314940"/>
+            <a:off x="3952231" y="7502339"/>
             <a:ext cx="1370257" cy="503638"/>
           </a:xfrm>
           <a:prstGeom prst="roundRect">
@@ -10891,8 +10891,8 @@
                 <a:solidFill>
                   <a:schemeClr val="tx1"/>
                 </a:solidFill>
-                <a:latin typeface="Times New Roman" panose="02020503050405090304" pitchFamily="18" charset="0"/>
-                <a:cs typeface="Times New Roman" panose="02020503050405090304" pitchFamily="18" charset="0"/>
+                <a:latin typeface="Times New Roman" panose="02020603050405020304" pitchFamily="18" charset="0"/>
+                <a:cs typeface="Times New Roman" panose="02020603050405020304" pitchFamily="18" charset="0"/>
               </a:rPr>
               <a:t>SLCB</a:t>
             </a:r>
@@ -10900,8 +10900,8 @@
               <a:solidFill>
                 <a:schemeClr val="tx1"/>
               </a:solidFill>
-              <a:latin typeface="Times New Roman" panose="02020503050405090304" pitchFamily="18" charset="0"/>
-              <a:cs typeface="Times New Roman" panose="02020503050405090304" pitchFamily="18" charset="0"/>
+              <a:latin typeface="Times New Roman" panose="02020603050405020304" pitchFamily="18" charset="0"/>
+              <a:cs typeface="Times New Roman" panose="02020603050405020304" pitchFamily="18" charset="0"/>
             </a:endParaRPr>
           </a:p>
         </p:txBody>
@@ -10957,8 +10957,8 @@
                 <a:solidFill>
                   <a:schemeClr val="tx1"/>
                 </a:solidFill>
-                <a:latin typeface="Times New Roman" panose="02020503050405090304" pitchFamily="18" charset="0"/>
-                <a:cs typeface="Times New Roman" panose="02020503050405090304" pitchFamily="18" charset="0"/>
+                <a:latin typeface="Times New Roman" panose="02020603050405020304" pitchFamily="18" charset="0"/>
+                <a:cs typeface="Times New Roman" panose="02020603050405020304" pitchFamily="18" charset="0"/>
               </a:rPr>
               <a:t>Patch Embedding</a:t>
             </a:r>
@@ -10966,8 +10966,8 @@
               <a:solidFill>
                 <a:schemeClr val="tx1"/>
               </a:solidFill>
-              <a:latin typeface="Times New Roman" panose="02020503050405090304" pitchFamily="18" charset="0"/>
-              <a:cs typeface="Times New Roman" panose="02020503050405090304" pitchFamily="18" charset="0"/>
+              <a:latin typeface="Times New Roman" panose="02020603050405020304" pitchFamily="18" charset="0"/>
+              <a:cs typeface="Times New Roman" panose="02020603050405020304" pitchFamily="18" charset="0"/>
             </a:endParaRPr>
           </a:p>
         </p:txBody>
@@ -11024,8 +11024,8 @@
                 <a:solidFill>
                   <a:schemeClr val="tx1"/>
                 </a:solidFill>
-                <a:latin typeface="Times New Roman" panose="02020503050405090304" pitchFamily="18" charset="0"/>
-                <a:cs typeface="Times New Roman" panose="02020503050405090304" pitchFamily="18" charset="0"/>
+                <a:latin typeface="Times New Roman" panose="02020603050405020304" pitchFamily="18" charset="0"/>
+                <a:cs typeface="Times New Roman" panose="02020603050405020304" pitchFamily="18" charset="0"/>
               </a:rPr>
               <a:t>SLCB</a:t>
             </a:r>
@@ -11033,8 +11033,8 @@
               <a:solidFill>
                 <a:schemeClr val="tx1"/>
               </a:solidFill>
-              <a:latin typeface="Times New Roman" panose="02020503050405090304" pitchFamily="18" charset="0"/>
-              <a:cs typeface="Times New Roman" panose="02020503050405090304" pitchFamily="18" charset="0"/>
+              <a:latin typeface="Times New Roman" panose="02020603050405020304" pitchFamily="18" charset="0"/>
+              <a:cs typeface="Times New Roman" panose="02020603050405020304" pitchFamily="18" charset="0"/>
             </a:endParaRPr>
           </a:p>
         </p:txBody>
@@ -11090,8 +11090,8 @@
                 <a:solidFill>
                   <a:schemeClr val="tx1"/>
                 </a:solidFill>
-                <a:latin typeface="Times New Roman" panose="02020503050405090304" pitchFamily="18" charset="0"/>
-                <a:cs typeface="Times New Roman" panose="02020503050405090304" pitchFamily="18" charset="0"/>
+                <a:latin typeface="Times New Roman" panose="02020603050405020304" pitchFamily="18" charset="0"/>
+                <a:cs typeface="Times New Roman" panose="02020603050405020304" pitchFamily="18" charset="0"/>
               </a:rPr>
               <a:t>SH</a:t>
             </a:r>
@@ -11099,8 +11099,8 @@
               <a:solidFill>
                 <a:schemeClr val="tx1"/>
               </a:solidFill>
-              <a:latin typeface="Times New Roman" panose="02020503050405090304" pitchFamily="18" charset="0"/>
-              <a:cs typeface="Times New Roman" panose="02020503050405090304" pitchFamily="18" charset="0"/>
+              <a:latin typeface="Times New Roman" panose="02020603050405020304" pitchFamily="18" charset="0"/>
+              <a:cs typeface="Times New Roman" panose="02020603050405020304" pitchFamily="18" charset="0"/>
             </a:endParaRPr>
           </a:p>
         </p:txBody>
@@ -11233,12 +11233,12 @@
         </p:nvCxnSpPr>
         <p:spPr>
           <a:xfrm rot="16200000" flipH="1">
-            <a:off x="3179681" y="6360899"/>
-            <a:ext cx="105419" cy="2809938"/>
+            <a:off x="3085981" y="6454598"/>
+            <a:ext cx="292818" cy="2809939"/>
           </a:xfrm>
           <a:prstGeom prst="bentConnector3">
             <a:avLst>
-              <a:gd name="adj1" fmla="val 316849"/>
+              <a:gd name="adj1" fmla="val 178069"/>
             </a:avLst>
           </a:prstGeom>
           <a:ln w="19050">
@@ -11274,8 +11274,8 @@
         </p:nvCxnSpPr>
         <p:spPr>
           <a:xfrm rot="10800000">
-            <a:off x="3245620" y="7109637"/>
-            <a:ext cx="706611" cy="457122"/>
+            <a:off x="3245619" y="7109638"/>
+            <a:ext cx="706613" cy="644521"/>
           </a:xfrm>
           <a:prstGeom prst="bentConnector2">
             <a:avLst/>
@@ -11762,8 +11762,8 @@
                 <a:solidFill>
                   <a:schemeClr val="tx1"/>
                 </a:solidFill>
-                <a:latin typeface="Times New Roman" panose="02020503050405090304" pitchFamily="18" charset="0"/>
-                <a:cs typeface="Times New Roman" panose="02020503050405090304" pitchFamily="18" charset="0"/>
+                <a:latin typeface="Times New Roman" panose="02020603050405020304" pitchFamily="18" charset="0"/>
+                <a:cs typeface="Times New Roman" panose="02020603050405020304" pitchFamily="18" charset="0"/>
               </a:rPr>
               <a:t>VSS Block *2</a:t>
             </a:r>
@@ -11771,8 +11771,8 @@
               <a:solidFill>
                 <a:schemeClr val="tx1"/>
               </a:solidFill>
-              <a:latin typeface="Times New Roman" panose="02020503050405090304" pitchFamily="18" charset="0"/>
-              <a:cs typeface="Times New Roman" panose="02020503050405090304" pitchFamily="18" charset="0"/>
+              <a:latin typeface="Times New Roman" panose="02020603050405020304" pitchFamily="18" charset="0"/>
+              <a:cs typeface="Times New Roman" panose="02020603050405020304" pitchFamily="18" charset="0"/>
             </a:endParaRPr>
           </a:p>
         </p:txBody>
@@ -11829,8 +11829,8 @@
                 <a:solidFill>
                   <a:schemeClr val="tx1"/>
                 </a:solidFill>
-                <a:latin typeface="Times New Roman" panose="02020503050405090304" pitchFamily="18" charset="0"/>
-                <a:cs typeface="Times New Roman" panose="02020503050405090304" pitchFamily="18" charset="0"/>
+                <a:latin typeface="Times New Roman" panose="02020603050405020304" pitchFamily="18" charset="0"/>
+                <a:cs typeface="Times New Roman" panose="02020603050405020304" pitchFamily="18" charset="0"/>
               </a:rPr>
               <a:t>Patch Merging</a:t>
             </a:r>
@@ -11838,8 +11838,8 @@
               <a:solidFill>
                 <a:schemeClr val="tx1"/>
               </a:solidFill>
-              <a:latin typeface="Times New Roman" panose="02020503050405090304" pitchFamily="18" charset="0"/>
-              <a:cs typeface="Times New Roman" panose="02020503050405090304" pitchFamily="18" charset="0"/>
+              <a:latin typeface="Times New Roman" panose="02020603050405020304" pitchFamily="18" charset="0"/>
+              <a:cs typeface="Times New Roman" panose="02020603050405020304" pitchFamily="18" charset="0"/>
             </a:endParaRPr>
           </a:p>
         </p:txBody>
@@ -11896,8 +11896,8 @@
                 <a:solidFill>
                   <a:schemeClr val="tx1"/>
                 </a:solidFill>
-                <a:latin typeface="Times New Roman" panose="02020503050405090304" pitchFamily="18" charset="0"/>
-                <a:cs typeface="Times New Roman" panose="02020503050405090304" pitchFamily="18" charset="0"/>
+                <a:latin typeface="Times New Roman" panose="02020603050405020304" pitchFamily="18" charset="0"/>
+                <a:cs typeface="Times New Roman" panose="02020603050405020304" pitchFamily="18" charset="0"/>
               </a:rPr>
               <a:t>VSS Block *2</a:t>
             </a:r>
@@ -11905,8 +11905,8 @@
               <a:solidFill>
                 <a:schemeClr val="tx1"/>
               </a:solidFill>
-              <a:latin typeface="Times New Roman" panose="02020503050405090304" pitchFamily="18" charset="0"/>
-              <a:cs typeface="Times New Roman" panose="02020503050405090304" pitchFamily="18" charset="0"/>
+              <a:latin typeface="Times New Roman" panose="02020603050405020304" pitchFamily="18" charset="0"/>
+              <a:cs typeface="Times New Roman" panose="02020603050405020304" pitchFamily="18" charset="0"/>
             </a:endParaRPr>
           </a:p>
         </p:txBody>
@@ -11963,8 +11963,8 @@
                 <a:solidFill>
                   <a:schemeClr val="tx1"/>
                 </a:solidFill>
-                <a:latin typeface="Times New Roman" panose="02020503050405090304" pitchFamily="18" charset="0"/>
-                <a:cs typeface="Times New Roman" panose="02020503050405090304" pitchFamily="18" charset="0"/>
+                <a:latin typeface="Times New Roman" panose="02020603050405020304" pitchFamily="18" charset="0"/>
+                <a:cs typeface="Times New Roman" panose="02020603050405020304" pitchFamily="18" charset="0"/>
               </a:rPr>
               <a:t>Patch Merging</a:t>
             </a:r>
@@ -11972,8 +11972,8 @@
               <a:solidFill>
                 <a:schemeClr val="tx1"/>
               </a:solidFill>
-              <a:latin typeface="Times New Roman" panose="02020503050405090304" pitchFamily="18" charset="0"/>
-              <a:cs typeface="Times New Roman" panose="02020503050405090304" pitchFamily="18" charset="0"/>
+              <a:latin typeface="Times New Roman" panose="02020603050405020304" pitchFamily="18" charset="0"/>
+              <a:cs typeface="Times New Roman" panose="02020603050405020304" pitchFamily="18" charset="0"/>
             </a:endParaRPr>
           </a:p>
         </p:txBody>
@@ -12030,8 +12030,8 @@
                 <a:solidFill>
                   <a:schemeClr val="tx1"/>
                 </a:solidFill>
-                <a:latin typeface="Times New Roman" panose="02020503050405090304" pitchFamily="18" charset="0"/>
-                <a:cs typeface="Times New Roman" panose="02020503050405090304" pitchFamily="18" charset="0"/>
+                <a:latin typeface="Times New Roman" panose="02020603050405020304" pitchFamily="18" charset="0"/>
+                <a:cs typeface="Times New Roman" panose="02020603050405020304" pitchFamily="18" charset="0"/>
               </a:rPr>
               <a:t>VSS Block *2</a:t>
             </a:r>
@@ -12039,8 +12039,8 @@
               <a:solidFill>
                 <a:schemeClr val="tx1"/>
               </a:solidFill>
-              <a:latin typeface="Times New Roman" panose="02020503050405090304" pitchFamily="18" charset="0"/>
-              <a:cs typeface="Times New Roman" panose="02020503050405090304" pitchFamily="18" charset="0"/>
+              <a:latin typeface="Times New Roman" panose="02020603050405020304" pitchFamily="18" charset="0"/>
+              <a:cs typeface="Times New Roman" panose="02020603050405020304" pitchFamily="18" charset="0"/>
             </a:endParaRPr>
           </a:p>
         </p:txBody>
@@ -12097,8 +12097,8 @@
                 <a:solidFill>
                   <a:schemeClr val="tx1"/>
                 </a:solidFill>
-                <a:latin typeface="Times New Roman" panose="02020503050405090304" pitchFamily="18" charset="0"/>
-                <a:cs typeface="Times New Roman" panose="02020503050405090304" pitchFamily="18" charset="0"/>
+                <a:latin typeface="Times New Roman" panose="02020603050405020304" pitchFamily="18" charset="0"/>
+                <a:cs typeface="Times New Roman" panose="02020603050405020304" pitchFamily="18" charset="0"/>
               </a:rPr>
               <a:t>Patch Expanding</a:t>
             </a:r>
@@ -12106,8 +12106,8 @@
               <a:solidFill>
                 <a:schemeClr val="tx1"/>
               </a:solidFill>
-              <a:latin typeface="Times New Roman" panose="02020503050405090304" pitchFamily="18" charset="0"/>
-              <a:cs typeface="Times New Roman" panose="02020503050405090304" pitchFamily="18" charset="0"/>
+              <a:latin typeface="Times New Roman" panose="02020603050405020304" pitchFamily="18" charset="0"/>
+              <a:cs typeface="Times New Roman" panose="02020603050405020304" pitchFamily="18" charset="0"/>
             </a:endParaRPr>
           </a:p>
         </p:txBody>
@@ -12164,8 +12164,8 @@
                 <a:solidFill>
                   <a:schemeClr val="tx1"/>
                 </a:solidFill>
-                <a:latin typeface="Times New Roman" panose="02020503050405090304" pitchFamily="18" charset="0"/>
-                <a:cs typeface="Times New Roman" panose="02020503050405090304" pitchFamily="18" charset="0"/>
+                <a:latin typeface="Times New Roman" panose="02020603050405020304" pitchFamily="18" charset="0"/>
+                <a:cs typeface="Times New Roman" panose="02020603050405020304" pitchFamily="18" charset="0"/>
               </a:rPr>
               <a:t>SLCB</a:t>
             </a:r>
@@ -12173,8 +12173,8 @@
               <a:solidFill>
                 <a:schemeClr val="tx1"/>
               </a:solidFill>
-              <a:latin typeface="Times New Roman" panose="02020503050405090304" pitchFamily="18" charset="0"/>
-              <a:cs typeface="Times New Roman" panose="02020503050405090304" pitchFamily="18" charset="0"/>
+              <a:latin typeface="Times New Roman" panose="02020603050405020304" pitchFamily="18" charset="0"/>
+              <a:cs typeface="Times New Roman" panose="02020603050405020304" pitchFamily="18" charset="0"/>
             </a:endParaRPr>
           </a:p>
         </p:txBody>
@@ -12231,8 +12231,8 @@
                 <a:solidFill>
                   <a:schemeClr val="tx1"/>
                 </a:solidFill>
-                <a:latin typeface="Times New Roman" panose="02020503050405090304" pitchFamily="18" charset="0"/>
-                <a:cs typeface="Times New Roman" panose="02020503050405090304" pitchFamily="18" charset="0"/>
+                <a:latin typeface="Times New Roman" panose="02020603050405020304" pitchFamily="18" charset="0"/>
+                <a:cs typeface="Times New Roman" panose="02020603050405020304" pitchFamily="18" charset="0"/>
               </a:rPr>
               <a:t>Patch Expanding</a:t>
             </a:r>
@@ -12240,8 +12240,8 @@
               <a:solidFill>
                 <a:schemeClr val="tx1"/>
               </a:solidFill>
-              <a:latin typeface="Times New Roman" panose="02020503050405090304" pitchFamily="18" charset="0"/>
-              <a:cs typeface="Times New Roman" panose="02020503050405090304" pitchFamily="18" charset="0"/>
+              <a:latin typeface="Times New Roman" panose="02020603050405020304" pitchFamily="18" charset="0"/>
+              <a:cs typeface="Times New Roman" panose="02020603050405020304" pitchFamily="18" charset="0"/>
             </a:endParaRPr>
           </a:p>
         </p:txBody>
@@ -12298,8 +12298,8 @@
                 <a:solidFill>
                   <a:schemeClr val="tx1"/>
                 </a:solidFill>
-                <a:latin typeface="Times New Roman" panose="02020503050405090304" pitchFamily="18" charset="0"/>
-                <a:cs typeface="Times New Roman" panose="02020503050405090304" pitchFamily="18" charset="0"/>
+                <a:latin typeface="Times New Roman" panose="02020603050405020304" pitchFamily="18" charset="0"/>
+                <a:cs typeface="Times New Roman" panose="02020603050405020304" pitchFamily="18" charset="0"/>
               </a:rPr>
               <a:t>SLCB</a:t>
             </a:r>
@@ -12307,8 +12307,8 @@
               <a:solidFill>
                 <a:schemeClr val="tx1"/>
               </a:solidFill>
-              <a:latin typeface="Times New Roman" panose="02020503050405090304" pitchFamily="18" charset="0"/>
-              <a:cs typeface="Times New Roman" panose="02020503050405090304" pitchFamily="18" charset="0"/>
+              <a:latin typeface="Times New Roman" panose="02020603050405020304" pitchFamily="18" charset="0"/>
+              <a:cs typeface="Times New Roman" panose="02020603050405020304" pitchFamily="18" charset="0"/>
             </a:endParaRPr>
           </a:p>
         </p:txBody>
@@ -12402,8 +12402,8 @@
         </p:nvCxnSpPr>
         <p:spPr>
           <a:xfrm flipH="1" flipV="1">
-            <a:off x="4634160" y="7013180"/>
-            <a:ext cx="3199" cy="301761"/>
+            <a:off x="4634159" y="7013180"/>
+            <a:ext cx="3201" cy="489159"/>
           </a:xfrm>
           <a:prstGeom prst="straightConnector1">
             <a:avLst/>
@@ -12438,8 +12438,8 @@
         </p:nvSpPr>
         <p:spPr>
           <a:xfrm>
-            <a:off x="2289457" y="1191321"/>
-            <a:ext cx="1752404" cy="410433"/>
+            <a:off x="1905819" y="562671"/>
+            <a:ext cx="2644140" cy="408940"/>
           </a:xfrm>
           <a:prstGeom prst="rect">
             <a:avLst/>
@@ -12455,21 +12455,28 @@
             <a:pPr algn="ctr"/>
             <a:r>
               <a:rPr lang="en-US" altLang="zh-CN" sz="2065" dirty="0">
-                <a:latin typeface="Times New Roman" panose="02020503050405090304" pitchFamily="18" charset="0"/>
-                <a:cs typeface="Times New Roman" panose="02020503050405090304" pitchFamily="18" charset="0"/>
+                <a:latin typeface="Times New Roman" panose="02020603050405020304" pitchFamily="18" charset="0"/>
+                <a:cs typeface="Times New Roman" panose="02020603050405020304" pitchFamily="18" charset="0"/>
               </a:rPr>
               <a:t>(a) </a:t>
             </a:r>
             <a:r>
               <a:rPr lang="en-US" altLang="zh-CN" sz="2065" b="1" dirty="0" err="1">
-                <a:latin typeface="Times New Roman" panose="02020503050405090304" pitchFamily="18" charset="0"/>
-                <a:cs typeface="Times New Roman" panose="02020503050405090304" pitchFamily="18" charset="0"/>
+                <a:latin typeface="Times New Roman" panose="02020603050405020304" pitchFamily="18" charset="0"/>
+                <a:cs typeface="Times New Roman" panose="02020603050405020304" pitchFamily="18" charset="0"/>
               </a:rPr>
               <a:t>SLMamba</a:t>
             </a:r>
-            <a:endParaRPr lang="zh-CN" altLang="en-US" sz="2065" b="1" dirty="0">
-              <a:latin typeface="Times New Roman" panose="02020503050405090304" pitchFamily="18" charset="0"/>
-              <a:cs typeface="Times New Roman" panose="02020503050405090304" pitchFamily="18" charset="0"/>
+            <a:r>
+              <a:rPr lang="en-US" altLang="zh-CN" sz="2065" b="1" dirty="0" err="1">
+                <a:latin typeface="Times New Roman" panose="02020603050405020304" pitchFamily="18" charset="0"/>
+                <a:cs typeface="Times New Roman" panose="02020603050405020304" pitchFamily="18" charset="0"/>
+              </a:rPr>
+              <a:t>MedSeg</a:t>
+            </a:r>
+            <a:endParaRPr lang="en-US" altLang="zh-CN" sz="2065" b="1" dirty="0" err="1">
+              <a:latin typeface="Times New Roman" panose="02020603050405020304" pitchFamily="18" charset="0"/>
+              <a:cs typeface="Times New Roman" panose="02020603050405020304" pitchFamily="18" charset="0"/>
             </a:endParaRPr>
           </a:p>
         </p:txBody>
@@ -12504,8 +12511,8 @@
                     <a:lumMod val="50000"/>
                   </a:schemeClr>
                 </a:solidFill>
-                <a:latin typeface="Times New Roman" panose="02020503050405090304" pitchFamily="18" charset="0"/>
-                <a:cs typeface="Times New Roman" panose="02020503050405090304" pitchFamily="18" charset="0"/>
+                <a:latin typeface="Times New Roman" panose="02020603050405020304" pitchFamily="18" charset="0"/>
+                <a:cs typeface="Times New Roman" panose="02020603050405020304" pitchFamily="18" charset="0"/>
               </a:rPr>
               <a:t>x1</a:t>
             </a:r>
@@ -12515,8 +12522,8 @@
                   <a:lumMod val="50000"/>
                 </a:schemeClr>
               </a:solidFill>
-              <a:latin typeface="Times New Roman" panose="02020503050405090304" pitchFamily="18" charset="0"/>
-              <a:cs typeface="Times New Roman" panose="02020503050405090304" pitchFamily="18" charset="0"/>
+              <a:latin typeface="Times New Roman" panose="02020603050405020304" pitchFamily="18" charset="0"/>
+              <a:cs typeface="Times New Roman" panose="02020603050405020304" pitchFamily="18" charset="0"/>
             </a:endParaRPr>
           </a:p>
         </p:txBody>
@@ -12551,8 +12558,8 @@
                     <a:lumMod val="50000"/>
                   </a:schemeClr>
                 </a:solidFill>
-                <a:latin typeface="Times New Roman" panose="02020503050405090304" pitchFamily="18" charset="0"/>
-                <a:cs typeface="Times New Roman" panose="02020503050405090304" pitchFamily="18" charset="0"/>
+                <a:latin typeface="Times New Roman" panose="02020603050405020304" pitchFamily="18" charset="0"/>
+                <a:cs typeface="Times New Roman" panose="02020603050405020304" pitchFamily="18" charset="0"/>
               </a:rPr>
               <a:t>x2</a:t>
             </a:r>
@@ -12562,8 +12569,8 @@
                   <a:lumMod val="50000"/>
                 </a:schemeClr>
               </a:solidFill>
-              <a:latin typeface="Times New Roman" panose="02020503050405090304" pitchFamily="18" charset="0"/>
-              <a:cs typeface="Times New Roman" panose="02020503050405090304" pitchFamily="18" charset="0"/>
+              <a:latin typeface="Times New Roman" panose="02020603050405020304" pitchFamily="18" charset="0"/>
+              <a:cs typeface="Times New Roman" panose="02020603050405020304" pitchFamily="18" charset="0"/>
             </a:endParaRPr>
           </a:p>
         </p:txBody>
@@ -12598,8 +12605,8 @@
                     <a:lumMod val="50000"/>
                   </a:schemeClr>
                 </a:solidFill>
-                <a:latin typeface="Times New Roman" panose="02020503050405090304" pitchFamily="18" charset="0"/>
-                <a:cs typeface="Times New Roman" panose="02020503050405090304" pitchFamily="18" charset="0"/>
+                <a:latin typeface="Times New Roman" panose="02020603050405020304" pitchFamily="18" charset="0"/>
+                <a:cs typeface="Times New Roman" panose="02020603050405020304" pitchFamily="18" charset="0"/>
               </a:rPr>
               <a:t>x3</a:t>
             </a:r>
@@ -12609,8 +12616,8 @@
                   <a:lumMod val="50000"/>
                 </a:schemeClr>
               </a:solidFill>
-              <a:latin typeface="Times New Roman" panose="02020503050405090304" pitchFamily="18" charset="0"/>
-              <a:cs typeface="Times New Roman" panose="02020503050405090304" pitchFamily="18" charset="0"/>
+              <a:latin typeface="Times New Roman" panose="02020603050405020304" pitchFamily="18" charset="0"/>
+              <a:cs typeface="Times New Roman" panose="02020603050405020304" pitchFamily="18" charset="0"/>
             </a:endParaRPr>
           </a:p>
         </p:txBody>
@@ -12645,8 +12652,8 @@
                     <a:lumMod val="50000"/>
                   </a:schemeClr>
                 </a:solidFill>
-                <a:latin typeface="Times New Roman" panose="02020503050405090304" pitchFamily="18" charset="0"/>
-                <a:cs typeface="Times New Roman" panose="02020503050405090304" pitchFamily="18" charset="0"/>
+                <a:latin typeface="Times New Roman" panose="02020603050405020304" pitchFamily="18" charset="0"/>
+                <a:cs typeface="Times New Roman" panose="02020603050405020304" pitchFamily="18" charset="0"/>
               </a:rPr>
               <a:t>x4</a:t>
             </a:r>
@@ -12656,8 +12663,8 @@
                   <a:lumMod val="50000"/>
                 </a:schemeClr>
               </a:solidFill>
-              <a:latin typeface="Times New Roman" panose="02020503050405090304" pitchFamily="18" charset="0"/>
-              <a:cs typeface="Times New Roman" panose="02020503050405090304" pitchFamily="18" charset="0"/>
+              <a:latin typeface="Times New Roman" panose="02020603050405020304" pitchFamily="18" charset="0"/>
+              <a:cs typeface="Times New Roman" panose="02020603050405020304" pitchFamily="18" charset="0"/>
             </a:endParaRPr>
           </a:p>
         </p:txBody>
@@ -12817,8 +12824,8 @@
                         <a:lumMod val="50000"/>
                       </a:schemeClr>
                     </a:solidFill>
-                    <a:latin typeface="Times New Roman" panose="02020503050405090304" pitchFamily="18" charset="0"/>
-                    <a:cs typeface="Times New Roman" panose="02020503050405090304" pitchFamily="18" charset="0"/>
+                    <a:latin typeface="Times New Roman" panose="02020603050405020304" pitchFamily="18" charset="0"/>
+                    <a:cs typeface="Times New Roman" panose="02020603050405020304" pitchFamily="18" charset="0"/>
                   </a:rPr>
                   <a:t>C</a:t>
                 </a:r>
@@ -12828,8 +12835,8 @@
                       <a:lumMod val="50000"/>
                     </a:schemeClr>
                   </a:solidFill>
-                  <a:latin typeface="Times New Roman" panose="02020503050405090304" pitchFamily="18" charset="0"/>
-                  <a:cs typeface="Times New Roman" panose="02020503050405090304" pitchFamily="18" charset="0"/>
+                  <a:latin typeface="Times New Roman" panose="02020603050405020304" pitchFamily="18" charset="0"/>
+                  <a:cs typeface="Times New Roman" panose="02020603050405020304" pitchFamily="18" charset="0"/>
                 </a:endParaRPr>
               </a:p>
             </p:txBody>
@@ -12926,8 +12933,8 @@
                 <a:solidFill>
                   <a:schemeClr val="tx1"/>
                 </a:solidFill>
-                <a:latin typeface="Times New Roman" panose="02020503050405090304" pitchFamily="18" charset="0"/>
-                <a:cs typeface="Times New Roman" panose="02020503050405090304" pitchFamily="18" charset="0"/>
+                <a:latin typeface="Times New Roman" panose="02020603050405020304" pitchFamily="18" charset="0"/>
+                <a:cs typeface="Times New Roman" panose="02020603050405020304" pitchFamily="18" charset="0"/>
               </a:rPr>
               <a:t>Patch Expanding</a:t>
             </a:r>
@@ -12935,8 +12942,8 @@
               <a:solidFill>
                 <a:schemeClr val="tx1"/>
               </a:solidFill>
-              <a:latin typeface="Times New Roman" panose="02020503050405090304" pitchFamily="18" charset="0"/>
-              <a:cs typeface="Times New Roman" panose="02020503050405090304" pitchFamily="18" charset="0"/>
+              <a:latin typeface="Times New Roman" panose="02020603050405020304" pitchFamily="18" charset="0"/>
+              <a:cs typeface="Times New Roman" panose="02020603050405020304" pitchFamily="18" charset="0"/>
             </a:endParaRPr>
           </a:p>
         </p:txBody>
@@ -13096,8 +13103,8 @@
                         <a:lumMod val="50000"/>
                       </a:schemeClr>
                     </a:solidFill>
-                    <a:latin typeface="Times New Roman" panose="02020503050405090304" pitchFamily="18" charset="0"/>
-                    <a:cs typeface="Times New Roman" panose="02020503050405090304" pitchFamily="18" charset="0"/>
+                    <a:latin typeface="Times New Roman" panose="02020603050405020304" pitchFamily="18" charset="0"/>
+                    <a:cs typeface="Times New Roman" panose="02020603050405020304" pitchFamily="18" charset="0"/>
                   </a:rPr>
                   <a:t>2C</a:t>
                 </a:r>
@@ -13107,8 +13114,8 @@
                       <a:lumMod val="50000"/>
                     </a:schemeClr>
                   </a:solidFill>
-                  <a:latin typeface="Times New Roman" panose="02020503050405090304" pitchFamily="18" charset="0"/>
-                  <a:cs typeface="Times New Roman" panose="02020503050405090304" pitchFamily="18" charset="0"/>
+                  <a:latin typeface="Times New Roman" panose="02020603050405020304" pitchFamily="18" charset="0"/>
+                  <a:cs typeface="Times New Roman" panose="02020603050405020304" pitchFamily="18" charset="0"/>
                 </a:endParaRPr>
               </a:p>
             </p:txBody>
@@ -13308,8 +13315,8 @@
                         <a:lumMod val="50000"/>
                       </a:schemeClr>
                     </a:solidFill>
-                    <a:latin typeface="Times New Roman" panose="02020503050405090304" pitchFamily="18" charset="0"/>
-                    <a:cs typeface="Times New Roman" panose="02020503050405090304" pitchFamily="18" charset="0"/>
+                    <a:latin typeface="Times New Roman" panose="02020603050405020304" pitchFamily="18" charset="0"/>
+                    <a:cs typeface="Times New Roman" panose="02020603050405020304" pitchFamily="18" charset="0"/>
                   </a:rPr>
                   <a:t>4C</a:t>
                 </a:r>
@@ -13319,8 +13326,8 @@
                       <a:lumMod val="50000"/>
                     </a:schemeClr>
                   </a:solidFill>
-                  <a:latin typeface="Times New Roman" panose="02020503050405090304" pitchFamily="18" charset="0"/>
-                  <a:cs typeface="Times New Roman" panose="02020503050405090304" pitchFamily="18" charset="0"/>
+                  <a:latin typeface="Times New Roman" panose="02020603050405020304" pitchFamily="18" charset="0"/>
+                  <a:cs typeface="Times New Roman" panose="02020603050405020304" pitchFamily="18" charset="0"/>
                 </a:endParaRPr>
               </a:p>
             </p:txBody>
@@ -13532,8 +13539,8 @@
                         <a:lumMod val="50000"/>
                       </a:schemeClr>
                     </a:solidFill>
-                    <a:latin typeface="Times New Roman" panose="02020503050405090304" pitchFamily="18" charset="0"/>
-                    <a:cs typeface="Times New Roman" panose="02020503050405090304" pitchFamily="18" charset="0"/>
+                    <a:latin typeface="Times New Roman" panose="02020603050405020304" pitchFamily="18" charset="0"/>
+                    <a:cs typeface="Times New Roman" panose="02020603050405020304" pitchFamily="18" charset="0"/>
                   </a:rPr>
                   <a:t>C</a:t>
                 </a:r>
@@ -13543,8 +13550,8 @@
                       <a:lumMod val="50000"/>
                     </a:schemeClr>
                   </a:solidFill>
-                  <a:latin typeface="Times New Roman" panose="02020503050405090304" pitchFamily="18" charset="0"/>
-                  <a:cs typeface="Times New Roman" panose="02020503050405090304" pitchFamily="18" charset="0"/>
+                  <a:latin typeface="Times New Roman" panose="02020603050405020304" pitchFamily="18" charset="0"/>
+                  <a:cs typeface="Times New Roman" panose="02020603050405020304" pitchFamily="18" charset="0"/>
                 </a:endParaRPr>
               </a:p>
             </p:txBody>
@@ -13613,14 +13620,14 @@
           <a:p>
             <a:r>
               <a:rPr lang="en-US" altLang="zh-CN" sz="1655" dirty="0">
-                <a:latin typeface="Times New Roman" panose="02020503050405090304" pitchFamily="18" charset="0"/>
-                <a:cs typeface="Times New Roman" panose="02020503050405090304" pitchFamily="18" charset="0"/>
+                <a:latin typeface="Times New Roman" panose="02020603050405020304" pitchFamily="18" charset="0"/>
+                <a:cs typeface="Times New Roman" panose="02020603050405020304" pitchFamily="18" charset="0"/>
               </a:rPr>
               <a:t> C: Number of input channels</a:t>
             </a:r>
             <a:endParaRPr lang="zh-CN" altLang="en-US" sz="1655" b="1" dirty="0">
-              <a:latin typeface="Times New Roman" panose="02020503050405090304" pitchFamily="18" charset="0"/>
-              <a:cs typeface="Times New Roman" panose="02020503050405090304" pitchFamily="18" charset="0"/>
+              <a:latin typeface="Times New Roman" panose="02020603050405020304" pitchFamily="18" charset="0"/>
+              <a:cs typeface="Times New Roman" panose="02020603050405020304" pitchFamily="18" charset="0"/>
             </a:endParaRPr>
           </a:p>
         </p:txBody>
@@ -13677,8 +13684,8 @@
                 <a:solidFill>
                   <a:schemeClr val="tx1"/>
                 </a:solidFill>
-                <a:latin typeface="Times New Roman" panose="02020503050405090304" pitchFamily="18" charset="0"/>
-                <a:cs typeface="Times New Roman" panose="02020503050405090304" pitchFamily="18" charset="0"/>
+                <a:latin typeface="Times New Roman" panose="02020603050405020304" pitchFamily="18" charset="0"/>
+                <a:cs typeface="Times New Roman" panose="02020603050405020304" pitchFamily="18" charset="0"/>
               </a:rPr>
               <a:t>DWC</a:t>
             </a:r>
@@ -13686,8 +13693,8 @@
               <a:solidFill>
                 <a:schemeClr val="tx1"/>
               </a:solidFill>
-              <a:latin typeface="Times New Roman" panose="02020503050405090304" pitchFamily="18" charset="0"/>
-              <a:cs typeface="Times New Roman" panose="02020503050405090304" pitchFamily="18" charset="0"/>
+              <a:latin typeface="Times New Roman" panose="02020603050405020304" pitchFamily="18" charset="0"/>
+              <a:cs typeface="Times New Roman" panose="02020603050405020304" pitchFamily="18" charset="0"/>
             </a:endParaRPr>
           </a:p>
         </p:txBody>
@@ -13744,8 +13751,8 @@
                 <a:solidFill>
                   <a:schemeClr val="tx1"/>
                 </a:solidFill>
-                <a:latin typeface="Times New Roman" panose="02020503050405090304" pitchFamily="18" charset="0"/>
-                <a:cs typeface="Times New Roman" panose="02020503050405090304" pitchFamily="18" charset="0"/>
+                <a:latin typeface="Times New Roman" panose="02020603050405020304" pitchFamily="18" charset="0"/>
+                <a:cs typeface="Times New Roman" panose="02020603050405020304" pitchFamily="18" charset="0"/>
               </a:rPr>
               <a:t>GeLU</a:t>
             </a:r>
@@ -13753,8 +13760,8 @@
               <a:solidFill>
                 <a:schemeClr val="tx1"/>
               </a:solidFill>
-              <a:latin typeface="Times New Roman" panose="02020503050405090304" pitchFamily="18" charset="0"/>
-              <a:cs typeface="Times New Roman" panose="02020503050405090304" pitchFamily="18" charset="0"/>
+              <a:latin typeface="Times New Roman" panose="02020603050405020304" pitchFamily="18" charset="0"/>
+              <a:cs typeface="Times New Roman" panose="02020603050405020304" pitchFamily="18" charset="0"/>
             </a:endParaRPr>
           </a:p>
         </p:txBody>
@@ -13811,8 +13818,8 @@
                 <a:solidFill>
                   <a:schemeClr val="tx1"/>
                 </a:solidFill>
-                <a:latin typeface="Times New Roman" panose="02020503050405090304" pitchFamily="18" charset="0"/>
-                <a:cs typeface="Times New Roman" panose="02020503050405090304" pitchFamily="18" charset="0"/>
+                <a:latin typeface="Times New Roman" panose="02020603050405020304" pitchFamily="18" charset="0"/>
+                <a:cs typeface="Times New Roman" panose="02020603050405020304" pitchFamily="18" charset="0"/>
               </a:rPr>
               <a:t>Full Connect</a:t>
             </a:r>
@@ -13820,8 +13827,8 @@
               <a:solidFill>
                 <a:schemeClr val="tx1"/>
               </a:solidFill>
-              <a:latin typeface="Times New Roman" panose="02020503050405090304" pitchFamily="18" charset="0"/>
-              <a:cs typeface="Times New Roman" panose="02020503050405090304" pitchFamily="18" charset="0"/>
+              <a:latin typeface="Times New Roman" panose="02020603050405020304" pitchFamily="18" charset="0"/>
+              <a:cs typeface="Times New Roman" panose="02020603050405020304" pitchFamily="18" charset="0"/>
             </a:endParaRPr>
           </a:p>
         </p:txBody>
@@ -13971,21 +13978,21 @@
             <a:pPr algn="ctr"/>
             <a:r>
               <a:rPr lang="en-US" altLang="zh-CN" sz="1655" dirty="0">
-                <a:latin typeface="Times New Roman" panose="02020503050405090304" pitchFamily="18" charset="0"/>
-                <a:cs typeface="Times New Roman" panose="02020503050405090304" pitchFamily="18" charset="0"/>
+                <a:latin typeface="Times New Roman" panose="02020603050405020304" pitchFamily="18" charset="0"/>
+                <a:cs typeface="Times New Roman" panose="02020603050405020304" pitchFamily="18" charset="0"/>
               </a:rPr>
               <a:t>(k) </a:t>
             </a:r>
             <a:r>
               <a:rPr lang="en-US" altLang="zh-CN" sz="1655" b="1" dirty="0">
-                <a:latin typeface="Times New Roman" panose="02020503050405090304" pitchFamily="18" charset="0"/>
-                <a:cs typeface="Times New Roman" panose="02020503050405090304" pitchFamily="18" charset="0"/>
+                <a:latin typeface="Times New Roman" panose="02020603050405020304" pitchFamily="18" charset="0"/>
+                <a:cs typeface="Times New Roman" panose="02020603050405020304" pitchFamily="18" charset="0"/>
               </a:rPr>
               <a:t>FFN</a:t>
             </a:r>
             <a:endParaRPr lang="zh-CN" altLang="en-US" sz="1655" b="1" dirty="0">
-              <a:latin typeface="Times New Roman" panose="02020503050405090304" pitchFamily="18" charset="0"/>
-              <a:cs typeface="Times New Roman" panose="02020503050405090304" pitchFamily="18" charset="0"/>
+              <a:latin typeface="Times New Roman" panose="02020603050405020304" pitchFamily="18" charset="0"/>
+              <a:cs typeface="Times New Roman" panose="02020603050405020304" pitchFamily="18" charset="0"/>
             </a:endParaRPr>
           </a:p>
         </p:txBody>
